--- a/納品レポート/ホテル別レポート/keyakigate_口コミ分析レポート.pptx
+++ b/納品レポート/ホテル別レポート/keyakigate_口コミ分析レポート.pptx
@@ -211,7 +211,7 @@
                   <c:v>9.83</c:v>
                 </c:pt>
                 <c:pt idx="1">
-                  <c:v>9.07</c:v>
+                  <c:v>8.97</c:v>
                 </c:pt>
                 <c:pt idx="2">
                   <c:v>8.77</c:v>
@@ -569,7 +569,7 @@
                   <c:v>72</c:v>
                 </c:pt>
                 <c:pt idx="1">
-                  <c:v>8</c:v>
+                  <c:v>9</c:v>
                 </c:pt>
                 <c:pt idx="2">
                   <c:v>3</c:v>
@@ -790,7 +790,7 @@
                   <c:v>20</c:v>
                 </c:pt>
                 <c:pt idx="3">
-                  <c:v>8</c:v>
+                  <c:v>9</c:v>
                 </c:pt>
                 <c:pt idx="4">
                   <c:v>1</c:v>
@@ -2747,7 +2747,7 @@
                 <a:ea typeface="Arial" pitchFamily="34" charset="-122"/>
                 <a:cs typeface="Arial" pitchFamily="34" charset="-120"/>
               </a:rPr>
-              <a:t>レビュー総数：83件（6サイト）</a:t>
+              <a:t>レビュー総数：84件（6サイト）</a:t>
             </a:r>
             <a:endParaRPr lang="en-US" sz="1000" dirty="0"/>
           </a:p>
@@ -2767,7 +2767,7 @@
                 <a:ea typeface="Arial" pitchFamily="34" charset="-122"/>
                 <a:cs typeface="Arial" pitchFamily="34" charset="-120"/>
               </a:rPr>
-              <a:t>作成日：2026年3月17日</a:t>
+              <a:t>作成日：2026年3月18日</a:t>
             </a:r>
             <a:endParaRPr lang="en-US" sz="1000" dirty="0"/>
           </a:p>
@@ -3313,7 +3313,7 @@
                           <a:ea typeface="Arial" pitchFamily="34" charset="-122"/>
                           <a:cs typeface="Arial" pitchFamily="34" charset="-120"/>
                         </a:rPr>
-                        <a:t>8.81点</a:t>
+                        <a:t>8.77点</a:t>
                       </a:r>
                       <a:endParaRPr lang="en-US" sz="1000" dirty="0">
                         <a:latin typeface="Arial" charset="0"/>
@@ -3587,7 +3587,7 @@
                           <a:ea typeface="Arial" pitchFamily="34" charset="-122"/>
                           <a:cs typeface="Arial" pitchFamily="34" charset="-120"/>
                         </a:rPr>
-                        <a:t>86.7%</a:t>
+                        <a:t>85.7%</a:t>
                       </a:r>
                       <a:endParaRPr lang="en-US" sz="1000" dirty="0">
                         <a:latin typeface="Arial" charset="0"/>
@@ -3655,7 +3655,7 @@
                           <a:ea typeface="Arial" pitchFamily="34" charset="-122"/>
                           <a:cs typeface="Arial" pitchFamily="34" charset="-120"/>
                         </a:rPr>
-                        <a:t>92%以上</a:t>
+                        <a:t>91%以上</a:t>
                       </a:r>
                       <a:endParaRPr lang="en-US" sz="1000" dirty="0">
                         <a:latin typeface="Arial" charset="0"/>
@@ -5322,7 +5322,7 @@
                 <a:ea typeface="Arial" pitchFamily="34" charset="-122"/>
                 <a:cs typeface="Arial" pitchFamily="34" charset="-120"/>
               </a:rPr>
-              <a:t>8.81</a:t>
+              <a:t>8.77</a:t>
             </a:r>
             <a:endParaRPr lang="en-US" sz="3200" dirty="0"/>
           </a:p>
@@ -5447,7 +5447,7 @@
                 <a:ea typeface="Arial" pitchFamily="34" charset="-122"/>
                 <a:cs typeface="Arial" pitchFamily="34" charset="-120"/>
               </a:rPr>
-              <a:t>86.7%</a:t>
+              <a:t>85.7%</a:t>
             </a:r>
             <a:endParaRPr lang="en-US" sz="3200" dirty="0"/>
           </a:p>
@@ -5697,7 +5697,7 @@
                 <a:ea typeface="Arial" pitchFamily="34" charset="-122"/>
                 <a:cs typeface="Arial" pitchFamily="34" charset="-120"/>
               </a:rPr>
-              <a:t>83件</a:t>
+              <a:t>84件</a:t>
             </a:r>
             <a:endParaRPr lang="en-US" sz="3200" dirty="0"/>
           </a:p>
@@ -5845,7 +5845,7 @@
                 <a:ea typeface="Arial" pitchFamily="34" charset="-122"/>
                 <a:cs typeface="Arial" pitchFamily="34" charset="-120"/>
               </a:rPr>
-              <a:t>  駅から大変近く、周りにも賑やかなお店がたくさんあり、仕事でも観光でもお勧めです</a:t>
+              <a:t>  駅から近いなどアクセスが良いのは分かるが 評価が高い理由が正直分からない</a:t>
             </a:r>
             <a:endParaRPr lang="en-US" sz="1100" dirty="0"/>
           </a:p>
@@ -6506,7 +6506,7 @@
                 <a:ea typeface="Arial" pitchFamily="34" charset="-122"/>
                 <a:cs typeface="Arial" pitchFamily="34" charset="-120"/>
               </a:rPr>
-              <a:t>8.81</a:t>
+              <a:t>8.77</a:t>
             </a:r>
             <a:endParaRPr lang="en-US" sz="3200" dirty="0"/>
           </a:p>
@@ -6631,7 +6631,7 @@
                 <a:ea typeface="Arial" pitchFamily="34" charset="-122"/>
                 <a:cs typeface="Arial" pitchFamily="34" charset="-120"/>
               </a:rPr>
-              <a:t>86.7%</a:t>
+              <a:t>85.7%</a:t>
             </a:r>
             <a:endParaRPr lang="en-US" sz="3200" dirty="0"/>
           </a:p>
@@ -6881,7 +6881,7 @@
                 <a:ea typeface="Arial" pitchFamily="34" charset="-122"/>
                 <a:cs typeface="Arial" pitchFamily="34" charset="-120"/>
               </a:rPr>
-              <a:t>83件</a:t>
+              <a:t>84件</a:t>
             </a:r>
             <a:endParaRPr lang="en-US" sz="3200" dirty="0"/>
           </a:p>
@@ -8202,7 +8202,7 @@
                           <a:ea typeface="Arial" pitchFamily="34" charset="-122"/>
                           <a:cs typeface="Arial" pitchFamily="34" charset="-120"/>
                         </a:rPr>
-                        <a:t>30</a:t>
+                        <a:t>31</a:t>
                       </a:r>
                       <a:endParaRPr lang="en-US" sz="900" dirty="0">
                         <a:latin typeface="Arial" charset="0"/>
@@ -8270,7 +8270,7 @@
                           <a:ea typeface="Arial" pitchFamily="34" charset="-122"/>
                           <a:cs typeface="Arial" pitchFamily="34" charset="-120"/>
                         </a:rPr>
-                        <a:t>4.53</a:t>
+                        <a:t>4.48</a:t>
                       </a:r>
                       <a:endParaRPr lang="en-US" sz="900" dirty="0">
                         <a:latin typeface="Arial" charset="0"/>
@@ -8406,7 +8406,7 @@
                           <a:ea typeface="Arial" pitchFamily="34" charset="-122"/>
                           <a:cs typeface="Arial" pitchFamily="34" charset="-120"/>
                         </a:rPr>
-                        <a:t>9.07</a:t>
+                        <a:t>8.97</a:t>
                       </a:r>
                       <a:endParaRPr lang="en-US" sz="900" dirty="0">
                         <a:latin typeface="Arial" charset="0"/>
@@ -10182,7 +10182,7 @@
                 <a:ea typeface="Arial" pitchFamily="34" charset="-122"/>
                 <a:cs typeface="Arial" pitchFamily="34" charset="-120"/>
               </a:rPr>
-              <a:t>72件（86.7%）</a:t>
+              <a:t>72件（85.7%）</a:t>
             </a:r>
             <a:endParaRPr lang="en-US" sz="1100" dirty="0"/>
           </a:p>
@@ -10280,7 +10280,7 @@
                 <a:ea typeface="Arial" pitchFamily="34" charset="-122"/>
                 <a:cs typeface="Arial" pitchFamily="34" charset="-120"/>
               </a:rPr>
-              <a:t>8件（9.6%）</a:t>
+              <a:t>9件（10.7%）</a:t>
             </a:r>
             <a:endParaRPr lang="en-US" sz="1100" dirty="0"/>
           </a:p>
@@ -10790,7 +10790,7 @@
                 <a:ea typeface="Arial" pitchFamily="34" charset="-122"/>
                 <a:cs typeface="Arial" pitchFamily="34" charset="-120"/>
               </a:rPr>
-              <a:t>駅から大変近く、周りにも賑やかなお店がたくさんあり、仕事でも観光でもお勧めです</a:t>
+              <a:t>駅から近いなどアクセスが良いのは分かるが 評価が高い理由が正直分からない</a:t>
             </a:r>
             <a:endParaRPr lang="en-US" sz="900" dirty="0"/>
           </a:p>
@@ -10829,7 +10829,7 @@
                 <a:ea typeface="Arial" pitchFamily="34" charset="-122"/>
                 <a:cs typeface="Arial" pitchFamily="34" charset="-120"/>
               </a:rPr>
-              <a:t>「駅直結で小さな子ども連れでも行きやすかったです」</a:t>
+              <a:t>「駅から大変近く、周りにも賑やかなお店がたくさんあり、仕事でも観光でもお勧めです」</a:t>
             </a:r>
             <a:endParaRPr lang="en-US" sz="900" dirty="0"/>
           </a:p>
@@ -11459,7 +11459,7 @@
                 <a:ea typeface="Arial" pitchFamily="34" charset="-122"/>
                 <a:cs typeface="Arial" pitchFamily="34" charset="-120"/>
               </a:rPr>
-              <a:t>コンパクトなお部屋でしたが清潔感があり快適</a:t>
+              <a:t>ベッドサイドの照明が壊れていた</a:t>
             </a:r>
             <a:endParaRPr lang="en-US" sz="900" dirty="0"/>
           </a:p>
@@ -11498,7 +11498,7 @@
                 <a:ea typeface="Arial" pitchFamily="34" charset="-122"/>
                 <a:cs typeface="Arial" pitchFamily="34" charset="-120"/>
               </a:rPr>
-              <a:t>「清潔感のあるお部屋でベッドが大きくぐっすりと眠れました」</a:t>
+              <a:t>「コンパクトなお部屋でしたが清潔感があり快適」</a:t>
             </a:r>
             <a:endParaRPr lang="en-US" sz="900" dirty="0"/>
           </a:p>

--- a/納品レポート/ホテル別レポート/keyakigate_口コミ分析レポート.pptx
+++ b/納品レポート/ホテル別レポート/keyakigate_口コミ分析レポート.pptx
@@ -2767,7 +2767,7 @@
                 <a:ea typeface="Arial" pitchFamily="34" charset="-122"/>
                 <a:cs typeface="Arial" pitchFamily="34" charset="-120"/>
               </a:rPr>
-              <a:t>作成日：2026年3月18日</a:t>
+              <a:t>作成日：2026年3月19日</a:t>
             </a:r>
             <a:endParaRPr lang="en-US" sz="1000" dirty="0"/>
           </a:p>

--- a/納品レポート/ホテル別レポート/keyakigate_口コミ分析レポート.pptx
+++ b/納品レポート/ホテル別レポート/keyakigate_口コミ分析レポート.pptx
@@ -211,7 +211,7 @@
                   <c:v>9.83</c:v>
                 </c:pt>
                 <c:pt idx="1">
-                  <c:v>8.97</c:v>
+                  <c:v>9</c:v>
                 </c:pt>
                 <c:pt idx="2">
                   <c:v>8.77</c:v>
@@ -220,10 +220,10 @@
                   <c:v>8.67</c:v>
                 </c:pt>
                 <c:pt idx="4">
-                  <c:v>8.56</c:v>
+                  <c:v>8.53</c:v>
                 </c:pt>
                 <c:pt idx="5">
-                  <c:v>7</c:v>
+                  <c:v>7.6</c:v>
                 </c:pt>
               </c:numCache>
             </c:numRef>
@@ -566,7 +566,7 @@
               <c:numCache>
                 <c:ptCount val="3"/>
                 <c:pt idx="0">
-                  <c:v>72</c:v>
+                  <c:v>75</c:v>
                 </c:pt>
                 <c:pt idx="1">
                   <c:v>9</c:v>
@@ -781,13 +781,13 @@
                 <c:formatCode>General</c:formatCode>
                 <c:ptCount val="6"/>
                 <c:pt idx="0">
-                  <c:v>47</c:v>
+                  <c:v>49</c:v>
                 </c:pt>
                 <c:pt idx="1">
                   <c:v>5</c:v>
                 </c:pt>
                 <c:pt idx="2">
-                  <c:v>20</c:v>
+                  <c:v>21</c:v>
                 </c:pt>
                 <c:pt idx="3">
                   <c:v>9</c:v>
@@ -2747,7 +2747,7 @@
                 <a:ea typeface="Arial" pitchFamily="34" charset="-122"/>
                 <a:cs typeface="Arial" pitchFamily="34" charset="-120"/>
               </a:rPr>
-              <a:t>レビュー総数：84件（6サイト）</a:t>
+              <a:t>レビュー総数：87件（6サイト）</a:t>
             </a:r>
             <a:endParaRPr lang="en-US" sz="1000" dirty="0"/>
           </a:p>
@@ -2767,7 +2767,7 @@
                 <a:ea typeface="Arial" pitchFamily="34" charset="-122"/>
                 <a:cs typeface="Arial" pitchFamily="34" charset="-120"/>
               </a:rPr>
-              <a:t>作成日：2026年3月19日</a:t>
+              <a:t>作成日：2026年3月20日</a:t>
             </a:r>
             <a:endParaRPr lang="en-US" sz="1000" dirty="0"/>
           </a:p>
@@ -3313,7 +3313,7 @@
                           <a:ea typeface="Arial" pitchFamily="34" charset="-122"/>
                           <a:cs typeface="Arial" pitchFamily="34" charset="-120"/>
                         </a:rPr>
-                        <a:t>8.77点</a:t>
+                        <a:t>8.79点</a:t>
                       </a:r>
                       <a:endParaRPr lang="en-US" sz="1000" dirty="0">
                         <a:latin typeface="Arial" charset="0"/>
@@ -3587,7 +3587,7 @@
                           <a:ea typeface="Arial" pitchFamily="34" charset="-122"/>
                           <a:cs typeface="Arial" pitchFamily="34" charset="-120"/>
                         </a:rPr>
-                        <a:t>85.7%</a:t>
+                        <a:t>86.2%</a:t>
                       </a:r>
                       <a:endParaRPr lang="en-US" sz="1000" dirty="0">
                         <a:latin typeface="Arial" charset="0"/>
@@ -3861,7 +3861,7 @@
                           <a:ea typeface="Arial" pitchFamily="34" charset="-122"/>
                           <a:cs typeface="Arial" pitchFamily="34" charset="-120"/>
                         </a:rPr>
-                        <a:t>3.6%</a:t>
+                        <a:t>3.4%</a:t>
                       </a:r>
                       <a:endParaRPr lang="en-US" sz="1000" dirty="0">
                         <a:latin typeface="Arial" charset="0"/>
@@ -3929,7 +3929,7 @@
                           <a:ea typeface="Arial" pitchFamily="34" charset="-122"/>
                           <a:cs typeface="Arial" pitchFamily="34" charset="-120"/>
                         </a:rPr>
-                        <a:t>1%以下</a:t>
+                        <a:t>0%以下</a:t>
                       </a:r>
                       <a:endParaRPr lang="en-US" sz="1000" dirty="0">
                         <a:latin typeface="Arial" charset="0"/>
@@ -4135,7 +4135,7 @@
                           <a:ea typeface="Arial" pitchFamily="34" charset="-122"/>
                           <a:cs typeface="Arial" pitchFamily="34" charset="-120"/>
                         </a:rPr>
-                        <a:t>7.0点</a:t>
+                        <a:t>7.6点</a:t>
                       </a:r>
                       <a:endParaRPr lang="en-US" sz="1000" dirty="0">
                         <a:latin typeface="Arial" charset="0"/>
@@ -4203,7 +4203,7 @@
                           <a:ea typeface="Arial" pitchFamily="34" charset="-122"/>
                           <a:cs typeface="Arial" pitchFamily="34" charset="-120"/>
                         </a:rPr>
-                        <a:t>8.0点以上</a:t>
+                        <a:t>8.6点以上</a:t>
                       </a:r>
                       <a:endParaRPr lang="en-US" sz="1000" dirty="0">
                         <a:latin typeface="Arial" charset="0"/>
@@ -4683,7 +4683,7 @@
                           <a:ea typeface="Arial" pitchFamily="34" charset="-122"/>
                           <a:cs typeface="Arial" pitchFamily="34" charset="-120"/>
                         </a:rPr>
-                        <a:t>約6件/期間</a:t>
+                        <a:t>約7件/期間</a:t>
                       </a:r>
                       <a:endParaRPr lang="en-US" sz="1000" dirty="0">
                         <a:latin typeface="Arial" charset="0"/>
@@ -5322,7 +5322,7 @@
                 <a:ea typeface="Arial" pitchFamily="34" charset="-122"/>
                 <a:cs typeface="Arial" pitchFamily="34" charset="-120"/>
               </a:rPr>
-              <a:t>8.77</a:t>
+              <a:t>8.79</a:t>
             </a:r>
             <a:endParaRPr lang="en-US" sz="3200" dirty="0"/>
           </a:p>
@@ -5447,7 +5447,7 @@
                 <a:ea typeface="Arial" pitchFamily="34" charset="-122"/>
                 <a:cs typeface="Arial" pitchFamily="34" charset="-120"/>
               </a:rPr>
-              <a:t>85.7%</a:t>
+              <a:t>86.2%</a:t>
             </a:r>
             <a:endParaRPr lang="en-US" sz="3200" dirty="0"/>
           </a:p>
@@ -5572,7 +5572,7 @@
                 <a:ea typeface="Arial" pitchFamily="34" charset="-122"/>
                 <a:cs typeface="Arial" pitchFamily="34" charset="-120"/>
               </a:rPr>
-              <a:t>3.6%</a:t>
+              <a:t>3.4%</a:t>
             </a:r>
             <a:endParaRPr lang="en-US" sz="3200" dirty="0"/>
           </a:p>
@@ -5697,7 +5697,7 @@
                 <a:ea typeface="Arial" pitchFamily="34" charset="-122"/>
                 <a:cs typeface="Arial" pitchFamily="34" charset="-120"/>
               </a:rPr>
-              <a:t>84件</a:t>
+              <a:t>87件</a:t>
             </a:r>
             <a:endParaRPr lang="en-US" sz="3200" dirty="0"/>
           </a:p>
@@ -5845,7 +5845,7 @@
                 <a:ea typeface="Arial" pitchFamily="34" charset="-122"/>
                 <a:cs typeface="Arial" pitchFamily="34" charset="-120"/>
               </a:rPr>
-              <a:t>  駅から近いなどアクセスが良いのは分かるが 評価が高い理由が正直分からない</a:t>
+              <a:t>  駅直結の立地で、朝からスムーズに動けるのはありがたいですね</a:t>
             </a:r>
             <a:endParaRPr lang="en-US" sz="1100" dirty="0"/>
           </a:p>
@@ -5885,7 +5885,7 @@
                 <a:ea typeface="Arial" pitchFamily="34" charset="-122"/>
                 <a:cs typeface="Arial" pitchFamily="34" charset="-120"/>
               </a:rPr>
-              <a:t>  また、朝食も常にきれいにブュッフェが設えてあり、気持ちよく美味しくいただけました</a:t>
+              <a:t>  清潔感のあるお部屋で快適に過ごすことができました</a:t>
             </a:r>
             <a:endParaRPr lang="en-US" sz="1100" dirty="0"/>
           </a:p>
@@ -5925,7 +5925,7 @@
                 <a:ea typeface="Arial" pitchFamily="34" charset="-122"/>
                 <a:cs typeface="Arial" pitchFamily="34" charset="-120"/>
               </a:rPr>
-              <a:t>  また、朝食も常にきれいにブュッフェが設えてあり、気持ちよく美味しくいただけました</a:t>
+              <a:t>  《けやきゲート府中／府中駅直結／ホテル朝食ビュッフェ》  お店が気になった方はぜひ【お店を保存】を</a:t>
             </a:r>
             <a:endParaRPr lang="en-US" sz="1100" dirty="0"/>
           </a:p>
@@ -6073,7 +6073,7 @@
                 <a:ea typeface="Arial" pitchFamily="34" charset="-122"/>
                 <a:cs typeface="Arial" pitchFamily="34" charset="-120"/>
               </a:rPr>
-              <a:t>  部屋は普通ですが、朝食が品数は多くはないですが、一ひねりあっておいしかったです（麹焼きだったか鮭や酢漬けの野菜など）</a:t>
+              <a:t>  和洋ともに品数がしっかり揃っていて、朝から選ぶ楽しさがあります</a:t>
             </a:r>
             <a:endParaRPr lang="en-US" sz="1100" dirty="0"/>
           </a:p>
@@ -6506,7 +6506,7 @@
                 <a:ea typeface="Arial" pitchFamily="34" charset="-122"/>
                 <a:cs typeface="Arial" pitchFamily="34" charset="-120"/>
               </a:rPr>
-              <a:t>8.77</a:t>
+              <a:t>8.79</a:t>
             </a:r>
             <a:endParaRPr lang="en-US" sz="3200" dirty="0"/>
           </a:p>
@@ -6631,7 +6631,7 @@
                 <a:ea typeface="Arial" pitchFamily="34" charset="-122"/>
                 <a:cs typeface="Arial" pitchFamily="34" charset="-120"/>
               </a:rPr>
-              <a:t>85.7%</a:t>
+              <a:t>86.2%</a:t>
             </a:r>
             <a:endParaRPr lang="en-US" sz="3200" dirty="0"/>
           </a:p>
@@ -6756,7 +6756,7 @@
                 <a:ea typeface="Arial" pitchFamily="34" charset="-122"/>
                 <a:cs typeface="Arial" pitchFamily="34" charset="-120"/>
               </a:rPr>
-              <a:t>3.6%</a:t>
+              <a:t>3.4%</a:t>
             </a:r>
             <a:endParaRPr lang="en-US" sz="3200" dirty="0"/>
           </a:p>
@@ -6881,7 +6881,7 @@
                 <a:ea typeface="Arial" pitchFamily="34" charset="-122"/>
                 <a:cs typeface="Arial" pitchFamily="34" charset="-120"/>
               </a:rPr>
-              <a:t>84件</a:t>
+              <a:t>87件</a:t>
             </a:r>
             <a:endParaRPr lang="en-US" sz="3200" dirty="0"/>
           </a:p>
@@ -7351,7 +7351,7 @@
                 <a:ea typeface="Arial" pitchFamily="34" charset="-122"/>
                 <a:cs typeface="Arial" pitchFamily="34" charset="-120"/>
               </a:rPr>
-              <a:t>Google(7.0)が相対的に低い。口コミ返信の強化が急務</a:t>
+              <a:t>Google(7.6)が相対的に低い。口コミ返信の強化が急務</a:t>
             </a:r>
             <a:endParaRPr lang="en-US" sz="1100" dirty="0"/>
           </a:p>
@@ -8202,7 +8202,7 @@
                           <a:ea typeface="Arial" pitchFamily="34" charset="-122"/>
                           <a:cs typeface="Arial" pitchFamily="34" charset="-120"/>
                         </a:rPr>
-                        <a:t>31</a:t>
+                        <a:t>32</a:t>
                       </a:r>
                       <a:endParaRPr lang="en-US" sz="900" dirty="0">
                         <a:latin typeface="Arial" charset="0"/>
@@ -8270,7 +8270,7 @@
                           <a:ea typeface="Arial" pitchFamily="34" charset="-122"/>
                           <a:cs typeface="Arial" pitchFamily="34" charset="-120"/>
                         </a:rPr>
-                        <a:t>4.48</a:t>
+                        <a:t>4.5</a:t>
                       </a:r>
                       <a:endParaRPr lang="en-US" sz="900" dirty="0">
                         <a:latin typeface="Arial" charset="0"/>
@@ -8406,7 +8406,7 @@
                           <a:ea typeface="Arial" pitchFamily="34" charset="-122"/>
                           <a:cs typeface="Arial" pitchFamily="34" charset="-120"/>
                         </a:rPr>
-                        <a:t>8.97</a:t>
+                        <a:t>9</a:t>
                       </a:r>
                       <a:endParaRPr lang="en-US" sz="900" dirty="0">
                         <a:latin typeface="Arial" charset="0"/>
@@ -9228,7 +9228,7 @@
                           <a:ea typeface="Arial" pitchFamily="34" charset="-122"/>
                           <a:cs typeface="Arial" pitchFamily="34" charset="-120"/>
                         </a:rPr>
-                        <a:t>18</a:t>
+                        <a:t>19</a:t>
                       </a:r>
                       <a:endParaRPr lang="en-US" sz="900" dirty="0">
                         <a:latin typeface="Arial" charset="0"/>
@@ -9296,7 +9296,7 @@
                           <a:ea typeface="Arial" pitchFamily="34" charset="-122"/>
                           <a:cs typeface="Arial" pitchFamily="34" charset="-120"/>
                         </a:rPr>
-                        <a:t>4.28</a:t>
+                        <a:t>4.26</a:t>
                       </a:r>
                       <a:endParaRPr lang="en-US" sz="900" dirty="0">
                         <a:latin typeface="Arial" charset="0"/>
@@ -9432,7 +9432,7 @@
                           <a:ea typeface="Arial" pitchFamily="34" charset="-122"/>
                           <a:cs typeface="Arial" pitchFamily="34" charset="-120"/>
                         </a:rPr>
-                        <a:t>8.56</a:t>
+                        <a:t>8.53</a:t>
                       </a:r>
                       <a:endParaRPr lang="en-US" sz="900" dirty="0">
                         <a:latin typeface="Arial" charset="0"/>
@@ -9570,7 +9570,7 @@
                           <a:ea typeface="Arial" pitchFamily="34" charset="-122"/>
                           <a:cs typeface="Arial" pitchFamily="34" charset="-120"/>
                         </a:rPr>
-                        <a:t>4</a:t>
+                        <a:t>5</a:t>
                       </a:r>
                       <a:endParaRPr lang="en-US" sz="900" dirty="0">
                         <a:latin typeface="Arial" charset="0"/>
@@ -9638,7 +9638,7 @@
                           <a:ea typeface="Arial" pitchFamily="34" charset="-122"/>
                           <a:cs typeface="Arial" pitchFamily="34" charset="-120"/>
                         </a:rPr>
-                        <a:t>3.5</a:t>
+                        <a:t>3.8</a:t>
                       </a:r>
                       <a:endParaRPr lang="en-US" sz="900" dirty="0">
                         <a:latin typeface="Arial" charset="0"/>
@@ -9774,7 +9774,7 @@
                           <a:ea typeface="Arial" pitchFamily="34" charset="-122"/>
                           <a:cs typeface="Arial" pitchFamily="34" charset="-120"/>
                         </a:rPr>
-                        <a:t>7</a:t>
+                        <a:t>7.6</a:t>
                       </a:r>
                       <a:endParaRPr lang="en-US" sz="900" dirty="0">
                         <a:latin typeface="Arial" charset="0"/>
@@ -10182,7 +10182,7 @@
                 <a:ea typeface="Arial" pitchFamily="34" charset="-122"/>
                 <a:cs typeface="Arial" pitchFamily="34" charset="-120"/>
               </a:rPr>
-              <a:t>72件（85.7%）</a:t>
+              <a:t>75件（86.2%）</a:t>
             </a:r>
             <a:endParaRPr lang="en-US" sz="1100" dirty="0"/>
           </a:p>
@@ -10280,7 +10280,7 @@
                 <a:ea typeface="Arial" pitchFamily="34" charset="-122"/>
                 <a:cs typeface="Arial" pitchFamily="34" charset="-120"/>
               </a:rPr>
-              <a:t>9件（10.7%）</a:t>
+              <a:t>9件（10.3%）</a:t>
             </a:r>
             <a:endParaRPr lang="en-US" sz="1100" dirty="0"/>
           </a:p>
@@ -10378,7 +10378,7 @@
                 <a:ea typeface="Arial" pitchFamily="34" charset="-122"/>
                 <a:cs typeface="Arial" pitchFamily="34" charset="-120"/>
               </a:rPr>
-              <a:t>3件（3.6%）</a:t>
+              <a:t>3件（3.4%）</a:t>
             </a:r>
             <a:endParaRPr lang="en-US" sz="1100" dirty="0"/>
           </a:p>
@@ -10790,7 +10790,7 @@
                 <a:ea typeface="Arial" pitchFamily="34" charset="-122"/>
                 <a:cs typeface="Arial" pitchFamily="34" charset="-120"/>
               </a:rPr>
-              <a:t>駅から近いなどアクセスが良いのは分かるが 評価が高い理由が正直分からない</a:t>
+              <a:t>駅直結の立地で、朝からスムーズに動けるのはありがたいですね</a:t>
             </a:r>
             <a:endParaRPr lang="en-US" sz="900" dirty="0"/>
           </a:p>
@@ -10829,7 +10829,7 @@
                 <a:ea typeface="Arial" pitchFamily="34" charset="-122"/>
                 <a:cs typeface="Arial" pitchFamily="34" charset="-120"/>
               </a:rPr>
-              <a:t>「駅から大変近く、周りにも賑やかなお店がたくさんあり、仕事でも観光でもお勧めです」</a:t>
+              <a:t>「府中駅直結でアクセスも良好でした」</a:t>
             </a:r>
             <a:endParaRPr lang="en-US" sz="900" dirty="0"/>
           </a:p>
@@ -11013,7 +11013,7 @@
                 <a:ea typeface="Arial" pitchFamily="34" charset="-122"/>
                 <a:cs typeface="Arial" pitchFamily="34" charset="-120"/>
               </a:rPr>
-              <a:t>また、朝食も常にきれいにブュッフェが設えてあり、気持ちよく美味しくいただけました</a:t>
+              <a:t>清潔感のあるお部屋で快適に過ごすことができました</a:t>
             </a:r>
             <a:endParaRPr lang="en-US" sz="900" dirty="0"/>
           </a:p>
@@ -11052,7 +11052,7 @@
                 <a:ea typeface="Arial" pitchFamily="34" charset="-122"/>
                 <a:cs typeface="Arial" pitchFamily="34" charset="-120"/>
               </a:rPr>
-              <a:t>「コンパクトなお部屋でしたが清潔感があり快適」</a:t>
+              <a:t>「とても綺麗に清掃されていて気持ちよく泊まることができました」</a:t>
             </a:r>
             <a:endParaRPr lang="en-US" sz="900" dirty="0"/>
           </a:p>
@@ -11236,7 +11236,7 @@
                 <a:ea typeface="Arial" pitchFamily="34" charset="-122"/>
                 <a:cs typeface="Arial" pitchFamily="34" charset="-120"/>
               </a:rPr>
-              <a:t>また、朝食も常にきれいにブュッフェが設えてあり、気持ちよく美味しくいただけました</a:t>
+              <a:t>《けやきゲート府中／府中駅直結／ホテル朝食ビュッフェ》  お店が気になった方はぜひ【お店を保存】を</a:t>
             </a:r>
             <a:endParaRPr lang="en-US" sz="900" dirty="0"/>
           </a:p>
@@ -11275,7 +11275,7 @@
                 <a:ea typeface="Arial" pitchFamily="34" charset="-122"/>
                 <a:cs typeface="Arial" pitchFamily="34" charset="-120"/>
               </a:rPr>
-              <a:t>「朝食ビュッフェは種類は多くはありませんが、ひとつひとつ美味しくいただきました」</a:t>
+              <a:t>「また、朝食も常にきれいにブュッフェが設えてあり、気持ちよく美味しくいただけました」</a:t>
             </a:r>
             <a:endParaRPr lang="en-US" sz="900" dirty="0"/>
           </a:p>
@@ -11459,7 +11459,7 @@
                 <a:ea typeface="Arial" pitchFamily="34" charset="-122"/>
                 <a:cs typeface="Arial" pitchFamily="34" charset="-120"/>
               </a:rPr>
-              <a:t>ベッドサイドの照明が壊れていた</a:t>
+              <a:t>清潔感のあるお部屋で快適に過ごすことができました</a:t>
             </a:r>
             <a:endParaRPr lang="en-US" sz="900" dirty="0"/>
           </a:p>
@@ -11498,7 +11498,7 @@
                 <a:ea typeface="Arial" pitchFamily="34" charset="-122"/>
                 <a:cs typeface="Arial" pitchFamily="34" charset="-120"/>
               </a:rPr>
-              <a:t>「コンパクトなお部屋でしたが清潔感があり快適」</a:t>
+              <a:t>「お部屋も広く、ベッドも広いのでゆっくり過ごせました」</a:t>
             </a:r>
             <a:endParaRPr lang="en-US" sz="900" dirty="0"/>
           </a:p>
@@ -12634,7 +12634,7 @@
                           <a:ea typeface="Arial" pitchFamily="34" charset="-122"/>
                           <a:cs typeface="Arial" pitchFamily="34" charset="-120"/>
                         </a:rPr>
-                        <a:t>部屋は普通ですが、朝食が品数は多くはないですが、一ひねりあっておいしかったです（麹焼きだったか鮭や酢漬けの野菜など）</a:t>
+                        <a:t>和洋ともに品数がしっかり揃っていて、朝から選ぶ楽しさがあります</a:t>
                       </a:r>
                       <a:endParaRPr lang="en-US" sz="900" dirty="0">
                         <a:latin typeface="Arial" charset="0"/>
@@ -12702,7 +12702,7 @@
                           <a:ea typeface="Arial" pitchFamily="34" charset="-122"/>
                           <a:cs typeface="Arial" pitchFamily="34" charset="-120"/>
                         </a:rPr>
-                        <a:t>6件</a:t>
+                        <a:t>7件</a:t>
                       </a:r>
                       <a:endParaRPr lang="en-US" sz="900" dirty="0">
                         <a:latin typeface="Arial" charset="0"/>

--- a/納品レポート/ホテル別レポート/keyakigate_口コミ分析レポート.pptx
+++ b/納品レポート/ホテル別レポート/keyakigate_口コミ分析レポート.pptx
@@ -217,7 +217,7 @@
                   <c:v>8.77</c:v>
                 </c:pt>
                 <c:pt idx="3">
-                  <c:v>8.67</c:v>
+                  <c:v>8.62</c:v>
                 </c:pt>
                 <c:pt idx="4">
                   <c:v>8.53</c:v>
@@ -566,7 +566,7 @@
               <c:numCache>
                 <c:ptCount val="3"/>
                 <c:pt idx="0">
-                  <c:v>75</c:v>
+                  <c:v>76</c:v>
                 </c:pt>
                 <c:pt idx="1">
                   <c:v>9</c:v>
@@ -787,7 +787,7 @@
                   <c:v>5</c:v>
                 </c:pt>
                 <c:pt idx="2">
-                  <c:v>21</c:v>
+                  <c:v>22</c:v>
                 </c:pt>
                 <c:pt idx="3">
                   <c:v>9</c:v>
@@ -2747,7 +2747,7 @@
                 <a:ea typeface="Arial" pitchFamily="34" charset="-122"/>
                 <a:cs typeface="Arial" pitchFamily="34" charset="-120"/>
               </a:rPr>
-              <a:t>レビュー総数：87件（6サイト）</a:t>
+              <a:t>レビュー総数：88件（6サイト）</a:t>
             </a:r>
             <a:endParaRPr lang="en-US" sz="1000" dirty="0"/>
           </a:p>
@@ -2767,7 +2767,7 @@
                 <a:ea typeface="Arial" pitchFamily="34" charset="-122"/>
                 <a:cs typeface="Arial" pitchFamily="34" charset="-120"/>
               </a:rPr>
-              <a:t>作成日：2026年3月20日</a:t>
+              <a:t>作成日：2026年3月21日</a:t>
             </a:r>
             <a:endParaRPr lang="en-US" sz="1000" dirty="0"/>
           </a:p>
@@ -3313,7 +3313,7 @@
                           <a:ea typeface="Arial" pitchFamily="34" charset="-122"/>
                           <a:cs typeface="Arial" pitchFamily="34" charset="-120"/>
                         </a:rPr>
-                        <a:t>8.79点</a:t>
+                        <a:t>8.78点</a:t>
                       </a:r>
                       <a:endParaRPr lang="en-US" sz="1000" dirty="0">
                         <a:latin typeface="Arial" charset="0"/>
@@ -3587,7 +3587,7 @@
                           <a:ea typeface="Arial" pitchFamily="34" charset="-122"/>
                           <a:cs typeface="Arial" pitchFamily="34" charset="-120"/>
                         </a:rPr>
-                        <a:t>86.2%</a:t>
+                        <a:t>86.4%</a:t>
                       </a:r>
                       <a:endParaRPr lang="en-US" sz="1000" dirty="0">
                         <a:latin typeface="Arial" charset="0"/>
@@ -5322,7 +5322,7 @@
                 <a:ea typeface="Arial" pitchFamily="34" charset="-122"/>
                 <a:cs typeface="Arial" pitchFamily="34" charset="-120"/>
               </a:rPr>
-              <a:t>8.79</a:t>
+              <a:t>8.78</a:t>
             </a:r>
             <a:endParaRPr lang="en-US" sz="3200" dirty="0"/>
           </a:p>
@@ -5447,7 +5447,7 @@
                 <a:ea typeface="Arial" pitchFamily="34" charset="-122"/>
                 <a:cs typeface="Arial" pitchFamily="34" charset="-120"/>
               </a:rPr>
-              <a:t>86.2%</a:t>
+              <a:t>86.4%</a:t>
             </a:r>
             <a:endParaRPr lang="en-US" sz="3200" dirty="0"/>
           </a:p>
@@ -5697,7 +5697,7 @@
                 <a:ea typeface="Arial" pitchFamily="34" charset="-122"/>
                 <a:cs typeface="Arial" pitchFamily="34" charset="-120"/>
               </a:rPr>
-              <a:t>87件</a:t>
+              <a:t>88件</a:t>
             </a:r>
             <a:endParaRPr lang="en-US" sz="3200" dirty="0"/>
           </a:p>
@@ -5845,7 +5845,7 @@
                 <a:ea typeface="Arial" pitchFamily="34" charset="-122"/>
                 <a:cs typeface="Arial" pitchFamily="34" charset="-120"/>
               </a:rPr>
-              <a:t>  駅直結の立地で、朝からスムーズに動けるのはありがたいですね</a:t>
+              <a:t>  駅からホテルへ行きやすく、お部屋の浴槽もゆったりしていて入浴剤も選べて入れられるのでくつろいで入れました</a:t>
             </a:r>
             <a:endParaRPr lang="en-US" sz="1100" dirty="0"/>
           </a:p>
@@ -5925,7 +5925,7 @@
                 <a:ea typeface="Arial" pitchFamily="34" charset="-122"/>
                 <a:cs typeface="Arial" pitchFamily="34" charset="-120"/>
               </a:rPr>
-              <a:t>  《けやきゲート府中／府中駅直結／ホテル朝食ビュッフェ》  お店が気になった方はぜひ【お店を保存】を</a:t>
+              <a:t>  朝食も選べて美味しかったです</a:t>
             </a:r>
             <a:endParaRPr lang="en-US" sz="1100" dirty="0"/>
           </a:p>
@@ -6506,7 +6506,7 @@
                 <a:ea typeface="Arial" pitchFamily="34" charset="-122"/>
                 <a:cs typeface="Arial" pitchFamily="34" charset="-120"/>
               </a:rPr>
-              <a:t>8.79</a:t>
+              <a:t>8.78</a:t>
             </a:r>
             <a:endParaRPr lang="en-US" sz="3200" dirty="0"/>
           </a:p>
@@ -6631,7 +6631,7 @@
                 <a:ea typeface="Arial" pitchFamily="34" charset="-122"/>
                 <a:cs typeface="Arial" pitchFamily="34" charset="-120"/>
               </a:rPr>
-              <a:t>86.2%</a:t>
+              <a:t>86.4%</a:t>
             </a:r>
             <a:endParaRPr lang="en-US" sz="3200" dirty="0"/>
           </a:p>
@@ -6881,7 +6881,7 @@
                 <a:ea typeface="Arial" pitchFamily="34" charset="-122"/>
                 <a:cs typeface="Arial" pitchFamily="34" charset="-120"/>
               </a:rPr>
-              <a:t>87件</a:t>
+              <a:t>88件</a:t>
             </a:r>
             <a:endParaRPr lang="en-US" sz="3200" dirty="0"/>
           </a:p>
@@ -8886,7 +8886,7 @@
                           <a:ea typeface="Arial" pitchFamily="34" charset="-122"/>
                           <a:cs typeface="Arial" pitchFamily="34" charset="-120"/>
                         </a:rPr>
-                        <a:t>12</a:t>
+                        <a:t>13</a:t>
                       </a:r>
                       <a:endParaRPr lang="en-US" sz="900" dirty="0">
                         <a:latin typeface="Arial" charset="0"/>
@@ -8954,7 +8954,7 @@
                           <a:ea typeface="Arial" pitchFamily="34" charset="-122"/>
                           <a:cs typeface="Arial" pitchFamily="34" charset="-120"/>
                         </a:rPr>
-                        <a:t>8.67</a:t>
+                        <a:t>8.62</a:t>
                       </a:r>
                       <a:endParaRPr lang="en-US" sz="900" dirty="0">
                         <a:latin typeface="Arial" charset="0"/>
@@ -9090,7 +9090,7 @@
                           <a:ea typeface="Arial" pitchFamily="34" charset="-122"/>
                           <a:cs typeface="Arial" pitchFamily="34" charset="-120"/>
                         </a:rPr>
-                        <a:t>8.67</a:t>
+                        <a:t>8.62</a:t>
                       </a:r>
                       <a:endParaRPr lang="en-US" sz="900" dirty="0">
                         <a:latin typeface="Arial" charset="0"/>
@@ -10182,7 +10182,7 @@
                 <a:ea typeface="Arial" pitchFamily="34" charset="-122"/>
                 <a:cs typeface="Arial" pitchFamily="34" charset="-120"/>
               </a:rPr>
-              <a:t>75件（86.2%）</a:t>
+              <a:t>76件（86.4%）</a:t>
             </a:r>
             <a:endParaRPr lang="en-US" sz="1100" dirty="0"/>
           </a:p>
@@ -10280,7 +10280,7 @@
                 <a:ea typeface="Arial" pitchFamily="34" charset="-122"/>
                 <a:cs typeface="Arial" pitchFamily="34" charset="-120"/>
               </a:rPr>
-              <a:t>9件（10.3%）</a:t>
+              <a:t>9件（10.2%）</a:t>
             </a:r>
             <a:endParaRPr lang="en-US" sz="1100" dirty="0"/>
           </a:p>
@@ -10790,7 +10790,7 @@
                 <a:ea typeface="Arial" pitchFamily="34" charset="-122"/>
                 <a:cs typeface="Arial" pitchFamily="34" charset="-120"/>
               </a:rPr>
-              <a:t>駅直結の立地で、朝からスムーズに動けるのはありがたいですね</a:t>
+              <a:t>駅からホテルへ行きやすく、お部屋の浴槽もゆったりしていて入浴剤も選べて入れられるのでくつろいで入れました</a:t>
             </a:r>
             <a:endParaRPr lang="en-US" sz="900" dirty="0"/>
           </a:p>
@@ -10829,7 +10829,7 @@
                 <a:ea typeface="Arial" pitchFamily="34" charset="-122"/>
                 <a:cs typeface="Arial" pitchFamily="34" charset="-120"/>
               </a:rPr>
-              <a:t>「府中駅直結でアクセスも良好でした」</a:t>
+              <a:t>「駅直結の立地で、朝からスムーズに動けるのはありがたいですね」</a:t>
             </a:r>
             <a:endParaRPr lang="en-US" sz="900" dirty="0"/>
           </a:p>
@@ -11236,7 +11236,7 @@
                 <a:ea typeface="Arial" pitchFamily="34" charset="-122"/>
                 <a:cs typeface="Arial" pitchFamily="34" charset="-120"/>
               </a:rPr>
-              <a:t>《けやきゲート府中／府中駅直結／ホテル朝食ビュッフェ》  お店が気になった方はぜひ【お店を保存】を</a:t>
+              <a:t>朝食も選べて美味しかったです</a:t>
             </a:r>
             <a:endParaRPr lang="en-US" sz="900" dirty="0"/>
           </a:p>
@@ -11275,7 +11275,7 @@
                 <a:ea typeface="Arial" pitchFamily="34" charset="-122"/>
                 <a:cs typeface="Arial" pitchFamily="34" charset="-120"/>
               </a:rPr>
-              <a:t>「また、朝食も常にきれいにブュッフェが設えてあり、気持ちよく美味しくいただけました」</a:t>
+              <a:t>「《けやきゲート府中／府中駅直結／ホテル朝食ビュッフェ》  お店が気になった方はぜひ【お店を保存】を」</a:t>
             </a:r>
             <a:endParaRPr lang="en-US" sz="900" dirty="0"/>
           </a:p>

--- a/納品レポート/ホテル別レポート/keyakigate_口コミ分析レポート.pptx
+++ b/納品レポート/ホテル別レポート/keyakigate_口コミ分析レポート.pptx
@@ -211,7 +211,7 @@
                   <c:v>9.83</c:v>
                 </c:pt>
                 <c:pt idx="1">
-                  <c:v>9</c:v>
+                  <c:v>9.03</c:v>
                 </c:pt>
                 <c:pt idx="2">
                   <c:v>8.77</c:v>
@@ -220,10 +220,10 @@
                   <c:v>8.62</c:v>
                 </c:pt>
                 <c:pt idx="4">
-                  <c:v>8.53</c:v>
+                  <c:v>8.6</c:v>
                 </c:pt>
                 <c:pt idx="5">
-                  <c:v>7.6</c:v>
+                  <c:v>6.67</c:v>
                 </c:pt>
               </c:numCache>
             </c:numRef>
@@ -566,13 +566,13 @@
               <c:numCache>
                 <c:ptCount val="3"/>
                 <c:pt idx="0">
-                  <c:v>76</c:v>
+                  <c:v>78</c:v>
                 </c:pt>
                 <c:pt idx="1">
                   <c:v>9</c:v>
                 </c:pt>
                 <c:pt idx="2">
-                  <c:v>3</c:v>
+                  <c:v>4</c:v>
                 </c:pt>
               </c:numCache>
             </c:numRef>
@@ -781,7 +781,7 @@
                 <c:formatCode>General</c:formatCode>
                 <c:ptCount val="6"/>
                 <c:pt idx="0">
-                  <c:v>49</c:v>
+                  <c:v>51</c:v>
                 </c:pt>
                 <c:pt idx="1">
                   <c:v>5</c:v>
@@ -796,7 +796,7 @@
                   <c:v>1</c:v>
                 </c:pt>
                 <c:pt idx="5">
-                  <c:v>2</c:v>
+                  <c:v>3</c:v>
                 </c:pt>
               </c:numCache>
             </c:numRef>
@@ -2747,7 +2747,7 @@
                 <a:ea typeface="Arial" pitchFamily="34" charset="-122"/>
                 <a:cs typeface="Arial" pitchFamily="34" charset="-120"/>
               </a:rPr>
-              <a:t>レビュー総数：88件（6サイト）</a:t>
+              <a:t>レビュー総数：91件（6サイト）</a:t>
             </a:r>
             <a:endParaRPr lang="en-US" sz="1000" dirty="0"/>
           </a:p>
@@ -2767,7 +2767,7 @@
                 <a:ea typeface="Arial" pitchFamily="34" charset="-122"/>
                 <a:cs typeface="Arial" pitchFamily="34" charset="-120"/>
               </a:rPr>
-              <a:t>作成日：2026年3月21日</a:t>
+              <a:t>作成日：2026年3月23日</a:t>
             </a:r>
             <a:endParaRPr lang="en-US" sz="1000" dirty="0"/>
           </a:p>
@@ -3313,7 +3313,7 @@
                           <a:ea typeface="Arial" pitchFamily="34" charset="-122"/>
                           <a:cs typeface="Arial" pitchFamily="34" charset="-120"/>
                         </a:rPr>
-                        <a:t>8.78点</a:t>
+                        <a:t>8.74点</a:t>
                       </a:r>
                       <a:endParaRPr lang="en-US" sz="1000" dirty="0">
                         <a:latin typeface="Arial" charset="0"/>
@@ -3381,7 +3381,7 @@
                           <a:ea typeface="Arial" pitchFamily="34" charset="-122"/>
                           <a:cs typeface="Arial" pitchFamily="34" charset="-120"/>
                         </a:rPr>
-                        <a:t>9.1点以上</a:t>
+                        <a:t>9.0点以上</a:t>
                       </a:r>
                       <a:endParaRPr lang="en-US" sz="1000" dirty="0">
                         <a:latin typeface="Arial" charset="0"/>
@@ -3587,7 +3587,7 @@
                           <a:ea typeface="Arial" pitchFamily="34" charset="-122"/>
                           <a:cs typeface="Arial" pitchFamily="34" charset="-120"/>
                         </a:rPr>
-                        <a:t>86.4%</a:t>
+                        <a:t>85.7%</a:t>
                       </a:r>
                       <a:endParaRPr lang="en-US" sz="1000" dirty="0">
                         <a:latin typeface="Arial" charset="0"/>
@@ -3861,7 +3861,7 @@
                           <a:ea typeface="Arial" pitchFamily="34" charset="-122"/>
                           <a:cs typeface="Arial" pitchFamily="34" charset="-120"/>
                         </a:rPr>
-                        <a:t>3.4%</a:t>
+                        <a:t>4.4%</a:t>
                       </a:r>
                       <a:endParaRPr lang="en-US" sz="1000" dirty="0">
                         <a:latin typeface="Arial" charset="0"/>
@@ -3929,7 +3929,7 @@
                           <a:ea typeface="Arial" pitchFamily="34" charset="-122"/>
                           <a:cs typeface="Arial" pitchFamily="34" charset="-120"/>
                         </a:rPr>
-                        <a:t>0%以下</a:t>
+                        <a:t>1%以下</a:t>
                       </a:r>
                       <a:endParaRPr lang="en-US" sz="1000" dirty="0">
                         <a:latin typeface="Arial" charset="0"/>
@@ -4135,7 +4135,7 @@
                           <a:ea typeface="Arial" pitchFamily="34" charset="-122"/>
                           <a:cs typeface="Arial" pitchFamily="34" charset="-120"/>
                         </a:rPr>
-                        <a:t>7.6点</a:t>
+                        <a:t>6.7点</a:t>
                       </a:r>
                       <a:endParaRPr lang="en-US" sz="1000" dirty="0">
                         <a:latin typeface="Arial" charset="0"/>
@@ -4203,7 +4203,7 @@
                           <a:ea typeface="Arial" pitchFamily="34" charset="-122"/>
                           <a:cs typeface="Arial" pitchFamily="34" charset="-120"/>
                         </a:rPr>
-                        <a:t>8.6点以上</a:t>
+                        <a:t>7.7点以上</a:t>
                       </a:r>
                       <a:endParaRPr lang="en-US" sz="1000" dirty="0">
                         <a:latin typeface="Arial" charset="0"/>
@@ -4683,7 +4683,7 @@
                           <a:ea typeface="Arial" pitchFamily="34" charset="-122"/>
                           <a:cs typeface="Arial" pitchFamily="34" charset="-120"/>
                         </a:rPr>
-                        <a:t>約7件/期間</a:t>
+                        <a:t>約8件/期間</a:t>
                       </a:r>
                       <a:endParaRPr lang="en-US" sz="1000" dirty="0">
                         <a:latin typeface="Arial" charset="0"/>
@@ -4751,7 +4751,7 @@
                           <a:ea typeface="Arial" pitchFamily="34" charset="-122"/>
                           <a:cs typeface="Arial" pitchFamily="34" charset="-120"/>
                         </a:rPr>
-                        <a:t>3件以下</a:t>
+                        <a:t>4件以下</a:t>
                       </a:r>
                       <a:endParaRPr lang="en-US" sz="1000" dirty="0">
                         <a:latin typeface="Arial" charset="0"/>
@@ -5322,7 +5322,7 @@
                 <a:ea typeface="Arial" pitchFamily="34" charset="-122"/>
                 <a:cs typeface="Arial" pitchFamily="34" charset="-120"/>
               </a:rPr>
-              <a:t>8.78</a:t>
+              <a:t>8.74</a:t>
             </a:r>
             <a:endParaRPr lang="en-US" sz="3200" dirty="0"/>
           </a:p>
@@ -5447,7 +5447,7 @@
                 <a:ea typeface="Arial" pitchFamily="34" charset="-122"/>
                 <a:cs typeface="Arial" pitchFamily="34" charset="-120"/>
               </a:rPr>
-              <a:t>86.4%</a:t>
+              <a:t>85.7%</a:t>
             </a:r>
             <a:endParaRPr lang="en-US" sz="3200" dirty="0"/>
           </a:p>
@@ -5572,7 +5572,7 @@
                 <a:ea typeface="Arial" pitchFamily="34" charset="-122"/>
                 <a:cs typeface="Arial" pitchFamily="34" charset="-120"/>
               </a:rPr>
-              <a:t>3.4%</a:t>
+              <a:t>4.4%</a:t>
             </a:r>
             <a:endParaRPr lang="en-US" sz="3200" dirty="0"/>
           </a:p>
@@ -5697,7 +5697,7 @@
                 <a:ea typeface="Arial" pitchFamily="34" charset="-122"/>
                 <a:cs typeface="Arial" pitchFamily="34" charset="-120"/>
               </a:rPr>
-              <a:t>88件</a:t>
+              <a:t>91件</a:t>
             </a:r>
             <a:endParaRPr lang="en-US" sz="3200" dirty="0"/>
           </a:p>
@@ -5845,7 +5845,7 @@
                 <a:ea typeface="Arial" pitchFamily="34" charset="-122"/>
                 <a:cs typeface="Arial" pitchFamily="34" charset="-120"/>
               </a:rPr>
-              <a:t>  駅からホテルへ行きやすく、お部屋の浴槽もゆったりしていて入浴剤も選べて入れられるのでくつろいで入れました</a:t>
+              <a:t>  添い寝で食事なしの子供にもタオルを用意してくれた ダブルベッドの部屋なら広さがあってベビーカー+スーツケースを置い...</a:t>
             </a:r>
             <a:endParaRPr lang="en-US" sz="1100" dirty="0"/>
           </a:p>
@@ -5885,7 +5885,7 @@
                 <a:ea typeface="Arial" pitchFamily="34" charset="-122"/>
                 <a:cs typeface="Arial" pitchFamily="34" charset="-120"/>
               </a:rPr>
-              <a:t>  清潔感のあるお部屋で快適に過ごすことができました</a:t>
+              <a:t>  清潔感あるホテルで、落ち着きある雰囲気がとても気に入っています</a:t>
             </a:r>
             <a:endParaRPr lang="en-US" sz="1100" dirty="0"/>
           </a:p>
@@ -6073,7 +6073,7 @@
                 <a:ea typeface="Arial" pitchFamily="34" charset="-122"/>
                 <a:cs typeface="Arial" pitchFamily="34" charset="-120"/>
               </a:rPr>
-              <a:t>  和洋ともに品数がしっかり揃っていて、朝から選ぶ楽しさがあります</a:t>
+              <a:t>  朝食も美味しかったです。副菜も少しずついただきましたがどれも美味しかったです。  今回、無事にパンも焼くことができ...</a:t>
             </a:r>
             <a:endParaRPr lang="en-US" sz="1100" dirty="0"/>
           </a:p>
@@ -6506,7 +6506,7 @@
                 <a:ea typeface="Arial" pitchFamily="34" charset="-122"/>
                 <a:cs typeface="Arial" pitchFamily="34" charset="-120"/>
               </a:rPr>
-              <a:t>8.78</a:t>
+              <a:t>8.74</a:t>
             </a:r>
             <a:endParaRPr lang="en-US" sz="3200" dirty="0"/>
           </a:p>
@@ -6631,7 +6631,7 @@
                 <a:ea typeface="Arial" pitchFamily="34" charset="-122"/>
                 <a:cs typeface="Arial" pitchFamily="34" charset="-120"/>
               </a:rPr>
-              <a:t>86.4%</a:t>
+              <a:t>85.7%</a:t>
             </a:r>
             <a:endParaRPr lang="en-US" sz="3200" dirty="0"/>
           </a:p>
@@ -6756,7 +6756,7 @@
                 <a:ea typeface="Arial" pitchFamily="34" charset="-122"/>
                 <a:cs typeface="Arial" pitchFamily="34" charset="-120"/>
               </a:rPr>
-              <a:t>3.4%</a:t>
+              <a:t>4.4%</a:t>
             </a:r>
             <a:endParaRPr lang="en-US" sz="3200" dirty="0"/>
           </a:p>
@@ -6881,7 +6881,7 @@
                 <a:ea typeface="Arial" pitchFamily="34" charset="-122"/>
                 <a:cs typeface="Arial" pitchFamily="34" charset="-120"/>
               </a:rPr>
-              <a:t>88件</a:t>
+              <a:t>91件</a:t>
             </a:r>
             <a:endParaRPr lang="en-US" sz="3200" dirty="0"/>
           </a:p>
@@ -7351,7 +7351,7 @@
                 <a:ea typeface="Arial" pitchFamily="34" charset="-122"/>
                 <a:cs typeface="Arial" pitchFamily="34" charset="-120"/>
               </a:rPr>
-              <a:t>Google(7.6)が相対的に低い。口コミ返信の強化が急務</a:t>
+              <a:t>Google(6.7)が相対的に低い。口コミ返信の強化が急務</a:t>
             </a:r>
             <a:endParaRPr lang="en-US" sz="1100" dirty="0"/>
           </a:p>
@@ -8202,7 +8202,7 @@
                           <a:ea typeface="Arial" pitchFamily="34" charset="-122"/>
                           <a:cs typeface="Arial" pitchFamily="34" charset="-120"/>
                         </a:rPr>
-                        <a:t>32</a:t>
+                        <a:t>33</a:t>
                       </a:r>
                       <a:endParaRPr lang="en-US" sz="900" dirty="0">
                         <a:latin typeface="Arial" charset="0"/>
@@ -8270,7 +8270,7 @@
                           <a:ea typeface="Arial" pitchFamily="34" charset="-122"/>
                           <a:cs typeface="Arial" pitchFamily="34" charset="-120"/>
                         </a:rPr>
-                        <a:t>4.5</a:t>
+                        <a:t>4.52</a:t>
                       </a:r>
                       <a:endParaRPr lang="en-US" sz="900" dirty="0">
                         <a:latin typeface="Arial" charset="0"/>
@@ -8406,7 +8406,7 @@
                           <a:ea typeface="Arial" pitchFamily="34" charset="-122"/>
                           <a:cs typeface="Arial" pitchFamily="34" charset="-120"/>
                         </a:rPr>
-                        <a:t>9</a:t>
+                        <a:t>9.03</a:t>
                       </a:r>
                       <a:endParaRPr lang="en-US" sz="900" dirty="0">
                         <a:latin typeface="Arial" charset="0"/>
@@ -9228,7 +9228,7 @@
                           <a:ea typeface="Arial" pitchFamily="34" charset="-122"/>
                           <a:cs typeface="Arial" pitchFamily="34" charset="-120"/>
                         </a:rPr>
-                        <a:t>19</a:t>
+                        <a:t>20</a:t>
                       </a:r>
                       <a:endParaRPr lang="en-US" sz="900" dirty="0">
                         <a:latin typeface="Arial" charset="0"/>
@@ -9296,7 +9296,7 @@
                           <a:ea typeface="Arial" pitchFamily="34" charset="-122"/>
                           <a:cs typeface="Arial" pitchFamily="34" charset="-120"/>
                         </a:rPr>
-                        <a:t>4.26</a:t>
+                        <a:t>4.3</a:t>
                       </a:r>
                       <a:endParaRPr lang="en-US" sz="900" dirty="0">
                         <a:latin typeface="Arial" charset="0"/>
@@ -9432,7 +9432,7 @@
                           <a:ea typeface="Arial" pitchFamily="34" charset="-122"/>
                           <a:cs typeface="Arial" pitchFamily="34" charset="-120"/>
                         </a:rPr>
-                        <a:t>8.53</a:t>
+                        <a:t>8.6</a:t>
                       </a:r>
                       <a:endParaRPr lang="en-US" sz="900" dirty="0">
                         <a:latin typeface="Arial" charset="0"/>
@@ -9570,7 +9570,7 @@
                           <a:ea typeface="Arial" pitchFamily="34" charset="-122"/>
                           <a:cs typeface="Arial" pitchFamily="34" charset="-120"/>
                         </a:rPr>
-                        <a:t>5</a:t>
+                        <a:t>6</a:t>
                       </a:r>
                       <a:endParaRPr lang="en-US" sz="900" dirty="0">
                         <a:latin typeface="Arial" charset="0"/>
@@ -9638,7 +9638,7 @@
                           <a:ea typeface="Arial" pitchFamily="34" charset="-122"/>
                           <a:cs typeface="Arial" pitchFamily="34" charset="-120"/>
                         </a:rPr>
-                        <a:t>3.8</a:t>
+                        <a:t>3.33</a:t>
                       </a:r>
                       <a:endParaRPr lang="en-US" sz="900" dirty="0">
                         <a:latin typeface="Arial" charset="0"/>
@@ -9774,7 +9774,7 @@
                           <a:ea typeface="Arial" pitchFamily="34" charset="-122"/>
                           <a:cs typeface="Arial" pitchFamily="34" charset="-120"/>
                         </a:rPr>
-                        <a:t>7.6</a:t>
+                        <a:t>6.67</a:t>
                       </a:r>
                       <a:endParaRPr lang="en-US" sz="900" dirty="0">
                         <a:latin typeface="Arial" charset="0"/>
@@ -10182,7 +10182,7 @@
                 <a:ea typeface="Arial" pitchFamily="34" charset="-122"/>
                 <a:cs typeface="Arial" pitchFamily="34" charset="-120"/>
               </a:rPr>
-              <a:t>76件（86.4%）</a:t>
+              <a:t>78件（85.7%）</a:t>
             </a:r>
             <a:endParaRPr lang="en-US" sz="1100" dirty="0"/>
           </a:p>
@@ -10280,7 +10280,7 @@
                 <a:ea typeface="Arial" pitchFamily="34" charset="-122"/>
                 <a:cs typeface="Arial" pitchFamily="34" charset="-120"/>
               </a:rPr>
-              <a:t>9件（10.2%）</a:t>
+              <a:t>9件（9.9%）</a:t>
             </a:r>
             <a:endParaRPr lang="en-US" sz="1100" dirty="0"/>
           </a:p>
@@ -10378,7 +10378,7 @@
                 <a:ea typeface="Arial" pitchFamily="34" charset="-122"/>
                 <a:cs typeface="Arial" pitchFamily="34" charset="-120"/>
               </a:rPr>
-              <a:t>3件（3.4%）</a:t>
+              <a:t>4件（4.4%）</a:t>
             </a:r>
             <a:endParaRPr lang="en-US" sz="1100" dirty="0"/>
           </a:p>
@@ -10790,7 +10790,7 @@
                 <a:ea typeface="Arial" pitchFamily="34" charset="-122"/>
                 <a:cs typeface="Arial" pitchFamily="34" charset="-120"/>
               </a:rPr>
-              <a:t>駅からホテルへ行きやすく、お部屋の浴槽もゆったりしていて入浴剤も選べて入れられるのでくつろいで入れました</a:t>
+              <a:t>添い寝で食事なしの子供にもタオルを用意してくれた ダブルベッドの部屋なら広さがあってベビーカー+スーツケースを置い...</a:t>
             </a:r>
             <a:endParaRPr lang="en-US" sz="900" dirty="0"/>
           </a:p>
@@ -10829,7 +10829,7 @@
                 <a:ea typeface="Arial" pitchFamily="34" charset="-122"/>
                 <a:cs typeface="Arial" pitchFamily="34" charset="-120"/>
               </a:rPr>
-              <a:t>「駅直結の立地で、朝からスムーズに動けるのはありがたいですね」</a:t>
+              <a:t>「駅からホテルへ行きやすく、お部屋の浴槽もゆったりしていて入浴剤も選べて入れられるのでくつろいで入れました」</a:t>
             </a:r>
             <a:endParaRPr lang="en-US" sz="900" dirty="0"/>
           </a:p>
@@ -11013,7 +11013,7 @@
                 <a:ea typeface="Arial" pitchFamily="34" charset="-122"/>
                 <a:cs typeface="Arial" pitchFamily="34" charset="-120"/>
               </a:rPr>
-              <a:t>清潔感のあるお部屋で快適に過ごすことができました</a:t>
+              <a:t>清潔感あるホテルで、落ち着きある雰囲気がとても気に入っています</a:t>
             </a:r>
             <a:endParaRPr lang="en-US" sz="900" dirty="0"/>
           </a:p>
@@ -11052,7 +11052,7 @@
                 <a:ea typeface="Arial" pitchFamily="34" charset="-122"/>
                 <a:cs typeface="Arial" pitchFamily="34" charset="-120"/>
               </a:rPr>
-              <a:t>「とても綺麗に清掃されていて気持ちよく泊まることができました」</a:t>
+              <a:t>「清潔感のあるお部屋で快適に過ごすことができました」</a:t>
             </a:r>
             <a:endParaRPr lang="en-US" sz="900" dirty="0"/>
           </a:p>
@@ -11275,7 +11275,7 @@
                 <a:ea typeface="Arial" pitchFamily="34" charset="-122"/>
                 <a:cs typeface="Arial" pitchFamily="34" charset="-120"/>
               </a:rPr>
-              <a:t>「《けやきゲート府中／府中駅直結／ホテル朝食ビュッフェ》  お店が気になった方はぜひ【お店を保存】を」</a:t>
+              <a:t>「朝食も美味しかったです」</a:t>
             </a:r>
             <a:endParaRPr lang="en-US" sz="900" dirty="0"/>
           </a:p>
@@ -11459,7 +11459,7 @@
                 <a:ea typeface="Arial" pitchFamily="34" charset="-122"/>
                 <a:cs typeface="Arial" pitchFamily="34" charset="-120"/>
               </a:rPr>
-              <a:t>清潔感のあるお部屋で快適に過ごすことができました</a:t>
+              <a:t>添い寝で食事なしの子供にもタオルを用意してくれた ダブルベッドの部屋なら広さがあってベビーカー+スーツケースを置い...</a:t>
             </a:r>
             <a:endParaRPr lang="en-US" sz="900" dirty="0"/>
           </a:p>
@@ -11498,7 +11498,7 @@
                 <a:ea typeface="Arial" pitchFamily="34" charset="-122"/>
                 <a:cs typeface="Arial" pitchFamily="34" charset="-120"/>
               </a:rPr>
-              <a:t>「お部屋も広く、ベッドも広いのでゆっくり過ごせました」</a:t>
+              <a:t>「清潔感のあるお部屋で快適に過ごすことができました」</a:t>
             </a:r>
             <a:endParaRPr lang="en-US" sz="900" dirty="0"/>
           </a:p>
@@ -11682,7 +11682,7 @@
                 <a:ea typeface="Arial" pitchFamily="34" charset="-122"/>
                 <a:cs typeface="Arial" pitchFamily="34" charset="-120"/>
               </a:rPr>
-              <a:t>嬉しいサービスでした</a:t>
+              <a:t>店員さんのめんどくさそうに対応する系　カツラの支配人 店員さんのめんどくさそうに対応する系　カツラの支配人</a:t>
             </a:r>
             <a:endParaRPr lang="en-US" sz="900" dirty="0"/>
           </a:p>
@@ -11721,7 +11721,7 @@
                 <a:ea typeface="Arial" pitchFamily="34" charset="-122"/>
                 <a:cs typeface="Arial" pitchFamily="34" charset="-120"/>
               </a:rPr>
-              <a:t>「中に入ってしまえばバリアフリーでしたが、フロントに行くまでの表示をもっとわかりやすくしてほしかったです」</a:t>
+              <a:t>「嬉しいサービスでした」</a:t>
             </a:r>
             <a:endParaRPr lang="en-US" sz="900" dirty="0"/>
           </a:p>
@@ -12634,7 +12634,7 @@
                           <a:ea typeface="Arial" pitchFamily="34" charset="-122"/>
                           <a:cs typeface="Arial" pitchFamily="34" charset="-120"/>
                         </a:rPr>
-                        <a:t>和洋ともに品数がしっかり揃っていて、朝から選ぶ楽しさがあります</a:t>
+                        <a:t>朝食も美味しかったです。副菜も少しずついただきましたがどれも美味しかったです。  今回、無事にパンも焼くことができ...</a:t>
                       </a:r>
                       <a:endParaRPr lang="en-US" sz="900" dirty="0">
                         <a:latin typeface="Arial" charset="0"/>
@@ -12702,7 +12702,7 @@
                           <a:ea typeface="Arial" pitchFamily="34" charset="-122"/>
                           <a:cs typeface="Arial" pitchFamily="34" charset="-120"/>
                         </a:rPr>
-                        <a:t>7件</a:t>
+                        <a:t>8件</a:t>
                       </a:r>
                       <a:endParaRPr lang="en-US" sz="900" dirty="0">
                         <a:latin typeface="Arial" charset="0"/>

--- a/納品レポート/ホテル別レポート/keyakigate_口コミ分析レポート.pptx
+++ b/納品レポート/ホテル別レポート/keyakigate_口コミ分析レポート.pptx
@@ -211,10 +211,10 @@
                   <c:v>9.83</c:v>
                 </c:pt>
                 <c:pt idx="1">
-                  <c:v>9.03</c:v>
+                  <c:v>9</c:v>
                 </c:pt>
                 <c:pt idx="2">
-                  <c:v>8.77</c:v>
+                  <c:v>8.86</c:v>
                 </c:pt>
                 <c:pt idx="3">
                   <c:v>8.62</c:v>
@@ -566,7 +566,7 @@
               <c:numCache>
                 <c:ptCount val="3"/>
                 <c:pt idx="0">
-                  <c:v>78</c:v>
+                  <c:v>80</c:v>
                 </c:pt>
                 <c:pt idx="1">
                   <c:v>9</c:v>
@@ -781,13 +781,13 @@
                 <c:formatCode>General</c:formatCode>
                 <c:ptCount val="6"/>
                 <c:pt idx="0">
-                  <c:v>51</c:v>
+                  <c:v>52</c:v>
                 </c:pt>
                 <c:pt idx="1">
                   <c:v>5</c:v>
                 </c:pt>
                 <c:pt idx="2">
-                  <c:v>22</c:v>
+                  <c:v>23</c:v>
                 </c:pt>
                 <c:pt idx="3">
                   <c:v>9</c:v>
@@ -2747,7 +2747,7 @@
                 <a:ea typeface="Arial" pitchFamily="34" charset="-122"/>
                 <a:cs typeface="Arial" pitchFamily="34" charset="-120"/>
               </a:rPr>
-              <a:t>レビュー総数：91件（6サイト）</a:t>
+              <a:t>レビュー総数：93件（6サイト）</a:t>
             </a:r>
             <a:endParaRPr lang="en-US" sz="1000" dirty="0"/>
           </a:p>
@@ -2767,7 +2767,7 @@
                 <a:ea typeface="Arial" pitchFamily="34" charset="-122"/>
                 <a:cs typeface="Arial" pitchFamily="34" charset="-120"/>
               </a:rPr>
-              <a:t>作成日：2026年3月23日</a:t>
+              <a:t>作成日：2026年3月24日</a:t>
             </a:r>
             <a:endParaRPr lang="en-US" sz="1000" dirty="0"/>
           </a:p>
@@ -3587,7 +3587,7 @@
                           <a:ea typeface="Arial" pitchFamily="34" charset="-122"/>
                           <a:cs typeface="Arial" pitchFamily="34" charset="-120"/>
                         </a:rPr>
-                        <a:t>85.7%</a:t>
+                        <a:t>86.0%</a:t>
                       </a:r>
                       <a:endParaRPr lang="en-US" sz="1000" dirty="0">
                         <a:latin typeface="Arial" charset="0"/>
@@ -3861,7 +3861,7 @@
                           <a:ea typeface="Arial" pitchFamily="34" charset="-122"/>
                           <a:cs typeface="Arial" pitchFamily="34" charset="-120"/>
                         </a:rPr>
-                        <a:t>4.4%</a:t>
+                        <a:t>4.3%</a:t>
                       </a:r>
                       <a:endParaRPr lang="en-US" sz="1000" dirty="0">
                         <a:latin typeface="Arial" charset="0"/>
@@ -5447,7 +5447,7 @@
                 <a:ea typeface="Arial" pitchFamily="34" charset="-122"/>
                 <a:cs typeface="Arial" pitchFamily="34" charset="-120"/>
               </a:rPr>
-              <a:t>85.7%</a:t>
+              <a:t>86.0%</a:t>
             </a:r>
             <a:endParaRPr lang="en-US" sz="3200" dirty="0"/>
           </a:p>
@@ -5572,7 +5572,7 @@
                 <a:ea typeface="Arial" pitchFamily="34" charset="-122"/>
                 <a:cs typeface="Arial" pitchFamily="34" charset="-120"/>
               </a:rPr>
-              <a:t>4.4%</a:t>
+              <a:t>4.3%</a:t>
             </a:r>
             <a:endParaRPr lang="en-US" sz="3200" dirty="0"/>
           </a:p>
@@ -5697,7 +5697,7 @@
                 <a:ea typeface="Arial" pitchFamily="34" charset="-122"/>
                 <a:cs typeface="Arial" pitchFamily="34" charset="-120"/>
               </a:rPr>
-              <a:t>91件</a:t>
+              <a:t>93件</a:t>
             </a:r>
             <a:endParaRPr lang="en-US" sz="3200" dirty="0"/>
           </a:p>
@@ -5845,7 +5845,7 @@
                 <a:ea typeface="Arial" pitchFamily="34" charset="-122"/>
                 <a:cs typeface="Arial" pitchFamily="34" charset="-120"/>
               </a:rPr>
-              <a:t>  添い寝で食事なしの子供にもタオルを用意してくれた ダブルベッドの部屋なら広さがあってベビーカー+スーツケースを置い...</a:t>
+              <a:t>  府中駅前にあるこのホテル、特筆する部分はないですが、駅前だという事が優れた点だと思います</a:t>
             </a:r>
             <a:endParaRPr lang="en-US" sz="1100" dirty="0"/>
           </a:p>
@@ -5885,7 +5885,7 @@
                 <a:ea typeface="Arial" pitchFamily="34" charset="-122"/>
                 <a:cs typeface="Arial" pitchFamily="34" charset="-120"/>
               </a:rPr>
-              <a:t>  清潔感あるホテルで、落ち着きある雰囲気がとても気に入っています</a:t>
+              <a:t>  フロントの女性の方が対応いただきましたが非常に心地よく丁寧でした、部屋も綺麗でゆっくりできました</a:t>
             </a:r>
             <a:endParaRPr lang="en-US" sz="1100" dirty="0"/>
           </a:p>
@@ -6631,7 +6631,7 @@
                 <a:ea typeface="Arial" pitchFamily="34" charset="-122"/>
                 <a:cs typeface="Arial" pitchFamily="34" charset="-120"/>
               </a:rPr>
-              <a:t>85.7%</a:t>
+              <a:t>86.0%</a:t>
             </a:r>
             <a:endParaRPr lang="en-US" sz="3200" dirty="0"/>
           </a:p>
@@ -6756,7 +6756,7 @@
                 <a:ea typeface="Arial" pitchFamily="34" charset="-122"/>
                 <a:cs typeface="Arial" pitchFamily="34" charset="-120"/>
               </a:rPr>
-              <a:t>4.4%</a:t>
+              <a:t>4.3%</a:t>
             </a:r>
             <a:endParaRPr lang="en-US" sz="3200" dirty="0"/>
           </a:p>
@@ -6881,7 +6881,7 @@
                 <a:ea typeface="Arial" pitchFamily="34" charset="-122"/>
                 <a:cs typeface="Arial" pitchFamily="34" charset="-120"/>
               </a:rPr>
-              <a:t>91件</a:t>
+              <a:t>93件</a:t>
             </a:r>
             <a:endParaRPr lang="en-US" sz="3200" dirty="0"/>
           </a:p>
@@ -8202,7 +8202,7 @@
                           <a:ea typeface="Arial" pitchFamily="34" charset="-122"/>
                           <a:cs typeface="Arial" pitchFamily="34" charset="-120"/>
                         </a:rPr>
-                        <a:t>33</a:t>
+                        <a:t>34</a:t>
                       </a:r>
                       <a:endParaRPr lang="en-US" sz="900" dirty="0">
                         <a:latin typeface="Arial" charset="0"/>
@@ -8270,7 +8270,7 @@
                           <a:ea typeface="Arial" pitchFamily="34" charset="-122"/>
                           <a:cs typeface="Arial" pitchFamily="34" charset="-120"/>
                         </a:rPr>
-                        <a:t>4.52</a:t>
+                        <a:t>4.5</a:t>
                       </a:r>
                       <a:endParaRPr lang="en-US" sz="900" dirty="0">
                         <a:latin typeface="Arial" charset="0"/>
@@ -8406,7 +8406,7 @@
                           <a:ea typeface="Arial" pitchFamily="34" charset="-122"/>
                           <a:cs typeface="Arial" pitchFamily="34" charset="-120"/>
                         </a:rPr>
-                        <a:t>9.03</a:t>
+                        <a:t>9</a:t>
                       </a:r>
                       <a:endParaRPr lang="en-US" sz="900" dirty="0">
                         <a:latin typeface="Arial" charset="0"/>
@@ -8544,7 +8544,7 @@
                           <a:ea typeface="Arial" pitchFamily="34" charset="-122"/>
                           <a:cs typeface="Arial" pitchFamily="34" charset="-120"/>
                         </a:rPr>
-                        <a:t>13</a:t>
+                        <a:t>14</a:t>
                       </a:r>
                       <a:endParaRPr lang="en-US" sz="900" dirty="0">
                         <a:latin typeface="Arial" charset="0"/>
@@ -8612,7 +8612,7 @@
                           <a:ea typeface="Arial" pitchFamily="34" charset="-122"/>
                           <a:cs typeface="Arial" pitchFamily="34" charset="-120"/>
                         </a:rPr>
-                        <a:t>8.77</a:t>
+                        <a:t>8.86</a:t>
                       </a:r>
                       <a:endParaRPr lang="en-US" sz="900" dirty="0">
                         <a:latin typeface="Arial" charset="0"/>
@@ -8748,7 +8748,7 @@
                           <a:ea typeface="Arial" pitchFamily="34" charset="-122"/>
                           <a:cs typeface="Arial" pitchFamily="34" charset="-120"/>
                         </a:rPr>
-                        <a:t>8.77</a:t>
+                        <a:t>8.86</a:t>
                       </a:r>
                       <a:endParaRPr lang="en-US" sz="900" dirty="0">
                         <a:latin typeface="Arial" charset="0"/>
@@ -10182,7 +10182,7 @@
                 <a:ea typeface="Arial" pitchFamily="34" charset="-122"/>
                 <a:cs typeface="Arial" pitchFamily="34" charset="-120"/>
               </a:rPr>
-              <a:t>78件（85.7%）</a:t>
+              <a:t>80件（86.0%）</a:t>
             </a:r>
             <a:endParaRPr lang="en-US" sz="1100" dirty="0"/>
           </a:p>
@@ -10280,7 +10280,7 @@
                 <a:ea typeface="Arial" pitchFamily="34" charset="-122"/>
                 <a:cs typeface="Arial" pitchFamily="34" charset="-120"/>
               </a:rPr>
-              <a:t>9件（9.9%）</a:t>
+              <a:t>9件（9.7%）</a:t>
             </a:r>
             <a:endParaRPr lang="en-US" sz="1100" dirty="0"/>
           </a:p>
@@ -10378,7 +10378,7 @@
                 <a:ea typeface="Arial" pitchFamily="34" charset="-122"/>
                 <a:cs typeface="Arial" pitchFamily="34" charset="-120"/>
               </a:rPr>
-              <a:t>4件（4.4%）</a:t>
+              <a:t>4件（4.3%）</a:t>
             </a:r>
             <a:endParaRPr lang="en-US" sz="1100" dirty="0"/>
           </a:p>
@@ -10712,7 +10712,7 @@
                 <a:ea typeface="Arial" pitchFamily="34" charset="-122"/>
                 <a:cs typeface="Arial" pitchFamily="34" charset="-120"/>
               </a:rPr>
-              <a:t>20件+</a:t>
+              <a:t>50件+</a:t>
             </a:r>
             <a:endParaRPr lang="en-US" sz="900" dirty="0"/>
           </a:p>
@@ -10790,7 +10790,7 @@
                 <a:ea typeface="Arial" pitchFamily="34" charset="-122"/>
                 <a:cs typeface="Arial" pitchFamily="34" charset="-120"/>
               </a:rPr>
-              <a:t>添い寝で食事なしの子供にもタオルを用意してくれた ダブルベッドの部屋なら広さがあってベビーカー+スーツケースを置い...</a:t>
+              <a:t>府中駅前にあるこのホテル、特筆する部分はないですが、駅前だという事が優れた点だと思います</a:t>
             </a:r>
             <a:endParaRPr lang="en-US" sz="900" dirty="0"/>
           </a:p>
@@ -10829,7 +10829,7 @@
                 <a:ea typeface="Arial" pitchFamily="34" charset="-122"/>
                 <a:cs typeface="Arial" pitchFamily="34" charset="-120"/>
               </a:rPr>
-              <a:t>「駅からホテルへ行きやすく、お部屋の浴槽もゆったりしていて入浴剤も選べて入れられるのでくつろいで入れました」</a:t>
+              <a:t>「添い寝で食事なしの子供にもタオルを用意してくれた ダブルベッドの部屋なら広さがあってベビーカー+スーツケースを置い...」</a:t>
             </a:r>
             <a:endParaRPr lang="en-US" sz="900" dirty="0"/>
           </a:p>
@@ -11013,7 +11013,7 @@
                 <a:ea typeface="Arial" pitchFamily="34" charset="-122"/>
                 <a:cs typeface="Arial" pitchFamily="34" charset="-120"/>
               </a:rPr>
-              <a:t>清潔感あるホテルで、落ち着きある雰囲気がとても気に入っています</a:t>
+              <a:t>フロントの女性の方が対応いただきましたが非常に心地よく丁寧でした、部屋も綺麗でゆっくりできました</a:t>
             </a:r>
             <a:endParaRPr lang="en-US" sz="900" dirty="0"/>
           </a:p>
@@ -11028,6 +11028,452 @@
         <p:spPr>
           <a:xfrm>
             <a:off x="3429000" y="1828800"/>
+            <a:ext cx="2377440" cy="640080"/>
+          </a:xfrm>
+          <a:prstGeom prst="rect">
+            <a:avLst/>
+          </a:prstGeom>
+          <a:noFill/>
+          <a:ln/>
+        </p:spPr>
+        <p:txBody>
+          <a:bodyPr wrap="square" lIns="0" tIns="0" rIns="0" bIns="0" rtlCol="0" anchor="ctr"/>
+          <a:lstStyle/>
+          <a:p>
+            <a:pPr indent="0" marL="0">
+              <a:buNone/>
+            </a:pPr>
+            <a:r>
+              <a:rPr lang="en-US" sz="900" i="1" dirty="0">
+                <a:solidFill>
+                  <a:srgbClr val="3B7DD8"/>
+                </a:solidFill>
+                <a:latin typeface="Arial" pitchFamily="34" charset="0"/>
+                <a:ea typeface="Arial" pitchFamily="34" charset="-122"/>
+                <a:cs typeface="Arial" pitchFamily="34" charset="-120"/>
+              </a:rPr>
+              <a:t>「清潔感あるホテルで、落ち着きある雰囲気がとても気に入っています」</a:t>
+            </a:r>
+            <a:endParaRPr lang="en-US" sz="900" dirty="0"/>
+          </a:p>
+        </p:txBody>
+      </p:sp>
+      <p:sp>
+        <p:nvSpPr>
+          <p:cNvPr id="19" name="Shape 17"/>
+          <p:cNvSpPr/>
+          <p:nvPr/>
+        </p:nvSpPr>
+        <p:spPr>
+          <a:xfrm>
+            <a:off x="6126480" y="1051560"/>
+            <a:ext cx="2651760" cy="1600200"/>
+          </a:xfrm>
+          <a:prstGeom prst="rect">
+            <a:avLst/>
+          </a:prstGeom>
+          <a:solidFill>
+            <a:srgbClr val="FFFFFF"/>
+          </a:solidFill>
+          <a:ln/>
+          <a:effectLst>
+            <a:outerShdw sx="100000" sy="100000" kx="0" ky="0" algn="bl" rotWithShape="0" blurRad="50800" dist="25400" dir="8100000">
+              <a:srgbClr val="000000">
+                <a:alpha val="10000"/>
+              </a:srgbClr>
+            </a:outerShdw>
+          </a:effectLst>
+        </p:spPr>
+      </p:sp>
+      <p:sp>
+        <p:nvSpPr>
+          <p:cNvPr id="20" name="Shape 18"/>
+          <p:cNvSpPr/>
+          <p:nvPr/>
+        </p:nvSpPr>
+        <p:spPr>
+          <a:xfrm>
+            <a:off x="6126480" y="1051560"/>
+            <a:ext cx="54864" cy="1600200"/>
+          </a:xfrm>
+          <a:prstGeom prst="rect">
+            <a:avLst/>
+          </a:prstGeom>
+          <a:solidFill>
+            <a:srgbClr val="16A34A"/>
+          </a:solidFill>
+          <a:ln/>
+        </p:spPr>
+      </p:sp>
+      <p:sp>
+        <p:nvSpPr>
+          <p:cNvPr id="21" name="Shape 19"/>
+          <p:cNvSpPr/>
+          <p:nvPr/>
+        </p:nvSpPr>
+        <p:spPr>
+          <a:xfrm>
+            <a:off x="7955280" y="1124712"/>
+            <a:ext cx="658368" cy="228600"/>
+          </a:xfrm>
+          <a:prstGeom prst="rect">
+            <a:avLst/>
+          </a:prstGeom>
+          <a:solidFill>
+            <a:srgbClr val="DCFCE7"/>
+          </a:solidFill>
+          <a:ln/>
+        </p:spPr>
+      </p:sp>
+      <p:sp>
+        <p:nvSpPr>
+          <p:cNvPr id="22" name="Text 20"/>
+          <p:cNvSpPr/>
+          <p:nvPr/>
+        </p:nvSpPr>
+        <p:spPr>
+          <a:xfrm>
+            <a:off x="7955280" y="1124712"/>
+            <a:ext cx="658368" cy="228600"/>
+          </a:xfrm>
+          <a:prstGeom prst="rect">
+            <a:avLst/>
+          </a:prstGeom>
+          <a:noFill/>
+          <a:ln/>
+        </p:spPr>
+        <p:txBody>
+          <a:bodyPr wrap="square" lIns="0" tIns="0" rIns="0" bIns="0" rtlCol="0" anchor="ctr"/>
+          <a:lstStyle/>
+          <a:p>
+            <a:pPr algn="ctr" indent="0" marL="0">
+              <a:buNone/>
+            </a:pPr>
+            <a:r>
+              <a:rPr lang="en-US" sz="900" b="1" dirty="0">
+                <a:solidFill>
+                  <a:srgbClr val="16A34A"/>
+                </a:solidFill>
+                <a:latin typeface="Arial" pitchFamily="34" charset="0"/>
+                <a:ea typeface="Arial" pitchFamily="34" charset="-122"/>
+                <a:cs typeface="Arial" pitchFamily="34" charset="-120"/>
+              </a:rPr>
+              <a:t>20件+</a:t>
+            </a:r>
+            <a:endParaRPr lang="en-US" sz="900" dirty="0"/>
+          </a:p>
+        </p:txBody>
+      </p:sp>
+      <p:sp>
+        <p:nvSpPr>
+          <p:cNvPr id="23" name="Text 21"/>
+          <p:cNvSpPr/>
+          <p:nvPr/>
+        </p:nvSpPr>
+        <p:spPr>
+          <a:xfrm>
+            <a:off x="6263640" y="1124712"/>
+            <a:ext cx="1645920" cy="274320"/>
+          </a:xfrm>
+          <a:prstGeom prst="rect">
+            <a:avLst/>
+          </a:prstGeom>
+          <a:noFill/>
+          <a:ln/>
+        </p:spPr>
+        <p:txBody>
+          <a:bodyPr wrap="square" lIns="0" tIns="0" rIns="0" bIns="0" rtlCol="0" anchor="ctr"/>
+          <a:lstStyle/>
+          <a:p>
+            <a:pPr indent="0" marL="0">
+              <a:buNone/>
+            </a:pPr>
+            <a:r>
+              <a:rPr lang="en-US" sz="1300" b="1" dirty="0">
+                <a:solidFill>
+                  <a:srgbClr val="1A2744"/>
+                </a:solidFill>
+                <a:latin typeface="Arial" pitchFamily="34" charset="0"/>
+                <a:ea typeface="Arial" pitchFamily="34" charset="-122"/>
+                <a:cs typeface="Arial" pitchFamily="34" charset="-120"/>
+              </a:rPr>
+              <a:t>朝食</a:t>
+            </a:r>
+            <a:endParaRPr lang="en-US" sz="1300" dirty="0"/>
+          </a:p>
+        </p:txBody>
+      </p:sp>
+      <p:sp>
+        <p:nvSpPr>
+          <p:cNvPr id="24" name="Text 22"/>
+          <p:cNvSpPr/>
+          <p:nvPr/>
+        </p:nvSpPr>
+        <p:spPr>
+          <a:xfrm>
+            <a:off x="6263640" y="1417320"/>
+            <a:ext cx="2377440" cy="365760"/>
+          </a:xfrm>
+          <a:prstGeom prst="rect">
+            <a:avLst/>
+          </a:prstGeom>
+          <a:noFill/>
+          <a:ln/>
+        </p:spPr>
+        <p:txBody>
+          <a:bodyPr wrap="square" lIns="0" tIns="0" rIns="0" bIns="0" rtlCol="0" anchor="ctr"/>
+          <a:lstStyle/>
+          <a:p>
+            <a:pPr indent="0" marL="0">
+              <a:buNone/>
+            </a:pPr>
+            <a:r>
+              <a:rPr lang="en-US" sz="900" dirty="0">
+                <a:solidFill>
+                  <a:srgbClr val="64748B"/>
+                </a:solidFill>
+                <a:latin typeface="Arial" pitchFamily="34" charset="0"/>
+                <a:ea typeface="Arial" pitchFamily="34" charset="-122"/>
+                <a:cs typeface="Arial" pitchFamily="34" charset="-120"/>
+              </a:rPr>
+              <a:t>朝食も選べて美味しかったです</a:t>
+            </a:r>
+            <a:endParaRPr lang="en-US" sz="900" dirty="0"/>
+          </a:p>
+        </p:txBody>
+      </p:sp>
+      <p:sp>
+        <p:nvSpPr>
+          <p:cNvPr id="25" name="Text 23"/>
+          <p:cNvSpPr/>
+          <p:nvPr/>
+        </p:nvSpPr>
+        <p:spPr>
+          <a:xfrm>
+            <a:off x="6263640" y="1828800"/>
+            <a:ext cx="2377440" cy="640080"/>
+          </a:xfrm>
+          <a:prstGeom prst="rect">
+            <a:avLst/>
+          </a:prstGeom>
+          <a:noFill/>
+          <a:ln/>
+        </p:spPr>
+        <p:txBody>
+          <a:bodyPr wrap="square" lIns="0" tIns="0" rIns="0" bIns="0" rtlCol="0" anchor="ctr"/>
+          <a:lstStyle/>
+          <a:p>
+            <a:pPr indent="0" marL="0">
+              <a:buNone/>
+            </a:pPr>
+            <a:r>
+              <a:rPr lang="en-US" sz="900" i="1" dirty="0">
+                <a:solidFill>
+                  <a:srgbClr val="3B7DD8"/>
+                </a:solidFill>
+                <a:latin typeface="Arial" pitchFamily="34" charset="0"/>
+                <a:ea typeface="Arial" pitchFamily="34" charset="-122"/>
+                <a:cs typeface="Arial" pitchFamily="34" charset="-120"/>
+              </a:rPr>
+              <a:t>「朝食も美味しかったです」</a:t>
+            </a:r>
+            <a:endParaRPr lang="en-US" sz="900" dirty="0"/>
+          </a:p>
+        </p:txBody>
+      </p:sp>
+      <p:sp>
+        <p:nvSpPr>
+          <p:cNvPr id="26" name="Shape 24"/>
+          <p:cNvSpPr/>
+          <p:nvPr/>
+        </p:nvSpPr>
+        <p:spPr>
+          <a:xfrm>
+            <a:off x="457200" y="2880360"/>
+            <a:ext cx="2651760" cy="1600200"/>
+          </a:xfrm>
+          <a:prstGeom prst="rect">
+            <a:avLst/>
+          </a:prstGeom>
+          <a:solidFill>
+            <a:srgbClr val="FFFFFF"/>
+          </a:solidFill>
+          <a:ln/>
+          <a:effectLst>
+            <a:outerShdw sx="100000" sy="100000" kx="0" ky="0" algn="bl" rotWithShape="0" blurRad="50800" dist="25400" dir="8100000">
+              <a:srgbClr val="000000">
+                <a:alpha val="10000"/>
+              </a:srgbClr>
+            </a:outerShdw>
+          </a:effectLst>
+        </p:spPr>
+      </p:sp>
+      <p:sp>
+        <p:nvSpPr>
+          <p:cNvPr id="27" name="Shape 25"/>
+          <p:cNvSpPr/>
+          <p:nvPr/>
+        </p:nvSpPr>
+        <p:spPr>
+          <a:xfrm>
+            <a:off x="457200" y="2880360"/>
+            <a:ext cx="54864" cy="1600200"/>
+          </a:xfrm>
+          <a:prstGeom prst="rect">
+            <a:avLst/>
+          </a:prstGeom>
+          <a:solidFill>
+            <a:srgbClr val="16A34A"/>
+          </a:solidFill>
+          <a:ln/>
+        </p:spPr>
+      </p:sp>
+      <p:sp>
+        <p:nvSpPr>
+          <p:cNvPr id="28" name="Shape 26"/>
+          <p:cNvSpPr/>
+          <p:nvPr/>
+        </p:nvSpPr>
+        <p:spPr>
+          <a:xfrm>
+            <a:off x="2286000" y="2953512"/>
+            <a:ext cx="658368" cy="228600"/>
+          </a:xfrm>
+          <a:prstGeom prst="rect">
+            <a:avLst/>
+          </a:prstGeom>
+          <a:solidFill>
+            <a:srgbClr val="DCFCE7"/>
+          </a:solidFill>
+          <a:ln/>
+        </p:spPr>
+      </p:sp>
+      <p:sp>
+        <p:nvSpPr>
+          <p:cNvPr id="29" name="Text 27"/>
+          <p:cNvSpPr/>
+          <p:nvPr/>
+        </p:nvSpPr>
+        <p:spPr>
+          <a:xfrm>
+            <a:off x="2286000" y="2953512"/>
+            <a:ext cx="658368" cy="228600"/>
+          </a:xfrm>
+          <a:prstGeom prst="rect">
+            <a:avLst/>
+          </a:prstGeom>
+          <a:noFill/>
+          <a:ln/>
+        </p:spPr>
+        <p:txBody>
+          <a:bodyPr wrap="square" lIns="0" tIns="0" rIns="0" bIns="0" rtlCol="0" anchor="ctr"/>
+          <a:lstStyle/>
+          <a:p>
+            <a:pPr algn="ctr" indent="0" marL="0">
+              <a:buNone/>
+            </a:pPr>
+            <a:r>
+              <a:rPr lang="en-US" sz="900" b="1" dirty="0">
+                <a:solidFill>
+                  <a:srgbClr val="16A34A"/>
+                </a:solidFill>
+                <a:latin typeface="Arial" pitchFamily="34" charset="0"/>
+                <a:ea typeface="Arial" pitchFamily="34" charset="-122"/>
+                <a:cs typeface="Arial" pitchFamily="34" charset="-120"/>
+              </a:rPr>
+              <a:t>20件+</a:t>
+            </a:r>
+            <a:endParaRPr lang="en-US" sz="900" dirty="0"/>
+          </a:p>
+        </p:txBody>
+      </p:sp>
+      <p:sp>
+        <p:nvSpPr>
+          <p:cNvPr id="30" name="Text 28"/>
+          <p:cNvSpPr/>
+          <p:nvPr/>
+        </p:nvSpPr>
+        <p:spPr>
+          <a:xfrm>
+            <a:off x="594360" y="2953512"/>
+            <a:ext cx="1645920" cy="274320"/>
+          </a:xfrm>
+          <a:prstGeom prst="rect">
+            <a:avLst/>
+          </a:prstGeom>
+          <a:noFill/>
+          <a:ln/>
+        </p:spPr>
+        <p:txBody>
+          <a:bodyPr wrap="square" lIns="0" tIns="0" rIns="0" bIns="0" rtlCol="0" anchor="ctr"/>
+          <a:lstStyle/>
+          <a:p>
+            <a:pPr indent="0" marL="0">
+              <a:buNone/>
+            </a:pPr>
+            <a:r>
+              <a:rPr lang="en-US" sz="1300" b="1" dirty="0">
+                <a:solidFill>
+                  <a:srgbClr val="1A2744"/>
+                </a:solidFill>
+                <a:latin typeface="Arial" pitchFamily="34" charset="0"/>
+                <a:ea typeface="Arial" pitchFamily="34" charset="-122"/>
+                <a:cs typeface="Arial" pitchFamily="34" charset="-120"/>
+              </a:rPr>
+              <a:t>快適さ・設備</a:t>
+            </a:r>
+            <a:endParaRPr lang="en-US" sz="1300" dirty="0"/>
+          </a:p>
+        </p:txBody>
+      </p:sp>
+      <p:sp>
+        <p:nvSpPr>
+          <p:cNvPr id="31" name="Text 29"/>
+          <p:cNvSpPr/>
+          <p:nvPr/>
+        </p:nvSpPr>
+        <p:spPr>
+          <a:xfrm>
+            <a:off x="594360" y="3246120"/>
+            <a:ext cx="2377440" cy="365760"/>
+          </a:xfrm>
+          <a:prstGeom prst="rect">
+            <a:avLst/>
+          </a:prstGeom>
+          <a:noFill/>
+          <a:ln/>
+        </p:spPr>
+        <p:txBody>
+          <a:bodyPr wrap="square" lIns="0" tIns="0" rIns="0" bIns="0" rtlCol="0" anchor="ctr"/>
+          <a:lstStyle/>
+          <a:p>
+            <a:pPr indent="0" marL="0">
+              <a:buNone/>
+            </a:pPr>
+            <a:r>
+              <a:rPr lang="en-US" sz="900" dirty="0">
+                <a:solidFill>
+                  <a:srgbClr val="64748B"/>
+                </a:solidFill>
+                <a:latin typeface="Arial" pitchFamily="34" charset="0"/>
+                <a:ea typeface="Arial" pitchFamily="34" charset="-122"/>
+                <a:cs typeface="Arial" pitchFamily="34" charset="-120"/>
+              </a:rPr>
+              <a:t>添い寝で食事なしの子供にもタオルを用意してくれた ダブルベッドの部屋なら広さがあってベビーカー+スーツケースを置い...</a:t>
+            </a:r>
+            <a:endParaRPr lang="en-US" sz="900" dirty="0"/>
+          </a:p>
+        </p:txBody>
+      </p:sp>
+      <p:sp>
+        <p:nvSpPr>
+          <p:cNvPr id="32" name="Text 30"/>
+          <p:cNvSpPr/>
+          <p:nvPr/>
+        </p:nvSpPr>
+        <p:spPr>
+          <a:xfrm>
+            <a:off x="594360" y="3657600"/>
             <a:ext cx="2377440" cy="640080"/>
           </a:xfrm>
           <a:prstGeom prst="rect">
@@ -11060,452 +11506,6 @@
       </p:sp>
       <p:sp>
         <p:nvSpPr>
-          <p:cNvPr id="19" name="Shape 17"/>
-          <p:cNvSpPr/>
-          <p:nvPr/>
-        </p:nvSpPr>
-        <p:spPr>
-          <a:xfrm>
-            <a:off x="6126480" y="1051560"/>
-            <a:ext cx="2651760" cy="1600200"/>
-          </a:xfrm>
-          <a:prstGeom prst="rect">
-            <a:avLst/>
-          </a:prstGeom>
-          <a:solidFill>
-            <a:srgbClr val="FFFFFF"/>
-          </a:solidFill>
-          <a:ln/>
-          <a:effectLst>
-            <a:outerShdw sx="100000" sy="100000" kx="0" ky="0" algn="bl" rotWithShape="0" blurRad="50800" dist="25400" dir="8100000">
-              <a:srgbClr val="000000">
-                <a:alpha val="10000"/>
-              </a:srgbClr>
-            </a:outerShdw>
-          </a:effectLst>
-        </p:spPr>
-      </p:sp>
-      <p:sp>
-        <p:nvSpPr>
-          <p:cNvPr id="20" name="Shape 18"/>
-          <p:cNvSpPr/>
-          <p:nvPr/>
-        </p:nvSpPr>
-        <p:spPr>
-          <a:xfrm>
-            <a:off x="6126480" y="1051560"/>
-            <a:ext cx="54864" cy="1600200"/>
-          </a:xfrm>
-          <a:prstGeom prst="rect">
-            <a:avLst/>
-          </a:prstGeom>
-          <a:solidFill>
-            <a:srgbClr val="16A34A"/>
-          </a:solidFill>
-          <a:ln/>
-        </p:spPr>
-      </p:sp>
-      <p:sp>
-        <p:nvSpPr>
-          <p:cNvPr id="21" name="Shape 19"/>
-          <p:cNvSpPr/>
-          <p:nvPr/>
-        </p:nvSpPr>
-        <p:spPr>
-          <a:xfrm>
-            <a:off x="7955280" y="1124712"/>
-            <a:ext cx="658368" cy="228600"/>
-          </a:xfrm>
-          <a:prstGeom prst="rect">
-            <a:avLst/>
-          </a:prstGeom>
-          <a:solidFill>
-            <a:srgbClr val="DCFCE7"/>
-          </a:solidFill>
-          <a:ln/>
-        </p:spPr>
-      </p:sp>
-      <p:sp>
-        <p:nvSpPr>
-          <p:cNvPr id="22" name="Text 20"/>
-          <p:cNvSpPr/>
-          <p:nvPr/>
-        </p:nvSpPr>
-        <p:spPr>
-          <a:xfrm>
-            <a:off x="7955280" y="1124712"/>
-            <a:ext cx="658368" cy="228600"/>
-          </a:xfrm>
-          <a:prstGeom prst="rect">
-            <a:avLst/>
-          </a:prstGeom>
-          <a:noFill/>
-          <a:ln/>
-        </p:spPr>
-        <p:txBody>
-          <a:bodyPr wrap="square" lIns="0" tIns="0" rIns="0" bIns="0" rtlCol="0" anchor="ctr"/>
-          <a:lstStyle/>
-          <a:p>
-            <a:pPr algn="ctr" indent="0" marL="0">
-              <a:buNone/>
-            </a:pPr>
-            <a:r>
-              <a:rPr lang="en-US" sz="900" b="1" dirty="0">
-                <a:solidFill>
-                  <a:srgbClr val="16A34A"/>
-                </a:solidFill>
-                <a:latin typeface="Arial" pitchFamily="34" charset="0"/>
-                <a:ea typeface="Arial" pitchFamily="34" charset="-122"/>
-                <a:cs typeface="Arial" pitchFamily="34" charset="-120"/>
-              </a:rPr>
-              <a:t>20件+</a:t>
-            </a:r>
-            <a:endParaRPr lang="en-US" sz="900" dirty="0"/>
-          </a:p>
-        </p:txBody>
-      </p:sp>
-      <p:sp>
-        <p:nvSpPr>
-          <p:cNvPr id="23" name="Text 21"/>
-          <p:cNvSpPr/>
-          <p:nvPr/>
-        </p:nvSpPr>
-        <p:spPr>
-          <a:xfrm>
-            <a:off x="6263640" y="1124712"/>
-            <a:ext cx="1645920" cy="274320"/>
-          </a:xfrm>
-          <a:prstGeom prst="rect">
-            <a:avLst/>
-          </a:prstGeom>
-          <a:noFill/>
-          <a:ln/>
-        </p:spPr>
-        <p:txBody>
-          <a:bodyPr wrap="square" lIns="0" tIns="0" rIns="0" bIns="0" rtlCol="0" anchor="ctr"/>
-          <a:lstStyle/>
-          <a:p>
-            <a:pPr indent="0" marL="0">
-              <a:buNone/>
-            </a:pPr>
-            <a:r>
-              <a:rPr lang="en-US" sz="1300" b="1" dirty="0">
-                <a:solidFill>
-                  <a:srgbClr val="1A2744"/>
-                </a:solidFill>
-                <a:latin typeface="Arial" pitchFamily="34" charset="0"/>
-                <a:ea typeface="Arial" pitchFamily="34" charset="-122"/>
-                <a:cs typeface="Arial" pitchFamily="34" charset="-120"/>
-              </a:rPr>
-              <a:t>朝食</a:t>
-            </a:r>
-            <a:endParaRPr lang="en-US" sz="1300" dirty="0"/>
-          </a:p>
-        </p:txBody>
-      </p:sp>
-      <p:sp>
-        <p:nvSpPr>
-          <p:cNvPr id="24" name="Text 22"/>
-          <p:cNvSpPr/>
-          <p:nvPr/>
-        </p:nvSpPr>
-        <p:spPr>
-          <a:xfrm>
-            <a:off x="6263640" y="1417320"/>
-            <a:ext cx="2377440" cy="365760"/>
-          </a:xfrm>
-          <a:prstGeom prst="rect">
-            <a:avLst/>
-          </a:prstGeom>
-          <a:noFill/>
-          <a:ln/>
-        </p:spPr>
-        <p:txBody>
-          <a:bodyPr wrap="square" lIns="0" tIns="0" rIns="0" bIns="0" rtlCol="0" anchor="ctr"/>
-          <a:lstStyle/>
-          <a:p>
-            <a:pPr indent="0" marL="0">
-              <a:buNone/>
-            </a:pPr>
-            <a:r>
-              <a:rPr lang="en-US" sz="900" dirty="0">
-                <a:solidFill>
-                  <a:srgbClr val="64748B"/>
-                </a:solidFill>
-                <a:latin typeface="Arial" pitchFamily="34" charset="0"/>
-                <a:ea typeface="Arial" pitchFamily="34" charset="-122"/>
-                <a:cs typeface="Arial" pitchFamily="34" charset="-120"/>
-              </a:rPr>
-              <a:t>朝食も選べて美味しかったです</a:t>
-            </a:r>
-            <a:endParaRPr lang="en-US" sz="900" dirty="0"/>
-          </a:p>
-        </p:txBody>
-      </p:sp>
-      <p:sp>
-        <p:nvSpPr>
-          <p:cNvPr id="25" name="Text 23"/>
-          <p:cNvSpPr/>
-          <p:nvPr/>
-        </p:nvSpPr>
-        <p:spPr>
-          <a:xfrm>
-            <a:off x="6263640" y="1828800"/>
-            <a:ext cx="2377440" cy="640080"/>
-          </a:xfrm>
-          <a:prstGeom prst="rect">
-            <a:avLst/>
-          </a:prstGeom>
-          <a:noFill/>
-          <a:ln/>
-        </p:spPr>
-        <p:txBody>
-          <a:bodyPr wrap="square" lIns="0" tIns="0" rIns="0" bIns="0" rtlCol="0" anchor="ctr"/>
-          <a:lstStyle/>
-          <a:p>
-            <a:pPr indent="0" marL="0">
-              <a:buNone/>
-            </a:pPr>
-            <a:r>
-              <a:rPr lang="en-US" sz="900" i="1" dirty="0">
-                <a:solidFill>
-                  <a:srgbClr val="3B7DD8"/>
-                </a:solidFill>
-                <a:latin typeface="Arial" pitchFamily="34" charset="0"/>
-                <a:ea typeface="Arial" pitchFamily="34" charset="-122"/>
-                <a:cs typeface="Arial" pitchFamily="34" charset="-120"/>
-              </a:rPr>
-              <a:t>「朝食も美味しかったです」</a:t>
-            </a:r>
-            <a:endParaRPr lang="en-US" sz="900" dirty="0"/>
-          </a:p>
-        </p:txBody>
-      </p:sp>
-      <p:sp>
-        <p:nvSpPr>
-          <p:cNvPr id="26" name="Shape 24"/>
-          <p:cNvSpPr/>
-          <p:nvPr/>
-        </p:nvSpPr>
-        <p:spPr>
-          <a:xfrm>
-            <a:off x="457200" y="2880360"/>
-            <a:ext cx="2651760" cy="1600200"/>
-          </a:xfrm>
-          <a:prstGeom prst="rect">
-            <a:avLst/>
-          </a:prstGeom>
-          <a:solidFill>
-            <a:srgbClr val="FFFFFF"/>
-          </a:solidFill>
-          <a:ln/>
-          <a:effectLst>
-            <a:outerShdw sx="100000" sy="100000" kx="0" ky="0" algn="bl" rotWithShape="0" blurRad="50800" dist="25400" dir="8100000">
-              <a:srgbClr val="000000">
-                <a:alpha val="10000"/>
-              </a:srgbClr>
-            </a:outerShdw>
-          </a:effectLst>
-        </p:spPr>
-      </p:sp>
-      <p:sp>
-        <p:nvSpPr>
-          <p:cNvPr id="27" name="Shape 25"/>
-          <p:cNvSpPr/>
-          <p:nvPr/>
-        </p:nvSpPr>
-        <p:spPr>
-          <a:xfrm>
-            <a:off x="457200" y="2880360"/>
-            <a:ext cx="54864" cy="1600200"/>
-          </a:xfrm>
-          <a:prstGeom prst="rect">
-            <a:avLst/>
-          </a:prstGeom>
-          <a:solidFill>
-            <a:srgbClr val="16A34A"/>
-          </a:solidFill>
-          <a:ln/>
-        </p:spPr>
-      </p:sp>
-      <p:sp>
-        <p:nvSpPr>
-          <p:cNvPr id="28" name="Shape 26"/>
-          <p:cNvSpPr/>
-          <p:nvPr/>
-        </p:nvSpPr>
-        <p:spPr>
-          <a:xfrm>
-            <a:off x="2286000" y="2953512"/>
-            <a:ext cx="658368" cy="228600"/>
-          </a:xfrm>
-          <a:prstGeom prst="rect">
-            <a:avLst/>
-          </a:prstGeom>
-          <a:solidFill>
-            <a:srgbClr val="DCFCE7"/>
-          </a:solidFill>
-          <a:ln/>
-        </p:spPr>
-      </p:sp>
-      <p:sp>
-        <p:nvSpPr>
-          <p:cNvPr id="29" name="Text 27"/>
-          <p:cNvSpPr/>
-          <p:nvPr/>
-        </p:nvSpPr>
-        <p:spPr>
-          <a:xfrm>
-            <a:off x="2286000" y="2953512"/>
-            <a:ext cx="658368" cy="228600"/>
-          </a:xfrm>
-          <a:prstGeom prst="rect">
-            <a:avLst/>
-          </a:prstGeom>
-          <a:noFill/>
-          <a:ln/>
-        </p:spPr>
-        <p:txBody>
-          <a:bodyPr wrap="square" lIns="0" tIns="0" rIns="0" bIns="0" rtlCol="0" anchor="ctr"/>
-          <a:lstStyle/>
-          <a:p>
-            <a:pPr algn="ctr" indent="0" marL="0">
-              <a:buNone/>
-            </a:pPr>
-            <a:r>
-              <a:rPr lang="en-US" sz="900" b="1" dirty="0">
-                <a:solidFill>
-                  <a:srgbClr val="16A34A"/>
-                </a:solidFill>
-                <a:latin typeface="Arial" pitchFamily="34" charset="0"/>
-                <a:ea typeface="Arial" pitchFamily="34" charset="-122"/>
-                <a:cs typeface="Arial" pitchFamily="34" charset="-120"/>
-              </a:rPr>
-              <a:t>20件+</a:t>
-            </a:r>
-            <a:endParaRPr lang="en-US" sz="900" dirty="0"/>
-          </a:p>
-        </p:txBody>
-      </p:sp>
-      <p:sp>
-        <p:nvSpPr>
-          <p:cNvPr id="30" name="Text 28"/>
-          <p:cNvSpPr/>
-          <p:nvPr/>
-        </p:nvSpPr>
-        <p:spPr>
-          <a:xfrm>
-            <a:off x="594360" y="2953512"/>
-            <a:ext cx="1645920" cy="274320"/>
-          </a:xfrm>
-          <a:prstGeom prst="rect">
-            <a:avLst/>
-          </a:prstGeom>
-          <a:noFill/>
-          <a:ln/>
-        </p:spPr>
-        <p:txBody>
-          <a:bodyPr wrap="square" lIns="0" tIns="0" rIns="0" bIns="0" rtlCol="0" anchor="ctr"/>
-          <a:lstStyle/>
-          <a:p>
-            <a:pPr indent="0" marL="0">
-              <a:buNone/>
-            </a:pPr>
-            <a:r>
-              <a:rPr lang="en-US" sz="1300" b="1" dirty="0">
-                <a:solidFill>
-                  <a:srgbClr val="1A2744"/>
-                </a:solidFill>
-                <a:latin typeface="Arial" pitchFamily="34" charset="0"/>
-                <a:ea typeface="Arial" pitchFamily="34" charset="-122"/>
-                <a:cs typeface="Arial" pitchFamily="34" charset="-120"/>
-              </a:rPr>
-              <a:t>快適さ・設備</a:t>
-            </a:r>
-            <a:endParaRPr lang="en-US" sz="1300" dirty="0"/>
-          </a:p>
-        </p:txBody>
-      </p:sp>
-      <p:sp>
-        <p:nvSpPr>
-          <p:cNvPr id="31" name="Text 29"/>
-          <p:cNvSpPr/>
-          <p:nvPr/>
-        </p:nvSpPr>
-        <p:spPr>
-          <a:xfrm>
-            <a:off x="594360" y="3246120"/>
-            <a:ext cx="2377440" cy="365760"/>
-          </a:xfrm>
-          <a:prstGeom prst="rect">
-            <a:avLst/>
-          </a:prstGeom>
-          <a:noFill/>
-          <a:ln/>
-        </p:spPr>
-        <p:txBody>
-          <a:bodyPr wrap="square" lIns="0" tIns="0" rIns="0" bIns="0" rtlCol="0" anchor="ctr"/>
-          <a:lstStyle/>
-          <a:p>
-            <a:pPr indent="0" marL="0">
-              <a:buNone/>
-            </a:pPr>
-            <a:r>
-              <a:rPr lang="en-US" sz="900" dirty="0">
-                <a:solidFill>
-                  <a:srgbClr val="64748B"/>
-                </a:solidFill>
-                <a:latin typeface="Arial" pitchFamily="34" charset="0"/>
-                <a:ea typeface="Arial" pitchFamily="34" charset="-122"/>
-                <a:cs typeface="Arial" pitchFamily="34" charset="-120"/>
-              </a:rPr>
-              <a:t>添い寝で食事なしの子供にもタオルを用意してくれた ダブルベッドの部屋なら広さがあってベビーカー+スーツケースを置い...</a:t>
-            </a:r>
-            <a:endParaRPr lang="en-US" sz="900" dirty="0"/>
-          </a:p>
-        </p:txBody>
-      </p:sp>
-      <p:sp>
-        <p:nvSpPr>
-          <p:cNvPr id="32" name="Text 30"/>
-          <p:cNvSpPr/>
-          <p:nvPr/>
-        </p:nvSpPr>
-        <p:spPr>
-          <a:xfrm>
-            <a:off x="594360" y="3657600"/>
-            <a:ext cx="2377440" cy="640080"/>
-          </a:xfrm>
-          <a:prstGeom prst="rect">
-            <a:avLst/>
-          </a:prstGeom>
-          <a:noFill/>
-          <a:ln/>
-        </p:spPr>
-        <p:txBody>
-          <a:bodyPr wrap="square" lIns="0" tIns="0" rIns="0" bIns="0" rtlCol="0" anchor="ctr"/>
-          <a:lstStyle/>
-          <a:p>
-            <a:pPr indent="0" marL="0">
-              <a:buNone/>
-            </a:pPr>
-            <a:r>
-              <a:rPr lang="en-US" sz="900" i="1" dirty="0">
-                <a:solidFill>
-                  <a:srgbClr val="3B7DD8"/>
-                </a:solidFill>
-                <a:latin typeface="Arial" pitchFamily="34" charset="0"/>
-                <a:ea typeface="Arial" pitchFamily="34" charset="-122"/>
-                <a:cs typeface="Arial" pitchFamily="34" charset="-120"/>
-              </a:rPr>
-              <a:t>「清潔感のあるお部屋で快適に過ごすことができました」</a:t>
-            </a:r>
-            <a:endParaRPr lang="en-US" sz="900" dirty="0"/>
-          </a:p>
-        </p:txBody>
-      </p:sp>
-      <p:sp>
-        <p:nvSpPr>
           <p:cNvPr id="33" name="Shape 31"/>
           <p:cNvSpPr/>
           <p:nvPr/>
@@ -11682,7 +11682,7 @@
                 <a:ea typeface="Arial" pitchFamily="34" charset="-122"/>
                 <a:cs typeface="Arial" pitchFamily="34" charset="-120"/>
               </a:rPr>
-              <a:t>店員さんのめんどくさそうに対応する系　カツラの支配人 店員さんのめんどくさそうに対応する系　カツラの支配人</a:t>
+              <a:t>フロントの女性の方が対応いただきましたが非常に心地よく丁寧でした、部屋も綺麗でゆっくりできました</a:t>
             </a:r>
             <a:endParaRPr lang="en-US" sz="900" dirty="0"/>
           </a:p>
@@ -11721,7 +11721,7 @@
                 <a:ea typeface="Arial" pitchFamily="34" charset="-122"/>
                 <a:cs typeface="Arial" pitchFamily="34" charset="-120"/>
               </a:rPr>
-              <a:t>「嬉しいサービスでした」</a:t>
+              <a:t>「店員さんのめんどくさそうに対応する系　カツラの支配人 店員さんのめんどくさそうに対応する系　カツラの支配人」</a:t>
             </a:r>
             <a:endParaRPr lang="en-US" sz="900" dirty="0"/>
           </a:p>

--- a/納品レポート/ホテル別レポート/keyakigate_口コミ分析レポート.pptx
+++ b/納品レポート/ホテル別レポート/keyakigate_口コミ分析レポート.pptx
@@ -211,13 +211,13 @@
                   <c:v>9.83</c:v>
                 </c:pt>
                 <c:pt idx="1">
-                  <c:v>9</c:v>
+                  <c:v>8.92</c:v>
                 </c:pt>
                 <c:pt idx="2">
                   <c:v>8.86</c:v>
                 </c:pt>
                 <c:pt idx="3">
-                  <c:v>8.62</c:v>
+                  <c:v>8.6</c:v>
                 </c:pt>
                 <c:pt idx="4">
                   <c:v>8.6</c:v>
@@ -566,10 +566,10 @@
               <c:numCache>
                 <c:ptCount val="3"/>
                 <c:pt idx="0">
-                  <c:v>80</c:v>
+                  <c:v>84</c:v>
                 </c:pt>
                 <c:pt idx="1">
-                  <c:v>9</c:v>
+                  <c:v>10</c:v>
                 </c:pt>
                 <c:pt idx="2">
                   <c:v>4</c:v>
@@ -730,7 +730,7 @@
             <c:bubble3D val="0"/>
             <c:spPr>
               <a:solidFill>
-                <a:srgbClr val="DC2626"/>
+                <a:srgbClr val="D4A843"/>
               </a:solidFill>
               <a:effectLst/>
             </c:spPr>
@@ -746,11 +746,22 @@
               <a:effectLst/>
             </c:spPr>
           </c:dPt>
+          <c:dPt>
+            <c:idx val="6"/>
+            <c:invertIfNegative val="0"/>
+            <c:bubble3D val="0"/>
+            <c:spPr>
+              <a:solidFill>
+                <a:srgbClr val="DC2626"/>
+              </a:solidFill>
+              <a:effectLst/>
+            </c:spPr>
+          </c:dPt>
           <c:cat>
             <c:multiLvlStrRef>
-              <c:f>Sheet1!$A$2:$A$7</c:f>
+              <c:f>Sheet1!$A$2:$A$8</c:f>
               <c:multiLvlStrCache>
-                <c:ptCount val="6"/>
+                <c:ptCount val="7"/>
                 <c:lvl>
                   <c:pt idx="0">
                     <c:v>10点</c:v>
@@ -762,12 +773,15 @@
                     <c:v>8点</c:v>
                   </c:pt>
                   <c:pt idx="3">
+                    <c:v>7点</c:v>
+                  </c:pt>
+                  <c:pt idx="4">
                     <c:v>6点</c:v>
                   </c:pt>
-                  <c:pt idx="4">
+                  <c:pt idx="5">
                     <c:v>4点</c:v>
                   </c:pt>
-                  <c:pt idx="5">
+                  <c:pt idx="6">
                     <c:v>2点</c:v>
                   </c:pt>
                 </c:lvl>
@@ -776,26 +790,29 @@
           </c:cat>
           <c:val>
             <c:numRef>
-              <c:f>Sheet1!$B$2:$B$7</c:f>
+              <c:f>Sheet1!$B$2:$B$8</c:f>
               <c:numCache>
                 <c:formatCode>General</c:formatCode>
-                <c:ptCount val="6"/>
+                <c:ptCount val="7"/>
                 <c:pt idx="0">
-                  <c:v>52</c:v>
+                  <c:v>53</c:v>
                 </c:pt>
                 <c:pt idx="1">
                   <c:v>5</c:v>
                 </c:pt>
                 <c:pt idx="2">
-                  <c:v>23</c:v>
+                  <c:v>26</c:v>
                 </c:pt>
                 <c:pt idx="3">
+                  <c:v>1</c:v>
+                </c:pt>
+                <c:pt idx="4">
                   <c:v>9</c:v>
                 </c:pt>
-                <c:pt idx="4">
+                <c:pt idx="5">
                   <c:v>1</c:v>
                 </c:pt>
-                <c:pt idx="5">
+                <c:pt idx="6">
                   <c:v>3</c:v>
                 </c:pt>
               </c:numCache>
@@ -2747,7 +2764,7 @@
                 <a:ea typeface="Arial" pitchFamily="34" charset="-122"/>
                 <a:cs typeface="Arial" pitchFamily="34" charset="-120"/>
               </a:rPr>
-              <a:t>レビュー総数：93件（6サイト）</a:t>
+              <a:t>レビュー総数：98件（6サイト）</a:t>
             </a:r>
             <a:endParaRPr lang="en-US" sz="1000" dirty="0"/>
           </a:p>
@@ -2767,7 +2784,7 @@
                 <a:ea typeface="Arial" pitchFamily="34" charset="-122"/>
                 <a:cs typeface="Arial" pitchFamily="34" charset="-120"/>
               </a:rPr>
-              <a:t>作成日：2026年3月24日</a:t>
+              <a:t>作成日：2026年3月25日</a:t>
             </a:r>
             <a:endParaRPr lang="en-US" sz="1000" dirty="0"/>
           </a:p>
@@ -3313,7 +3330,7 @@
                           <a:ea typeface="Arial" pitchFamily="34" charset="-122"/>
                           <a:cs typeface="Arial" pitchFamily="34" charset="-120"/>
                         </a:rPr>
-                        <a:t>8.74点</a:t>
+                        <a:t>8.71点</a:t>
                       </a:r>
                       <a:endParaRPr lang="en-US" sz="1000" dirty="0">
                         <a:latin typeface="Arial" charset="0"/>
@@ -3587,7 +3604,7 @@
                           <a:ea typeface="Arial" pitchFamily="34" charset="-122"/>
                           <a:cs typeface="Arial" pitchFamily="34" charset="-120"/>
                         </a:rPr>
-                        <a:t>86.0%</a:t>
+                        <a:t>85.7%</a:t>
                       </a:r>
                       <a:endParaRPr lang="en-US" sz="1000" dirty="0">
                         <a:latin typeface="Arial" charset="0"/>
@@ -3861,7 +3878,7 @@
                           <a:ea typeface="Arial" pitchFamily="34" charset="-122"/>
                           <a:cs typeface="Arial" pitchFamily="34" charset="-120"/>
                         </a:rPr>
-                        <a:t>4.3%</a:t>
+                        <a:t>4.1%</a:t>
                       </a:r>
                       <a:endParaRPr lang="en-US" sz="1000" dirty="0">
                         <a:latin typeface="Arial" charset="0"/>
@@ -5322,7 +5339,7 @@
                 <a:ea typeface="Arial" pitchFamily="34" charset="-122"/>
                 <a:cs typeface="Arial" pitchFamily="34" charset="-120"/>
               </a:rPr>
-              <a:t>8.74</a:t>
+              <a:t>8.71</a:t>
             </a:r>
             <a:endParaRPr lang="en-US" sz="3200" dirty="0"/>
           </a:p>
@@ -5447,7 +5464,7 @@
                 <a:ea typeface="Arial" pitchFamily="34" charset="-122"/>
                 <a:cs typeface="Arial" pitchFamily="34" charset="-120"/>
               </a:rPr>
-              <a:t>86.0%</a:t>
+              <a:t>85.7%</a:t>
             </a:r>
             <a:endParaRPr lang="en-US" sz="3200" dirty="0"/>
           </a:p>
@@ -5572,7 +5589,7 @@
                 <a:ea typeface="Arial" pitchFamily="34" charset="-122"/>
                 <a:cs typeface="Arial" pitchFamily="34" charset="-120"/>
               </a:rPr>
-              <a:t>4.3%</a:t>
+              <a:t>4.1%</a:t>
             </a:r>
             <a:endParaRPr lang="en-US" sz="3200" dirty="0"/>
           </a:p>
@@ -5697,7 +5714,7 @@
                 <a:ea typeface="Arial" pitchFamily="34" charset="-122"/>
                 <a:cs typeface="Arial" pitchFamily="34" charset="-120"/>
               </a:rPr>
-              <a:t>93件</a:t>
+              <a:t>98件</a:t>
             </a:r>
             <a:endParaRPr lang="en-US" sz="3200" dirty="0"/>
           </a:p>
@@ -5845,7 +5862,7 @@
                 <a:ea typeface="Arial" pitchFamily="34" charset="-122"/>
                 <a:cs typeface="Arial" pitchFamily="34" charset="-120"/>
               </a:rPr>
-              <a:t>  府中駅前にあるこのホテル、特筆する部分はないですが、駅前だという事が優れた点だと思います</a:t>
+              <a:t>  駅と直結している</a:t>
             </a:r>
             <a:endParaRPr lang="en-US" sz="1100" dirty="0"/>
           </a:p>
@@ -5885,7 +5902,7 @@
                 <a:ea typeface="Arial" pitchFamily="34" charset="-122"/>
                 <a:cs typeface="Arial" pitchFamily="34" charset="-120"/>
               </a:rPr>
-              <a:t>  フロントの女性の方が対応いただきましたが非常に心地よく丁寧でした、部屋も綺麗でゆっくりできました</a:t>
+              <a:t>  部屋は綺麗で、日本にしてはスペースがあった</a:t>
             </a:r>
             <a:endParaRPr lang="en-US" sz="1100" dirty="0"/>
           </a:p>
@@ -5905,7 +5922,7 @@
                 <a:ea typeface="Arial" pitchFamily="34" charset="-122"/>
                 <a:cs typeface="Arial" pitchFamily="34" charset="-120"/>
               </a:rPr>
-              <a:t>朝食 </a:t>
+              <a:t>快適さ・設備 </a:t>
             </a:r>
             <a:endParaRPr lang="en-US" sz="1100" dirty="0"/>
           </a:p>
@@ -5925,7 +5942,7 @@
                 <a:ea typeface="Arial" pitchFamily="34" charset="-122"/>
                 <a:cs typeface="Arial" pitchFamily="34" charset="-120"/>
               </a:rPr>
-              <a:t>  朝食も選べて美味しかったです</a:t>
+              <a:t>  クッションやベッドでの寝心地よかった</a:t>
             </a:r>
             <a:endParaRPr lang="en-US" sz="1100" dirty="0"/>
           </a:p>
@@ -6506,7 +6523,7 @@
                 <a:ea typeface="Arial" pitchFamily="34" charset="-122"/>
                 <a:cs typeface="Arial" pitchFamily="34" charset="-120"/>
               </a:rPr>
-              <a:t>8.74</a:t>
+              <a:t>8.71</a:t>
             </a:r>
             <a:endParaRPr lang="en-US" sz="3200" dirty="0"/>
           </a:p>
@@ -6631,7 +6648,7 @@
                 <a:ea typeface="Arial" pitchFamily="34" charset="-122"/>
                 <a:cs typeface="Arial" pitchFamily="34" charset="-120"/>
               </a:rPr>
-              <a:t>86.0%</a:t>
+              <a:t>85.7%</a:t>
             </a:r>
             <a:endParaRPr lang="en-US" sz="3200" dirty="0"/>
           </a:p>
@@ -6756,7 +6773,7 @@
                 <a:ea typeface="Arial" pitchFamily="34" charset="-122"/>
                 <a:cs typeface="Arial" pitchFamily="34" charset="-120"/>
               </a:rPr>
-              <a:t>4.3%</a:t>
+              <a:t>4.1%</a:t>
             </a:r>
             <a:endParaRPr lang="en-US" sz="3200" dirty="0"/>
           </a:p>
@@ -6881,7 +6898,7 @@
                 <a:ea typeface="Arial" pitchFamily="34" charset="-122"/>
                 <a:cs typeface="Arial" pitchFamily="34" charset="-120"/>
               </a:rPr>
-              <a:t>93件</a:t>
+              <a:t>98件</a:t>
             </a:r>
             <a:endParaRPr lang="en-US" sz="3200" dirty="0"/>
           </a:p>
@@ -8202,7 +8219,7 @@
                           <a:ea typeface="Arial" pitchFamily="34" charset="-122"/>
                           <a:cs typeface="Arial" pitchFamily="34" charset="-120"/>
                         </a:rPr>
-                        <a:t>34</a:t>
+                        <a:t>37</a:t>
                       </a:r>
                       <a:endParaRPr lang="en-US" sz="900" dirty="0">
                         <a:latin typeface="Arial" charset="0"/>
@@ -8270,7 +8287,7 @@
                           <a:ea typeface="Arial" pitchFamily="34" charset="-122"/>
                           <a:cs typeface="Arial" pitchFamily="34" charset="-120"/>
                         </a:rPr>
-                        <a:t>4.5</a:t>
+                        <a:t>4.46</a:t>
                       </a:r>
                       <a:endParaRPr lang="en-US" sz="900" dirty="0">
                         <a:latin typeface="Arial" charset="0"/>
@@ -8406,7 +8423,7 @@
                           <a:ea typeface="Arial" pitchFamily="34" charset="-122"/>
                           <a:cs typeface="Arial" pitchFamily="34" charset="-120"/>
                         </a:rPr>
-                        <a:t>9</a:t>
+                        <a:t>8.92</a:t>
                       </a:r>
                       <a:endParaRPr lang="en-US" sz="900" dirty="0">
                         <a:latin typeface="Arial" charset="0"/>
@@ -8886,7 +8903,7 @@
                           <a:ea typeface="Arial" pitchFamily="34" charset="-122"/>
                           <a:cs typeface="Arial" pitchFamily="34" charset="-120"/>
                         </a:rPr>
-                        <a:t>13</a:t>
+                        <a:t>15</a:t>
                       </a:r>
                       <a:endParaRPr lang="en-US" sz="900" dirty="0">
                         <a:latin typeface="Arial" charset="0"/>
@@ -8954,7 +8971,7 @@
                           <a:ea typeface="Arial" pitchFamily="34" charset="-122"/>
                           <a:cs typeface="Arial" pitchFamily="34" charset="-120"/>
                         </a:rPr>
-                        <a:t>8.62</a:t>
+                        <a:t>8.6</a:t>
                       </a:r>
                       <a:endParaRPr lang="en-US" sz="900" dirty="0">
                         <a:latin typeface="Arial" charset="0"/>
@@ -9090,7 +9107,7 @@
                           <a:ea typeface="Arial" pitchFamily="34" charset="-122"/>
                           <a:cs typeface="Arial" pitchFamily="34" charset="-120"/>
                         </a:rPr>
-                        <a:t>8.62</a:t>
+                        <a:t>8.6</a:t>
                       </a:r>
                       <a:endParaRPr lang="en-US" sz="900" dirty="0">
                         <a:latin typeface="Arial" charset="0"/>
@@ -10182,7 +10199,7 @@
                 <a:ea typeface="Arial" pitchFamily="34" charset="-122"/>
                 <a:cs typeface="Arial" pitchFamily="34" charset="-120"/>
               </a:rPr>
-              <a:t>80件（86.0%）</a:t>
+              <a:t>84件（85.7%）</a:t>
             </a:r>
             <a:endParaRPr lang="en-US" sz="1100" dirty="0"/>
           </a:p>
@@ -10280,7 +10297,7 @@
                 <a:ea typeface="Arial" pitchFamily="34" charset="-122"/>
                 <a:cs typeface="Arial" pitchFamily="34" charset="-120"/>
               </a:rPr>
-              <a:t>9件（9.7%）</a:t>
+              <a:t>10件（10.2%）</a:t>
             </a:r>
             <a:endParaRPr lang="en-US" sz="1100" dirty="0"/>
           </a:p>
@@ -10378,7 +10395,7 @@
                 <a:ea typeface="Arial" pitchFamily="34" charset="-122"/>
                 <a:cs typeface="Arial" pitchFamily="34" charset="-120"/>
               </a:rPr>
-              <a:t>4件（4.3%）</a:t>
+              <a:t>4件（4.1%）</a:t>
             </a:r>
             <a:endParaRPr lang="en-US" sz="1100" dirty="0"/>
           </a:p>
@@ -10790,7 +10807,7 @@
                 <a:ea typeface="Arial" pitchFamily="34" charset="-122"/>
                 <a:cs typeface="Arial" pitchFamily="34" charset="-120"/>
               </a:rPr>
-              <a:t>府中駅前にあるこのホテル、特筆する部分はないですが、駅前だという事が優れた点だと思います</a:t>
+              <a:t>駅と直結している</a:t>
             </a:r>
             <a:endParaRPr lang="en-US" sz="900" dirty="0"/>
           </a:p>
@@ -10829,7 +10846,7 @@
                 <a:ea typeface="Arial" pitchFamily="34" charset="-122"/>
                 <a:cs typeface="Arial" pitchFamily="34" charset="-120"/>
               </a:rPr>
-              <a:t>「添い寝で食事なしの子供にもタオルを用意してくれた ダブルベッドの部屋なら広さがあってベビーカー+スーツケースを置い...」</a:t>
+              <a:t>「府中駅すぐの便利なホテルでしたし、部屋もきれいです」</a:t>
             </a:r>
             <a:endParaRPr lang="en-US" sz="900" dirty="0"/>
           </a:p>
@@ -11013,7 +11030,7 @@
                 <a:ea typeface="Arial" pitchFamily="34" charset="-122"/>
                 <a:cs typeface="Arial" pitchFamily="34" charset="-120"/>
               </a:rPr>
-              <a:t>フロントの女性の方が対応いただきましたが非常に心地よく丁寧でした、部屋も綺麗でゆっくりできました</a:t>
+              <a:t>部屋は綺麗で、日本にしてはスペースがあった</a:t>
             </a:r>
             <a:endParaRPr lang="en-US" sz="900" dirty="0"/>
           </a:p>
@@ -11052,7 +11069,7 @@
                 <a:ea typeface="Arial" pitchFamily="34" charset="-122"/>
                 <a:cs typeface="Arial" pitchFamily="34" charset="-120"/>
               </a:rPr>
-              <a:t>「清潔感あるホテルで、落ち着きある雰囲気がとても気に入っています」</a:t>
+              <a:t>「府中駅すぐの便利なホテルでしたし、部屋もきれいです」</a:t>
             </a:r>
             <a:endParaRPr lang="en-US" sz="900" dirty="0"/>
           </a:p>
@@ -11197,6 +11214,229 @@
                 <a:ea typeface="Arial" pitchFamily="34" charset="-122"/>
                 <a:cs typeface="Arial" pitchFamily="34" charset="-120"/>
               </a:rPr>
+              <a:t>快適さ・設備</a:t>
+            </a:r>
+            <a:endParaRPr lang="en-US" sz="1300" dirty="0"/>
+          </a:p>
+        </p:txBody>
+      </p:sp>
+      <p:sp>
+        <p:nvSpPr>
+          <p:cNvPr id="24" name="Text 22"/>
+          <p:cNvSpPr/>
+          <p:nvPr/>
+        </p:nvSpPr>
+        <p:spPr>
+          <a:xfrm>
+            <a:off x="6263640" y="1417320"/>
+            <a:ext cx="2377440" cy="365760"/>
+          </a:xfrm>
+          <a:prstGeom prst="rect">
+            <a:avLst/>
+          </a:prstGeom>
+          <a:noFill/>
+          <a:ln/>
+        </p:spPr>
+        <p:txBody>
+          <a:bodyPr wrap="square" lIns="0" tIns="0" rIns="0" bIns="0" rtlCol="0" anchor="ctr"/>
+          <a:lstStyle/>
+          <a:p>
+            <a:pPr indent="0" marL="0">
+              <a:buNone/>
+            </a:pPr>
+            <a:r>
+              <a:rPr lang="en-US" sz="900" dirty="0">
+                <a:solidFill>
+                  <a:srgbClr val="64748B"/>
+                </a:solidFill>
+                <a:latin typeface="Arial" pitchFamily="34" charset="0"/>
+                <a:ea typeface="Arial" pitchFamily="34" charset="-122"/>
+                <a:cs typeface="Arial" pitchFamily="34" charset="-120"/>
+              </a:rPr>
+              <a:t>クッションやベッドでの寝心地よかった</a:t>
+            </a:r>
+            <a:endParaRPr lang="en-US" sz="900" dirty="0"/>
+          </a:p>
+        </p:txBody>
+      </p:sp>
+      <p:sp>
+        <p:nvSpPr>
+          <p:cNvPr id="25" name="Text 23"/>
+          <p:cNvSpPr/>
+          <p:nvPr/>
+        </p:nvSpPr>
+        <p:spPr>
+          <a:xfrm>
+            <a:off x="6263640" y="1828800"/>
+            <a:ext cx="2377440" cy="640080"/>
+          </a:xfrm>
+          <a:prstGeom prst="rect">
+            <a:avLst/>
+          </a:prstGeom>
+          <a:noFill/>
+          <a:ln/>
+        </p:spPr>
+        <p:txBody>
+          <a:bodyPr wrap="square" lIns="0" tIns="0" rIns="0" bIns="0" rtlCol="0" anchor="ctr"/>
+          <a:lstStyle/>
+          <a:p>
+            <a:pPr indent="0" marL="0">
+              <a:buNone/>
+            </a:pPr>
+            <a:r>
+              <a:rPr lang="en-US" sz="900" i="1" dirty="0">
+                <a:solidFill>
+                  <a:srgbClr val="3B7DD8"/>
+                </a:solidFill>
+                <a:latin typeface="Arial" pitchFamily="34" charset="0"/>
+                <a:ea typeface="Arial" pitchFamily="34" charset="-122"/>
+                <a:cs typeface="Arial" pitchFamily="34" charset="-120"/>
+              </a:rPr>
+              <a:t>「ただ、Wi-Fiは改善してください」</a:t>
+            </a:r>
+            <a:endParaRPr lang="en-US" sz="900" dirty="0"/>
+          </a:p>
+        </p:txBody>
+      </p:sp>
+      <p:sp>
+        <p:nvSpPr>
+          <p:cNvPr id="26" name="Shape 24"/>
+          <p:cNvSpPr/>
+          <p:nvPr/>
+        </p:nvSpPr>
+        <p:spPr>
+          <a:xfrm>
+            <a:off x="457200" y="2880360"/>
+            <a:ext cx="2651760" cy="1600200"/>
+          </a:xfrm>
+          <a:prstGeom prst="rect">
+            <a:avLst/>
+          </a:prstGeom>
+          <a:solidFill>
+            <a:srgbClr val="FFFFFF"/>
+          </a:solidFill>
+          <a:ln/>
+          <a:effectLst>
+            <a:outerShdw sx="100000" sy="100000" kx="0" ky="0" algn="bl" rotWithShape="0" blurRad="50800" dist="25400" dir="8100000">
+              <a:srgbClr val="000000">
+                <a:alpha val="10000"/>
+              </a:srgbClr>
+            </a:outerShdw>
+          </a:effectLst>
+        </p:spPr>
+      </p:sp>
+      <p:sp>
+        <p:nvSpPr>
+          <p:cNvPr id="27" name="Shape 25"/>
+          <p:cNvSpPr/>
+          <p:nvPr/>
+        </p:nvSpPr>
+        <p:spPr>
+          <a:xfrm>
+            <a:off x="457200" y="2880360"/>
+            <a:ext cx="54864" cy="1600200"/>
+          </a:xfrm>
+          <a:prstGeom prst="rect">
+            <a:avLst/>
+          </a:prstGeom>
+          <a:solidFill>
+            <a:srgbClr val="16A34A"/>
+          </a:solidFill>
+          <a:ln/>
+        </p:spPr>
+      </p:sp>
+      <p:sp>
+        <p:nvSpPr>
+          <p:cNvPr id="28" name="Shape 26"/>
+          <p:cNvSpPr/>
+          <p:nvPr/>
+        </p:nvSpPr>
+        <p:spPr>
+          <a:xfrm>
+            <a:off x="2286000" y="2953512"/>
+            <a:ext cx="658368" cy="228600"/>
+          </a:xfrm>
+          <a:prstGeom prst="rect">
+            <a:avLst/>
+          </a:prstGeom>
+          <a:solidFill>
+            <a:srgbClr val="DCFCE7"/>
+          </a:solidFill>
+          <a:ln/>
+        </p:spPr>
+      </p:sp>
+      <p:sp>
+        <p:nvSpPr>
+          <p:cNvPr id="29" name="Text 27"/>
+          <p:cNvSpPr/>
+          <p:nvPr/>
+        </p:nvSpPr>
+        <p:spPr>
+          <a:xfrm>
+            <a:off x="2286000" y="2953512"/>
+            <a:ext cx="658368" cy="228600"/>
+          </a:xfrm>
+          <a:prstGeom prst="rect">
+            <a:avLst/>
+          </a:prstGeom>
+          <a:noFill/>
+          <a:ln/>
+        </p:spPr>
+        <p:txBody>
+          <a:bodyPr wrap="square" lIns="0" tIns="0" rIns="0" bIns="0" rtlCol="0" anchor="ctr"/>
+          <a:lstStyle/>
+          <a:p>
+            <a:pPr algn="ctr" indent="0" marL="0">
+              <a:buNone/>
+            </a:pPr>
+            <a:r>
+              <a:rPr lang="en-US" sz="900" b="1" dirty="0">
+                <a:solidFill>
+                  <a:srgbClr val="16A34A"/>
+                </a:solidFill>
+                <a:latin typeface="Arial" pitchFamily="34" charset="0"/>
+                <a:ea typeface="Arial" pitchFamily="34" charset="-122"/>
+                <a:cs typeface="Arial" pitchFamily="34" charset="-120"/>
+              </a:rPr>
+              <a:t>20件+</a:t>
+            </a:r>
+            <a:endParaRPr lang="en-US" sz="900" dirty="0"/>
+          </a:p>
+        </p:txBody>
+      </p:sp>
+      <p:sp>
+        <p:nvSpPr>
+          <p:cNvPr id="30" name="Text 28"/>
+          <p:cNvSpPr/>
+          <p:nvPr/>
+        </p:nvSpPr>
+        <p:spPr>
+          <a:xfrm>
+            <a:off x="594360" y="2953512"/>
+            <a:ext cx="1645920" cy="274320"/>
+          </a:xfrm>
+          <a:prstGeom prst="rect">
+            <a:avLst/>
+          </a:prstGeom>
+          <a:noFill/>
+          <a:ln/>
+        </p:spPr>
+        <p:txBody>
+          <a:bodyPr wrap="square" lIns="0" tIns="0" rIns="0" bIns="0" rtlCol="0" anchor="ctr"/>
+          <a:lstStyle/>
+          <a:p>
+            <a:pPr indent="0" marL="0">
+              <a:buNone/>
+            </a:pPr>
+            <a:r>
+              <a:rPr lang="en-US" sz="1300" b="1" dirty="0">
+                <a:solidFill>
+                  <a:srgbClr val="1A2744"/>
+                </a:solidFill>
+                <a:latin typeface="Arial" pitchFamily="34" charset="0"/>
+                <a:ea typeface="Arial" pitchFamily="34" charset="-122"/>
+                <a:cs typeface="Arial" pitchFamily="34" charset="-120"/>
+              </a:rPr>
               <a:t>朝食</a:t>
             </a:r>
             <a:endParaRPr lang="en-US" sz="1300" dirty="0"/>
@@ -11205,13 +11445,13 @@
       </p:sp>
       <p:sp>
         <p:nvSpPr>
-          <p:cNvPr id="24" name="Text 22"/>
-          <p:cNvSpPr/>
-          <p:nvPr/>
-        </p:nvSpPr>
-        <p:spPr>
-          <a:xfrm>
-            <a:off x="6263640" y="1417320"/>
+          <p:cNvPr id="31" name="Text 29"/>
+          <p:cNvSpPr/>
+          <p:nvPr/>
+        </p:nvSpPr>
+        <p:spPr>
+          <a:xfrm>
+            <a:off x="594360" y="3246120"/>
             <a:ext cx="2377440" cy="365760"/>
           </a:xfrm>
           <a:prstGeom prst="rect">
@@ -11244,13 +11484,13 @@
       </p:sp>
       <p:sp>
         <p:nvSpPr>
-          <p:cNvPr id="25" name="Text 23"/>
-          <p:cNvSpPr/>
-          <p:nvPr/>
-        </p:nvSpPr>
-        <p:spPr>
-          <a:xfrm>
-            <a:off x="6263640" y="1828800"/>
+          <p:cNvPr id="32" name="Text 30"/>
+          <p:cNvSpPr/>
+          <p:nvPr/>
+        </p:nvSpPr>
+        <p:spPr>
+          <a:xfrm>
+            <a:off x="594360" y="3657600"/>
             <a:ext cx="2377440" cy="640080"/>
           </a:xfrm>
           <a:prstGeom prst="rect">
@@ -11283,13 +11523,13 @@
       </p:sp>
       <p:sp>
         <p:nvSpPr>
-          <p:cNvPr id="26" name="Shape 24"/>
-          <p:cNvSpPr/>
-          <p:nvPr/>
-        </p:nvSpPr>
-        <p:spPr>
-          <a:xfrm>
-            <a:off x="457200" y="2880360"/>
+          <p:cNvPr id="33" name="Shape 31"/>
+          <p:cNvSpPr/>
+          <p:nvPr/>
+        </p:nvSpPr>
+        <p:spPr>
+          <a:xfrm>
+            <a:off x="3291840" y="2880360"/>
             <a:ext cx="2651760" cy="1600200"/>
           </a:xfrm>
           <a:prstGeom prst="rect">
@@ -11310,13 +11550,13 @@
       </p:sp>
       <p:sp>
         <p:nvSpPr>
-          <p:cNvPr id="27" name="Shape 25"/>
-          <p:cNvSpPr/>
-          <p:nvPr/>
-        </p:nvSpPr>
-        <p:spPr>
-          <a:xfrm>
-            <a:off x="457200" y="2880360"/>
+          <p:cNvPr id="34" name="Shape 32"/>
+          <p:cNvSpPr/>
+          <p:nvPr/>
+        </p:nvSpPr>
+        <p:spPr>
+          <a:xfrm>
+            <a:off x="3291840" y="2880360"/>
             <a:ext cx="54864" cy="1600200"/>
           </a:xfrm>
           <a:prstGeom prst="rect">
@@ -11330,13 +11570,13 @@
       </p:sp>
       <p:sp>
         <p:nvSpPr>
-          <p:cNvPr id="28" name="Shape 26"/>
-          <p:cNvSpPr/>
-          <p:nvPr/>
-        </p:nvSpPr>
-        <p:spPr>
-          <a:xfrm>
-            <a:off x="2286000" y="2953512"/>
+          <p:cNvPr id="35" name="Shape 33"/>
+          <p:cNvSpPr/>
+          <p:nvPr/>
+        </p:nvSpPr>
+        <p:spPr>
+          <a:xfrm>
+            <a:off x="5120640" y="2953512"/>
             <a:ext cx="658368" cy="228600"/>
           </a:xfrm>
           <a:prstGeom prst="rect">
@@ -11350,13 +11590,13 @@
       </p:sp>
       <p:sp>
         <p:nvSpPr>
-          <p:cNvPr id="29" name="Text 27"/>
-          <p:cNvSpPr/>
-          <p:nvPr/>
-        </p:nvSpPr>
-        <p:spPr>
-          <a:xfrm>
-            <a:off x="2286000" y="2953512"/>
+          <p:cNvPr id="36" name="Text 34"/>
+          <p:cNvSpPr/>
+          <p:nvPr/>
+        </p:nvSpPr>
+        <p:spPr>
+          <a:xfrm>
+            <a:off x="5120640" y="2953512"/>
             <a:ext cx="658368" cy="228600"/>
           </a:xfrm>
           <a:prstGeom prst="rect">
@@ -11389,229 +11629,6 @@
       </p:sp>
       <p:sp>
         <p:nvSpPr>
-          <p:cNvPr id="30" name="Text 28"/>
-          <p:cNvSpPr/>
-          <p:nvPr/>
-        </p:nvSpPr>
-        <p:spPr>
-          <a:xfrm>
-            <a:off x="594360" y="2953512"/>
-            <a:ext cx="1645920" cy="274320"/>
-          </a:xfrm>
-          <a:prstGeom prst="rect">
-            <a:avLst/>
-          </a:prstGeom>
-          <a:noFill/>
-          <a:ln/>
-        </p:spPr>
-        <p:txBody>
-          <a:bodyPr wrap="square" lIns="0" tIns="0" rIns="0" bIns="0" rtlCol="0" anchor="ctr"/>
-          <a:lstStyle/>
-          <a:p>
-            <a:pPr indent="0" marL="0">
-              <a:buNone/>
-            </a:pPr>
-            <a:r>
-              <a:rPr lang="en-US" sz="1300" b="1" dirty="0">
-                <a:solidFill>
-                  <a:srgbClr val="1A2744"/>
-                </a:solidFill>
-                <a:latin typeface="Arial" pitchFamily="34" charset="0"/>
-                <a:ea typeface="Arial" pitchFamily="34" charset="-122"/>
-                <a:cs typeface="Arial" pitchFamily="34" charset="-120"/>
-              </a:rPr>
-              <a:t>快適さ・設備</a:t>
-            </a:r>
-            <a:endParaRPr lang="en-US" sz="1300" dirty="0"/>
-          </a:p>
-        </p:txBody>
-      </p:sp>
-      <p:sp>
-        <p:nvSpPr>
-          <p:cNvPr id="31" name="Text 29"/>
-          <p:cNvSpPr/>
-          <p:nvPr/>
-        </p:nvSpPr>
-        <p:spPr>
-          <a:xfrm>
-            <a:off x="594360" y="3246120"/>
-            <a:ext cx="2377440" cy="365760"/>
-          </a:xfrm>
-          <a:prstGeom prst="rect">
-            <a:avLst/>
-          </a:prstGeom>
-          <a:noFill/>
-          <a:ln/>
-        </p:spPr>
-        <p:txBody>
-          <a:bodyPr wrap="square" lIns="0" tIns="0" rIns="0" bIns="0" rtlCol="0" anchor="ctr"/>
-          <a:lstStyle/>
-          <a:p>
-            <a:pPr indent="0" marL="0">
-              <a:buNone/>
-            </a:pPr>
-            <a:r>
-              <a:rPr lang="en-US" sz="900" dirty="0">
-                <a:solidFill>
-                  <a:srgbClr val="64748B"/>
-                </a:solidFill>
-                <a:latin typeface="Arial" pitchFamily="34" charset="0"/>
-                <a:ea typeface="Arial" pitchFamily="34" charset="-122"/>
-                <a:cs typeface="Arial" pitchFamily="34" charset="-120"/>
-              </a:rPr>
-              <a:t>添い寝で食事なしの子供にもタオルを用意してくれた ダブルベッドの部屋なら広さがあってベビーカー+スーツケースを置い...</a:t>
-            </a:r>
-            <a:endParaRPr lang="en-US" sz="900" dirty="0"/>
-          </a:p>
-        </p:txBody>
-      </p:sp>
-      <p:sp>
-        <p:nvSpPr>
-          <p:cNvPr id="32" name="Text 30"/>
-          <p:cNvSpPr/>
-          <p:nvPr/>
-        </p:nvSpPr>
-        <p:spPr>
-          <a:xfrm>
-            <a:off x="594360" y="3657600"/>
-            <a:ext cx="2377440" cy="640080"/>
-          </a:xfrm>
-          <a:prstGeom prst="rect">
-            <a:avLst/>
-          </a:prstGeom>
-          <a:noFill/>
-          <a:ln/>
-        </p:spPr>
-        <p:txBody>
-          <a:bodyPr wrap="square" lIns="0" tIns="0" rIns="0" bIns="0" rtlCol="0" anchor="ctr"/>
-          <a:lstStyle/>
-          <a:p>
-            <a:pPr indent="0" marL="0">
-              <a:buNone/>
-            </a:pPr>
-            <a:r>
-              <a:rPr lang="en-US" sz="900" i="1" dirty="0">
-                <a:solidFill>
-                  <a:srgbClr val="3B7DD8"/>
-                </a:solidFill>
-                <a:latin typeface="Arial" pitchFamily="34" charset="0"/>
-                <a:ea typeface="Arial" pitchFamily="34" charset="-122"/>
-                <a:cs typeface="Arial" pitchFamily="34" charset="-120"/>
-              </a:rPr>
-              <a:t>「清潔感のあるお部屋で快適に過ごすことができました」</a:t>
-            </a:r>
-            <a:endParaRPr lang="en-US" sz="900" dirty="0"/>
-          </a:p>
-        </p:txBody>
-      </p:sp>
-      <p:sp>
-        <p:nvSpPr>
-          <p:cNvPr id="33" name="Shape 31"/>
-          <p:cNvSpPr/>
-          <p:nvPr/>
-        </p:nvSpPr>
-        <p:spPr>
-          <a:xfrm>
-            <a:off x="3291840" y="2880360"/>
-            <a:ext cx="2651760" cy="1600200"/>
-          </a:xfrm>
-          <a:prstGeom prst="rect">
-            <a:avLst/>
-          </a:prstGeom>
-          <a:solidFill>
-            <a:srgbClr val="FFFFFF"/>
-          </a:solidFill>
-          <a:ln/>
-          <a:effectLst>
-            <a:outerShdw sx="100000" sy="100000" kx="0" ky="0" algn="bl" rotWithShape="0" blurRad="50800" dist="25400" dir="8100000">
-              <a:srgbClr val="000000">
-                <a:alpha val="10000"/>
-              </a:srgbClr>
-            </a:outerShdw>
-          </a:effectLst>
-        </p:spPr>
-      </p:sp>
-      <p:sp>
-        <p:nvSpPr>
-          <p:cNvPr id="34" name="Shape 32"/>
-          <p:cNvSpPr/>
-          <p:nvPr/>
-        </p:nvSpPr>
-        <p:spPr>
-          <a:xfrm>
-            <a:off x="3291840" y="2880360"/>
-            <a:ext cx="54864" cy="1600200"/>
-          </a:xfrm>
-          <a:prstGeom prst="rect">
-            <a:avLst/>
-          </a:prstGeom>
-          <a:solidFill>
-            <a:srgbClr val="16A34A"/>
-          </a:solidFill>
-          <a:ln/>
-        </p:spPr>
-      </p:sp>
-      <p:sp>
-        <p:nvSpPr>
-          <p:cNvPr id="35" name="Shape 33"/>
-          <p:cNvSpPr/>
-          <p:nvPr/>
-        </p:nvSpPr>
-        <p:spPr>
-          <a:xfrm>
-            <a:off x="5120640" y="2953512"/>
-            <a:ext cx="658368" cy="228600"/>
-          </a:xfrm>
-          <a:prstGeom prst="rect">
-            <a:avLst/>
-          </a:prstGeom>
-          <a:solidFill>
-            <a:srgbClr val="DCFCE7"/>
-          </a:solidFill>
-          <a:ln/>
-        </p:spPr>
-      </p:sp>
-      <p:sp>
-        <p:nvSpPr>
-          <p:cNvPr id="36" name="Text 34"/>
-          <p:cNvSpPr/>
-          <p:nvPr/>
-        </p:nvSpPr>
-        <p:spPr>
-          <a:xfrm>
-            <a:off x="5120640" y="2953512"/>
-            <a:ext cx="658368" cy="228600"/>
-          </a:xfrm>
-          <a:prstGeom prst="rect">
-            <a:avLst/>
-          </a:prstGeom>
-          <a:noFill/>
-          <a:ln/>
-        </p:spPr>
-        <p:txBody>
-          <a:bodyPr wrap="square" lIns="0" tIns="0" rIns="0" bIns="0" rtlCol="0" anchor="ctr"/>
-          <a:lstStyle/>
-          <a:p>
-            <a:pPr algn="ctr" indent="0" marL="0">
-              <a:buNone/>
-            </a:pPr>
-            <a:r>
-              <a:rPr lang="en-US" sz="900" b="1" dirty="0">
-                <a:solidFill>
-                  <a:srgbClr val="16A34A"/>
-                </a:solidFill>
-                <a:latin typeface="Arial" pitchFamily="34" charset="0"/>
-                <a:ea typeface="Arial" pitchFamily="34" charset="-122"/>
-                <a:cs typeface="Arial" pitchFamily="34" charset="-120"/>
-              </a:rPr>
-              <a:t>10件+</a:t>
-            </a:r>
-            <a:endParaRPr lang="en-US" sz="900" dirty="0"/>
-          </a:p>
-        </p:txBody>
-      </p:sp>
-      <p:sp>
-        <p:nvSpPr>
           <p:cNvPr id="37" name="Text 35"/>
           <p:cNvSpPr/>
           <p:nvPr/>
@@ -11682,7 +11699,7 @@
                 <a:ea typeface="Arial" pitchFamily="34" charset="-122"/>
                 <a:cs typeface="Arial" pitchFamily="34" charset="-120"/>
               </a:rPr>
-              <a:t>フロントの女性の方が対応いただきましたが非常に心地よく丁寧でした、部屋も綺麗でゆっくりできました</a:t>
+              <a:t>スタッフはフレンドーでとても心地よかった</a:t>
             </a:r>
             <a:endParaRPr lang="en-US" sz="900" dirty="0"/>
           </a:p>
@@ -11721,7 +11738,7 @@
                 <a:ea typeface="Arial" pitchFamily="34" charset="-122"/>
                 <a:cs typeface="Arial" pitchFamily="34" charset="-120"/>
               </a:rPr>
-              <a:t>「店員さんのめんどくさそうに対応する系　カツラの支配人 店員さんのめんどくさそうに対応する系　カツラの支配人」</a:t>
+              <a:t>「スタッフ良かった」</a:t>
             </a:r>
             <a:endParaRPr lang="en-US" sz="900" dirty="0"/>
           </a:p>
@@ -13388,7 +13405,7 @@
                           <a:ea typeface="Arial" pitchFamily="34" charset="-122"/>
                           <a:cs typeface="Arial" pitchFamily="34" charset="-120"/>
                         </a:rPr>
-                        <a:t>浴室・水回り</a:t>
+                        <a:t>部屋の狭さ</a:t>
                       </a:r>
                       <a:endParaRPr lang="en-US" sz="900" dirty="0">
                         <a:latin typeface="Arial" charset="0"/>
@@ -13456,7 +13473,7 @@
                           <a:ea typeface="Arial" pitchFamily="34" charset="-122"/>
                           <a:cs typeface="Arial" pitchFamily="34" charset="-120"/>
                         </a:rPr>
-                        <a:t>ビジネスに利用するには少々高めではありますが、風呂とトイレは広く取られており、窮屈感がありません</a:t>
+                        <a:t>ベッドが小さい</a:t>
                       </a:r>
                       <a:endParaRPr lang="en-US" sz="900" dirty="0">
                         <a:latin typeface="Arial" charset="0"/>
@@ -13662,7 +13679,7 @@
                           <a:ea typeface="Arial" pitchFamily="34" charset="-122"/>
                           <a:cs typeface="Arial" pitchFamily="34" charset="-120"/>
                         </a:rPr>
-                        <a:t>エアコン・空調</a:t>
+                        <a:t>浴室・水回り</a:t>
                       </a:r>
                       <a:endParaRPr lang="en-US" sz="900" dirty="0">
                         <a:latin typeface="Arial" charset="0"/>
@@ -13730,7 +13747,7 @@
                           <a:ea typeface="Arial" pitchFamily="34" charset="-122"/>
                           <a:cs typeface="Arial" pitchFamily="34" charset="-120"/>
                         </a:rPr>
-                        <a:t>紅茶、コーヒー、ほうじ茶があり寒い日には嬉しいアメニティでした</a:t>
+                        <a:t>ビジネスに利用するには少々高めではありますが、風呂とトイレは広く取られており、窮屈感がありません</a:t>
                       </a:r>
                       <a:endParaRPr lang="en-US" sz="900" dirty="0">
                         <a:latin typeface="Arial" charset="0"/>
@@ -13936,7 +13953,7 @@
                           <a:ea typeface="Arial" pitchFamily="34" charset="-122"/>
                           <a:cs typeface="Arial" pitchFamily="34" charset="-120"/>
                         </a:rPr>
-                        <a:t>設備の老朽化</a:t>
+                        <a:t>エアコン・空調</a:t>
                       </a:r>
                       <a:endParaRPr lang="en-US" sz="900" dirty="0">
                         <a:latin typeface="Arial" charset="0"/>
@@ -14004,7 +14021,7 @@
                           <a:ea typeface="Arial" pitchFamily="34" charset="-122"/>
                           <a:cs typeface="Arial" pitchFamily="34" charset="-120"/>
                         </a:rPr>
-                        <a:t>周辺の宿泊施設は老朽化が激しく小さなリクエストにも答えない施設があったりと・・・当施設は築浅で基本的な部分は申し分...</a:t>
+                        <a:t>紅茶、コーヒー、ほうじ茶があり寒い日には嬉しいアメニティでした</a:t>
                       </a:r>
                       <a:endParaRPr lang="en-US" sz="900" dirty="0">
                         <a:latin typeface="Arial" charset="0"/>
@@ -14072,7 +14089,7 @@
                           <a:ea typeface="Arial" pitchFamily="34" charset="-122"/>
                           <a:cs typeface="Arial" pitchFamily="34" charset="-120"/>
                         </a:rPr>
-                        <a:t>1件</a:t>
+                        <a:t>2件</a:t>
                       </a:r>
                       <a:endParaRPr lang="en-US" sz="900" dirty="0">
                         <a:latin typeface="Arial" charset="0"/>
@@ -14210,7 +14227,7 @@
                           <a:ea typeface="Arial" pitchFamily="34" charset="-122"/>
                           <a:cs typeface="Arial" pitchFamily="34" charset="-120"/>
                         </a:rPr>
-                        <a:t>部屋の狭さ</a:t>
+                        <a:t>設備の老朽化</a:t>
                       </a:r>
                       <a:endParaRPr lang="en-US" sz="900" dirty="0">
                         <a:latin typeface="Arial" charset="0"/>
@@ -14278,7 +14295,7 @@
                           <a:ea typeface="Arial" pitchFamily="34" charset="-122"/>
                           <a:cs typeface="Arial" pitchFamily="34" charset="-120"/>
                         </a:rPr>
-                        <a:t>ビジネスに利用するには少々高めではありますが、風呂とトイレは広く取られており、窮屈感がありません</a:t>
+                        <a:t>周辺の宿泊施設は老朽化が激しく小さなリクエストにも答えない施設があったりと・・・当施設は築浅で基本的な部分は申し分...</a:t>
                       </a:r>
                       <a:endParaRPr lang="en-US" sz="900" dirty="0">
                         <a:latin typeface="Arial" charset="0"/>

--- a/納品レポート/ホテル別レポート/keyakigate_口コミ分析レポート.pptx
+++ b/納品レポート/ホテル別レポート/keyakigate_口コミ分析レポート.pptx
@@ -2784,7 +2784,7 @@
                 <a:ea typeface="Arial" pitchFamily="34" charset="-122"/>
                 <a:cs typeface="Arial" pitchFamily="34" charset="-120"/>
               </a:rPr>
-              <a:t>作成日：2026年3月25日</a:t>
+              <a:t>作成日：2026年3月26日</a:t>
             </a:r>
             <a:endParaRPr lang="en-US" sz="1000" dirty="0"/>
           </a:p>

--- a/納品レポート/ホテル別レポート/keyakigate_口コミ分析レポート.pptx
+++ b/納品レポート/ホテル別レポート/keyakigate_口コミ分析レポート.pptx
@@ -217,10 +217,10 @@
                   <c:v>8.86</c:v>
                 </c:pt>
                 <c:pt idx="3">
-                  <c:v>8.6</c:v>
+                  <c:v>8.69</c:v>
                 </c:pt>
                 <c:pt idx="4">
-                  <c:v>8.6</c:v>
+                  <c:v>8.67</c:v>
                 </c:pt>
                 <c:pt idx="5">
                   <c:v>6.67</c:v>
@@ -566,7 +566,7 @@
               <c:numCache>
                 <c:ptCount val="3"/>
                 <c:pt idx="0">
-                  <c:v>84</c:v>
+                  <c:v>86</c:v>
                 </c:pt>
                 <c:pt idx="1">
                   <c:v>10</c:v>
@@ -795,7 +795,7 @@
                 <c:formatCode>General</c:formatCode>
                 <c:ptCount val="7"/>
                 <c:pt idx="0">
-                  <c:v>53</c:v>
+                  <c:v>55</c:v>
                 </c:pt>
                 <c:pt idx="1">
                   <c:v>5</c:v>
@@ -2764,7 +2764,7 @@
                 <a:ea typeface="Arial" pitchFamily="34" charset="-122"/>
                 <a:cs typeface="Arial" pitchFamily="34" charset="-120"/>
               </a:rPr>
-              <a:t>レビュー総数：98件（6サイト）</a:t>
+              <a:t>レビュー総数：100件（6サイト）</a:t>
             </a:r>
             <a:endParaRPr lang="en-US" sz="1000" dirty="0"/>
           </a:p>
@@ -2784,7 +2784,7 @@
                 <a:ea typeface="Arial" pitchFamily="34" charset="-122"/>
                 <a:cs typeface="Arial" pitchFamily="34" charset="-120"/>
               </a:rPr>
-              <a:t>作成日：2026年3月26日</a:t>
+              <a:t>作成日：2026年3月27日</a:t>
             </a:r>
             <a:endParaRPr lang="en-US" sz="1000" dirty="0"/>
           </a:p>
@@ -3330,7 +3330,7 @@
                           <a:ea typeface="Arial" pitchFamily="34" charset="-122"/>
                           <a:cs typeface="Arial" pitchFamily="34" charset="-120"/>
                         </a:rPr>
-                        <a:t>8.71点</a:t>
+                        <a:t>8.74点</a:t>
                       </a:r>
                       <a:endParaRPr lang="en-US" sz="1000" dirty="0">
                         <a:latin typeface="Arial" charset="0"/>
@@ -3604,7 +3604,7 @@
                           <a:ea typeface="Arial" pitchFamily="34" charset="-122"/>
                           <a:cs typeface="Arial" pitchFamily="34" charset="-120"/>
                         </a:rPr>
-                        <a:t>85.7%</a:t>
+                        <a:t>86.0%</a:t>
                       </a:r>
                       <a:endParaRPr lang="en-US" sz="1000" dirty="0">
                         <a:latin typeface="Arial" charset="0"/>
@@ -3878,7 +3878,7 @@
                           <a:ea typeface="Arial" pitchFamily="34" charset="-122"/>
                           <a:cs typeface="Arial" pitchFamily="34" charset="-120"/>
                         </a:rPr>
-                        <a:t>4.1%</a:t>
+                        <a:t>4.0%</a:t>
                       </a:r>
                       <a:endParaRPr lang="en-US" sz="1000" dirty="0">
                         <a:latin typeface="Arial" charset="0"/>
@@ -5339,7 +5339,7 @@
                 <a:ea typeface="Arial" pitchFamily="34" charset="-122"/>
                 <a:cs typeface="Arial" pitchFamily="34" charset="-120"/>
               </a:rPr>
-              <a:t>8.71</a:t>
+              <a:t>8.74</a:t>
             </a:r>
             <a:endParaRPr lang="en-US" sz="3200" dirty="0"/>
           </a:p>
@@ -5464,7 +5464,7 @@
                 <a:ea typeface="Arial" pitchFamily="34" charset="-122"/>
                 <a:cs typeface="Arial" pitchFamily="34" charset="-120"/>
               </a:rPr>
-              <a:t>85.7%</a:t>
+              <a:t>86.0%</a:t>
             </a:r>
             <a:endParaRPr lang="en-US" sz="3200" dirty="0"/>
           </a:p>
@@ -5589,7 +5589,7 @@
                 <a:ea typeface="Arial" pitchFamily="34" charset="-122"/>
                 <a:cs typeface="Arial" pitchFamily="34" charset="-120"/>
               </a:rPr>
-              <a:t>4.1%</a:t>
+              <a:t>4.0%</a:t>
             </a:r>
             <a:endParaRPr lang="en-US" sz="3200" dirty="0"/>
           </a:p>
@@ -5714,7 +5714,7 @@
                 <a:ea typeface="Arial" pitchFamily="34" charset="-122"/>
                 <a:cs typeface="Arial" pitchFamily="34" charset="-120"/>
               </a:rPr>
-              <a:t>98件</a:t>
+              <a:t>100件</a:t>
             </a:r>
             <a:endParaRPr lang="en-US" sz="3200" dirty="0"/>
           </a:p>
@@ -5862,7 +5862,7 @@
                 <a:ea typeface="Arial" pitchFamily="34" charset="-122"/>
                 <a:cs typeface="Arial" pitchFamily="34" charset="-120"/>
               </a:rPr>
-              <a:t>  駅と直結している</a:t>
+              <a:t>  また駅から近く便利です</a:t>
             </a:r>
             <a:endParaRPr lang="en-US" sz="1100" dirty="0"/>
           </a:p>
@@ -6523,7 +6523,7 @@
                 <a:ea typeface="Arial" pitchFamily="34" charset="-122"/>
                 <a:cs typeface="Arial" pitchFamily="34" charset="-120"/>
               </a:rPr>
-              <a:t>8.71</a:t>
+              <a:t>8.74</a:t>
             </a:r>
             <a:endParaRPr lang="en-US" sz="3200" dirty="0"/>
           </a:p>
@@ -6648,7 +6648,7 @@
                 <a:ea typeface="Arial" pitchFamily="34" charset="-122"/>
                 <a:cs typeface="Arial" pitchFamily="34" charset="-120"/>
               </a:rPr>
-              <a:t>85.7%</a:t>
+              <a:t>86.0%</a:t>
             </a:r>
             <a:endParaRPr lang="en-US" sz="3200" dirty="0"/>
           </a:p>
@@ -6773,7 +6773,7 @@
                 <a:ea typeface="Arial" pitchFamily="34" charset="-122"/>
                 <a:cs typeface="Arial" pitchFamily="34" charset="-120"/>
               </a:rPr>
-              <a:t>4.1%</a:t>
+              <a:t>4.0%</a:t>
             </a:r>
             <a:endParaRPr lang="en-US" sz="3200" dirty="0"/>
           </a:p>
@@ -6898,7 +6898,7 @@
                 <a:ea typeface="Arial" pitchFamily="34" charset="-122"/>
                 <a:cs typeface="Arial" pitchFamily="34" charset="-120"/>
               </a:rPr>
-              <a:t>98件</a:t>
+              <a:t>100件</a:t>
             </a:r>
             <a:endParaRPr lang="en-US" sz="3200" dirty="0"/>
           </a:p>
@@ -8903,7 +8903,7 @@
                           <a:ea typeface="Arial" pitchFamily="34" charset="-122"/>
                           <a:cs typeface="Arial" pitchFamily="34" charset="-120"/>
                         </a:rPr>
-                        <a:t>15</a:t>
+                        <a:t>16</a:t>
                       </a:r>
                       <a:endParaRPr lang="en-US" sz="900" dirty="0">
                         <a:latin typeface="Arial" charset="0"/>
@@ -8971,7 +8971,7 @@
                           <a:ea typeface="Arial" pitchFamily="34" charset="-122"/>
                           <a:cs typeface="Arial" pitchFamily="34" charset="-120"/>
                         </a:rPr>
-                        <a:t>8.6</a:t>
+                        <a:t>8.69</a:t>
                       </a:r>
                       <a:endParaRPr lang="en-US" sz="900" dirty="0">
                         <a:latin typeface="Arial" charset="0"/>
@@ -9107,7 +9107,7 @@
                           <a:ea typeface="Arial" pitchFamily="34" charset="-122"/>
                           <a:cs typeface="Arial" pitchFamily="34" charset="-120"/>
                         </a:rPr>
-                        <a:t>8.6</a:t>
+                        <a:t>8.69</a:t>
                       </a:r>
                       <a:endParaRPr lang="en-US" sz="900" dirty="0">
                         <a:latin typeface="Arial" charset="0"/>
@@ -9245,7 +9245,7 @@
                           <a:ea typeface="Arial" pitchFamily="34" charset="-122"/>
                           <a:cs typeface="Arial" pitchFamily="34" charset="-120"/>
                         </a:rPr>
-                        <a:t>20</a:t>
+                        <a:t>21</a:t>
                       </a:r>
                       <a:endParaRPr lang="en-US" sz="900" dirty="0">
                         <a:latin typeface="Arial" charset="0"/>
@@ -9313,7 +9313,7 @@
                           <a:ea typeface="Arial" pitchFamily="34" charset="-122"/>
                           <a:cs typeface="Arial" pitchFamily="34" charset="-120"/>
                         </a:rPr>
-                        <a:t>4.3</a:t>
+                        <a:t>4.33</a:t>
                       </a:r>
                       <a:endParaRPr lang="en-US" sz="900" dirty="0">
                         <a:latin typeface="Arial" charset="0"/>
@@ -9449,7 +9449,7 @@
                           <a:ea typeface="Arial" pitchFamily="34" charset="-122"/>
                           <a:cs typeface="Arial" pitchFamily="34" charset="-120"/>
                         </a:rPr>
-                        <a:t>8.6</a:t>
+                        <a:t>8.67</a:t>
                       </a:r>
                       <a:endParaRPr lang="en-US" sz="900" dirty="0">
                         <a:latin typeface="Arial" charset="0"/>
@@ -10199,7 +10199,7 @@
                 <a:ea typeface="Arial" pitchFamily="34" charset="-122"/>
                 <a:cs typeface="Arial" pitchFamily="34" charset="-120"/>
               </a:rPr>
-              <a:t>84件（85.7%）</a:t>
+              <a:t>86件（86.0%）</a:t>
             </a:r>
             <a:endParaRPr lang="en-US" sz="1100" dirty="0"/>
           </a:p>
@@ -10297,7 +10297,7 @@
                 <a:ea typeface="Arial" pitchFamily="34" charset="-122"/>
                 <a:cs typeface="Arial" pitchFamily="34" charset="-120"/>
               </a:rPr>
-              <a:t>10件（10.2%）</a:t>
+              <a:t>10件（10.0%）</a:t>
             </a:r>
             <a:endParaRPr lang="en-US" sz="1100" dirty="0"/>
           </a:p>
@@ -10395,7 +10395,7 @@
                 <a:ea typeface="Arial" pitchFamily="34" charset="-122"/>
                 <a:cs typeface="Arial" pitchFamily="34" charset="-120"/>
               </a:rPr>
-              <a:t>4件（4.1%）</a:t>
+              <a:t>4件（4.0%）</a:t>
             </a:r>
             <a:endParaRPr lang="en-US" sz="1100" dirty="0"/>
           </a:p>
@@ -10807,7 +10807,7 @@
                 <a:ea typeface="Arial" pitchFamily="34" charset="-122"/>
                 <a:cs typeface="Arial" pitchFamily="34" charset="-120"/>
               </a:rPr>
-              <a:t>駅と直結している</a:t>
+              <a:t>また駅から近く便利です</a:t>
             </a:r>
             <a:endParaRPr lang="en-US" sz="900" dirty="0"/>
           </a:p>
@@ -10822,6 +10822,229 @@
         <p:spPr>
           <a:xfrm>
             <a:off x="594360" y="1828800"/>
+            <a:ext cx="2377440" cy="640080"/>
+          </a:xfrm>
+          <a:prstGeom prst="rect">
+            <a:avLst/>
+          </a:prstGeom>
+          <a:noFill/>
+          <a:ln/>
+        </p:spPr>
+        <p:txBody>
+          <a:bodyPr wrap="square" lIns="0" tIns="0" rIns="0" bIns="0" rtlCol="0" anchor="ctr"/>
+          <a:lstStyle/>
+          <a:p>
+            <a:pPr indent="0" marL="0">
+              <a:buNone/>
+            </a:pPr>
+            <a:r>
+              <a:rPr lang="en-US" sz="900" i="1" dirty="0">
+                <a:solidFill>
+                  <a:srgbClr val="3B7DD8"/>
+                </a:solidFill>
+                <a:latin typeface="Arial" pitchFamily="34" charset="0"/>
+                <a:ea typeface="Arial" pitchFamily="34" charset="-122"/>
+                <a:cs typeface="Arial" pitchFamily="34" charset="-120"/>
+              </a:rPr>
+              <a:t>「駅と直結している」</a:t>
+            </a:r>
+            <a:endParaRPr lang="en-US" sz="900" dirty="0"/>
+          </a:p>
+        </p:txBody>
+      </p:sp>
+      <p:sp>
+        <p:nvSpPr>
+          <p:cNvPr id="12" name="Shape 10"/>
+          <p:cNvSpPr/>
+          <p:nvPr/>
+        </p:nvSpPr>
+        <p:spPr>
+          <a:xfrm>
+            <a:off x="3291840" y="1051560"/>
+            <a:ext cx="2651760" cy="1600200"/>
+          </a:xfrm>
+          <a:prstGeom prst="rect">
+            <a:avLst/>
+          </a:prstGeom>
+          <a:solidFill>
+            <a:srgbClr val="FFFFFF"/>
+          </a:solidFill>
+          <a:ln/>
+          <a:effectLst>
+            <a:outerShdw sx="100000" sy="100000" kx="0" ky="0" algn="bl" rotWithShape="0" blurRad="50800" dist="25400" dir="8100000">
+              <a:srgbClr val="000000">
+                <a:alpha val="10000"/>
+              </a:srgbClr>
+            </a:outerShdw>
+          </a:effectLst>
+        </p:spPr>
+      </p:sp>
+      <p:sp>
+        <p:nvSpPr>
+          <p:cNvPr id="13" name="Shape 11"/>
+          <p:cNvSpPr/>
+          <p:nvPr/>
+        </p:nvSpPr>
+        <p:spPr>
+          <a:xfrm>
+            <a:off x="3291840" y="1051560"/>
+            <a:ext cx="54864" cy="1600200"/>
+          </a:xfrm>
+          <a:prstGeom prst="rect">
+            <a:avLst/>
+          </a:prstGeom>
+          <a:solidFill>
+            <a:srgbClr val="16A34A"/>
+          </a:solidFill>
+          <a:ln/>
+        </p:spPr>
+      </p:sp>
+      <p:sp>
+        <p:nvSpPr>
+          <p:cNvPr id="14" name="Shape 12"/>
+          <p:cNvSpPr/>
+          <p:nvPr/>
+        </p:nvSpPr>
+        <p:spPr>
+          <a:xfrm>
+            <a:off x="5120640" y="1124712"/>
+            <a:ext cx="658368" cy="228600"/>
+          </a:xfrm>
+          <a:prstGeom prst="rect">
+            <a:avLst/>
+          </a:prstGeom>
+          <a:solidFill>
+            <a:srgbClr val="DCFCE7"/>
+          </a:solidFill>
+          <a:ln/>
+        </p:spPr>
+      </p:sp>
+      <p:sp>
+        <p:nvSpPr>
+          <p:cNvPr id="15" name="Text 13"/>
+          <p:cNvSpPr/>
+          <p:nvPr/>
+        </p:nvSpPr>
+        <p:spPr>
+          <a:xfrm>
+            <a:off x="5120640" y="1124712"/>
+            <a:ext cx="658368" cy="228600"/>
+          </a:xfrm>
+          <a:prstGeom prst="rect">
+            <a:avLst/>
+          </a:prstGeom>
+          <a:noFill/>
+          <a:ln/>
+        </p:spPr>
+        <p:txBody>
+          <a:bodyPr wrap="square" lIns="0" tIns="0" rIns="0" bIns="0" rtlCol="0" anchor="ctr"/>
+          <a:lstStyle/>
+          <a:p>
+            <a:pPr algn="ctr" indent="0" marL="0">
+              <a:buNone/>
+            </a:pPr>
+            <a:r>
+              <a:rPr lang="en-US" sz="900" b="1" dirty="0">
+                <a:solidFill>
+                  <a:srgbClr val="16A34A"/>
+                </a:solidFill>
+                <a:latin typeface="Arial" pitchFamily="34" charset="0"/>
+                <a:ea typeface="Arial" pitchFamily="34" charset="-122"/>
+                <a:cs typeface="Arial" pitchFamily="34" charset="-120"/>
+              </a:rPr>
+              <a:t>20件+</a:t>
+            </a:r>
+            <a:endParaRPr lang="en-US" sz="900" dirty="0"/>
+          </a:p>
+        </p:txBody>
+      </p:sp>
+      <p:sp>
+        <p:nvSpPr>
+          <p:cNvPr id="16" name="Text 14"/>
+          <p:cNvSpPr/>
+          <p:nvPr/>
+        </p:nvSpPr>
+        <p:spPr>
+          <a:xfrm>
+            <a:off x="3429000" y="1124712"/>
+            <a:ext cx="1645920" cy="274320"/>
+          </a:xfrm>
+          <a:prstGeom prst="rect">
+            <a:avLst/>
+          </a:prstGeom>
+          <a:noFill/>
+          <a:ln/>
+        </p:spPr>
+        <p:txBody>
+          <a:bodyPr wrap="square" lIns="0" tIns="0" rIns="0" bIns="0" rtlCol="0" anchor="ctr"/>
+          <a:lstStyle/>
+          <a:p>
+            <a:pPr indent="0" marL="0">
+              <a:buNone/>
+            </a:pPr>
+            <a:r>
+              <a:rPr lang="en-US" sz="1300" b="1" dirty="0">
+                <a:solidFill>
+                  <a:srgbClr val="1A2744"/>
+                </a:solidFill>
+                <a:latin typeface="Arial" pitchFamily="34" charset="0"/>
+                <a:ea typeface="Arial" pitchFamily="34" charset="-122"/>
+                <a:cs typeface="Arial" pitchFamily="34" charset="-120"/>
+              </a:rPr>
+              <a:t>清潔さ・清掃</a:t>
+            </a:r>
+            <a:endParaRPr lang="en-US" sz="1300" dirty="0"/>
+          </a:p>
+        </p:txBody>
+      </p:sp>
+      <p:sp>
+        <p:nvSpPr>
+          <p:cNvPr id="17" name="Text 15"/>
+          <p:cNvSpPr/>
+          <p:nvPr/>
+        </p:nvSpPr>
+        <p:spPr>
+          <a:xfrm>
+            <a:off x="3429000" y="1417320"/>
+            <a:ext cx="2377440" cy="365760"/>
+          </a:xfrm>
+          <a:prstGeom prst="rect">
+            <a:avLst/>
+          </a:prstGeom>
+          <a:noFill/>
+          <a:ln/>
+        </p:spPr>
+        <p:txBody>
+          <a:bodyPr wrap="square" lIns="0" tIns="0" rIns="0" bIns="0" rtlCol="0" anchor="ctr"/>
+          <a:lstStyle/>
+          <a:p>
+            <a:pPr indent="0" marL="0">
+              <a:buNone/>
+            </a:pPr>
+            <a:r>
+              <a:rPr lang="en-US" sz="900" dirty="0">
+                <a:solidFill>
+                  <a:srgbClr val="64748B"/>
+                </a:solidFill>
+                <a:latin typeface="Arial" pitchFamily="34" charset="0"/>
+                <a:ea typeface="Arial" pitchFamily="34" charset="-122"/>
+                <a:cs typeface="Arial" pitchFamily="34" charset="-120"/>
+              </a:rPr>
+              <a:t>部屋は綺麗で、日本にしてはスペースがあった</a:t>
+            </a:r>
+            <a:endParaRPr lang="en-US" sz="900" dirty="0"/>
+          </a:p>
+        </p:txBody>
+      </p:sp>
+      <p:sp>
+        <p:nvSpPr>
+          <p:cNvPr id="18" name="Text 16"/>
+          <p:cNvSpPr/>
+          <p:nvPr/>
+        </p:nvSpPr>
+        <p:spPr>
+          <a:xfrm>
+            <a:off x="3429000" y="1828800"/>
             <a:ext cx="2377440" cy="640080"/>
           </a:xfrm>
           <a:prstGeom prst="rect">
@@ -10854,13 +11077,13 @@
       </p:sp>
       <p:sp>
         <p:nvSpPr>
-          <p:cNvPr id="12" name="Shape 10"/>
-          <p:cNvSpPr/>
-          <p:nvPr/>
-        </p:nvSpPr>
-        <p:spPr>
-          <a:xfrm>
-            <a:off x="3291840" y="1051560"/>
+          <p:cNvPr id="19" name="Shape 17"/>
+          <p:cNvSpPr/>
+          <p:nvPr/>
+        </p:nvSpPr>
+        <p:spPr>
+          <a:xfrm>
+            <a:off x="6126480" y="1051560"/>
             <a:ext cx="2651760" cy="1600200"/>
           </a:xfrm>
           <a:prstGeom prst="rect">
@@ -10881,13 +11104,13 @@
       </p:sp>
       <p:sp>
         <p:nvSpPr>
-          <p:cNvPr id="13" name="Shape 11"/>
-          <p:cNvSpPr/>
-          <p:nvPr/>
-        </p:nvSpPr>
-        <p:spPr>
-          <a:xfrm>
-            <a:off x="3291840" y="1051560"/>
+          <p:cNvPr id="20" name="Shape 18"/>
+          <p:cNvSpPr/>
+          <p:nvPr/>
+        </p:nvSpPr>
+        <p:spPr>
+          <a:xfrm>
+            <a:off x="6126480" y="1051560"/>
             <a:ext cx="54864" cy="1600200"/>
           </a:xfrm>
           <a:prstGeom prst="rect">
@@ -10901,13 +11124,13 @@
       </p:sp>
       <p:sp>
         <p:nvSpPr>
-          <p:cNvPr id="14" name="Shape 12"/>
-          <p:cNvSpPr/>
-          <p:nvPr/>
-        </p:nvSpPr>
-        <p:spPr>
-          <a:xfrm>
-            <a:off x="5120640" y="1124712"/>
+          <p:cNvPr id="21" name="Shape 19"/>
+          <p:cNvSpPr/>
+          <p:nvPr/>
+        </p:nvSpPr>
+        <p:spPr>
+          <a:xfrm>
+            <a:off x="7955280" y="1124712"/>
             <a:ext cx="658368" cy="228600"/>
           </a:xfrm>
           <a:prstGeom prst="rect">
@@ -10921,13 +11144,13 @@
       </p:sp>
       <p:sp>
         <p:nvSpPr>
-          <p:cNvPr id="15" name="Text 13"/>
-          <p:cNvSpPr/>
-          <p:nvPr/>
-        </p:nvSpPr>
-        <p:spPr>
-          <a:xfrm>
-            <a:off x="5120640" y="1124712"/>
+          <p:cNvPr id="22" name="Text 20"/>
+          <p:cNvSpPr/>
+          <p:nvPr/>
+        </p:nvSpPr>
+        <p:spPr>
+          <a:xfrm>
+            <a:off x="7955280" y="1124712"/>
             <a:ext cx="658368" cy="228600"/>
           </a:xfrm>
           <a:prstGeom prst="rect">
@@ -10960,13 +11183,13 @@
       </p:sp>
       <p:sp>
         <p:nvSpPr>
-          <p:cNvPr id="16" name="Text 14"/>
-          <p:cNvSpPr/>
-          <p:nvPr/>
-        </p:nvSpPr>
-        <p:spPr>
-          <a:xfrm>
-            <a:off x="3429000" y="1124712"/>
+          <p:cNvPr id="23" name="Text 21"/>
+          <p:cNvSpPr/>
+          <p:nvPr/>
+        </p:nvSpPr>
+        <p:spPr>
+          <a:xfrm>
+            <a:off x="6263640" y="1124712"/>
             <a:ext cx="1645920" cy="274320"/>
           </a:xfrm>
           <a:prstGeom prst="rect">
@@ -10991,7 +11214,7 @@
                 <a:ea typeface="Arial" pitchFamily="34" charset="-122"/>
                 <a:cs typeface="Arial" pitchFamily="34" charset="-120"/>
               </a:rPr>
-              <a:t>清潔さ・清掃</a:t>
+              <a:t>快適さ・設備</a:t>
             </a:r>
             <a:endParaRPr lang="en-US" sz="1300" dirty="0"/>
           </a:p>
@@ -10999,13 +11222,13 @@
       </p:sp>
       <p:sp>
         <p:nvSpPr>
-          <p:cNvPr id="17" name="Text 15"/>
-          <p:cNvSpPr/>
-          <p:nvPr/>
-        </p:nvSpPr>
-        <p:spPr>
-          <a:xfrm>
-            <a:off x="3429000" y="1417320"/>
+          <p:cNvPr id="24" name="Text 22"/>
+          <p:cNvSpPr/>
+          <p:nvPr/>
+        </p:nvSpPr>
+        <p:spPr>
+          <a:xfrm>
+            <a:off x="6263640" y="1417320"/>
             <a:ext cx="2377440" cy="365760"/>
           </a:xfrm>
           <a:prstGeom prst="rect">
@@ -11030,7 +11253,7 @@
                 <a:ea typeface="Arial" pitchFamily="34" charset="-122"/>
                 <a:cs typeface="Arial" pitchFamily="34" charset="-120"/>
               </a:rPr>
-              <a:t>部屋は綺麗で、日本にしてはスペースがあった</a:t>
+              <a:t>クッションやベッドでの寝心地よかった</a:t>
             </a:r>
             <a:endParaRPr lang="en-US" sz="900" dirty="0"/>
           </a:p>
@@ -11038,13 +11261,13 @@
       </p:sp>
       <p:sp>
         <p:nvSpPr>
-          <p:cNvPr id="18" name="Text 16"/>
-          <p:cNvSpPr/>
-          <p:nvPr/>
-        </p:nvSpPr>
-        <p:spPr>
-          <a:xfrm>
-            <a:off x="3429000" y="1828800"/>
+          <p:cNvPr id="25" name="Text 23"/>
+          <p:cNvSpPr/>
+          <p:nvPr/>
+        </p:nvSpPr>
+        <p:spPr>
+          <a:xfrm>
+            <a:off x="6263640" y="1828800"/>
             <a:ext cx="2377440" cy="640080"/>
           </a:xfrm>
           <a:prstGeom prst="rect">
@@ -11069,7 +11292,7 @@
                 <a:ea typeface="Arial" pitchFamily="34" charset="-122"/>
                 <a:cs typeface="Arial" pitchFamily="34" charset="-120"/>
               </a:rPr>
-              <a:t>「府中駅すぐの便利なホテルでしたし、部屋もきれいです」</a:t>
+              <a:t>「アメニティにリプトンの紅茶があり嬉しかったです」</a:t>
             </a:r>
             <a:endParaRPr lang="en-US" sz="900" dirty="0"/>
           </a:p>
@@ -11077,13 +11300,13 @@
       </p:sp>
       <p:sp>
         <p:nvSpPr>
-          <p:cNvPr id="19" name="Shape 17"/>
-          <p:cNvSpPr/>
-          <p:nvPr/>
-        </p:nvSpPr>
-        <p:spPr>
-          <a:xfrm>
-            <a:off x="6126480" y="1051560"/>
+          <p:cNvPr id="26" name="Shape 24"/>
+          <p:cNvSpPr/>
+          <p:nvPr/>
+        </p:nvSpPr>
+        <p:spPr>
+          <a:xfrm>
+            <a:off x="457200" y="2880360"/>
             <a:ext cx="2651760" cy="1600200"/>
           </a:xfrm>
           <a:prstGeom prst="rect">
@@ -11104,13 +11327,13 @@
       </p:sp>
       <p:sp>
         <p:nvSpPr>
-          <p:cNvPr id="20" name="Shape 18"/>
-          <p:cNvSpPr/>
-          <p:nvPr/>
-        </p:nvSpPr>
-        <p:spPr>
-          <a:xfrm>
-            <a:off x="6126480" y="1051560"/>
+          <p:cNvPr id="27" name="Shape 25"/>
+          <p:cNvSpPr/>
+          <p:nvPr/>
+        </p:nvSpPr>
+        <p:spPr>
+          <a:xfrm>
+            <a:off x="457200" y="2880360"/>
             <a:ext cx="54864" cy="1600200"/>
           </a:xfrm>
           <a:prstGeom prst="rect">
@@ -11124,13 +11347,13 @@
       </p:sp>
       <p:sp>
         <p:nvSpPr>
-          <p:cNvPr id="21" name="Shape 19"/>
-          <p:cNvSpPr/>
-          <p:nvPr/>
-        </p:nvSpPr>
-        <p:spPr>
-          <a:xfrm>
-            <a:off x="7955280" y="1124712"/>
+          <p:cNvPr id="28" name="Shape 26"/>
+          <p:cNvSpPr/>
+          <p:nvPr/>
+        </p:nvSpPr>
+        <p:spPr>
+          <a:xfrm>
+            <a:off x="2286000" y="2953512"/>
             <a:ext cx="658368" cy="228600"/>
           </a:xfrm>
           <a:prstGeom prst="rect">
@@ -11144,13 +11367,13 @@
       </p:sp>
       <p:sp>
         <p:nvSpPr>
-          <p:cNvPr id="22" name="Text 20"/>
-          <p:cNvSpPr/>
-          <p:nvPr/>
-        </p:nvSpPr>
-        <p:spPr>
-          <a:xfrm>
-            <a:off x="7955280" y="1124712"/>
+          <p:cNvPr id="29" name="Text 27"/>
+          <p:cNvSpPr/>
+          <p:nvPr/>
+        </p:nvSpPr>
+        <p:spPr>
+          <a:xfrm>
+            <a:off x="2286000" y="2953512"/>
             <a:ext cx="658368" cy="228600"/>
           </a:xfrm>
           <a:prstGeom prst="rect">
@@ -11183,13 +11406,13 @@
       </p:sp>
       <p:sp>
         <p:nvSpPr>
-          <p:cNvPr id="23" name="Text 21"/>
-          <p:cNvSpPr/>
-          <p:nvPr/>
-        </p:nvSpPr>
-        <p:spPr>
-          <a:xfrm>
-            <a:off x="6263640" y="1124712"/>
+          <p:cNvPr id="30" name="Text 28"/>
+          <p:cNvSpPr/>
+          <p:nvPr/>
+        </p:nvSpPr>
+        <p:spPr>
+          <a:xfrm>
+            <a:off x="594360" y="2953512"/>
             <a:ext cx="1645920" cy="274320"/>
           </a:xfrm>
           <a:prstGeom prst="rect">
@@ -11214,7 +11437,7 @@
                 <a:ea typeface="Arial" pitchFamily="34" charset="-122"/>
                 <a:cs typeface="Arial" pitchFamily="34" charset="-120"/>
               </a:rPr>
-              <a:t>快適さ・設備</a:t>
+              <a:t>朝食</a:t>
             </a:r>
             <a:endParaRPr lang="en-US" sz="1300" dirty="0"/>
           </a:p>
@@ -11222,13 +11445,13 @@
       </p:sp>
       <p:sp>
         <p:nvSpPr>
-          <p:cNvPr id="24" name="Text 22"/>
-          <p:cNvSpPr/>
-          <p:nvPr/>
-        </p:nvSpPr>
-        <p:spPr>
-          <a:xfrm>
-            <a:off x="6263640" y="1417320"/>
+          <p:cNvPr id="31" name="Text 29"/>
+          <p:cNvSpPr/>
+          <p:nvPr/>
+        </p:nvSpPr>
+        <p:spPr>
+          <a:xfrm>
+            <a:off x="594360" y="3246120"/>
             <a:ext cx="2377440" cy="365760"/>
           </a:xfrm>
           <a:prstGeom prst="rect">
@@ -11253,7 +11476,7 @@
                 <a:ea typeface="Arial" pitchFamily="34" charset="-122"/>
                 <a:cs typeface="Arial" pitchFamily="34" charset="-120"/>
               </a:rPr>
-              <a:t>クッションやベッドでの寝心地よかった</a:t>
+              <a:t>朝食も選べて美味しかったです</a:t>
             </a:r>
             <a:endParaRPr lang="en-US" sz="900" dirty="0"/>
           </a:p>
@@ -11261,13 +11484,13 @@
       </p:sp>
       <p:sp>
         <p:nvSpPr>
-          <p:cNvPr id="25" name="Text 23"/>
-          <p:cNvSpPr/>
-          <p:nvPr/>
-        </p:nvSpPr>
-        <p:spPr>
-          <a:xfrm>
-            <a:off x="6263640" y="1828800"/>
+          <p:cNvPr id="32" name="Text 30"/>
+          <p:cNvSpPr/>
+          <p:nvPr/>
+        </p:nvSpPr>
+        <p:spPr>
+          <a:xfrm>
+            <a:off x="594360" y="3657600"/>
             <a:ext cx="2377440" cy="640080"/>
           </a:xfrm>
           <a:prstGeom prst="rect">
@@ -11292,7 +11515,7 @@
                 <a:ea typeface="Arial" pitchFamily="34" charset="-122"/>
                 <a:cs typeface="Arial" pitchFamily="34" charset="-120"/>
               </a:rPr>
-              <a:t>「ただ、Wi-Fiは改善してください」</a:t>
+              <a:t>「朝食も美味しかったです」</a:t>
             </a:r>
             <a:endParaRPr lang="en-US" sz="900" dirty="0"/>
           </a:p>
@@ -11300,13 +11523,13 @@
       </p:sp>
       <p:sp>
         <p:nvSpPr>
-          <p:cNvPr id="26" name="Shape 24"/>
-          <p:cNvSpPr/>
-          <p:nvPr/>
-        </p:nvSpPr>
-        <p:spPr>
-          <a:xfrm>
-            <a:off x="457200" y="2880360"/>
+          <p:cNvPr id="33" name="Shape 31"/>
+          <p:cNvSpPr/>
+          <p:nvPr/>
+        </p:nvSpPr>
+        <p:spPr>
+          <a:xfrm>
+            <a:off x="3291840" y="2880360"/>
             <a:ext cx="2651760" cy="1600200"/>
           </a:xfrm>
           <a:prstGeom prst="rect">
@@ -11327,13 +11550,13 @@
       </p:sp>
       <p:sp>
         <p:nvSpPr>
-          <p:cNvPr id="27" name="Shape 25"/>
-          <p:cNvSpPr/>
-          <p:nvPr/>
-        </p:nvSpPr>
-        <p:spPr>
-          <a:xfrm>
-            <a:off x="457200" y="2880360"/>
+          <p:cNvPr id="34" name="Shape 32"/>
+          <p:cNvSpPr/>
+          <p:nvPr/>
+        </p:nvSpPr>
+        <p:spPr>
+          <a:xfrm>
+            <a:off x="3291840" y="2880360"/>
             <a:ext cx="54864" cy="1600200"/>
           </a:xfrm>
           <a:prstGeom prst="rect">
@@ -11347,13 +11570,13 @@
       </p:sp>
       <p:sp>
         <p:nvSpPr>
-          <p:cNvPr id="28" name="Shape 26"/>
-          <p:cNvSpPr/>
-          <p:nvPr/>
-        </p:nvSpPr>
-        <p:spPr>
-          <a:xfrm>
-            <a:off x="2286000" y="2953512"/>
+          <p:cNvPr id="35" name="Shape 33"/>
+          <p:cNvSpPr/>
+          <p:nvPr/>
+        </p:nvSpPr>
+        <p:spPr>
+          <a:xfrm>
+            <a:off x="5120640" y="2953512"/>
             <a:ext cx="658368" cy="228600"/>
           </a:xfrm>
           <a:prstGeom prst="rect">
@@ -11367,13 +11590,13 @@
       </p:sp>
       <p:sp>
         <p:nvSpPr>
-          <p:cNvPr id="29" name="Text 27"/>
-          <p:cNvSpPr/>
-          <p:nvPr/>
-        </p:nvSpPr>
-        <p:spPr>
-          <a:xfrm>
-            <a:off x="2286000" y="2953512"/>
+          <p:cNvPr id="36" name="Text 34"/>
+          <p:cNvSpPr/>
+          <p:nvPr/>
+        </p:nvSpPr>
+        <p:spPr>
+          <a:xfrm>
+            <a:off x="5120640" y="2953512"/>
             <a:ext cx="658368" cy="228600"/>
           </a:xfrm>
           <a:prstGeom prst="rect">
@@ -11406,229 +11629,6 @@
       </p:sp>
       <p:sp>
         <p:nvSpPr>
-          <p:cNvPr id="30" name="Text 28"/>
-          <p:cNvSpPr/>
-          <p:nvPr/>
-        </p:nvSpPr>
-        <p:spPr>
-          <a:xfrm>
-            <a:off x="594360" y="2953512"/>
-            <a:ext cx="1645920" cy="274320"/>
-          </a:xfrm>
-          <a:prstGeom prst="rect">
-            <a:avLst/>
-          </a:prstGeom>
-          <a:noFill/>
-          <a:ln/>
-        </p:spPr>
-        <p:txBody>
-          <a:bodyPr wrap="square" lIns="0" tIns="0" rIns="0" bIns="0" rtlCol="0" anchor="ctr"/>
-          <a:lstStyle/>
-          <a:p>
-            <a:pPr indent="0" marL="0">
-              <a:buNone/>
-            </a:pPr>
-            <a:r>
-              <a:rPr lang="en-US" sz="1300" b="1" dirty="0">
-                <a:solidFill>
-                  <a:srgbClr val="1A2744"/>
-                </a:solidFill>
-                <a:latin typeface="Arial" pitchFamily="34" charset="0"/>
-                <a:ea typeface="Arial" pitchFamily="34" charset="-122"/>
-                <a:cs typeface="Arial" pitchFamily="34" charset="-120"/>
-              </a:rPr>
-              <a:t>朝食</a:t>
-            </a:r>
-            <a:endParaRPr lang="en-US" sz="1300" dirty="0"/>
-          </a:p>
-        </p:txBody>
-      </p:sp>
-      <p:sp>
-        <p:nvSpPr>
-          <p:cNvPr id="31" name="Text 29"/>
-          <p:cNvSpPr/>
-          <p:nvPr/>
-        </p:nvSpPr>
-        <p:spPr>
-          <a:xfrm>
-            <a:off x="594360" y="3246120"/>
-            <a:ext cx="2377440" cy="365760"/>
-          </a:xfrm>
-          <a:prstGeom prst="rect">
-            <a:avLst/>
-          </a:prstGeom>
-          <a:noFill/>
-          <a:ln/>
-        </p:spPr>
-        <p:txBody>
-          <a:bodyPr wrap="square" lIns="0" tIns="0" rIns="0" bIns="0" rtlCol="0" anchor="ctr"/>
-          <a:lstStyle/>
-          <a:p>
-            <a:pPr indent="0" marL="0">
-              <a:buNone/>
-            </a:pPr>
-            <a:r>
-              <a:rPr lang="en-US" sz="900" dirty="0">
-                <a:solidFill>
-                  <a:srgbClr val="64748B"/>
-                </a:solidFill>
-                <a:latin typeface="Arial" pitchFamily="34" charset="0"/>
-                <a:ea typeface="Arial" pitchFamily="34" charset="-122"/>
-                <a:cs typeface="Arial" pitchFamily="34" charset="-120"/>
-              </a:rPr>
-              <a:t>朝食も選べて美味しかったです</a:t>
-            </a:r>
-            <a:endParaRPr lang="en-US" sz="900" dirty="0"/>
-          </a:p>
-        </p:txBody>
-      </p:sp>
-      <p:sp>
-        <p:nvSpPr>
-          <p:cNvPr id="32" name="Text 30"/>
-          <p:cNvSpPr/>
-          <p:nvPr/>
-        </p:nvSpPr>
-        <p:spPr>
-          <a:xfrm>
-            <a:off x="594360" y="3657600"/>
-            <a:ext cx="2377440" cy="640080"/>
-          </a:xfrm>
-          <a:prstGeom prst="rect">
-            <a:avLst/>
-          </a:prstGeom>
-          <a:noFill/>
-          <a:ln/>
-        </p:spPr>
-        <p:txBody>
-          <a:bodyPr wrap="square" lIns="0" tIns="0" rIns="0" bIns="0" rtlCol="0" anchor="ctr"/>
-          <a:lstStyle/>
-          <a:p>
-            <a:pPr indent="0" marL="0">
-              <a:buNone/>
-            </a:pPr>
-            <a:r>
-              <a:rPr lang="en-US" sz="900" i="1" dirty="0">
-                <a:solidFill>
-                  <a:srgbClr val="3B7DD8"/>
-                </a:solidFill>
-                <a:latin typeface="Arial" pitchFamily="34" charset="0"/>
-                <a:ea typeface="Arial" pitchFamily="34" charset="-122"/>
-                <a:cs typeface="Arial" pitchFamily="34" charset="-120"/>
-              </a:rPr>
-              <a:t>「朝食も美味しかったです」</a:t>
-            </a:r>
-            <a:endParaRPr lang="en-US" sz="900" dirty="0"/>
-          </a:p>
-        </p:txBody>
-      </p:sp>
-      <p:sp>
-        <p:nvSpPr>
-          <p:cNvPr id="33" name="Shape 31"/>
-          <p:cNvSpPr/>
-          <p:nvPr/>
-        </p:nvSpPr>
-        <p:spPr>
-          <a:xfrm>
-            <a:off x="3291840" y="2880360"/>
-            <a:ext cx="2651760" cy="1600200"/>
-          </a:xfrm>
-          <a:prstGeom prst="rect">
-            <a:avLst/>
-          </a:prstGeom>
-          <a:solidFill>
-            <a:srgbClr val="FFFFFF"/>
-          </a:solidFill>
-          <a:ln/>
-          <a:effectLst>
-            <a:outerShdw sx="100000" sy="100000" kx="0" ky="0" algn="bl" rotWithShape="0" blurRad="50800" dist="25400" dir="8100000">
-              <a:srgbClr val="000000">
-                <a:alpha val="10000"/>
-              </a:srgbClr>
-            </a:outerShdw>
-          </a:effectLst>
-        </p:spPr>
-      </p:sp>
-      <p:sp>
-        <p:nvSpPr>
-          <p:cNvPr id="34" name="Shape 32"/>
-          <p:cNvSpPr/>
-          <p:nvPr/>
-        </p:nvSpPr>
-        <p:spPr>
-          <a:xfrm>
-            <a:off x="3291840" y="2880360"/>
-            <a:ext cx="54864" cy="1600200"/>
-          </a:xfrm>
-          <a:prstGeom prst="rect">
-            <a:avLst/>
-          </a:prstGeom>
-          <a:solidFill>
-            <a:srgbClr val="16A34A"/>
-          </a:solidFill>
-          <a:ln/>
-        </p:spPr>
-      </p:sp>
-      <p:sp>
-        <p:nvSpPr>
-          <p:cNvPr id="35" name="Shape 33"/>
-          <p:cNvSpPr/>
-          <p:nvPr/>
-        </p:nvSpPr>
-        <p:spPr>
-          <a:xfrm>
-            <a:off x="5120640" y="2953512"/>
-            <a:ext cx="658368" cy="228600"/>
-          </a:xfrm>
-          <a:prstGeom prst="rect">
-            <a:avLst/>
-          </a:prstGeom>
-          <a:solidFill>
-            <a:srgbClr val="DCFCE7"/>
-          </a:solidFill>
-          <a:ln/>
-        </p:spPr>
-      </p:sp>
-      <p:sp>
-        <p:nvSpPr>
-          <p:cNvPr id="36" name="Text 34"/>
-          <p:cNvSpPr/>
-          <p:nvPr/>
-        </p:nvSpPr>
-        <p:spPr>
-          <a:xfrm>
-            <a:off x="5120640" y="2953512"/>
-            <a:ext cx="658368" cy="228600"/>
-          </a:xfrm>
-          <a:prstGeom prst="rect">
-            <a:avLst/>
-          </a:prstGeom>
-          <a:noFill/>
-          <a:ln/>
-        </p:spPr>
-        <p:txBody>
-          <a:bodyPr wrap="square" lIns="0" tIns="0" rIns="0" bIns="0" rtlCol="0" anchor="ctr"/>
-          <a:lstStyle/>
-          <a:p>
-            <a:pPr algn="ctr" indent="0" marL="0">
-              <a:buNone/>
-            </a:pPr>
-            <a:r>
-              <a:rPr lang="en-US" sz="900" b="1" dirty="0">
-                <a:solidFill>
-                  <a:srgbClr val="16A34A"/>
-                </a:solidFill>
-                <a:latin typeface="Arial" pitchFamily="34" charset="0"/>
-                <a:ea typeface="Arial" pitchFamily="34" charset="-122"/>
-                <a:cs typeface="Arial" pitchFamily="34" charset="-120"/>
-              </a:rPr>
-              <a:t>20件+</a:t>
-            </a:r>
-            <a:endParaRPr lang="en-US" sz="900" dirty="0"/>
-          </a:p>
-        </p:txBody>
-      </p:sp>
-      <p:sp>
-        <p:nvSpPr>
           <p:cNvPr id="37" name="Text 35"/>
           <p:cNvSpPr/>
           <p:nvPr/>
@@ -11738,7 +11738,7 @@
                 <a:ea typeface="Arial" pitchFamily="34" charset="-122"/>
                 <a:cs typeface="Arial" pitchFamily="34" charset="-120"/>
               </a:rPr>
-              <a:t>「スタッフ良かった」</a:t>
+              <a:t>「下のカフェも利用しましたがルームキー提示で商品OFFサービスはなかなか他にはない点だと思いました」</a:t>
             </a:r>
             <a:endParaRPr lang="en-US" sz="900" dirty="0"/>
           </a:p>

--- a/納品レポート/ホテル別レポート/keyakigate_口コミ分析レポート.pptx
+++ b/納品レポート/ホテル別レポート/keyakigate_口コミ分析レポート.pptx
@@ -2784,7 +2784,7 @@
                 <a:ea typeface="Arial" pitchFamily="34" charset="-122"/>
                 <a:cs typeface="Arial" pitchFamily="34" charset="-120"/>
               </a:rPr>
-              <a:t>作成日：2026年3月27日</a:t>
+              <a:t>作成日：2026年3月28日</a:t>
             </a:r>
             <a:endParaRPr lang="en-US" sz="1000" dirty="0"/>
           </a:p>

--- a/納品レポート/ホテル別レポート/keyakigate_口コミ分析レポート.pptx
+++ b/納品レポート/ホテル別レポート/keyakigate_口コミ分析レポート.pptx
@@ -277,13 +277,13 @@
                   <c:v>9.83</c:v>
                 </c:pt>
                 <c:pt idx="1">
-                  <c:v>8.92</c:v>
+                  <c:v>8.97</c:v>
                 </c:pt>
                 <c:pt idx="2">
-                  <c:v>8.86</c:v>
+                  <c:v>8.93</c:v>
                 </c:pt>
                 <c:pt idx="3">
-                  <c:v>8.69</c:v>
+                  <c:v>8.71</c:v>
                 </c:pt>
                 <c:pt idx="4">
                   <c:v>8.67</c:v>
@@ -614,10 +614,10 @@
                 <c:formatCode>General</c:formatCode>
                 <c:ptCount val="7"/>
                 <c:pt idx="0">
-                  <c:v>55</c:v>
+                  <c:v>58</c:v>
                 </c:pt>
                 <c:pt idx="1">
-                  <c:v>5</c:v>
+                  <c:v>6</c:v>
                 </c:pt>
                 <c:pt idx="2">
                   <c:v>26</c:v>
@@ -2520,7 +2520,7 @@
                 <a:ea typeface="Arial" pitchFamily="34" charset="-122"/>
                 <a:cs typeface="Arial" pitchFamily="34" charset="-120"/>
               </a:rPr>
-              <a:t>レビュー総数：100件</a:t>
+              <a:t>レビュー総数：104件</a:t>
             </a:r>
             <a:endParaRPr lang="en-US" sz="1000" dirty="0"/>
           </a:p>
@@ -2800,7 +2800,7 @@
                 <a:ea typeface="Arial" pitchFamily="34" charset="-122"/>
                 <a:cs typeface="Arial" pitchFamily="34" charset="-120"/>
               </a:rPr>
-              <a:t>ホテルケヤキゲート東京府中は全体平均8.74点（10pt換算）、高評価率86.0%を達成しています。本レポートで示した改善施策を段階的に実施することで、さらなる顧客満足度向上が期待できます。</a:t>
+              <a:t>ホテルケヤキゲート東京府中は全体平均8.78点（10pt換算）、高評価率86.5%を達成しています。本レポートで示した改善施策を段階的に実施することで、さらなる顧客満足度向上が期待できます。</a:t>
             </a:r>
             <a:endParaRPr lang="en-US" sz="1200" dirty="0"/>
           </a:p>
@@ -3237,7 +3237,7 @@
                 <a:ea typeface="Arial" pitchFamily="34" charset="-122"/>
                 <a:cs typeface="Arial" pitchFamily="34" charset="-120"/>
               </a:rPr>
-              <a:t>8.74</a:t>
+              <a:t>8.78</a:t>
             </a:r>
             <a:endParaRPr lang="en-US" sz="2800" dirty="0"/>
           </a:p>
@@ -3355,7 +3355,7 @@
                 <a:ea typeface="Arial" pitchFamily="34" charset="-122"/>
                 <a:cs typeface="Arial" pitchFamily="34" charset="-120"/>
               </a:rPr>
-              <a:t>86.0%</a:t>
+              <a:t>86.5%</a:t>
             </a:r>
             <a:endParaRPr lang="en-US" sz="2800" dirty="0"/>
           </a:p>
@@ -3473,7 +3473,7 @@
                 <a:ea typeface="Arial" pitchFamily="34" charset="-122"/>
                 <a:cs typeface="Arial" pitchFamily="34" charset="-120"/>
               </a:rPr>
-              <a:t>4.0%</a:t>
+              <a:t>3.8%</a:t>
             </a:r>
             <a:endParaRPr lang="en-US" sz="2800" dirty="0"/>
           </a:p>
@@ -3591,7 +3591,7 @@
                 <a:ea typeface="Arial" pitchFamily="34" charset="-122"/>
                 <a:cs typeface="Arial" pitchFamily="34" charset="-120"/>
               </a:rPr>
-              <a:t>100件</a:t>
+              <a:t>104件</a:t>
             </a:r>
             <a:endParaRPr lang="en-US" sz="2800" dirty="0"/>
           </a:p>
@@ -4672,7 +4672,7 @@
                           <a:ea typeface="Arial" pitchFamily="34" charset="-122"/>
                           <a:cs typeface="Arial" pitchFamily="34" charset="-120"/>
                         </a:rPr>
-                        <a:t>37</a:t>
+                        <a:t>39</a:t>
                       </a:r>
                       <a:endParaRPr lang="en-US" sz="800" dirty="0">
                         <a:latin typeface="Arial" charset="0"/>
@@ -4740,7 +4740,7 @@
                           <a:ea typeface="Arial" pitchFamily="34" charset="-122"/>
                           <a:cs typeface="Arial" pitchFamily="34" charset="-120"/>
                         </a:rPr>
-                        <a:t>4.46/5</a:t>
+                        <a:t>4.49/5</a:t>
                       </a:r>
                       <a:endParaRPr lang="en-US" sz="800" dirty="0">
                         <a:latin typeface="Arial" charset="0"/>
@@ -4808,7 +4808,7 @@
                           <a:ea typeface="Arial" pitchFamily="34" charset="-122"/>
                           <a:cs typeface="Arial" pitchFamily="34" charset="-120"/>
                         </a:rPr>
-                        <a:t>8.92</a:t>
+                        <a:t>8.97</a:t>
                       </a:r>
                       <a:endParaRPr lang="en-US" sz="800" dirty="0">
                         <a:latin typeface="Arial" charset="0"/>
@@ -5014,7 +5014,7 @@
                           <a:ea typeface="Arial" pitchFamily="34" charset="-122"/>
                           <a:cs typeface="Arial" pitchFamily="34" charset="-120"/>
                         </a:rPr>
-                        <a:t>14</a:t>
+                        <a:t>15</a:t>
                       </a:r>
                       <a:endParaRPr lang="en-US" sz="800" dirty="0">
                         <a:latin typeface="Arial" charset="0"/>
@@ -5082,7 +5082,7 @@
                           <a:ea typeface="Arial" pitchFamily="34" charset="-122"/>
                           <a:cs typeface="Arial" pitchFamily="34" charset="-120"/>
                         </a:rPr>
-                        <a:t>8.86/10</a:t>
+                        <a:t>8.93/10</a:t>
                       </a:r>
                       <a:endParaRPr lang="en-US" sz="800" dirty="0">
                         <a:latin typeface="Arial" charset="0"/>
@@ -5150,7 +5150,7 @@
                           <a:ea typeface="Arial" pitchFamily="34" charset="-122"/>
                           <a:cs typeface="Arial" pitchFamily="34" charset="-120"/>
                         </a:rPr>
-                        <a:t>8.86</a:t>
+                        <a:t>8.93</a:t>
                       </a:r>
                       <a:endParaRPr lang="en-US" sz="800" dirty="0">
                         <a:latin typeface="Arial" charset="0"/>
@@ -5356,7 +5356,7 @@
                           <a:ea typeface="Arial" pitchFamily="34" charset="-122"/>
                           <a:cs typeface="Arial" pitchFamily="34" charset="-120"/>
                         </a:rPr>
-                        <a:t>16</a:t>
+                        <a:t>17</a:t>
                       </a:r>
                       <a:endParaRPr lang="en-US" sz="800" dirty="0">
                         <a:latin typeface="Arial" charset="0"/>
@@ -5424,7 +5424,7 @@
                           <a:ea typeface="Arial" pitchFamily="34" charset="-122"/>
                           <a:cs typeface="Arial" pitchFamily="34" charset="-120"/>
                         </a:rPr>
-                        <a:t>8.69/10</a:t>
+                        <a:t>8.71/10</a:t>
                       </a:r>
                       <a:endParaRPr lang="en-US" sz="800" dirty="0">
                         <a:latin typeface="Arial" charset="0"/>
@@ -5492,7 +5492,7 @@
                           <a:ea typeface="Arial" pitchFamily="34" charset="-122"/>
                           <a:cs typeface="Arial" pitchFamily="34" charset="-120"/>
                         </a:rPr>
-                        <a:t>8.69</a:t>
+                        <a:t>8.71</a:t>
                       </a:r>
                       <a:endParaRPr lang="en-US" sz="800" dirty="0">
                         <a:latin typeface="Arial" charset="0"/>
@@ -6629,7 +6629,7 @@
                 <a:ea typeface="Arial" pitchFamily="34" charset="-122"/>
                 <a:cs typeface="Arial" pitchFamily="34" charset="-120"/>
               </a:rPr>
-              <a:t>86件（86.0%）</a:t>
+              <a:t>90件（86.5%）</a:t>
             </a:r>
             <a:endParaRPr lang="en-US" sz="1600" dirty="0"/>
           </a:p>
@@ -6727,7 +6727,7 @@
                 <a:ea typeface="Arial" pitchFamily="34" charset="-122"/>
                 <a:cs typeface="Arial" pitchFamily="34" charset="-120"/>
               </a:rPr>
-              <a:t>10件（10.0%）</a:t>
+              <a:t>10件（9.6%）</a:t>
             </a:r>
             <a:endParaRPr lang="en-US" sz="1600" dirty="0"/>
           </a:p>
@@ -6825,7 +6825,7 @@
                 <a:ea typeface="Arial" pitchFamily="34" charset="-122"/>
                 <a:cs typeface="Arial" pitchFamily="34" charset="-120"/>
               </a:rPr>
-              <a:t>4件（4.0%）</a:t>
+              <a:t>4件（3.8%）</a:t>
             </a:r>
             <a:endParaRPr lang="en-US" sz="1600" dirty="0"/>
           </a:p>
@@ -6987,7 +6987,7 @@
                 <a:ea typeface="Arial" pitchFamily="34" charset="-122"/>
                 <a:cs typeface="Arial" pitchFamily="34" charset="-120"/>
               </a:rPr>
-              <a:t>高評価レビュー（8-10点: 86件）の分析から、主要な強みテーマを抽出しています。立地・アクセス、客室清潔感、スタッフ対応が高評価の中心的テーマです。</a:t>
+              <a:t>高評価レビュー（8-10点: 90件）の分析から、主要な強みテーマを抽出しています。立地・アクセス、客室清潔感、スタッフ対応が高評価の中心的テーマです。</a:t>
             </a:r>
             <a:endParaRPr lang="en-US" sz="1200" dirty="0"/>
           </a:p>
@@ -8027,7 +8027,7 @@
                 <a:ea typeface="Arial" pitchFamily="34" charset="-122"/>
                 <a:cs typeface="Arial" pitchFamily="34" charset="-120"/>
               </a:rPr>
-              <a:t>全体平均 8.74点 → 目標 9.24点</a:t>
+              <a:t>全体平均 8.78点 → 目標 9.28点</a:t>
             </a:r>
             <a:endParaRPr lang="en-US" sz="1200" dirty="0"/>
           </a:p>
@@ -8044,7 +8044,7 @@
                 <a:ea typeface="Arial" pitchFamily="34" charset="-122"/>
                 <a:cs typeface="Arial" pitchFamily="34" charset="-120"/>
               </a:rPr>
-              <a:t>高評価率 86.0% → 目標 91.0%</a:t>
+              <a:t>高評価率 86.5% → 目標 91.5%</a:t>
             </a:r>
             <a:endParaRPr lang="en-US" sz="1200" dirty="0"/>
           </a:p>
@@ -8061,7 +8061,7 @@
                 <a:ea typeface="Arial" pitchFamily="34" charset="-122"/>
                 <a:cs typeface="Arial" pitchFamily="34" charset="-120"/>
               </a:rPr>
-              <a:t>低評価率 4.0% → 目標 2.0%</a:t>
+              <a:t>低評価率 3.8% → 目標 1.8%</a:t>
             </a:r>
             <a:endParaRPr lang="en-US" sz="1200" dirty="0"/>
           </a:p>

--- a/納品レポート/ホテル別レポート/keyakigate_口コミ分析レポート.pptx
+++ b/納品レポート/ホテル別レポート/keyakigate_口コミ分析レポート.pptx
@@ -274,10 +274,10 @@
                 <c:formatCode>General</c:formatCode>
                 <c:ptCount val="6"/>
                 <c:pt idx="0">
-                  <c:v>9.83</c:v>
+                  <c:v>9.86</c:v>
                 </c:pt>
                 <c:pt idx="1">
-                  <c:v>8.97</c:v>
+                  <c:v>9</c:v>
                 </c:pt>
                 <c:pt idx="2">
                   <c:v>8.93</c:v>
@@ -614,7 +614,7 @@
                 <c:formatCode>General</c:formatCode>
                 <c:ptCount val="7"/>
                 <c:pt idx="0">
-                  <c:v>58</c:v>
+                  <c:v>60</c:v>
                 </c:pt>
                 <c:pt idx="1">
                   <c:v>6</c:v>
@@ -2520,7 +2520,7 @@
                 <a:ea typeface="Arial" pitchFamily="34" charset="-122"/>
                 <a:cs typeface="Arial" pitchFamily="34" charset="-120"/>
               </a:rPr>
-              <a:t>レビュー総数：104件</a:t>
+              <a:t>レビュー総数：106件</a:t>
             </a:r>
             <a:endParaRPr lang="en-US" sz="1000" dirty="0"/>
           </a:p>
@@ -2800,7 +2800,7 @@
                 <a:ea typeface="Arial" pitchFamily="34" charset="-122"/>
                 <a:cs typeface="Arial" pitchFamily="34" charset="-120"/>
               </a:rPr>
-              <a:t>ホテルケヤキゲート東京府中は全体平均8.78点（10pt換算）、高評価率86.5%を達成しています。本レポートで示した改善施策を段階的に実施することで、さらなる顧客満足度向上が期待できます。</a:t>
+              <a:t>ホテルケヤキゲート東京府中は全体平均8.80点（10pt換算）、高評価率86.8%を達成しています。本レポートで示した改善施策を段階的に実施することで、さらなる顧客満足度向上が期待できます。</a:t>
             </a:r>
             <a:endParaRPr lang="en-US" sz="1200" dirty="0"/>
           </a:p>
@@ -3237,7 +3237,7 @@
                 <a:ea typeface="Arial" pitchFamily="34" charset="-122"/>
                 <a:cs typeface="Arial" pitchFamily="34" charset="-120"/>
               </a:rPr>
-              <a:t>8.78</a:t>
+              <a:t>8.80</a:t>
             </a:r>
             <a:endParaRPr lang="en-US" sz="2800" dirty="0"/>
           </a:p>
@@ -3355,7 +3355,7 @@
                 <a:ea typeface="Arial" pitchFamily="34" charset="-122"/>
                 <a:cs typeface="Arial" pitchFamily="34" charset="-120"/>
               </a:rPr>
-              <a:t>86.5%</a:t>
+              <a:t>86.8%</a:t>
             </a:r>
             <a:endParaRPr lang="en-US" sz="2800" dirty="0"/>
           </a:p>
@@ -3591,7 +3591,7 @@
                 <a:ea typeface="Arial" pitchFamily="34" charset="-122"/>
                 <a:cs typeface="Arial" pitchFamily="34" charset="-120"/>
               </a:rPr>
-              <a:t>104件</a:t>
+              <a:t>106件</a:t>
             </a:r>
             <a:endParaRPr lang="en-US" sz="2800" dirty="0"/>
           </a:p>
@@ -4330,7 +4330,7 @@
                           <a:ea typeface="Arial" pitchFamily="34" charset="-122"/>
                           <a:cs typeface="Arial" pitchFamily="34" charset="-120"/>
                         </a:rPr>
-                        <a:t>6</a:t>
+                        <a:t>7</a:t>
                       </a:r>
                       <a:endParaRPr lang="en-US" sz="800" dirty="0">
                         <a:latin typeface="Arial" charset="0"/>
@@ -4398,7 +4398,7 @@
                           <a:ea typeface="Arial" pitchFamily="34" charset="-122"/>
                           <a:cs typeface="Arial" pitchFamily="34" charset="-120"/>
                         </a:rPr>
-                        <a:t>9.83/10</a:t>
+                        <a:t>9.86/10</a:t>
                       </a:r>
                       <a:endParaRPr lang="en-US" sz="800" dirty="0">
                         <a:latin typeface="Arial" charset="0"/>
@@ -4466,7 +4466,7 @@
                           <a:ea typeface="Arial" pitchFamily="34" charset="-122"/>
                           <a:cs typeface="Arial" pitchFamily="34" charset="-120"/>
                         </a:rPr>
-                        <a:t>9.83</a:t>
+                        <a:t>9.86</a:t>
                       </a:r>
                       <a:endParaRPr lang="en-US" sz="800" dirty="0">
                         <a:latin typeface="Arial" charset="0"/>
@@ -4672,7 +4672,7 @@
                           <a:ea typeface="Arial" pitchFamily="34" charset="-122"/>
                           <a:cs typeface="Arial" pitchFamily="34" charset="-120"/>
                         </a:rPr>
-                        <a:t>39</a:t>
+                        <a:t>40</a:t>
                       </a:r>
                       <a:endParaRPr lang="en-US" sz="800" dirty="0">
                         <a:latin typeface="Arial" charset="0"/>
@@ -4740,7 +4740,7 @@
                           <a:ea typeface="Arial" pitchFamily="34" charset="-122"/>
                           <a:cs typeface="Arial" pitchFamily="34" charset="-120"/>
                         </a:rPr>
-                        <a:t>4.49/5</a:t>
+                        <a:t>4.50/5</a:t>
                       </a:r>
                       <a:endParaRPr lang="en-US" sz="800" dirty="0">
                         <a:latin typeface="Arial" charset="0"/>
@@ -4808,7 +4808,7 @@
                           <a:ea typeface="Arial" pitchFamily="34" charset="-122"/>
                           <a:cs typeface="Arial" pitchFamily="34" charset="-120"/>
                         </a:rPr>
-                        <a:t>8.97</a:t>
+                        <a:t>9.00</a:t>
                       </a:r>
                       <a:endParaRPr lang="en-US" sz="800" dirty="0">
                         <a:latin typeface="Arial" charset="0"/>
@@ -4876,7 +4876,7 @@
                           <a:ea typeface="Arial" pitchFamily="34" charset="-122"/>
                           <a:cs typeface="Arial" pitchFamily="34" charset="-120"/>
                         </a:rPr>
-                        <a:t>良好</a:t>
+                        <a:t>優秀</a:t>
                       </a:r>
                       <a:endParaRPr lang="en-US" sz="800" dirty="0">
                         <a:latin typeface="Arial" charset="0"/>
@@ -6629,7 +6629,7 @@
                 <a:ea typeface="Arial" pitchFamily="34" charset="-122"/>
                 <a:cs typeface="Arial" pitchFamily="34" charset="-120"/>
               </a:rPr>
-              <a:t>90件（86.5%）</a:t>
+              <a:t>92件（86.8%）</a:t>
             </a:r>
             <a:endParaRPr lang="en-US" sz="1600" dirty="0"/>
           </a:p>
@@ -6727,7 +6727,7 @@
                 <a:ea typeface="Arial" pitchFamily="34" charset="-122"/>
                 <a:cs typeface="Arial" pitchFamily="34" charset="-120"/>
               </a:rPr>
-              <a:t>10件（9.6%）</a:t>
+              <a:t>10件（9.4%）</a:t>
             </a:r>
             <a:endParaRPr lang="en-US" sz="1600" dirty="0"/>
           </a:p>
@@ -6987,7 +6987,7 @@
                 <a:ea typeface="Arial" pitchFamily="34" charset="-122"/>
                 <a:cs typeface="Arial" pitchFamily="34" charset="-120"/>
               </a:rPr>
-              <a:t>高評価レビュー（8-10点: 90件）の分析から、主要な強みテーマを抽出しています。立地・アクセス、客室清潔感、スタッフ対応が高評価の中心的テーマです。</a:t>
+              <a:t>高評価レビュー（8-10点: 92件）の分析から、主要な強みテーマを抽出しています。立地・アクセス、客室清潔感、スタッフ対応が高評価の中心的テーマです。</a:t>
             </a:r>
             <a:endParaRPr lang="en-US" sz="1200" dirty="0"/>
           </a:p>
@@ -8027,7 +8027,7 @@
                 <a:ea typeface="Arial" pitchFamily="34" charset="-122"/>
                 <a:cs typeface="Arial" pitchFamily="34" charset="-120"/>
               </a:rPr>
-              <a:t>全体平均 8.78点 → 目標 9.28点</a:t>
+              <a:t>全体平均 8.80点 → 目標 9.30点</a:t>
             </a:r>
             <a:endParaRPr lang="en-US" sz="1200" dirty="0"/>
           </a:p>
@@ -8044,7 +8044,7 @@
                 <a:ea typeface="Arial" pitchFamily="34" charset="-122"/>
                 <a:cs typeface="Arial" pitchFamily="34" charset="-120"/>
               </a:rPr>
-              <a:t>高評価率 86.5% → 目標 91.5%</a:t>
+              <a:t>高評価率 86.8% → 目標 91.8%</a:t>
             </a:r>
             <a:endParaRPr lang="en-US" sz="1200" dirty="0"/>
           </a:p>

--- a/納品レポート/ホテル別レポート/keyakigate_口コミ分析レポート.pptx
+++ b/納品レポート/ホテル別レポート/keyakigate_口コミ分析レポート.pptx
@@ -277,13 +277,13 @@
                   <c:v>9.86</c:v>
                 </c:pt>
                 <c:pt idx="1">
-                  <c:v>9</c:v>
+                  <c:v>9.02</c:v>
                 </c:pt>
                 <c:pt idx="2">
                   <c:v>8.93</c:v>
                 </c:pt>
                 <c:pt idx="3">
-                  <c:v>8.71</c:v>
+                  <c:v>8.67</c:v>
                 </c:pt>
                 <c:pt idx="4">
                   <c:v>8.67</c:v>
@@ -614,13 +614,13 @@
                 <c:formatCode>General</c:formatCode>
                 <c:ptCount val="7"/>
                 <c:pt idx="0">
-                  <c:v>60</c:v>
+                  <c:v>61</c:v>
                 </c:pt>
                 <c:pt idx="1">
                   <c:v>6</c:v>
                 </c:pt>
                 <c:pt idx="2">
-                  <c:v>26</c:v>
+                  <c:v>27</c:v>
                 </c:pt>
                 <c:pt idx="3">
                   <c:v>1</c:v>
@@ -2520,7 +2520,7 @@
                 <a:ea typeface="Arial" pitchFamily="34" charset="-122"/>
                 <a:cs typeface="Arial" pitchFamily="34" charset="-120"/>
               </a:rPr>
-              <a:t>レビュー総数：106件</a:t>
+              <a:t>レビュー総数：108件</a:t>
             </a:r>
             <a:endParaRPr lang="en-US" sz="1000" dirty="0"/>
           </a:p>
@@ -2800,7 +2800,7 @@
                 <a:ea typeface="Arial" pitchFamily="34" charset="-122"/>
                 <a:cs typeface="Arial" pitchFamily="34" charset="-120"/>
               </a:rPr>
-              <a:t>ホテルケヤキゲート東京府中は全体平均8.80点（10pt換算）、高評価率86.8%を達成しています。本レポートで示した改善施策を段階的に実施することで、さらなる顧客満足度向上が期待できます。</a:t>
+              <a:t>ホテルケヤキゲート東京府中は全体平均8.81点（10pt換算）、高評価率87.0%を達成しています。本レポートで示した改善施策を段階的に実施することで、さらなる顧客満足度向上が期待できます。</a:t>
             </a:r>
             <a:endParaRPr lang="en-US" sz="1200" dirty="0"/>
           </a:p>
@@ -3237,7 +3237,7 @@
                 <a:ea typeface="Arial" pitchFamily="34" charset="-122"/>
                 <a:cs typeface="Arial" pitchFamily="34" charset="-120"/>
               </a:rPr>
-              <a:t>8.80</a:t>
+              <a:t>8.81</a:t>
             </a:r>
             <a:endParaRPr lang="en-US" sz="2800" dirty="0"/>
           </a:p>
@@ -3355,7 +3355,7 @@
                 <a:ea typeface="Arial" pitchFamily="34" charset="-122"/>
                 <a:cs typeface="Arial" pitchFamily="34" charset="-120"/>
               </a:rPr>
-              <a:t>86.8%</a:t>
+              <a:t>87.0%</a:t>
             </a:r>
             <a:endParaRPr lang="en-US" sz="2800" dirty="0"/>
           </a:p>
@@ -3473,7 +3473,7 @@
                 <a:ea typeface="Arial" pitchFamily="34" charset="-122"/>
                 <a:cs typeface="Arial" pitchFamily="34" charset="-120"/>
               </a:rPr>
-              <a:t>3.8%</a:t>
+              <a:t>3.7%</a:t>
             </a:r>
             <a:endParaRPr lang="en-US" sz="2800" dirty="0"/>
           </a:p>
@@ -3591,7 +3591,7 @@
                 <a:ea typeface="Arial" pitchFamily="34" charset="-122"/>
                 <a:cs typeface="Arial" pitchFamily="34" charset="-120"/>
               </a:rPr>
-              <a:t>106件</a:t>
+              <a:t>108件</a:t>
             </a:r>
             <a:endParaRPr lang="en-US" sz="2800" dirty="0"/>
           </a:p>
@@ -4672,7 +4672,7 @@
                           <a:ea typeface="Arial" pitchFamily="34" charset="-122"/>
                           <a:cs typeface="Arial" pitchFamily="34" charset="-120"/>
                         </a:rPr>
-                        <a:t>40</a:t>
+                        <a:t>41</a:t>
                       </a:r>
                       <a:endParaRPr lang="en-US" sz="800" dirty="0">
                         <a:latin typeface="Arial" charset="0"/>
@@ -4740,7 +4740,7 @@
                           <a:ea typeface="Arial" pitchFamily="34" charset="-122"/>
                           <a:cs typeface="Arial" pitchFamily="34" charset="-120"/>
                         </a:rPr>
-                        <a:t>4.50/5</a:t>
+                        <a:t>4.51/5</a:t>
                       </a:r>
                       <a:endParaRPr lang="en-US" sz="800" dirty="0">
                         <a:latin typeface="Arial" charset="0"/>
@@ -4808,7 +4808,7 @@
                           <a:ea typeface="Arial" pitchFamily="34" charset="-122"/>
                           <a:cs typeface="Arial" pitchFamily="34" charset="-120"/>
                         </a:rPr>
-                        <a:t>9.00</a:t>
+                        <a:t>9.02</a:t>
                       </a:r>
                       <a:endParaRPr lang="en-US" sz="800" dirty="0">
                         <a:latin typeface="Arial" charset="0"/>
@@ -5356,7 +5356,7 @@
                           <a:ea typeface="Arial" pitchFamily="34" charset="-122"/>
                           <a:cs typeface="Arial" pitchFamily="34" charset="-120"/>
                         </a:rPr>
-                        <a:t>17</a:t>
+                        <a:t>18</a:t>
                       </a:r>
                       <a:endParaRPr lang="en-US" sz="800" dirty="0">
                         <a:latin typeface="Arial" charset="0"/>
@@ -5424,7 +5424,7 @@
                           <a:ea typeface="Arial" pitchFamily="34" charset="-122"/>
                           <a:cs typeface="Arial" pitchFamily="34" charset="-120"/>
                         </a:rPr>
-                        <a:t>8.71/10</a:t>
+                        <a:t>8.67/10</a:t>
                       </a:r>
                       <a:endParaRPr lang="en-US" sz="800" dirty="0">
                         <a:latin typeface="Arial" charset="0"/>
@@ -5492,7 +5492,7 @@
                           <a:ea typeface="Arial" pitchFamily="34" charset="-122"/>
                           <a:cs typeface="Arial" pitchFamily="34" charset="-120"/>
                         </a:rPr>
-                        <a:t>8.71</a:t>
+                        <a:t>8.67</a:t>
                       </a:r>
                       <a:endParaRPr lang="en-US" sz="800" dirty="0">
                         <a:latin typeface="Arial" charset="0"/>
@@ -6629,7 +6629,7 @@
                 <a:ea typeface="Arial" pitchFamily="34" charset="-122"/>
                 <a:cs typeface="Arial" pitchFamily="34" charset="-120"/>
               </a:rPr>
-              <a:t>92件（86.8%）</a:t>
+              <a:t>94件（87.0%）</a:t>
             </a:r>
             <a:endParaRPr lang="en-US" sz="1600" dirty="0"/>
           </a:p>
@@ -6727,7 +6727,7 @@
                 <a:ea typeface="Arial" pitchFamily="34" charset="-122"/>
                 <a:cs typeface="Arial" pitchFamily="34" charset="-120"/>
               </a:rPr>
-              <a:t>10件（9.4%）</a:t>
+              <a:t>10件（9.3%）</a:t>
             </a:r>
             <a:endParaRPr lang="en-US" sz="1600" dirty="0"/>
           </a:p>
@@ -6825,7 +6825,7 @@
                 <a:ea typeface="Arial" pitchFamily="34" charset="-122"/>
                 <a:cs typeface="Arial" pitchFamily="34" charset="-120"/>
               </a:rPr>
-              <a:t>4件（3.8%）</a:t>
+              <a:t>4件（3.7%）</a:t>
             </a:r>
             <a:endParaRPr lang="en-US" sz="1600" dirty="0"/>
           </a:p>
@@ -6987,7 +6987,7 @@
                 <a:ea typeface="Arial" pitchFamily="34" charset="-122"/>
                 <a:cs typeface="Arial" pitchFamily="34" charset="-120"/>
               </a:rPr>
-              <a:t>高評価レビュー（8-10点: 92件）の分析から、主要な強みテーマを抽出しています。立地・アクセス、客室清潔感、スタッフ対応が高評価の中心的テーマです。</a:t>
+              <a:t>高評価レビュー（8-10点: 94件）の分析から、主要な強みテーマを抽出しています。立地・アクセス、客室清潔感、スタッフ対応が高評価の中心的テーマです。</a:t>
             </a:r>
             <a:endParaRPr lang="en-US" sz="1200" dirty="0"/>
           </a:p>
@@ -8027,7 +8027,7 @@
                 <a:ea typeface="Arial" pitchFamily="34" charset="-122"/>
                 <a:cs typeface="Arial" pitchFamily="34" charset="-120"/>
               </a:rPr>
-              <a:t>全体平均 8.80点 → 目標 9.30点</a:t>
+              <a:t>全体平均 8.81点 → 目標 9.31点</a:t>
             </a:r>
             <a:endParaRPr lang="en-US" sz="1200" dirty="0"/>
           </a:p>
@@ -8044,7 +8044,7 @@
                 <a:ea typeface="Arial" pitchFamily="34" charset="-122"/>
                 <a:cs typeface="Arial" pitchFamily="34" charset="-120"/>
               </a:rPr>
-              <a:t>高評価率 86.8% → 目標 91.8%</a:t>
+              <a:t>高評価率 87.0% → 目標 92.0%</a:t>
             </a:r>
             <a:endParaRPr lang="en-US" sz="1200" dirty="0"/>
           </a:p>
@@ -8061,7 +8061,7 @@
                 <a:ea typeface="Arial" pitchFamily="34" charset="-122"/>
                 <a:cs typeface="Arial" pitchFamily="34" charset="-120"/>
               </a:rPr>
-              <a:t>低評価率 3.8% → 目標 1.8%</a:t>
+              <a:t>低評価率 3.7% → 目標 1.7%</a:t>
             </a:r>
             <a:endParaRPr lang="en-US" sz="1200" dirty="0"/>
           </a:p>

--- a/納品レポート/ホテル別レポート/keyakigate_口コミ分析レポート.pptx
+++ b/納品レポート/ホテル別レポート/keyakigate_口コミ分析レポート.pptx
@@ -249,10 +249,10 @@
                     <c:v>Trip.com</c:v>
                   </c:pt>
                   <c:pt idx="1">
-                    <c:v>楽天トラベル</c:v>
+                    <c:v>Agoda</c:v>
                   </c:pt>
                   <c:pt idx="2">
-                    <c:v>Agoda</c:v>
+                    <c:v>楽天トラベル</c:v>
                   </c:pt>
                   <c:pt idx="3">
                     <c:v>Booking.com</c:v>
@@ -274,22 +274,22 @@
                 <c:formatCode>General</c:formatCode>
                 <c:ptCount val="6"/>
                 <c:pt idx="0">
-                  <c:v>9.86</c:v>
+                  <c:v>9.75</c:v>
                 </c:pt>
                 <c:pt idx="1">
-                  <c:v>9.02</c:v>
+                  <c:v>9.5</c:v>
                 </c:pt>
                 <c:pt idx="2">
-                  <c:v>8.93</c:v>
+                  <c:v>9.38</c:v>
                 </c:pt>
                 <c:pt idx="3">
-                  <c:v>8.67</c:v>
+                  <c:v>9</c:v>
                 </c:pt>
                 <c:pt idx="4">
                   <c:v>8.67</c:v>
                 </c:pt>
                 <c:pt idx="5">
-                  <c:v>6.67</c:v>
+                  <c:v>6</c:v>
                 </c:pt>
               </c:numCache>
             </c:numRef>
@@ -565,22 +565,11 @@
               <a:effectLst/>
             </c:spPr>
           </c:dPt>
-          <c:dPt>
-            <c:idx val="6"/>
-            <c:invertIfNegative val="0"/>
-            <c:bubble3D val="0"/>
-            <c:spPr>
-              <a:solidFill>
-                <a:srgbClr val="DC2626"/>
-              </a:solidFill>
-              <a:effectLst/>
-            </c:spPr>
-          </c:dPt>
           <c:cat>
             <c:multiLvlStrRef>
-              <c:f>Sheet1!$A$2:$A$8</c:f>
+              <c:f>Sheet1!$A$2:$A$7</c:f>
               <c:multiLvlStrCache>
-                <c:ptCount val="7"/>
+                <c:ptCount val="6"/>
                 <c:lvl>
                   <c:pt idx="0">
                     <c:v>10点</c:v>
@@ -598,9 +587,6 @@
                     <c:v>6点</c:v>
                   </c:pt>
                   <c:pt idx="5">
-                    <c:v>4点</c:v>
-                  </c:pt>
-                  <c:pt idx="6">
                     <c:v>2点</c:v>
                   </c:pt>
                 </c:lvl>
@@ -609,30 +595,27 @@
           </c:cat>
           <c:val>
             <c:numRef>
-              <c:f>Sheet1!$B$2:$B$8</c:f>
+              <c:f>Sheet1!$B$2:$B$7</c:f>
               <c:numCache>
                 <c:formatCode>General</c:formatCode>
-                <c:ptCount val="7"/>
+                <c:ptCount val="6"/>
                 <c:pt idx="0">
-                  <c:v>61</c:v>
+                  <c:v>37</c:v>
                 </c:pt>
                 <c:pt idx="1">
-                  <c:v>6</c:v>
+                  <c:v>3</c:v>
                 </c:pt>
                 <c:pt idx="2">
-                  <c:v>27</c:v>
+                  <c:v>12</c:v>
                 </c:pt>
                 <c:pt idx="3">
                   <c:v>1</c:v>
                 </c:pt>
                 <c:pt idx="4">
-                  <c:v>9</c:v>
+                  <c:v>4</c:v>
                 </c:pt>
                 <c:pt idx="5">
-                  <c:v>1</c:v>
-                </c:pt>
-                <c:pt idx="6">
-                  <c:v>3</c:v>
+                  <c:v>2</c:v>
                 </c:pt>
               </c:numCache>
             </c:numRef>
@@ -2520,7 +2503,7 @@
                 <a:ea typeface="Arial" pitchFamily="34" charset="-122"/>
                 <a:cs typeface="Arial" pitchFamily="34" charset="-120"/>
               </a:rPr>
-              <a:t>レビュー総数：108件</a:t>
+              <a:t>レビュー総数：59件</a:t>
             </a:r>
             <a:endParaRPr lang="en-US" sz="1000" dirty="0"/>
           </a:p>
@@ -2800,7 +2783,7 @@
                 <a:ea typeface="Arial" pitchFamily="34" charset="-122"/>
                 <a:cs typeface="Arial" pitchFamily="34" charset="-120"/>
               </a:rPr>
-              <a:t>ホテルケヤキゲート東京府中は全体平均8.81点（10pt換算）、高評価率87.0%を達成しています。本レポートで示した改善施策を段階的に実施することで、さらなる顧客満足度向上が期待できます。</a:t>
+              <a:t>ホテルケヤキゲート東京府中は全体平均8.95点（10pt換算）、高評価率88.1%を達成しています。本レポートで示した改善施策を段階的に実施することで、さらなる顧客満足度向上が期待できます。</a:t>
             </a:r>
             <a:endParaRPr lang="en-US" sz="1200" dirty="0"/>
           </a:p>
@@ -3237,7 +3220,7 @@
                 <a:ea typeface="Arial" pitchFamily="34" charset="-122"/>
                 <a:cs typeface="Arial" pitchFamily="34" charset="-120"/>
               </a:rPr>
-              <a:t>8.81</a:t>
+              <a:t>8.95</a:t>
             </a:r>
             <a:endParaRPr lang="en-US" sz="2800" dirty="0"/>
           </a:p>
@@ -3355,7 +3338,7 @@
                 <a:ea typeface="Arial" pitchFamily="34" charset="-122"/>
                 <a:cs typeface="Arial" pitchFamily="34" charset="-120"/>
               </a:rPr>
-              <a:t>87.0%</a:t>
+              <a:t>88.1%</a:t>
             </a:r>
             <a:endParaRPr lang="en-US" sz="2800" dirty="0"/>
           </a:p>
@@ -3473,7 +3456,7 @@
                 <a:ea typeface="Arial" pitchFamily="34" charset="-122"/>
                 <a:cs typeface="Arial" pitchFamily="34" charset="-120"/>
               </a:rPr>
-              <a:t>3.7%</a:t>
+              <a:t>3.4%</a:t>
             </a:r>
             <a:endParaRPr lang="en-US" sz="2800" dirty="0"/>
           </a:p>
@@ -3591,7 +3574,7 @@
                 <a:ea typeface="Arial" pitchFamily="34" charset="-122"/>
                 <a:cs typeface="Arial" pitchFamily="34" charset="-120"/>
               </a:rPr>
-              <a:t>108件</a:t>
+              <a:t>59件</a:t>
             </a:r>
             <a:endParaRPr lang="en-US" sz="2800" dirty="0"/>
           </a:p>
@@ -4330,7 +4313,7 @@
                           <a:ea typeface="Arial" pitchFamily="34" charset="-122"/>
                           <a:cs typeface="Arial" pitchFamily="34" charset="-120"/>
                         </a:rPr>
-                        <a:t>7</a:t>
+                        <a:t>4</a:t>
                       </a:r>
                       <a:endParaRPr lang="en-US" sz="800" dirty="0">
                         <a:latin typeface="Arial" charset="0"/>
@@ -4398,7 +4381,7 @@
                           <a:ea typeface="Arial" pitchFamily="34" charset="-122"/>
                           <a:cs typeface="Arial" pitchFamily="34" charset="-120"/>
                         </a:rPr>
-                        <a:t>9.86/10</a:t>
+                        <a:t>9.75/10</a:t>
                       </a:r>
                       <a:endParaRPr lang="en-US" sz="800" dirty="0">
                         <a:latin typeface="Arial" charset="0"/>
@@ -4466,7 +4449,349 @@
                           <a:ea typeface="Arial" pitchFamily="34" charset="-122"/>
                           <a:cs typeface="Arial" pitchFamily="34" charset="-120"/>
                         </a:rPr>
-                        <a:t>9.86</a:t>
+                        <a:t>9.75</a:t>
+                      </a:r>
+                      <a:endParaRPr lang="en-US" sz="800" dirty="0">
+                        <a:latin typeface="Arial" charset="0"/>
+                        <a:ea typeface="Arial" charset="0"/>
+                        <a:cs typeface="Arial" charset="0"/>
+                      </a:endParaRPr>
+                    </a:p>
+                  </a:txBody>
+                  <a:tcPr marL="91440" marR="91440" marT="45720" marB="45720">
+                    <a:lnL w="6350" cap="flat" cmpd="sng" algn="ctr">
+                      <a:solidFill>
+                        <a:srgbClr val="CCCCCC"/>
+                      </a:solidFill>
+                      <a:prstDash val="solid"/>
+                      <a:round/>
+                      <a:headEnd type="none" w="med" len="med"/>
+                      <a:tailEnd type="none" w="med" len="med"/>
+                    </a:lnL>
+                    <a:lnR w="6350" cap="flat" cmpd="sng" algn="ctr">
+                      <a:solidFill>
+                        <a:srgbClr val="CCCCCC"/>
+                      </a:solidFill>
+                      <a:prstDash val="solid"/>
+                      <a:round/>
+                      <a:headEnd type="none" w="med" len="med"/>
+                      <a:tailEnd type="none" w="med" len="med"/>
+                    </a:lnR>
+                    <a:lnT w="6350" cap="flat" cmpd="sng" algn="ctr">
+                      <a:solidFill>
+                        <a:srgbClr val="CCCCCC"/>
+                      </a:solidFill>
+                      <a:prstDash val="solid"/>
+                      <a:round/>
+                      <a:headEnd type="none" w="med" len="med"/>
+                      <a:tailEnd type="none" w="med" len="med"/>
+                    </a:lnT>
+                    <a:lnB w="6350" cap="flat" cmpd="sng" algn="ctr">
+                      <a:solidFill>
+                        <a:srgbClr val="CCCCCC"/>
+                      </a:solidFill>
+                      <a:prstDash val="solid"/>
+                      <a:round/>
+                      <a:headEnd type="none" w="med" len="med"/>
+                      <a:tailEnd type="none" w="med" len="med"/>
+                    </a:lnB>
+                    <a:solidFill>
+                      <a:srgbClr val="FFFFFF"/>
+                    </a:solidFill>
+                  </a:tcPr>
+                </a:tc>
+                <a:tc>
+                  <a:txBody>
+                    <a:bodyPr/>
+                    <a:lstStyle/>
+                    <a:p>
+                      <a:pPr algn="ctr" indent="0" marL="0">
+                        <a:buNone/>
+                      </a:pPr>
+                      <a:r>
+                        <a:rPr lang="en-US" sz="800" dirty="0">
+                          <a:solidFill>
+                            <a:srgbClr val="000000"/>
+                          </a:solidFill>
+                          <a:latin typeface="Arial" pitchFamily="34" charset="0"/>
+                          <a:ea typeface="Arial" pitchFamily="34" charset="-122"/>
+                          <a:cs typeface="Arial" pitchFamily="34" charset="-120"/>
+                        </a:rPr>
+                        <a:t>優秀</a:t>
+                      </a:r>
+                      <a:endParaRPr lang="en-US" sz="800" dirty="0">
+                        <a:latin typeface="Arial" charset="0"/>
+                        <a:ea typeface="Arial" charset="0"/>
+                        <a:cs typeface="Arial" charset="0"/>
+                      </a:endParaRPr>
+                    </a:p>
+                  </a:txBody>
+                  <a:tcPr marL="91440" marR="91440" marT="45720" marB="45720">
+                    <a:lnL w="6350" cap="flat" cmpd="sng" algn="ctr">
+                      <a:solidFill>
+                        <a:srgbClr val="CCCCCC"/>
+                      </a:solidFill>
+                      <a:prstDash val="solid"/>
+                      <a:round/>
+                      <a:headEnd type="none" w="med" len="med"/>
+                      <a:tailEnd type="none" w="med" len="med"/>
+                    </a:lnL>
+                    <a:lnR w="6350" cap="flat" cmpd="sng" algn="ctr">
+                      <a:solidFill>
+                        <a:srgbClr val="CCCCCC"/>
+                      </a:solidFill>
+                      <a:prstDash val="solid"/>
+                      <a:round/>
+                      <a:headEnd type="none" w="med" len="med"/>
+                      <a:tailEnd type="none" w="med" len="med"/>
+                    </a:lnR>
+                    <a:lnT w="6350" cap="flat" cmpd="sng" algn="ctr">
+                      <a:solidFill>
+                        <a:srgbClr val="CCCCCC"/>
+                      </a:solidFill>
+                      <a:prstDash val="solid"/>
+                      <a:round/>
+                      <a:headEnd type="none" w="med" len="med"/>
+                      <a:tailEnd type="none" w="med" len="med"/>
+                    </a:lnT>
+                    <a:lnB w="6350" cap="flat" cmpd="sng" algn="ctr">
+                      <a:solidFill>
+                        <a:srgbClr val="CCCCCC"/>
+                      </a:solidFill>
+                      <a:prstDash val="solid"/>
+                      <a:round/>
+                      <a:headEnd type="none" w="med" len="med"/>
+                      <a:tailEnd type="none" w="med" len="med"/>
+                    </a:lnB>
+                    <a:solidFill>
+                      <a:srgbClr val="FFFFFF"/>
+                    </a:solidFill>
+                  </a:tcPr>
+                </a:tc>
+              </a:tr>
+              <a:tr h="0">
+                <a:tc>
+                  <a:txBody>
+                    <a:bodyPr/>
+                    <a:lstStyle/>
+                    <a:p>
+                      <a:pPr algn="ctr" indent="0" marL="0">
+                        <a:buNone/>
+                      </a:pPr>
+                      <a:r>
+                        <a:rPr lang="en-US" sz="800" dirty="0">
+                          <a:solidFill>
+                            <a:srgbClr val="000000"/>
+                          </a:solidFill>
+                          <a:latin typeface="Arial" pitchFamily="34" charset="0"/>
+                          <a:ea typeface="Arial" pitchFamily="34" charset="-122"/>
+                          <a:cs typeface="Arial" pitchFamily="34" charset="-120"/>
+                        </a:rPr>
+                        <a:t>Agoda</a:t>
+                      </a:r>
+                      <a:endParaRPr lang="en-US" sz="800" dirty="0">
+                        <a:latin typeface="Arial" charset="0"/>
+                        <a:ea typeface="Arial" charset="0"/>
+                        <a:cs typeface="Arial" charset="0"/>
+                      </a:endParaRPr>
+                    </a:p>
+                  </a:txBody>
+                  <a:tcPr marL="91440" marR="91440" marT="45720" marB="45720">
+                    <a:lnL w="6350" cap="flat" cmpd="sng" algn="ctr">
+                      <a:solidFill>
+                        <a:srgbClr val="CCCCCC"/>
+                      </a:solidFill>
+                      <a:prstDash val="solid"/>
+                      <a:round/>
+                      <a:headEnd type="none" w="med" len="med"/>
+                      <a:tailEnd type="none" w="med" len="med"/>
+                    </a:lnL>
+                    <a:lnR w="6350" cap="flat" cmpd="sng" algn="ctr">
+                      <a:solidFill>
+                        <a:srgbClr val="CCCCCC"/>
+                      </a:solidFill>
+                      <a:prstDash val="solid"/>
+                      <a:round/>
+                      <a:headEnd type="none" w="med" len="med"/>
+                      <a:tailEnd type="none" w="med" len="med"/>
+                    </a:lnR>
+                    <a:lnT w="6350" cap="flat" cmpd="sng" algn="ctr">
+                      <a:solidFill>
+                        <a:srgbClr val="CCCCCC"/>
+                      </a:solidFill>
+                      <a:prstDash val="solid"/>
+                      <a:round/>
+                      <a:headEnd type="none" w="med" len="med"/>
+                      <a:tailEnd type="none" w="med" len="med"/>
+                    </a:lnT>
+                    <a:lnB w="6350" cap="flat" cmpd="sng" algn="ctr">
+                      <a:solidFill>
+                        <a:srgbClr val="CCCCCC"/>
+                      </a:solidFill>
+                      <a:prstDash val="solid"/>
+                      <a:round/>
+                      <a:headEnd type="none" w="med" len="med"/>
+                      <a:tailEnd type="none" w="med" len="med"/>
+                    </a:lnB>
+                    <a:solidFill>
+                      <a:srgbClr val="FFFFFF"/>
+                    </a:solidFill>
+                  </a:tcPr>
+                </a:tc>
+                <a:tc>
+                  <a:txBody>
+                    <a:bodyPr/>
+                    <a:lstStyle/>
+                    <a:p>
+                      <a:pPr algn="ctr" indent="0" marL="0">
+                        <a:buNone/>
+                      </a:pPr>
+                      <a:r>
+                        <a:rPr lang="en-US" sz="800" dirty="0">
+                          <a:solidFill>
+                            <a:srgbClr val="000000"/>
+                          </a:solidFill>
+                          <a:latin typeface="Arial" pitchFamily="34" charset="0"/>
+                          <a:ea typeface="Arial" pitchFamily="34" charset="-122"/>
+                          <a:cs typeface="Arial" pitchFamily="34" charset="-120"/>
+                        </a:rPr>
+                        <a:t>4</a:t>
+                      </a:r>
+                      <a:endParaRPr lang="en-US" sz="800" dirty="0">
+                        <a:latin typeface="Arial" charset="0"/>
+                        <a:ea typeface="Arial" charset="0"/>
+                        <a:cs typeface="Arial" charset="0"/>
+                      </a:endParaRPr>
+                    </a:p>
+                  </a:txBody>
+                  <a:tcPr marL="91440" marR="91440" marT="45720" marB="45720">
+                    <a:lnL w="6350" cap="flat" cmpd="sng" algn="ctr">
+                      <a:solidFill>
+                        <a:srgbClr val="CCCCCC"/>
+                      </a:solidFill>
+                      <a:prstDash val="solid"/>
+                      <a:round/>
+                      <a:headEnd type="none" w="med" len="med"/>
+                      <a:tailEnd type="none" w="med" len="med"/>
+                    </a:lnL>
+                    <a:lnR w="6350" cap="flat" cmpd="sng" algn="ctr">
+                      <a:solidFill>
+                        <a:srgbClr val="CCCCCC"/>
+                      </a:solidFill>
+                      <a:prstDash val="solid"/>
+                      <a:round/>
+                      <a:headEnd type="none" w="med" len="med"/>
+                      <a:tailEnd type="none" w="med" len="med"/>
+                    </a:lnR>
+                    <a:lnT w="6350" cap="flat" cmpd="sng" algn="ctr">
+                      <a:solidFill>
+                        <a:srgbClr val="CCCCCC"/>
+                      </a:solidFill>
+                      <a:prstDash val="solid"/>
+                      <a:round/>
+                      <a:headEnd type="none" w="med" len="med"/>
+                      <a:tailEnd type="none" w="med" len="med"/>
+                    </a:lnT>
+                    <a:lnB w="6350" cap="flat" cmpd="sng" algn="ctr">
+                      <a:solidFill>
+                        <a:srgbClr val="CCCCCC"/>
+                      </a:solidFill>
+                      <a:prstDash val="solid"/>
+                      <a:round/>
+                      <a:headEnd type="none" w="med" len="med"/>
+                      <a:tailEnd type="none" w="med" len="med"/>
+                    </a:lnB>
+                    <a:solidFill>
+                      <a:srgbClr val="FFFFFF"/>
+                    </a:solidFill>
+                  </a:tcPr>
+                </a:tc>
+                <a:tc>
+                  <a:txBody>
+                    <a:bodyPr/>
+                    <a:lstStyle/>
+                    <a:p>
+                      <a:pPr algn="ctr" indent="0" marL="0">
+                        <a:buNone/>
+                      </a:pPr>
+                      <a:r>
+                        <a:rPr lang="en-US" sz="800" dirty="0">
+                          <a:solidFill>
+                            <a:srgbClr val="000000"/>
+                          </a:solidFill>
+                          <a:latin typeface="Arial" pitchFamily="34" charset="0"/>
+                          <a:ea typeface="Arial" pitchFamily="34" charset="-122"/>
+                          <a:cs typeface="Arial" pitchFamily="34" charset="-120"/>
+                        </a:rPr>
+                        <a:t>9.50/10</a:t>
+                      </a:r>
+                      <a:endParaRPr lang="en-US" sz="800" dirty="0">
+                        <a:latin typeface="Arial" charset="0"/>
+                        <a:ea typeface="Arial" charset="0"/>
+                        <a:cs typeface="Arial" charset="0"/>
+                      </a:endParaRPr>
+                    </a:p>
+                  </a:txBody>
+                  <a:tcPr marL="91440" marR="91440" marT="45720" marB="45720">
+                    <a:lnL w="6350" cap="flat" cmpd="sng" algn="ctr">
+                      <a:solidFill>
+                        <a:srgbClr val="CCCCCC"/>
+                      </a:solidFill>
+                      <a:prstDash val="solid"/>
+                      <a:round/>
+                      <a:headEnd type="none" w="med" len="med"/>
+                      <a:tailEnd type="none" w="med" len="med"/>
+                    </a:lnL>
+                    <a:lnR w="6350" cap="flat" cmpd="sng" algn="ctr">
+                      <a:solidFill>
+                        <a:srgbClr val="CCCCCC"/>
+                      </a:solidFill>
+                      <a:prstDash val="solid"/>
+                      <a:round/>
+                      <a:headEnd type="none" w="med" len="med"/>
+                      <a:tailEnd type="none" w="med" len="med"/>
+                    </a:lnR>
+                    <a:lnT w="6350" cap="flat" cmpd="sng" algn="ctr">
+                      <a:solidFill>
+                        <a:srgbClr val="CCCCCC"/>
+                      </a:solidFill>
+                      <a:prstDash val="solid"/>
+                      <a:round/>
+                      <a:headEnd type="none" w="med" len="med"/>
+                      <a:tailEnd type="none" w="med" len="med"/>
+                    </a:lnT>
+                    <a:lnB w="6350" cap="flat" cmpd="sng" algn="ctr">
+                      <a:solidFill>
+                        <a:srgbClr val="CCCCCC"/>
+                      </a:solidFill>
+                      <a:prstDash val="solid"/>
+                      <a:round/>
+                      <a:headEnd type="none" w="med" len="med"/>
+                      <a:tailEnd type="none" w="med" len="med"/>
+                    </a:lnB>
+                    <a:solidFill>
+                      <a:srgbClr val="FFFFFF"/>
+                    </a:solidFill>
+                  </a:tcPr>
+                </a:tc>
+                <a:tc>
+                  <a:txBody>
+                    <a:bodyPr/>
+                    <a:lstStyle/>
+                    <a:p>
+                      <a:pPr algn="ctr" indent="0" marL="0">
+                        <a:buNone/>
+                      </a:pPr>
+                      <a:r>
+                        <a:rPr lang="en-US" sz="800" dirty="0">
+                          <a:solidFill>
+                            <a:srgbClr val="000000"/>
+                          </a:solidFill>
+                          <a:latin typeface="Arial" pitchFamily="34" charset="0"/>
+                          <a:ea typeface="Arial" pitchFamily="34" charset="-122"/>
+                          <a:cs typeface="Arial" pitchFamily="34" charset="-120"/>
+                        </a:rPr>
+                        <a:t>9.50</a:t>
                       </a:r>
                       <a:endParaRPr lang="en-US" sz="800" dirty="0">
                         <a:latin typeface="Arial" charset="0"/>
@@ -4672,7 +4997,7 @@
                           <a:ea typeface="Arial" pitchFamily="34" charset="-122"/>
                           <a:cs typeface="Arial" pitchFamily="34" charset="-120"/>
                         </a:rPr>
-                        <a:t>41</a:t>
+                        <a:t>26</a:t>
                       </a:r>
                       <a:endParaRPr lang="en-US" sz="800" dirty="0">
                         <a:latin typeface="Arial" charset="0"/>
@@ -4740,7 +5065,7 @@
                           <a:ea typeface="Arial" pitchFamily="34" charset="-122"/>
                           <a:cs typeface="Arial" pitchFamily="34" charset="-120"/>
                         </a:rPr>
-                        <a:t>4.51/5</a:t>
+                        <a:t>4.69/5</a:t>
                       </a:r>
                       <a:endParaRPr lang="en-US" sz="800" dirty="0">
                         <a:latin typeface="Arial" charset="0"/>
@@ -4808,7 +5133,7 @@
                           <a:ea typeface="Arial" pitchFamily="34" charset="-122"/>
                           <a:cs typeface="Arial" pitchFamily="34" charset="-120"/>
                         </a:rPr>
-                        <a:t>9.02</a:t>
+                        <a:t>9.38</a:t>
                       </a:r>
                       <a:endParaRPr lang="en-US" sz="800" dirty="0">
                         <a:latin typeface="Arial" charset="0"/>
@@ -4877,348 +5202,6 @@
                           <a:cs typeface="Arial" pitchFamily="34" charset="-120"/>
                         </a:rPr>
                         <a:t>優秀</a:t>
-                      </a:r>
-                      <a:endParaRPr lang="en-US" sz="800" dirty="0">
-                        <a:latin typeface="Arial" charset="0"/>
-                        <a:ea typeface="Arial" charset="0"/>
-                        <a:cs typeface="Arial" charset="0"/>
-                      </a:endParaRPr>
-                    </a:p>
-                  </a:txBody>
-                  <a:tcPr marL="91440" marR="91440" marT="45720" marB="45720">
-                    <a:lnL w="6350" cap="flat" cmpd="sng" algn="ctr">
-                      <a:solidFill>
-                        <a:srgbClr val="CCCCCC"/>
-                      </a:solidFill>
-                      <a:prstDash val="solid"/>
-                      <a:round/>
-                      <a:headEnd type="none" w="med" len="med"/>
-                      <a:tailEnd type="none" w="med" len="med"/>
-                    </a:lnL>
-                    <a:lnR w="6350" cap="flat" cmpd="sng" algn="ctr">
-                      <a:solidFill>
-                        <a:srgbClr val="CCCCCC"/>
-                      </a:solidFill>
-                      <a:prstDash val="solid"/>
-                      <a:round/>
-                      <a:headEnd type="none" w="med" len="med"/>
-                      <a:tailEnd type="none" w="med" len="med"/>
-                    </a:lnR>
-                    <a:lnT w="6350" cap="flat" cmpd="sng" algn="ctr">
-                      <a:solidFill>
-                        <a:srgbClr val="CCCCCC"/>
-                      </a:solidFill>
-                      <a:prstDash val="solid"/>
-                      <a:round/>
-                      <a:headEnd type="none" w="med" len="med"/>
-                      <a:tailEnd type="none" w="med" len="med"/>
-                    </a:lnT>
-                    <a:lnB w="6350" cap="flat" cmpd="sng" algn="ctr">
-                      <a:solidFill>
-                        <a:srgbClr val="CCCCCC"/>
-                      </a:solidFill>
-                      <a:prstDash val="solid"/>
-                      <a:round/>
-                      <a:headEnd type="none" w="med" len="med"/>
-                      <a:tailEnd type="none" w="med" len="med"/>
-                    </a:lnB>
-                    <a:solidFill>
-                      <a:srgbClr val="FFFFFF"/>
-                    </a:solidFill>
-                  </a:tcPr>
-                </a:tc>
-              </a:tr>
-              <a:tr h="0">
-                <a:tc>
-                  <a:txBody>
-                    <a:bodyPr/>
-                    <a:lstStyle/>
-                    <a:p>
-                      <a:pPr algn="ctr" indent="0" marL="0">
-                        <a:buNone/>
-                      </a:pPr>
-                      <a:r>
-                        <a:rPr lang="en-US" sz="800" dirty="0">
-                          <a:solidFill>
-                            <a:srgbClr val="000000"/>
-                          </a:solidFill>
-                          <a:latin typeface="Arial" pitchFamily="34" charset="0"/>
-                          <a:ea typeface="Arial" pitchFamily="34" charset="-122"/>
-                          <a:cs typeface="Arial" pitchFamily="34" charset="-120"/>
-                        </a:rPr>
-                        <a:t>Agoda</a:t>
-                      </a:r>
-                      <a:endParaRPr lang="en-US" sz="800" dirty="0">
-                        <a:latin typeface="Arial" charset="0"/>
-                        <a:ea typeface="Arial" charset="0"/>
-                        <a:cs typeface="Arial" charset="0"/>
-                      </a:endParaRPr>
-                    </a:p>
-                  </a:txBody>
-                  <a:tcPr marL="91440" marR="91440" marT="45720" marB="45720">
-                    <a:lnL w="6350" cap="flat" cmpd="sng" algn="ctr">
-                      <a:solidFill>
-                        <a:srgbClr val="CCCCCC"/>
-                      </a:solidFill>
-                      <a:prstDash val="solid"/>
-                      <a:round/>
-                      <a:headEnd type="none" w="med" len="med"/>
-                      <a:tailEnd type="none" w="med" len="med"/>
-                    </a:lnL>
-                    <a:lnR w="6350" cap="flat" cmpd="sng" algn="ctr">
-                      <a:solidFill>
-                        <a:srgbClr val="CCCCCC"/>
-                      </a:solidFill>
-                      <a:prstDash val="solid"/>
-                      <a:round/>
-                      <a:headEnd type="none" w="med" len="med"/>
-                      <a:tailEnd type="none" w="med" len="med"/>
-                    </a:lnR>
-                    <a:lnT w="6350" cap="flat" cmpd="sng" algn="ctr">
-                      <a:solidFill>
-                        <a:srgbClr val="CCCCCC"/>
-                      </a:solidFill>
-                      <a:prstDash val="solid"/>
-                      <a:round/>
-                      <a:headEnd type="none" w="med" len="med"/>
-                      <a:tailEnd type="none" w="med" len="med"/>
-                    </a:lnT>
-                    <a:lnB w="6350" cap="flat" cmpd="sng" algn="ctr">
-                      <a:solidFill>
-                        <a:srgbClr val="CCCCCC"/>
-                      </a:solidFill>
-                      <a:prstDash val="solid"/>
-                      <a:round/>
-                      <a:headEnd type="none" w="med" len="med"/>
-                      <a:tailEnd type="none" w="med" len="med"/>
-                    </a:lnB>
-                    <a:solidFill>
-                      <a:srgbClr val="FFFFFF"/>
-                    </a:solidFill>
-                  </a:tcPr>
-                </a:tc>
-                <a:tc>
-                  <a:txBody>
-                    <a:bodyPr/>
-                    <a:lstStyle/>
-                    <a:p>
-                      <a:pPr algn="ctr" indent="0" marL="0">
-                        <a:buNone/>
-                      </a:pPr>
-                      <a:r>
-                        <a:rPr lang="en-US" sz="800" dirty="0">
-                          <a:solidFill>
-                            <a:srgbClr val="000000"/>
-                          </a:solidFill>
-                          <a:latin typeface="Arial" pitchFamily="34" charset="0"/>
-                          <a:ea typeface="Arial" pitchFamily="34" charset="-122"/>
-                          <a:cs typeface="Arial" pitchFamily="34" charset="-120"/>
-                        </a:rPr>
-                        <a:t>15</a:t>
-                      </a:r>
-                      <a:endParaRPr lang="en-US" sz="800" dirty="0">
-                        <a:latin typeface="Arial" charset="0"/>
-                        <a:ea typeface="Arial" charset="0"/>
-                        <a:cs typeface="Arial" charset="0"/>
-                      </a:endParaRPr>
-                    </a:p>
-                  </a:txBody>
-                  <a:tcPr marL="91440" marR="91440" marT="45720" marB="45720">
-                    <a:lnL w="6350" cap="flat" cmpd="sng" algn="ctr">
-                      <a:solidFill>
-                        <a:srgbClr val="CCCCCC"/>
-                      </a:solidFill>
-                      <a:prstDash val="solid"/>
-                      <a:round/>
-                      <a:headEnd type="none" w="med" len="med"/>
-                      <a:tailEnd type="none" w="med" len="med"/>
-                    </a:lnL>
-                    <a:lnR w="6350" cap="flat" cmpd="sng" algn="ctr">
-                      <a:solidFill>
-                        <a:srgbClr val="CCCCCC"/>
-                      </a:solidFill>
-                      <a:prstDash val="solid"/>
-                      <a:round/>
-                      <a:headEnd type="none" w="med" len="med"/>
-                      <a:tailEnd type="none" w="med" len="med"/>
-                    </a:lnR>
-                    <a:lnT w="6350" cap="flat" cmpd="sng" algn="ctr">
-                      <a:solidFill>
-                        <a:srgbClr val="CCCCCC"/>
-                      </a:solidFill>
-                      <a:prstDash val="solid"/>
-                      <a:round/>
-                      <a:headEnd type="none" w="med" len="med"/>
-                      <a:tailEnd type="none" w="med" len="med"/>
-                    </a:lnT>
-                    <a:lnB w="6350" cap="flat" cmpd="sng" algn="ctr">
-                      <a:solidFill>
-                        <a:srgbClr val="CCCCCC"/>
-                      </a:solidFill>
-                      <a:prstDash val="solid"/>
-                      <a:round/>
-                      <a:headEnd type="none" w="med" len="med"/>
-                      <a:tailEnd type="none" w="med" len="med"/>
-                    </a:lnB>
-                    <a:solidFill>
-                      <a:srgbClr val="FFFFFF"/>
-                    </a:solidFill>
-                  </a:tcPr>
-                </a:tc>
-                <a:tc>
-                  <a:txBody>
-                    <a:bodyPr/>
-                    <a:lstStyle/>
-                    <a:p>
-                      <a:pPr algn="ctr" indent="0" marL="0">
-                        <a:buNone/>
-                      </a:pPr>
-                      <a:r>
-                        <a:rPr lang="en-US" sz="800" dirty="0">
-                          <a:solidFill>
-                            <a:srgbClr val="000000"/>
-                          </a:solidFill>
-                          <a:latin typeface="Arial" pitchFamily="34" charset="0"/>
-                          <a:ea typeface="Arial" pitchFamily="34" charset="-122"/>
-                          <a:cs typeface="Arial" pitchFamily="34" charset="-120"/>
-                        </a:rPr>
-                        <a:t>8.93/10</a:t>
-                      </a:r>
-                      <a:endParaRPr lang="en-US" sz="800" dirty="0">
-                        <a:latin typeface="Arial" charset="0"/>
-                        <a:ea typeface="Arial" charset="0"/>
-                        <a:cs typeface="Arial" charset="0"/>
-                      </a:endParaRPr>
-                    </a:p>
-                  </a:txBody>
-                  <a:tcPr marL="91440" marR="91440" marT="45720" marB="45720">
-                    <a:lnL w="6350" cap="flat" cmpd="sng" algn="ctr">
-                      <a:solidFill>
-                        <a:srgbClr val="CCCCCC"/>
-                      </a:solidFill>
-                      <a:prstDash val="solid"/>
-                      <a:round/>
-                      <a:headEnd type="none" w="med" len="med"/>
-                      <a:tailEnd type="none" w="med" len="med"/>
-                    </a:lnL>
-                    <a:lnR w="6350" cap="flat" cmpd="sng" algn="ctr">
-                      <a:solidFill>
-                        <a:srgbClr val="CCCCCC"/>
-                      </a:solidFill>
-                      <a:prstDash val="solid"/>
-                      <a:round/>
-                      <a:headEnd type="none" w="med" len="med"/>
-                      <a:tailEnd type="none" w="med" len="med"/>
-                    </a:lnR>
-                    <a:lnT w="6350" cap="flat" cmpd="sng" algn="ctr">
-                      <a:solidFill>
-                        <a:srgbClr val="CCCCCC"/>
-                      </a:solidFill>
-                      <a:prstDash val="solid"/>
-                      <a:round/>
-                      <a:headEnd type="none" w="med" len="med"/>
-                      <a:tailEnd type="none" w="med" len="med"/>
-                    </a:lnT>
-                    <a:lnB w="6350" cap="flat" cmpd="sng" algn="ctr">
-                      <a:solidFill>
-                        <a:srgbClr val="CCCCCC"/>
-                      </a:solidFill>
-                      <a:prstDash val="solid"/>
-                      <a:round/>
-                      <a:headEnd type="none" w="med" len="med"/>
-                      <a:tailEnd type="none" w="med" len="med"/>
-                    </a:lnB>
-                    <a:solidFill>
-                      <a:srgbClr val="FFFFFF"/>
-                    </a:solidFill>
-                  </a:tcPr>
-                </a:tc>
-                <a:tc>
-                  <a:txBody>
-                    <a:bodyPr/>
-                    <a:lstStyle/>
-                    <a:p>
-                      <a:pPr algn="ctr" indent="0" marL="0">
-                        <a:buNone/>
-                      </a:pPr>
-                      <a:r>
-                        <a:rPr lang="en-US" sz="800" dirty="0">
-                          <a:solidFill>
-                            <a:srgbClr val="000000"/>
-                          </a:solidFill>
-                          <a:latin typeface="Arial" pitchFamily="34" charset="0"/>
-                          <a:ea typeface="Arial" pitchFamily="34" charset="-122"/>
-                          <a:cs typeface="Arial" pitchFamily="34" charset="-120"/>
-                        </a:rPr>
-                        <a:t>8.93</a:t>
-                      </a:r>
-                      <a:endParaRPr lang="en-US" sz="800" dirty="0">
-                        <a:latin typeface="Arial" charset="0"/>
-                        <a:ea typeface="Arial" charset="0"/>
-                        <a:cs typeface="Arial" charset="0"/>
-                      </a:endParaRPr>
-                    </a:p>
-                  </a:txBody>
-                  <a:tcPr marL="91440" marR="91440" marT="45720" marB="45720">
-                    <a:lnL w="6350" cap="flat" cmpd="sng" algn="ctr">
-                      <a:solidFill>
-                        <a:srgbClr val="CCCCCC"/>
-                      </a:solidFill>
-                      <a:prstDash val="solid"/>
-                      <a:round/>
-                      <a:headEnd type="none" w="med" len="med"/>
-                      <a:tailEnd type="none" w="med" len="med"/>
-                    </a:lnL>
-                    <a:lnR w="6350" cap="flat" cmpd="sng" algn="ctr">
-                      <a:solidFill>
-                        <a:srgbClr val="CCCCCC"/>
-                      </a:solidFill>
-                      <a:prstDash val="solid"/>
-                      <a:round/>
-                      <a:headEnd type="none" w="med" len="med"/>
-                      <a:tailEnd type="none" w="med" len="med"/>
-                    </a:lnR>
-                    <a:lnT w="6350" cap="flat" cmpd="sng" algn="ctr">
-                      <a:solidFill>
-                        <a:srgbClr val="CCCCCC"/>
-                      </a:solidFill>
-                      <a:prstDash val="solid"/>
-                      <a:round/>
-                      <a:headEnd type="none" w="med" len="med"/>
-                      <a:tailEnd type="none" w="med" len="med"/>
-                    </a:lnT>
-                    <a:lnB w="6350" cap="flat" cmpd="sng" algn="ctr">
-                      <a:solidFill>
-                        <a:srgbClr val="CCCCCC"/>
-                      </a:solidFill>
-                      <a:prstDash val="solid"/>
-                      <a:round/>
-                      <a:headEnd type="none" w="med" len="med"/>
-                      <a:tailEnd type="none" w="med" len="med"/>
-                    </a:lnB>
-                    <a:solidFill>
-                      <a:srgbClr val="FFFFFF"/>
-                    </a:solidFill>
-                  </a:tcPr>
-                </a:tc>
-                <a:tc>
-                  <a:txBody>
-                    <a:bodyPr/>
-                    <a:lstStyle/>
-                    <a:p>
-                      <a:pPr algn="ctr" indent="0" marL="0">
-                        <a:buNone/>
-                      </a:pPr>
-                      <a:r>
-                        <a:rPr lang="en-US" sz="800" dirty="0">
-                          <a:solidFill>
-                            <a:srgbClr val="000000"/>
-                          </a:solidFill>
-                          <a:latin typeface="Arial" pitchFamily="34" charset="0"/>
-                          <a:ea typeface="Arial" pitchFamily="34" charset="-122"/>
-                          <a:cs typeface="Arial" pitchFamily="34" charset="-120"/>
-                        </a:rPr>
-                        <a:t>良好</a:t>
                       </a:r>
                       <a:endParaRPr lang="en-US" sz="800" dirty="0">
                         <a:latin typeface="Arial" charset="0"/>
@@ -5356,7 +5339,7 @@
                           <a:ea typeface="Arial" pitchFamily="34" charset="-122"/>
                           <a:cs typeface="Arial" pitchFamily="34" charset="-120"/>
                         </a:rPr>
-                        <a:t>18</a:t>
+                        <a:t>11</a:t>
                       </a:r>
                       <a:endParaRPr lang="en-US" sz="800" dirty="0">
                         <a:latin typeface="Arial" charset="0"/>
@@ -5424,7 +5407,7 @@
                           <a:ea typeface="Arial" pitchFamily="34" charset="-122"/>
                           <a:cs typeface="Arial" pitchFamily="34" charset="-120"/>
                         </a:rPr>
-                        <a:t>8.67/10</a:t>
+                        <a:t>9.00/10</a:t>
                       </a:r>
                       <a:endParaRPr lang="en-US" sz="800" dirty="0">
                         <a:latin typeface="Arial" charset="0"/>
@@ -5492,7 +5475,7 @@
                           <a:ea typeface="Arial" pitchFamily="34" charset="-122"/>
                           <a:cs typeface="Arial" pitchFamily="34" charset="-120"/>
                         </a:rPr>
-                        <a:t>8.67</a:t>
+                        <a:t>9.00</a:t>
                       </a:r>
                       <a:endParaRPr lang="en-US" sz="800" dirty="0">
                         <a:latin typeface="Arial" charset="0"/>
@@ -5560,7 +5543,7 @@
                           <a:ea typeface="Arial" pitchFamily="34" charset="-122"/>
                           <a:cs typeface="Arial" pitchFamily="34" charset="-120"/>
                         </a:rPr>
-                        <a:t>良好</a:t>
+                        <a:t>優秀</a:t>
                       </a:r>
                       <a:endParaRPr lang="en-US" sz="800" dirty="0">
                         <a:latin typeface="Arial" charset="0"/>
@@ -5698,7 +5681,7 @@
                           <a:ea typeface="Arial" pitchFamily="34" charset="-122"/>
                           <a:cs typeface="Arial" pitchFamily="34" charset="-120"/>
                         </a:rPr>
-                        <a:t>21</a:t>
+                        <a:t>9</a:t>
                       </a:r>
                       <a:endParaRPr lang="en-US" sz="800" dirty="0">
                         <a:latin typeface="Arial" charset="0"/>
@@ -6040,7 +6023,7 @@
                           <a:ea typeface="Arial" pitchFamily="34" charset="-122"/>
                           <a:cs typeface="Arial" pitchFamily="34" charset="-120"/>
                         </a:rPr>
-                        <a:t>6</a:t>
+                        <a:t>5</a:t>
                       </a:r>
                       <a:endParaRPr lang="en-US" sz="800" dirty="0">
                         <a:latin typeface="Arial" charset="0"/>
@@ -6108,7 +6091,7 @@
                           <a:ea typeface="Arial" pitchFamily="34" charset="-122"/>
                           <a:cs typeface="Arial" pitchFamily="34" charset="-120"/>
                         </a:rPr>
-                        <a:t>3.33/5</a:t>
+                        <a:t>3.00/5</a:t>
                       </a:r>
                       <a:endParaRPr lang="en-US" sz="800" dirty="0">
                         <a:latin typeface="Arial" charset="0"/>
@@ -6176,7 +6159,7 @@
                           <a:ea typeface="Arial" pitchFamily="34" charset="-122"/>
                           <a:cs typeface="Arial" pitchFamily="34" charset="-120"/>
                         </a:rPr>
-                        <a:t>6.67</a:t>
+                        <a:t>6.00</a:t>
                       </a:r>
                       <a:endParaRPr lang="en-US" sz="800" dirty="0">
                         <a:latin typeface="Arial" charset="0"/>
@@ -6629,7 +6612,7 @@
                 <a:ea typeface="Arial" pitchFamily="34" charset="-122"/>
                 <a:cs typeface="Arial" pitchFamily="34" charset="-120"/>
               </a:rPr>
-              <a:t>94件（87.0%）</a:t>
+              <a:t>52件（88.1%）</a:t>
             </a:r>
             <a:endParaRPr lang="en-US" sz="1600" dirty="0"/>
           </a:p>
@@ -6727,7 +6710,7 @@
                 <a:ea typeface="Arial" pitchFamily="34" charset="-122"/>
                 <a:cs typeface="Arial" pitchFamily="34" charset="-120"/>
               </a:rPr>
-              <a:t>10件（9.3%）</a:t>
+              <a:t>5件（8.5%）</a:t>
             </a:r>
             <a:endParaRPr lang="en-US" sz="1600" dirty="0"/>
           </a:p>
@@ -6825,7 +6808,7 @@
                 <a:ea typeface="Arial" pitchFamily="34" charset="-122"/>
                 <a:cs typeface="Arial" pitchFamily="34" charset="-120"/>
               </a:rPr>
-              <a:t>4件（3.7%）</a:t>
+              <a:t>2件（3.4%）</a:t>
             </a:r>
             <a:endParaRPr lang="en-US" sz="1600" dirty="0"/>
           </a:p>
@@ -6987,7 +6970,7 @@
                 <a:ea typeface="Arial" pitchFamily="34" charset="-122"/>
                 <a:cs typeface="Arial" pitchFamily="34" charset="-120"/>
               </a:rPr>
-              <a:t>高評価レビュー（8-10点: 94件）の分析から、主要な強みテーマを抽出しています。立地・アクセス、客室清潔感、スタッフ対応が高評価の中心的テーマです。</a:t>
+              <a:t>高評価レビュー（8-10点: 52件）の分析から、主要な強みテーマを抽出しています。立地・アクセス、客室清潔感、スタッフ対応が高評価の中心的テーマです。</a:t>
             </a:r>
             <a:endParaRPr lang="en-US" sz="1200" dirty="0"/>
           </a:p>
@@ -7247,7 +7230,7 @@
                 <a:ea typeface="Arial" pitchFamily="34" charset="-122"/>
                 <a:cs typeface="Arial" pitchFamily="34" charset="-120"/>
               </a:rPr>
-              <a:t>低評価・中評価レビュー（14件）から改善課題を優先度別に整理しています。S/A/B/Cの4段階で優先度を設定し、計画的な改善を推進します。</a:t>
+              <a:t>低評価・中評価レビュー（7件）から改善課題を優先度別に整理しています。S/A/B/Cの4段階で優先度を設定し、計画的な改善を推進します。</a:t>
             </a:r>
             <a:endParaRPr lang="en-US" sz="1200" dirty="0"/>
           </a:p>
@@ -8027,7 +8010,7 @@
                 <a:ea typeface="Arial" pitchFamily="34" charset="-122"/>
                 <a:cs typeface="Arial" pitchFamily="34" charset="-120"/>
               </a:rPr>
-              <a:t>全体平均 8.81点 → 目標 9.31点</a:t>
+              <a:t>全体平均 8.95点 → 目標 9.45点</a:t>
             </a:r>
             <a:endParaRPr lang="en-US" sz="1200" dirty="0"/>
           </a:p>
@@ -8044,7 +8027,7 @@
                 <a:ea typeface="Arial" pitchFamily="34" charset="-122"/>
                 <a:cs typeface="Arial" pitchFamily="34" charset="-120"/>
               </a:rPr>
-              <a:t>高評価率 87.0% → 目標 92.0%</a:t>
+              <a:t>高評価率 88.1% → 目標 93.1%</a:t>
             </a:r>
             <a:endParaRPr lang="en-US" sz="1200" dirty="0"/>
           </a:p>
@@ -8061,7 +8044,7 @@
                 <a:ea typeface="Arial" pitchFamily="34" charset="-122"/>
                 <a:cs typeface="Arial" pitchFamily="34" charset="-120"/>
               </a:rPr>
-              <a:t>低評価率 3.7% → 目標 1.7%</a:t>
+              <a:t>低評価率 3.4% → 目標 1.4%</a:t>
             </a:r>
             <a:endParaRPr lang="en-US" sz="1200" dirty="0"/>
           </a:p>

--- a/納品レポート/ホテル別レポート/keyakigate_口コミ分析レポート.pptx
+++ b/納品レポート/ホテル別レポート/keyakigate_口コミ分析レポート.pptx
@@ -183,10 +183,10 @@
                     <c:v>Trip.com</c:v>
                   </c:pt>
                   <c:pt idx="1">
-                    <c:v>楽天トラベル</c:v>
+                    <c:v>Agoda</c:v>
                   </c:pt>
                   <c:pt idx="2">
-                    <c:v>Agoda</c:v>
+                    <c:v>楽天トラベル</c:v>
                   </c:pt>
                   <c:pt idx="3">
                     <c:v>Booking.com</c:v>
@@ -208,22 +208,22 @@
                 <c:formatCode>General</c:formatCode>
                 <c:ptCount val="6"/>
                 <c:pt idx="0">
-                  <c:v>9.86</c:v>
+                  <c:v>9.75</c:v>
                 </c:pt>
                 <c:pt idx="1">
-                  <c:v>9.02</c:v>
+                  <c:v>9.5</c:v>
                 </c:pt>
                 <c:pt idx="2">
-                  <c:v>8.93</c:v>
+                  <c:v>9.38</c:v>
                 </c:pt>
                 <c:pt idx="3">
-                  <c:v>8.67</c:v>
+                  <c:v>9</c:v>
                 </c:pt>
                 <c:pt idx="4">
                   <c:v>8.67</c:v>
                 </c:pt>
                 <c:pt idx="5">
-                  <c:v>6.67</c:v>
+                  <c:v>6</c:v>
                 </c:pt>
               </c:numCache>
             </c:numRef>
@@ -566,13 +566,13 @@
               <c:numCache>
                 <c:ptCount val="3"/>
                 <c:pt idx="0">
-                  <c:v>94</c:v>
+                  <c:v>52</c:v>
                 </c:pt>
                 <c:pt idx="1">
-                  <c:v>10</c:v>
+                  <c:v>5</c:v>
                 </c:pt>
                 <c:pt idx="2">
-                  <c:v>4</c:v>
+                  <c:v>2</c:v>
                 </c:pt>
               </c:numCache>
             </c:numRef>
@@ -746,22 +746,11 @@
               <a:effectLst/>
             </c:spPr>
           </c:dPt>
-          <c:dPt>
-            <c:idx val="6"/>
-            <c:invertIfNegative val="0"/>
-            <c:bubble3D val="0"/>
-            <c:spPr>
-              <a:solidFill>
-                <a:srgbClr val="DC2626"/>
-              </a:solidFill>
-              <a:effectLst/>
-            </c:spPr>
-          </c:dPt>
           <c:cat>
             <c:multiLvlStrRef>
-              <c:f>Sheet1!$A$2:$A$8</c:f>
+              <c:f>Sheet1!$A$2:$A$7</c:f>
               <c:multiLvlStrCache>
-                <c:ptCount val="7"/>
+                <c:ptCount val="6"/>
                 <c:lvl>
                   <c:pt idx="0">
                     <c:v>10点</c:v>
@@ -779,9 +768,6 @@
                     <c:v>6点</c:v>
                   </c:pt>
                   <c:pt idx="5">
-                    <c:v>4点</c:v>
-                  </c:pt>
-                  <c:pt idx="6">
                     <c:v>2点</c:v>
                   </c:pt>
                 </c:lvl>
@@ -790,30 +776,27 @@
           </c:cat>
           <c:val>
             <c:numRef>
-              <c:f>Sheet1!$B$2:$B$8</c:f>
+              <c:f>Sheet1!$B$2:$B$7</c:f>
               <c:numCache>
                 <c:formatCode>General</c:formatCode>
-                <c:ptCount val="7"/>
+                <c:ptCount val="6"/>
                 <c:pt idx="0">
-                  <c:v>61</c:v>
+                  <c:v>37</c:v>
                 </c:pt>
                 <c:pt idx="1">
-                  <c:v>6</c:v>
+                  <c:v>3</c:v>
                 </c:pt>
                 <c:pt idx="2">
-                  <c:v>27</c:v>
+                  <c:v>12</c:v>
                 </c:pt>
                 <c:pt idx="3">
                   <c:v>1</c:v>
                 </c:pt>
                 <c:pt idx="4">
-                  <c:v>9</c:v>
+                  <c:v>4</c:v>
                 </c:pt>
                 <c:pt idx="5">
-                  <c:v>1</c:v>
-                </c:pt>
-                <c:pt idx="6">
-                  <c:v>3</c:v>
+                  <c:v>2</c:v>
                 </c:pt>
               </c:numCache>
             </c:numRef>
@@ -2744,7 +2727,7 @@
                 <a:ea typeface="Arial" pitchFamily="34" charset="-122"/>
                 <a:cs typeface="Arial" pitchFamily="34" charset="-120"/>
               </a:rPr>
-              <a:t>分析対象期間：2026年2月〜3月</a:t>
+              <a:t>分析対象期間：2026年3月</a:t>
             </a:r>
             <a:endParaRPr lang="en-US" sz="1000" dirty="0"/>
           </a:p>
@@ -2764,7 +2747,7 @@
                 <a:ea typeface="Arial" pitchFamily="34" charset="-122"/>
                 <a:cs typeface="Arial" pitchFamily="34" charset="-120"/>
               </a:rPr>
-              <a:t>レビュー総数：108件（6サイト）</a:t>
+              <a:t>レビュー総数：59件（6サイト）</a:t>
             </a:r>
             <a:endParaRPr lang="en-US" sz="1000" dirty="0"/>
           </a:p>
@@ -2784,7 +2767,7 @@
                 <a:ea typeface="Arial" pitchFamily="34" charset="-122"/>
                 <a:cs typeface="Arial" pitchFamily="34" charset="-120"/>
               </a:rPr>
-              <a:t>作成日：2026年4月2日</a:t>
+              <a:t>作成日：2026年4月5日</a:t>
             </a:r>
             <a:endParaRPr lang="en-US" sz="1000" dirty="0"/>
           </a:p>
@@ -3330,7 +3313,7 @@
                           <a:ea typeface="Arial" pitchFamily="34" charset="-122"/>
                           <a:cs typeface="Arial" pitchFamily="34" charset="-120"/>
                         </a:rPr>
-                        <a:t>8.81点</a:t>
+                        <a:t>8.95点</a:t>
                       </a:r>
                       <a:endParaRPr lang="en-US" sz="1000" dirty="0">
                         <a:latin typeface="Arial" charset="0"/>
@@ -3398,7 +3381,7 @@
                           <a:ea typeface="Arial" pitchFamily="34" charset="-122"/>
                           <a:cs typeface="Arial" pitchFamily="34" charset="-120"/>
                         </a:rPr>
-                        <a:t>9.1点以上</a:t>
+                        <a:t>9.3点以上</a:t>
                       </a:r>
                       <a:endParaRPr lang="en-US" sz="1000" dirty="0">
                         <a:latin typeface="Arial" charset="0"/>
@@ -3604,7 +3587,7 @@
                           <a:ea typeface="Arial" pitchFamily="34" charset="-122"/>
                           <a:cs typeface="Arial" pitchFamily="34" charset="-120"/>
                         </a:rPr>
-                        <a:t>87.0%</a:t>
+                        <a:t>88.1%</a:t>
                       </a:r>
                       <a:endParaRPr lang="en-US" sz="1000" dirty="0">
                         <a:latin typeface="Arial" charset="0"/>
@@ -3672,7 +3655,7 @@
                           <a:ea typeface="Arial" pitchFamily="34" charset="-122"/>
                           <a:cs typeface="Arial" pitchFamily="34" charset="-120"/>
                         </a:rPr>
-                        <a:t>92%以上</a:t>
+                        <a:t>93%以上</a:t>
                       </a:r>
                       <a:endParaRPr lang="en-US" sz="1000" dirty="0">
                         <a:latin typeface="Arial" charset="0"/>
@@ -3878,7 +3861,7 @@
                           <a:ea typeface="Arial" pitchFamily="34" charset="-122"/>
                           <a:cs typeface="Arial" pitchFamily="34" charset="-120"/>
                         </a:rPr>
-                        <a:t>3.7%</a:t>
+                        <a:t>3.4%</a:t>
                       </a:r>
                       <a:endParaRPr lang="en-US" sz="1000" dirty="0">
                         <a:latin typeface="Arial" charset="0"/>
@@ -3946,7 +3929,7 @@
                           <a:ea typeface="Arial" pitchFamily="34" charset="-122"/>
                           <a:cs typeface="Arial" pitchFamily="34" charset="-120"/>
                         </a:rPr>
-                        <a:t>1%以下</a:t>
+                        <a:t>0%以下</a:t>
                       </a:r>
                       <a:endParaRPr lang="en-US" sz="1000" dirty="0">
                         <a:latin typeface="Arial" charset="0"/>
@@ -4152,7 +4135,7 @@
                           <a:ea typeface="Arial" pitchFamily="34" charset="-122"/>
                           <a:cs typeface="Arial" pitchFamily="34" charset="-120"/>
                         </a:rPr>
-                        <a:t>6.7点</a:t>
+                        <a:t>6.0点</a:t>
                       </a:r>
                       <a:endParaRPr lang="en-US" sz="1000" dirty="0">
                         <a:latin typeface="Arial" charset="0"/>
@@ -4220,7 +4203,7 @@
                           <a:ea typeface="Arial" pitchFamily="34" charset="-122"/>
                           <a:cs typeface="Arial" pitchFamily="34" charset="-120"/>
                         </a:rPr>
-                        <a:t>7.7点以上</a:t>
+                        <a:t>7.0点以上</a:t>
                       </a:r>
                       <a:endParaRPr lang="en-US" sz="1000" dirty="0">
                         <a:latin typeface="Arial" charset="0"/>
@@ -4700,7 +4683,7 @@
                           <a:ea typeface="Arial" pitchFamily="34" charset="-122"/>
                           <a:cs typeface="Arial" pitchFamily="34" charset="-120"/>
                         </a:rPr>
-                        <a:t>約8件/期間</a:t>
+                        <a:t>約6件/期間</a:t>
                       </a:r>
                       <a:endParaRPr lang="en-US" sz="1000" dirty="0">
                         <a:latin typeface="Arial" charset="0"/>
@@ -4768,7 +4751,7 @@
                           <a:ea typeface="Arial" pitchFamily="34" charset="-122"/>
                           <a:cs typeface="Arial" pitchFamily="34" charset="-120"/>
                         </a:rPr>
-                        <a:t>4件以下</a:t>
+                        <a:t>3件以下</a:t>
                       </a:r>
                       <a:endParaRPr lang="en-US" sz="1000" dirty="0">
                         <a:latin typeface="Arial" charset="0"/>
@@ -5339,7 +5322,7 @@
                 <a:ea typeface="Arial" pitchFamily="34" charset="-122"/>
                 <a:cs typeface="Arial" pitchFamily="34" charset="-120"/>
               </a:rPr>
-              <a:t>8.81</a:t>
+              <a:t>8.95</a:t>
             </a:r>
             <a:endParaRPr lang="en-US" sz="3200" dirty="0"/>
           </a:p>
@@ -5464,7 +5447,7 @@
                 <a:ea typeface="Arial" pitchFamily="34" charset="-122"/>
                 <a:cs typeface="Arial" pitchFamily="34" charset="-120"/>
               </a:rPr>
-              <a:t>87.0%</a:t>
+              <a:t>88.1%</a:t>
             </a:r>
             <a:endParaRPr lang="en-US" sz="3200" dirty="0"/>
           </a:p>
@@ -5589,7 +5572,7 @@
                 <a:ea typeface="Arial" pitchFamily="34" charset="-122"/>
                 <a:cs typeface="Arial" pitchFamily="34" charset="-120"/>
               </a:rPr>
-              <a:t>3.7%</a:t>
+              <a:t>3.4%</a:t>
             </a:r>
             <a:endParaRPr lang="en-US" sz="3200" dirty="0"/>
           </a:p>
@@ -5714,7 +5697,7 @@
                 <a:ea typeface="Arial" pitchFamily="34" charset="-122"/>
                 <a:cs typeface="Arial" pitchFamily="34" charset="-120"/>
               </a:rPr>
-              <a:t>108件</a:t>
+              <a:t>59件</a:t>
             </a:r>
             <a:endParaRPr lang="en-US" sz="3200" dirty="0"/>
           </a:p>
@@ -6150,7 +6133,7 @@
                 <a:ea typeface="Arial" pitchFamily="34" charset="-122"/>
                 <a:cs typeface="Arial" pitchFamily="34" charset="-120"/>
               </a:rPr>
-              <a:t>窓・採光 </a:t>
+              <a:t>部屋の狭さ </a:t>
             </a:r>
             <a:endParaRPr lang="en-US" sz="1100" dirty="0"/>
           </a:p>
@@ -6170,7 +6153,7 @@
                 <a:ea typeface="Arial" pitchFamily="34" charset="-122"/>
                 <a:cs typeface="Arial" pitchFamily="34" charset="-120"/>
               </a:rPr>
-              <a:t>  入室して、すりガラスの窓を見た時のガッカリ感と言ったらなかった</a:t>
+              <a:t>  ベッドが小さい</a:t>
             </a:r>
             <a:endParaRPr lang="en-US" sz="1100" dirty="0"/>
           </a:p>
@@ -6523,7 +6506,7 @@
                 <a:ea typeface="Arial" pitchFamily="34" charset="-122"/>
                 <a:cs typeface="Arial" pitchFamily="34" charset="-120"/>
               </a:rPr>
-              <a:t>8.81</a:t>
+              <a:t>8.95</a:t>
             </a:r>
             <a:endParaRPr lang="en-US" sz="3200" dirty="0"/>
           </a:p>
@@ -6648,7 +6631,7 @@
                 <a:ea typeface="Arial" pitchFamily="34" charset="-122"/>
                 <a:cs typeface="Arial" pitchFamily="34" charset="-120"/>
               </a:rPr>
-              <a:t>87.0%</a:t>
+              <a:t>88.1%</a:t>
             </a:r>
             <a:endParaRPr lang="en-US" sz="3200" dirty="0"/>
           </a:p>
@@ -6773,7 +6756,7 @@
                 <a:ea typeface="Arial" pitchFamily="34" charset="-122"/>
                 <a:cs typeface="Arial" pitchFamily="34" charset="-120"/>
               </a:rPr>
-              <a:t>3.7%</a:t>
+              <a:t>3.4%</a:t>
             </a:r>
             <a:endParaRPr lang="en-US" sz="3200" dirty="0"/>
           </a:p>
@@ -6898,7 +6881,7 @@
                 <a:ea typeface="Arial" pitchFamily="34" charset="-122"/>
                 <a:cs typeface="Arial" pitchFamily="34" charset="-120"/>
               </a:rPr>
-              <a:t>108件</a:t>
+              <a:t>59件</a:t>
             </a:r>
             <a:endParaRPr lang="en-US" sz="3200" dirty="0"/>
           </a:p>
@@ -7319,7 +7302,7 @@
                 <a:ea typeface="Arial" pitchFamily="34" charset="-122"/>
                 <a:cs typeface="Arial" pitchFamily="34" charset="-120"/>
               </a:rPr>
-              <a:t>Trip.com(9.86)が最高スコア。</a:t>
+              <a:t>Trip.com(9.75)が最高スコア。</a:t>
             </a:r>
             <a:endParaRPr lang="en-US" sz="1100" dirty="0"/>
           </a:p>
@@ -7368,7 +7351,7 @@
                 <a:ea typeface="Arial" pitchFamily="34" charset="-122"/>
                 <a:cs typeface="Arial" pitchFamily="34" charset="-120"/>
               </a:rPr>
-              <a:t>Google(6.7)が相対的に低い。口コミ返信の強化が急務</a:t>
+              <a:t>Google(6.0)が相対的に低い。口コミ返信の強化が急務</a:t>
             </a:r>
             <a:endParaRPr lang="en-US" sz="1100" dirty="0"/>
           </a:p>
@@ -7877,7 +7860,7 @@
                           <a:ea typeface="Arial" pitchFamily="34" charset="-122"/>
                           <a:cs typeface="Arial" pitchFamily="34" charset="-120"/>
                         </a:rPr>
-                        <a:t>7</a:t>
+                        <a:t>4</a:t>
                       </a:r>
                       <a:endParaRPr lang="en-US" sz="900" dirty="0">
                         <a:latin typeface="Arial" charset="0"/>
@@ -7945,7 +7928,7 @@
                           <a:ea typeface="Arial" pitchFamily="34" charset="-122"/>
                           <a:cs typeface="Arial" pitchFamily="34" charset="-120"/>
                         </a:rPr>
-                        <a:t>9.86</a:t>
+                        <a:t>9.75</a:t>
                       </a:r>
                       <a:endParaRPr lang="en-US" sz="900" dirty="0">
                         <a:latin typeface="Arial" charset="0"/>
@@ -8081,7 +8064,7 @@
                           <a:ea typeface="Arial" pitchFamily="34" charset="-122"/>
                           <a:cs typeface="Arial" pitchFamily="34" charset="-120"/>
                         </a:rPr>
-                        <a:t>9.86</a:t>
+                        <a:t>9.75</a:t>
                       </a:r>
                       <a:endParaRPr lang="en-US" sz="900" dirty="0">
                         <a:latin typeface="Arial" charset="0"/>
@@ -8129,6 +8112,348 @@
                     </a:lnB>
                     <a:solidFill>
                       <a:srgbClr val="E8EFF8"/>
+                    </a:solidFill>
+                  </a:tcPr>
+                </a:tc>
+              </a:tr>
+              <a:tr h="201168">
+                <a:tc>
+                  <a:txBody>
+                    <a:bodyPr/>
+                    <a:lstStyle/>
+                    <a:p>
+                      <a:pPr algn="ctr" indent="0" marL="0">
+                        <a:buNone/>
+                      </a:pPr>
+                      <a:r>
+                        <a:rPr lang="en-US" sz="900" dirty="0">
+                          <a:solidFill>
+                            <a:srgbClr val="000000"/>
+                          </a:solidFill>
+                          <a:latin typeface="Arial" pitchFamily="34" charset="0"/>
+                          <a:ea typeface="Arial" pitchFamily="34" charset="-122"/>
+                          <a:cs typeface="Arial" pitchFamily="34" charset="-120"/>
+                        </a:rPr>
+                        <a:t>Agoda</a:t>
+                      </a:r>
+                      <a:endParaRPr lang="en-US" sz="900" dirty="0">
+                        <a:latin typeface="Arial" charset="0"/>
+                        <a:ea typeface="Arial" charset="0"/>
+                        <a:cs typeface="Arial" charset="0"/>
+                      </a:endParaRPr>
+                    </a:p>
+                  </a:txBody>
+                  <a:tcPr marL="91440" marR="91440" marT="45720" marB="45720">
+                    <a:lnL w="6350" cap="flat" cmpd="sng" algn="ctr">
+                      <a:solidFill>
+                        <a:srgbClr val="CBD5E1"/>
+                      </a:solidFill>
+                      <a:prstDash val="solid"/>
+                      <a:round/>
+                      <a:headEnd type="none" w="med" len="med"/>
+                      <a:tailEnd type="none" w="med" len="med"/>
+                    </a:lnL>
+                    <a:lnR w="6350" cap="flat" cmpd="sng" algn="ctr">
+                      <a:solidFill>
+                        <a:srgbClr val="CBD5E1"/>
+                      </a:solidFill>
+                      <a:prstDash val="solid"/>
+                      <a:round/>
+                      <a:headEnd type="none" w="med" len="med"/>
+                      <a:tailEnd type="none" w="med" len="med"/>
+                    </a:lnR>
+                    <a:lnT w="6350" cap="flat" cmpd="sng" algn="ctr">
+                      <a:solidFill>
+                        <a:srgbClr val="CBD5E1"/>
+                      </a:solidFill>
+                      <a:prstDash val="solid"/>
+                      <a:round/>
+                      <a:headEnd type="none" w="med" len="med"/>
+                      <a:tailEnd type="none" w="med" len="med"/>
+                    </a:lnT>
+                    <a:lnB w="6350" cap="flat" cmpd="sng" algn="ctr">
+                      <a:solidFill>
+                        <a:srgbClr val="CBD5E1"/>
+                      </a:solidFill>
+                      <a:prstDash val="solid"/>
+                      <a:round/>
+                      <a:headEnd type="none" w="med" len="med"/>
+                      <a:tailEnd type="none" w="med" len="med"/>
+                    </a:lnB>
+                    <a:solidFill>
+                      <a:srgbClr val="FFFFFF"/>
+                    </a:solidFill>
+                  </a:tcPr>
+                </a:tc>
+                <a:tc>
+                  <a:txBody>
+                    <a:bodyPr/>
+                    <a:lstStyle/>
+                    <a:p>
+                      <a:pPr algn="ctr" indent="0" marL="0">
+                        <a:buNone/>
+                      </a:pPr>
+                      <a:r>
+                        <a:rPr lang="en-US" sz="900" dirty="0">
+                          <a:solidFill>
+                            <a:srgbClr val="000000"/>
+                          </a:solidFill>
+                          <a:latin typeface="Arial" pitchFamily="34" charset="0"/>
+                          <a:ea typeface="Arial" pitchFamily="34" charset="-122"/>
+                          <a:cs typeface="Arial" pitchFamily="34" charset="-120"/>
+                        </a:rPr>
+                        <a:t>4</a:t>
+                      </a:r>
+                      <a:endParaRPr lang="en-US" sz="900" dirty="0">
+                        <a:latin typeface="Arial" charset="0"/>
+                        <a:ea typeface="Arial" charset="0"/>
+                        <a:cs typeface="Arial" charset="0"/>
+                      </a:endParaRPr>
+                    </a:p>
+                  </a:txBody>
+                  <a:tcPr marL="91440" marR="91440" marT="45720" marB="45720">
+                    <a:lnL w="6350" cap="flat" cmpd="sng" algn="ctr">
+                      <a:solidFill>
+                        <a:srgbClr val="CBD5E1"/>
+                      </a:solidFill>
+                      <a:prstDash val="solid"/>
+                      <a:round/>
+                      <a:headEnd type="none" w="med" len="med"/>
+                      <a:tailEnd type="none" w="med" len="med"/>
+                    </a:lnL>
+                    <a:lnR w="6350" cap="flat" cmpd="sng" algn="ctr">
+                      <a:solidFill>
+                        <a:srgbClr val="CBD5E1"/>
+                      </a:solidFill>
+                      <a:prstDash val="solid"/>
+                      <a:round/>
+                      <a:headEnd type="none" w="med" len="med"/>
+                      <a:tailEnd type="none" w="med" len="med"/>
+                    </a:lnR>
+                    <a:lnT w="6350" cap="flat" cmpd="sng" algn="ctr">
+                      <a:solidFill>
+                        <a:srgbClr val="CBD5E1"/>
+                      </a:solidFill>
+                      <a:prstDash val="solid"/>
+                      <a:round/>
+                      <a:headEnd type="none" w="med" len="med"/>
+                      <a:tailEnd type="none" w="med" len="med"/>
+                    </a:lnT>
+                    <a:lnB w="6350" cap="flat" cmpd="sng" algn="ctr">
+                      <a:solidFill>
+                        <a:srgbClr val="CBD5E1"/>
+                      </a:solidFill>
+                      <a:prstDash val="solid"/>
+                      <a:round/>
+                      <a:headEnd type="none" w="med" len="med"/>
+                      <a:tailEnd type="none" w="med" len="med"/>
+                    </a:lnB>
+                    <a:solidFill>
+                      <a:srgbClr val="FFFFFF"/>
+                    </a:solidFill>
+                  </a:tcPr>
+                </a:tc>
+                <a:tc>
+                  <a:txBody>
+                    <a:bodyPr/>
+                    <a:lstStyle/>
+                    <a:p>
+                      <a:pPr algn="ctr" indent="0" marL="0">
+                        <a:buNone/>
+                      </a:pPr>
+                      <a:r>
+                        <a:rPr lang="en-US" sz="900" dirty="0">
+                          <a:solidFill>
+                            <a:srgbClr val="000000"/>
+                          </a:solidFill>
+                          <a:latin typeface="Arial" pitchFamily="34" charset="0"/>
+                          <a:ea typeface="Arial" pitchFamily="34" charset="-122"/>
+                          <a:cs typeface="Arial" pitchFamily="34" charset="-120"/>
+                        </a:rPr>
+                        <a:t>9.5</a:t>
+                      </a:r>
+                      <a:endParaRPr lang="en-US" sz="900" dirty="0">
+                        <a:latin typeface="Arial" charset="0"/>
+                        <a:ea typeface="Arial" charset="0"/>
+                        <a:cs typeface="Arial" charset="0"/>
+                      </a:endParaRPr>
+                    </a:p>
+                  </a:txBody>
+                  <a:tcPr marL="91440" marR="91440" marT="45720" marB="45720">
+                    <a:lnL w="6350" cap="flat" cmpd="sng" algn="ctr">
+                      <a:solidFill>
+                        <a:srgbClr val="CBD5E1"/>
+                      </a:solidFill>
+                      <a:prstDash val="solid"/>
+                      <a:round/>
+                      <a:headEnd type="none" w="med" len="med"/>
+                      <a:tailEnd type="none" w="med" len="med"/>
+                    </a:lnL>
+                    <a:lnR w="6350" cap="flat" cmpd="sng" algn="ctr">
+                      <a:solidFill>
+                        <a:srgbClr val="CBD5E1"/>
+                      </a:solidFill>
+                      <a:prstDash val="solid"/>
+                      <a:round/>
+                      <a:headEnd type="none" w="med" len="med"/>
+                      <a:tailEnd type="none" w="med" len="med"/>
+                    </a:lnR>
+                    <a:lnT w="6350" cap="flat" cmpd="sng" algn="ctr">
+                      <a:solidFill>
+                        <a:srgbClr val="CBD5E1"/>
+                      </a:solidFill>
+                      <a:prstDash val="solid"/>
+                      <a:round/>
+                      <a:headEnd type="none" w="med" len="med"/>
+                      <a:tailEnd type="none" w="med" len="med"/>
+                    </a:lnT>
+                    <a:lnB w="6350" cap="flat" cmpd="sng" algn="ctr">
+                      <a:solidFill>
+                        <a:srgbClr val="CBD5E1"/>
+                      </a:solidFill>
+                      <a:prstDash val="solid"/>
+                      <a:round/>
+                      <a:headEnd type="none" w="med" len="med"/>
+                      <a:tailEnd type="none" w="med" len="med"/>
+                    </a:lnB>
+                    <a:solidFill>
+                      <a:srgbClr val="FFFFFF"/>
+                    </a:solidFill>
+                  </a:tcPr>
+                </a:tc>
+                <a:tc>
+                  <a:txBody>
+                    <a:bodyPr/>
+                    <a:lstStyle/>
+                    <a:p>
+                      <a:pPr algn="ctr" indent="0" marL="0">
+                        <a:buNone/>
+                      </a:pPr>
+                      <a:r>
+                        <a:rPr lang="en-US" sz="900" dirty="0">
+                          <a:solidFill>
+                            <a:srgbClr val="000000"/>
+                          </a:solidFill>
+                          <a:latin typeface="Arial" pitchFamily="34" charset="0"/>
+                          <a:ea typeface="Arial" pitchFamily="34" charset="-122"/>
+                          <a:cs typeface="Arial" pitchFamily="34" charset="-120"/>
+                        </a:rPr>
+                        <a:t>/10</a:t>
+                      </a:r>
+                      <a:endParaRPr lang="en-US" sz="900" dirty="0">
+                        <a:latin typeface="Arial" charset="0"/>
+                        <a:ea typeface="Arial" charset="0"/>
+                        <a:cs typeface="Arial" charset="0"/>
+                      </a:endParaRPr>
+                    </a:p>
+                  </a:txBody>
+                  <a:tcPr marL="91440" marR="91440" marT="45720" marB="45720">
+                    <a:lnL w="6350" cap="flat" cmpd="sng" algn="ctr">
+                      <a:solidFill>
+                        <a:srgbClr val="CBD5E1"/>
+                      </a:solidFill>
+                      <a:prstDash val="solid"/>
+                      <a:round/>
+                      <a:headEnd type="none" w="med" len="med"/>
+                      <a:tailEnd type="none" w="med" len="med"/>
+                    </a:lnL>
+                    <a:lnR w="6350" cap="flat" cmpd="sng" algn="ctr">
+                      <a:solidFill>
+                        <a:srgbClr val="CBD5E1"/>
+                      </a:solidFill>
+                      <a:prstDash val="solid"/>
+                      <a:round/>
+                      <a:headEnd type="none" w="med" len="med"/>
+                      <a:tailEnd type="none" w="med" len="med"/>
+                    </a:lnR>
+                    <a:lnT w="6350" cap="flat" cmpd="sng" algn="ctr">
+                      <a:solidFill>
+                        <a:srgbClr val="CBD5E1"/>
+                      </a:solidFill>
+                      <a:prstDash val="solid"/>
+                      <a:round/>
+                      <a:headEnd type="none" w="med" len="med"/>
+                      <a:tailEnd type="none" w="med" len="med"/>
+                    </a:lnT>
+                    <a:lnB w="6350" cap="flat" cmpd="sng" algn="ctr">
+                      <a:solidFill>
+                        <a:srgbClr val="CBD5E1"/>
+                      </a:solidFill>
+                      <a:prstDash val="solid"/>
+                      <a:round/>
+                      <a:headEnd type="none" w="med" len="med"/>
+                      <a:tailEnd type="none" w="med" len="med"/>
+                    </a:lnB>
+                    <a:solidFill>
+                      <a:srgbClr val="FFFFFF"/>
+                    </a:solidFill>
+                  </a:tcPr>
+                </a:tc>
+                <a:tc>
+                  <a:txBody>
+                    <a:bodyPr/>
+                    <a:lstStyle/>
+                    <a:p>
+                      <a:pPr algn="ctr" indent="0" marL="0">
+                        <a:buNone/>
+                      </a:pPr>
+                      <a:r>
+                        <a:rPr lang="en-US" sz="900" dirty="0">
+                          <a:solidFill>
+                            <a:srgbClr val="000000"/>
+                          </a:solidFill>
+                          <a:latin typeface="Arial" pitchFamily="34" charset="0"/>
+                          <a:ea typeface="Arial" pitchFamily="34" charset="-122"/>
+                          <a:cs typeface="Arial" pitchFamily="34" charset="-120"/>
+                        </a:rPr>
+                        <a:t>9.5</a:t>
+                      </a:r>
+                      <a:endParaRPr lang="en-US" sz="900" dirty="0">
+                        <a:latin typeface="Arial" charset="0"/>
+                        <a:ea typeface="Arial" charset="0"/>
+                        <a:cs typeface="Arial" charset="0"/>
+                      </a:endParaRPr>
+                    </a:p>
+                  </a:txBody>
+                  <a:tcPr marL="91440" marR="91440" marT="45720" marB="45720">
+                    <a:lnL w="6350" cap="flat" cmpd="sng" algn="ctr">
+                      <a:solidFill>
+                        <a:srgbClr val="CBD5E1"/>
+                      </a:solidFill>
+                      <a:prstDash val="solid"/>
+                      <a:round/>
+                      <a:headEnd type="none" w="med" len="med"/>
+                      <a:tailEnd type="none" w="med" len="med"/>
+                    </a:lnL>
+                    <a:lnR w="6350" cap="flat" cmpd="sng" algn="ctr">
+                      <a:solidFill>
+                        <a:srgbClr val="CBD5E1"/>
+                      </a:solidFill>
+                      <a:prstDash val="solid"/>
+                      <a:round/>
+                      <a:headEnd type="none" w="med" len="med"/>
+                      <a:tailEnd type="none" w="med" len="med"/>
+                    </a:lnR>
+                    <a:lnT w="6350" cap="flat" cmpd="sng" algn="ctr">
+                      <a:solidFill>
+                        <a:srgbClr val="CBD5E1"/>
+                      </a:solidFill>
+                      <a:prstDash val="solid"/>
+                      <a:round/>
+                      <a:headEnd type="none" w="med" len="med"/>
+                      <a:tailEnd type="none" w="med" len="med"/>
+                    </a:lnT>
+                    <a:lnB w="6350" cap="flat" cmpd="sng" algn="ctr">
+                      <a:solidFill>
+                        <a:srgbClr val="CBD5E1"/>
+                      </a:solidFill>
+                      <a:prstDash val="solid"/>
+                      <a:round/>
+                      <a:headEnd type="none" w="med" len="med"/>
+                      <a:tailEnd type="none" w="med" len="med"/>
+                    </a:lnB>
+                    <a:solidFill>
+                      <a:srgbClr val="FFFFFF"/>
                     </a:solidFill>
                   </a:tcPr>
                 </a:tc>
@@ -8198,7 +8523,7 @@
                       <a:tailEnd type="none" w="med" len="med"/>
                     </a:lnB>
                     <a:solidFill>
-                      <a:srgbClr val="FFFFFF"/>
+                      <a:srgbClr val="E8EFF8"/>
                     </a:solidFill>
                   </a:tcPr>
                 </a:tc>
@@ -8219,7 +8544,7 @@
                           <a:ea typeface="Arial" pitchFamily="34" charset="-122"/>
                           <a:cs typeface="Arial" pitchFamily="34" charset="-120"/>
                         </a:rPr>
-                        <a:t>41</a:t>
+                        <a:t>26</a:t>
                       </a:r>
                       <a:endParaRPr lang="en-US" sz="900" dirty="0">
                         <a:latin typeface="Arial" charset="0"/>
@@ -8266,7 +8591,7 @@
                       <a:tailEnd type="none" w="med" len="med"/>
                     </a:lnB>
                     <a:solidFill>
-                      <a:srgbClr val="FFFFFF"/>
+                      <a:srgbClr val="E8EFF8"/>
                     </a:solidFill>
                   </a:tcPr>
                 </a:tc>
@@ -8287,7 +8612,7 @@
                           <a:ea typeface="Arial" pitchFamily="34" charset="-122"/>
                           <a:cs typeface="Arial" pitchFamily="34" charset="-120"/>
                         </a:rPr>
-                        <a:t>4.51</a:t>
+                        <a:t>4.69</a:t>
                       </a:r>
                       <a:endParaRPr lang="en-US" sz="900" dirty="0">
                         <a:latin typeface="Arial" charset="0"/>
@@ -8334,7 +8659,7 @@
                       <a:tailEnd type="none" w="med" len="med"/>
                     </a:lnB>
                     <a:solidFill>
-                      <a:srgbClr val="FFFFFF"/>
+                      <a:srgbClr val="E8EFF8"/>
                     </a:solidFill>
                   </a:tcPr>
                 </a:tc>
@@ -8402,144 +8727,6 @@
                       <a:tailEnd type="none" w="med" len="med"/>
                     </a:lnB>
                     <a:solidFill>
-                      <a:srgbClr val="FFFFFF"/>
-                    </a:solidFill>
-                  </a:tcPr>
-                </a:tc>
-                <a:tc>
-                  <a:txBody>
-                    <a:bodyPr/>
-                    <a:lstStyle/>
-                    <a:p>
-                      <a:pPr algn="ctr" indent="0" marL="0">
-                        <a:buNone/>
-                      </a:pPr>
-                      <a:r>
-                        <a:rPr lang="en-US" sz="900" dirty="0">
-                          <a:solidFill>
-                            <a:srgbClr val="000000"/>
-                          </a:solidFill>
-                          <a:latin typeface="Arial" pitchFamily="34" charset="0"/>
-                          <a:ea typeface="Arial" pitchFamily="34" charset="-122"/>
-                          <a:cs typeface="Arial" pitchFamily="34" charset="-120"/>
-                        </a:rPr>
-                        <a:t>9.02</a:t>
-                      </a:r>
-                      <a:endParaRPr lang="en-US" sz="900" dirty="0">
-                        <a:latin typeface="Arial" charset="0"/>
-                        <a:ea typeface="Arial" charset="0"/>
-                        <a:cs typeface="Arial" charset="0"/>
-                      </a:endParaRPr>
-                    </a:p>
-                  </a:txBody>
-                  <a:tcPr marL="91440" marR="91440" marT="45720" marB="45720">
-                    <a:lnL w="6350" cap="flat" cmpd="sng" algn="ctr">
-                      <a:solidFill>
-                        <a:srgbClr val="CBD5E1"/>
-                      </a:solidFill>
-                      <a:prstDash val="solid"/>
-                      <a:round/>
-                      <a:headEnd type="none" w="med" len="med"/>
-                      <a:tailEnd type="none" w="med" len="med"/>
-                    </a:lnL>
-                    <a:lnR w="6350" cap="flat" cmpd="sng" algn="ctr">
-                      <a:solidFill>
-                        <a:srgbClr val="CBD5E1"/>
-                      </a:solidFill>
-                      <a:prstDash val="solid"/>
-                      <a:round/>
-                      <a:headEnd type="none" w="med" len="med"/>
-                      <a:tailEnd type="none" w="med" len="med"/>
-                    </a:lnR>
-                    <a:lnT w="6350" cap="flat" cmpd="sng" algn="ctr">
-                      <a:solidFill>
-                        <a:srgbClr val="CBD5E1"/>
-                      </a:solidFill>
-                      <a:prstDash val="solid"/>
-                      <a:round/>
-                      <a:headEnd type="none" w="med" len="med"/>
-                      <a:tailEnd type="none" w="med" len="med"/>
-                    </a:lnT>
-                    <a:lnB w="6350" cap="flat" cmpd="sng" algn="ctr">
-                      <a:solidFill>
-                        <a:srgbClr val="CBD5E1"/>
-                      </a:solidFill>
-                      <a:prstDash val="solid"/>
-                      <a:round/>
-                      <a:headEnd type="none" w="med" len="med"/>
-                      <a:tailEnd type="none" w="med" len="med"/>
-                    </a:lnB>
-                    <a:solidFill>
-                      <a:srgbClr val="FFFFFF"/>
-                    </a:solidFill>
-                  </a:tcPr>
-                </a:tc>
-              </a:tr>
-              <a:tr h="201168">
-                <a:tc>
-                  <a:txBody>
-                    <a:bodyPr/>
-                    <a:lstStyle/>
-                    <a:p>
-                      <a:pPr algn="ctr" indent="0" marL="0">
-                        <a:buNone/>
-                      </a:pPr>
-                      <a:r>
-                        <a:rPr lang="en-US" sz="900" dirty="0">
-                          <a:solidFill>
-                            <a:srgbClr val="000000"/>
-                          </a:solidFill>
-                          <a:latin typeface="Arial" pitchFamily="34" charset="0"/>
-                          <a:ea typeface="Arial" pitchFamily="34" charset="-122"/>
-                          <a:cs typeface="Arial" pitchFamily="34" charset="-120"/>
-                        </a:rPr>
-                        <a:t>Agoda</a:t>
-                      </a:r>
-                      <a:endParaRPr lang="en-US" sz="900" dirty="0">
-                        <a:latin typeface="Arial" charset="0"/>
-                        <a:ea typeface="Arial" charset="0"/>
-                        <a:cs typeface="Arial" charset="0"/>
-                      </a:endParaRPr>
-                    </a:p>
-                  </a:txBody>
-                  <a:tcPr marL="91440" marR="91440" marT="45720" marB="45720">
-                    <a:lnL w="6350" cap="flat" cmpd="sng" algn="ctr">
-                      <a:solidFill>
-                        <a:srgbClr val="CBD5E1"/>
-                      </a:solidFill>
-                      <a:prstDash val="solid"/>
-                      <a:round/>
-                      <a:headEnd type="none" w="med" len="med"/>
-                      <a:tailEnd type="none" w="med" len="med"/>
-                    </a:lnL>
-                    <a:lnR w="6350" cap="flat" cmpd="sng" algn="ctr">
-                      <a:solidFill>
-                        <a:srgbClr val="CBD5E1"/>
-                      </a:solidFill>
-                      <a:prstDash val="solid"/>
-                      <a:round/>
-                      <a:headEnd type="none" w="med" len="med"/>
-                      <a:tailEnd type="none" w="med" len="med"/>
-                    </a:lnR>
-                    <a:lnT w="6350" cap="flat" cmpd="sng" algn="ctr">
-                      <a:solidFill>
-                        <a:srgbClr val="CBD5E1"/>
-                      </a:solidFill>
-                      <a:prstDash val="solid"/>
-                      <a:round/>
-                      <a:headEnd type="none" w="med" len="med"/>
-                      <a:tailEnd type="none" w="med" len="med"/>
-                    </a:lnT>
-                    <a:lnB w="6350" cap="flat" cmpd="sng" algn="ctr">
-                      <a:solidFill>
-                        <a:srgbClr val="CBD5E1"/>
-                      </a:solidFill>
-                      <a:prstDash val="solid"/>
-                      <a:round/>
-                      <a:headEnd type="none" w="med" len="med"/>
-                      <a:tailEnd type="none" w="med" len="med"/>
-                    </a:lnB>
-                    <a:solidFill>
                       <a:srgbClr val="E8EFF8"/>
                     </a:solidFill>
                   </a:tcPr>
@@ -8561,211 +8748,7 @@
                           <a:ea typeface="Arial" pitchFamily="34" charset="-122"/>
                           <a:cs typeface="Arial" pitchFamily="34" charset="-120"/>
                         </a:rPr>
-                        <a:t>15</a:t>
-                      </a:r>
-                      <a:endParaRPr lang="en-US" sz="900" dirty="0">
-                        <a:latin typeface="Arial" charset="0"/>
-                        <a:ea typeface="Arial" charset="0"/>
-                        <a:cs typeface="Arial" charset="0"/>
-                      </a:endParaRPr>
-                    </a:p>
-                  </a:txBody>
-                  <a:tcPr marL="91440" marR="91440" marT="45720" marB="45720">
-                    <a:lnL w="6350" cap="flat" cmpd="sng" algn="ctr">
-                      <a:solidFill>
-                        <a:srgbClr val="CBD5E1"/>
-                      </a:solidFill>
-                      <a:prstDash val="solid"/>
-                      <a:round/>
-                      <a:headEnd type="none" w="med" len="med"/>
-                      <a:tailEnd type="none" w="med" len="med"/>
-                    </a:lnL>
-                    <a:lnR w="6350" cap="flat" cmpd="sng" algn="ctr">
-                      <a:solidFill>
-                        <a:srgbClr val="CBD5E1"/>
-                      </a:solidFill>
-                      <a:prstDash val="solid"/>
-                      <a:round/>
-                      <a:headEnd type="none" w="med" len="med"/>
-                      <a:tailEnd type="none" w="med" len="med"/>
-                    </a:lnR>
-                    <a:lnT w="6350" cap="flat" cmpd="sng" algn="ctr">
-                      <a:solidFill>
-                        <a:srgbClr val="CBD5E1"/>
-                      </a:solidFill>
-                      <a:prstDash val="solid"/>
-                      <a:round/>
-                      <a:headEnd type="none" w="med" len="med"/>
-                      <a:tailEnd type="none" w="med" len="med"/>
-                    </a:lnT>
-                    <a:lnB w="6350" cap="flat" cmpd="sng" algn="ctr">
-                      <a:solidFill>
-                        <a:srgbClr val="CBD5E1"/>
-                      </a:solidFill>
-                      <a:prstDash val="solid"/>
-                      <a:round/>
-                      <a:headEnd type="none" w="med" len="med"/>
-                      <a:tailEnd type="none" w="med" len="med"/>
-                    </a:lnB>
-                    <a:solidFill>
-                      <a:srgbClr val="E8EFF8"/>
-                    </a:solidFill>
-                  </a:tcPr>
-                </a:tc>
-                <a:tc>
-                  <a:txBody>
-                    <a:bodyPr/>
-                    <a:lstStyle/>
-                    <a:p>
-                      <a:pPr algn="ctr" indent="0" marL="0">
-                        <a:buNone/>
-                      </a:pPr>
-                      <a:r>
-                        <a:rPr lang="en-US" sz="900" dirty="0">
-                          <a:solidFill>
-                            <a:srgbClr val="000000"/>
-                          </a:solidFill>
-                          <a:latin typeface="Arial" pitchFamily="34" charset="0"/>
-                          <a:ea typeface="Arial" pitchFamily="34" charset="-122"/>
-                          <a:cs typeface="Arial" pitchFamily="34" charset="-120"/>
-                        </a:rPr>
-                        <a:t>8.93</a:t>
-                      </a:r>
-                      <a:endParaRPr lang="en-US" sz="900" dirty="0">
-                        <a:latin typeface="Arial" charset="0"/>
-                        <a:ea typeface="Arial" charset="0"/>
-                        <a:cs typeface="Arial" charset="0"/>
-                      </a:endParaRPr>
-                    </a:p>
-                  </a:txBody>
-                  <a:tcPr marL="91440" marR="91440" marT="45720" marB="45720">
-                    <a:lnL w="6350" cap="flat" cmpd="sng" algn="ctr">
-                      <a:solidFill>
-                        <a:srgbClr val="CBD5E1"/>
-                      </a:solidFill>
-                      <a:prstDash val="solid"/>
-                      <a:round/>
-                      <a:headEnd type="none" w="med" len="med"/>
-                      <a:tailEnd type="none" w="med" len="med"/>
-                    </a:lnL>
-                    <a:lnR w="6350" cap="flat" cmpd="sng" algn="ctr">
-                      <a:solidFill>
-                        <a:srgbClr val="CBD5E1"/>
-                      </a:solidFill>
-                      <a:prstDash val="solid"/>
-                      <a:round/>
-                      <a:headEnd type="none" w="med" len="med"/>
-                      <a:tailEnd type="none" w="med" len="med"/>
-                    </a:lnR>
-                    <a:lnT w="6350" cap="flat" cmpd="sng" algn="ctr">
-                      <a:solidFill>
-                        <a:srgbClr val="CBD5E1"/>
-                      </a:solidFill>
-                      <a:prstDash val="solid"/>
-                      <a:round/>
-                      <a:headEnd type="none" w="med" len="med"/>
-                      <a:tailEnd type="none" w="med" len="med"/>
-                    </a:lnT>
-                    <a:lnB w="6350" cap="flat" cmpd="sng" algn="ctr">
-                      <a:solidFill>
-                        <a:srgbClr val="CBD5E1"/>
-                      </a:solidFill>
-                      <a:prstDash val="solid"/>
-                      <a:round/>
-                      <a:headEnd type="none" w="med" len="med"/>
-                      <a:tailEnd type="none" w="med" len="med"/>
-                    </a:lnB>
-                    <a:solidFill>
-                      <a:srgbClr val="E8EFF8"/>
-                    </a:solidFill>
-                  </a:tcPr>
-                </a:tc>
-                <a:tc>
-                  <a:txBody>
-                    <a:bodyPr/>
-                    <a:lstStyle/>
-                    <a:p>
-                      <a:pPr algn="ctr" indent="0" marL="0">
-                        <a:buNone/>
-                      </a:pPr>
-                      <a:r>
-                        <a:rPr lang="en-US" sz="900" dirty="0">
-                          <a:solidFill>
-                            <a:srgbClr val="000000"/>
-                          </a:solidFill>
-                          <a:latin typeface="Arial" pitchFamily="34" charset="0"/>
-                          <a:ea typeface="Arial" pitchFamily="34" charset="-122"/>
-                          <a:cs typeface="Arial" pitchFamily="34" charset="-120"/>
-                        </a:rPr>
-                        <a:t>/10</a:t>
-                      </a:r>
-                      <a:endParaRPr lang="en-US" sz="900" dirty="0">
-                        <a:latin typeface="Arial" charset="0"/>
-                        <a:ea typeface="Arial" charset="0"/>
-                        <a:cs typeface="Arial" charset="0"/>
-                      </a:endParaRPr>
-                    </a:p>
-                  </a:txBody>
-                  <a:tcPr marL="91440" marR="91440" marT="45720" marB="45720">
-                    <a:lnL w="6350" cap="flat" cmpd="sng" algn="ctr">
-                      <a:solidFill>
-                        <a:srgbClr val="CBD5E1"/>
-                      </a:solidFill>
-                      <a:prstDash val="solid"/>
-                      <a:round/>
-                      <a:headEnd type="none" w="med" len="med"/>
-                      <a:tailEnd type="none" w="med" len="med"/>
-                    </a:lnL>
-                    <a:lnR w="6350" cap="flat" cmpd="sng" algn="ctr">
-                      <a:solidFill>
-                        <a:srgbClr val="CBD5E1"/>
-                      </a:solidFill>
-                      <a:prstDash val="solid"/>
-                      <a:round/>
-                      <a:headEnd type="none" w="med" len="med"/>
-                      <a:tailEnd type="none" w="med" len="med"/>
-                    </a:lnR>
-                    <a:lnT w="6350" cap="flat" cmpd="sng" algn="ctr">
-                      <a:solidFill>
-                        <a:srgbClr val="CBD5E1"/>
-                      </a:solidFill>
-                      <a:prstDash val="solid"/>
-                      <a:round/>
-                      <a:headEnd type="none" w="med" len="med"/>
-                      <a:tailEnd type="none" w="med" len="med"/>
-                    </a:lnT>
-                    <a:lnB w="6350" cap="flat" cmpd="sng" algn="ctr">
-                      <a:solidFill>
-                        <a:srgbClr val="CBD5E1"/>
-                      </a:solidFill>
-                      <a:prstDash val="solid"/>
-                      <a:round/>
-                      <a:headEnd type="none" w="med" len="med"/>
-                      <a:tailEnd type="none" w="med" len="med"/>
-                    </a:lnB>
-                    <a:solidFill>
-                      <a:srgbClr val="E8EFF8"/>
-                    </a:solidFill>
-                  </a:tcPr>
-                </a:tc>
-                <a:tc>
-                  <a:txBody>
-                    <a:bodyPr/>
-                    <a:lstStyle/>
-                    <a:p>
-                      <a:pPr algn="ctr" indent="0" marL="0">
-                        <a:buNone/>
-                      </a:pPr>
-                      <a:r>
-                        <a:rPr lang="en-US" sz="900" dirty="0">
-                          <a:solidFill>
-                            <a:srgbClr val="000000"/>
-                          </a:solidFill>
-                          <a:latin typeface="Arial" pitchFamily="34" charset="0"/>
-                          <a:ea typeface="Arial" pitchFamily="34" charset="-122"/>
-                          <a:cs typeface="Arial" pitchFamily="34" charset="-120"/>
-                        </a:rPr>
-                        <a:t>8.93</a:t>
+                        <a:t>9.38</a:t>
                       </a:r>
                       <a:endParaRPr lang="en-US" sz="900" dirty="0">
                         <a:latin typeface="Arial" charset="0"/>
@@ -8903,7 +8886,7 @@
                           <a:ea typeface="Arial" pitchFamily="34" charset="-122"/>
                           <a:cs typeface="Arial" pitchFamily="34" charset="-120"/>
                         </a:rPr>
-                        <a:t>18</a:t>
+                        <a:t>11</a:t>
                       </a:r>
                       <a:endParaRPr lang="en-US" sz="900" dirty="0">
                         <a:latin typeface="Arial" charset="0"/>
@@ -8971,7 +8954,7 @@
                           <a:ea typeface="Arial" pitchFamily="34" charset="-122"/>
                           <a:cs typeface="Arial" pitchFamily="34" charset="-120"/>
                         </a:rPr>
-                        <a:t>8.67</a:t>
+                        <a:t>9</a:t>
                       </a:r>
                       <a:endParaRPr lang="en-US" sz="900" dirty="0">
                         <a:latin typeface="Arial" charset="0"/>
@@ -9107,7 +9090,7 @@
                           <a:ea typeface="Arial" pitchFamily="34" charset="-122"/>
                           <a:cs typeface="Arial" pitchFamily="34" charset="-120"/>
                         </a:rPr>
-                        <a:t>8.67</a:t>
+                        <a:t>9</a:t>
                       </a:r>
                       <a:endParaRPr lang="en-US" sz="900" dirty="0">
                         <a:latin typeface="Arial" charset="0"/>
@@ -9245,7 +9228,7 @@
                           <a:ea typeface="Arial" pitchFamily="34" charset="-122"/>
                           <a:cs typeface="Arial" pitchFamily="34" charset="-120"/>
                         </a:rPr>
-                        <a:t>21</a:t>
+                        <a:t>9</a:t>
                       </a:r>
                       <a:endParaRPr lang="en-US" sz="900" dirty="0">
                         <a:latin typeface="Arial" charset="0"/>
@@ -9587,7 +9570,7 @@
                           <a:ea typeface="Arial" pitchFamily="34" charset="-122"/>
                           <a:cs typeface="Arial" pitchFamily="34" charset="-120"/>
                         </a:rPr>
-                        <a:t>6</a:t>
+                        <a:t>5</a:t>
                       </a:r>
                       <a:endParaRPr lang="en-US" sz="900" dirty="0">
                         <a:latin typeface="Arial" charset="0"/>
@@ -9655,7 +9638,7 @@
                           <a:ea typeface="Arial" pitchFamily="34" charset="-122"/>
                           <a:cs typeface="Arial" pitchFamily="34" charset="-120"/>
                         </a:rPr>
-                        <a:t>3.33</a:t>
+                        <a:t>3</a:t>
                       </a:r>
                       <a:endParaRPr lang="en-US" sz="900" dirty="0">
                         <a:latin typeface="Arial" charset="0"/>
@@ -9791,7 +9774,7 @@
                           <a:ea typeface="Arial" pitchFamily="34" charset="-122"/>
                           <a:cs typeface="Arial" pitchFamily="34" charset="-120"/>
                         </a:rPr>
-                        <a:t>6.67</a:t>
+                        <a:t>6</a:t>
                       </a:r>
                       <a:endParaRPr lang="en-US" sz="900" dirty="0">
                         <a:latin typeface="Arial" charset="0"/>
@@ -10199,7 +10182,7 @@
                 <a:ea typeface="Arial" pitchFamily="34" charset="-122"/>
                 <a:cs typeface="Arial" pitchFamily="34" charset="-120"/>
               </a:rPr>
-              <a:t>94件（87.0%）</a:t>
+              <a:t>52件（88.1%）</a:t>
             </a:r>
             <a:endParaRPr lang="en-US" sz="1100" dirty="0"/>
           </a:p>
@@ -10297,7 +10280,7 @@
                 <a:ea typeface="Arial" pitchFamily="34" charset="-122"/>
                 <a:cs typeface="Arial" pitchFamily="34" charset="-120"/>
               </a:rPr>
-              <a:t>10件（9.3%）</a:t>
+              <a:t>5件（8.5%）</a:t>
             </a:r>
             <a:endParaRPr lang="en-US" sz="1100" dirty="0"/>
           </a:p>
@@ -10395,7 +10378,7 @@
                 <a:ea typeface="Arial" pitchFamily="34" charset="-122"/>
                 <a:cs typeface="Arial" pitchFamily="34" charset="-120"/>
               </a:rPr>
-              <a:t>4件（3.7%）</a:t>
+              <a:t>2件（3.4%）</a:t>
             </a:r>
             <a:endParaRPr lang="en-US" sz="1100" dirty="0"/>
           </a:p>
@@ -10729,7 +10712,7 @@
                 <a:ea typeface="Arial" pitchFamily="34" charset="-122"/>
                 <a:cs typeface="Arial" pitchFamily="34" charset="-120"/>
               </a:rPr>
-              <a:t>50件+</a:t>
+              <a:t>20件+</a:t>
             </a:r>
             <a:endParaRPr lang="en-US" sz="900" dirty="0"/>
           </a:p>
@@ -11398,7 +11381,7 @@
                 <a:ea typeface="Arial" pitchFamily="34" charset="-122"/>
                 <a:cs typeface="Arial" pitchFamily="34" charset="-120"/>
               </a:rPr>
-              <a:t>20件+</a:t>
+              <a:t>10件+</a:t>
             </a:r>
             <a:endParaRPr lang="en-US" sz="900" dirty="0"/>
           </a:p>
@@ -11621,7 +11604,7 @@
                 <a:ea typeface="Arial" pitchFamily="34" charset="-122"/>
                 <a:cs typeface="Arial" pitchFamily="34" charset="-120"/>
               </a:rPr>
-              <a:t>20件+</a:t>
+              <a:t>10件+</a:t>
             </a:r>
             <a:endParaRPr lang="en-US" sz="900" dirty="0"/>
           </a:p>
@@ -11844,7 +11827,7 @@
                 <a:ea typeface="Arial" pitchFamily="34" charset="-122"/>
                 <a:cs typeface="Arial" pitchFamily="34" charset="-120"/>
               </a:rPr>
-              <a:t>10件+</a:t>
+              <a:t>4件</a:t>
             </a:r>
             <a:endParaRPr lang="en-US" sz="900" dirty="0"/>
           </a:p>
@@ -11883,7 +11866,7 @@
                 <a:ea typeface="Arial" pitchFamily="34" charset="-122"/>
                 <a:cs typeface="Arial" pitchFamily="34" charset="-120"/>
               </a:rPr>
-              <a:t>コンビニ・周辺施設</a:t>
+              <a:t>部屋の広さ</a:t>
             </a:r>
             <a:endParaRPr lang="en-US" sz="1300" dirty="0"/>
           </a:p>
@@ -11922,7 +11905,7 @@
                 <a:ea typeface="Arial" pitchFamily="34" charset="-122"/>
                 <a:cs typeface="Arial" pitchFamily="34" charset="-120"/>
               </a:rPr>
-              <a:t>駅まで傘無しで1分、京王スーパーも駅直結です</a:t>
+              <a:t>通常のビジネスホテルよりも広いのは当たり前だが、お風呂もそれなりに広く疲れが取れる入浴剤のサービスもあり良かった</a:t>
             </a:r>
             <a:endParaRPr lang="en-US" sz="900" dirty="0"/>
           </a:p>
@@ -11961,7 +11944,7 @@
                 <a:ea typeface="Arial" pitchFamily="34" charset="-122"/>
                 <a:cs typeface="Arial" pitchFamily="34" charset="-120"/>
               </a:rPr>
-              <a:t>「事前に買い物に行き、1Fから入ろうと思いましたが、出入り口が分かりにくく（駐輪場の奥に出入り口があるとも分からず）...」</a:t>
+              <a:t>「部屋は綺麗で、日本にしてはスペースがあった」</a:t>
             </a:r>
             <a:endParaRPr lang="en-US" sz="900" dirty="0"/>
           </a:p>
@@ -12719,7 +12702,7 @@
                           <a:ea typeface="Arial" pitchFamily="34" charset="-122"/>
                           <a:cs typeface="Arial" pitchFamily="34" charset="-120"/>
                         </a:rPr>
-                        <a:t>8件</a:t>
+                        <a:t>6件</a:t>
                       </a:r>
                       <a:endParaRPr lang="en-US" sz="900" dirty="0">
                         <a:latin typeface="Arial" charset="0"/>
@@ -12993,7 +12976,7 @@
                           <a:ea typeface="Arial" pitchFamily="34" charset="-122"/>
                           <a:cs typeface="Arial" pitchFamily="34" charset="-120"/>
                         </a:rPr>
-                        <a:t>7件</a:t>
+                        <a:t>4件</a:t>
                       </a:r>
                       <a:endParaRPr lang="en-US" sz="900" dirty="0">
                         <a:latin typeface="Arial" charset="0"/>
@@ -13131,7 +13114,7 @@
                           <a:ea typeface="Arial" pitchFamily="34" charset="-122"/>
                           <a:cs typeface="Arial" pitchFamily="34" charset="-120"/>
                         </a:rPr>
-                        <a:t>窓・採光</a:t>
+                        <a:t>部屋の狭さ</a:t>
                       </a:r>
                       <a:endParaRPr lang="en-US" sz="900" dirty="0">
                         <a:latin typeface="Arial" charset="0"/>
@@ -13199,7 +13182,7 @@
                           <a:ea typeface="Arial" pitchFamily="34" charset="-122"/>
                           <a:cs typeface="Arial" pitchFamily="34" charset="-120"/>
                         </a:rPr>
-                        <a:t>入室して、すりガラスの窓を見た時のガッカリ感と言ったらなかった</a:t>
+                        <a:t>ベッドが小さい</a:t>
                       </a:r>
                       <a:endParaRPr lang="en-US" sz="900" dirty="0">
                         <a:latin typeface="Arial" charset="0"/>
@@ -13267,7 +13250,7 @@
                           <a:ea typeface="Arial" pitchFamily="34" charset="-122"/>
                           <a:cs typeface="Arial" pitchFamily="34" charset="-120"/>
                         </a:rPr>
-                        <a:t>3件</a:t>
+                        <a:t>1件</a:t>
                       </a:r>
                       <a:endParaRPr lang="en-US" sz="900" dirty="0">
                         <a:latin typeface="Arial" charset="0"/>
@@ -13405,1102 +13388,6 @@
                           <a:ea typeface="Arial" pitchFamily="34" charset="-122"/>
                           <a:cs typeface="Arial" pitchFamily="34" charset="-120"/>
                         </a:rPr>
-                        <a:t>部屋の狭さ</a:t>
-                      </a:r>
-                      <a:endParaRPr lang="en-US" sz="900" dirty="0">
-                        <a:latin typeface="Arial" charset="0"/>
-                        <a:ea typeface="Arial" charset="0"/>
-                        <a:cs typeface="Arial" charset="0"/>
-                      </a:endParaRPr>
-                    </a:p>
-                  </a:txBody>
-                  <a:tcPr marL="91440" marR="91440" marT="45720" marB="45720">
-                    <a:lnL w="6350" cap="flat" cmpd="sng" algn="ctr">
-                      <a:solidFill>
-                        <a:srgbClr val="CBD5E1"/>
-                      </a:solidFill>
-                      <a:prstDash val="solid"/>
-                      <a:round/>
-                      <a:headEnd type="none" w="med" len="med"/>
-                      <a:tailEnd type="none" w="med" len="med"/>
-                    </a:lnL>
-                    <a:lnR w="6350" cap="flat" cmpd="sng" algn="ctr">
-                      <a:solidFill>
-                        <a:srgbClr val="CBD5E1"/>
-                      </a:solidFill>
-                      <a:prstDash val="solid"/>
-                      <a:round/>
-                      <a:headEnd type="none" w="med" len="med"/>
-                      <a:tailEnd type="none" w="med" len="med"/>
-                    </a:lnR>
-                    <a:lnT w="6350" cap="flat" cmpd="sng" algn="ctr">
-                      <a:solidFill>
-                        <a:srgbClr val="CBD5E1"/>
-                      </a:solidFill>
-                      <a:prstDash val="solid"/>
-                      <a:round/>
-                      <a:headEnd type="none" w="med" len="med"/>
-                      <a:tailEnd type="none" w="med" len="med"/>
-                    </a:lnT>
-                    <a:lnB w="6350" cap="flat" cmpd="sng" algn="ctr">
-                      <a:solidFill>
-                        <a:srgbClr val="CBD5E1"/>
-                      </a:solidFill>
-                      <a:prstDash val="solid"/>
-                      <a:round/>
-                      <a:headEnd type="none" w="med" len="med"/>
-                      <a:tailEnd type="none" w="med" len="med"/>
-                    </a:lnB>
-                    <a:solidFill>
-                      <a:srgbClr val="FFFFFF"/>
-                    </a:solidFill>
-                  </a:tcPr>
-                </a:tc>
-                <a:tc>
-                  <a:txBody>
-                    <a:bodyPr/>
-                    <a:lstStyle/>
-                    <a:p>
-                      <a:pPr indent="0" marL="0">
-                        <a:buNone/>
-                      </a:pPr>
-                      <a:r>
-                        <a:rPr lang="en-US" sz="900" dirty="0">
-                          <a:solidFill>
-                            <a:srgbClr val="64748B"/>
-                          </a:solidFill>
-                          <a:latin typeface="Arial" pitchFamily="34" charset="0"/>
-                          <a:ea typeface="Arial" pitchFamily="34" charset="-122"/>
-                          <a:cs typeface="Arial" pitchFamily="34" charset="-120"/>
-                        </a:rPr>
-                        <a:t>ベッドが小さい</a:t>
-                      </a:r>
-                      <a:endParaRPr lang="en-US" sz="900" dirty="0">
-                        <a:latin typeface="Arial" charset="0"/>
-                        <a:ea typeface="Arial" charset="0"/>
-                        <a:cs typeface="Arial" charset="0"/>
-                      </a:endParaRPr>
-                    </a:p>
-                  </a:txBody>
-                  <a:tcPr marL="91440" marR="91440" marT="45720" marB="45720">
-                    <a:lnL w="6350" cap="flat" cmpd="sng" algn="ctr">
-                      <a:solidFill>
-                        <a:srgbClr val="CBD5E1"/>
-                      </a:solidFill>
-                      <a:prstDash val="solid"/>
-                      <a:round/>
-                      <a:headEnd type="none" w="med" len="med"/>
-                      <a:tailEnd type="none" w="med" len="med"/>
-                    </a:lnL>
-                    <a:lnR w="6350" cap="flat" cmpd="sng" algn="ctr">
-                      <a:solidFill>
-                        <a:srgbClr val="CBD5E1"/>
-                      </a:solidFill>
-                      <a:prstDash val="solid"/>
-                      <a:round/>
-                      <a:headEnd type="none" w="med" len="med"/>
-                      <a:tailEnd type="none" w="med" len="med"/>
-                    </a:lnR>
-                    <a:lnT w="6350" cap="flat" cmpd="sng" algn="ctr">
-                      <a:solidFill>
-                        <a:srgbClr val="CBD5E1"/>
-                      </a:solidFill>
-                      <a:prstDash val="solid"/>
-                      <a:round/>
-                      <a:headEnd type="none" w="med" len="med"/>
-                      <a:tailEnd type="none" w="med" len="med"/>
-                    </a:lnT>
-                    <a:lnB w="6350" cap="flat" cmpd="sng" algn="ctr">
-                      <a:solidFill>
-                        <a:srgbClr val="CBD5E1"/>
-                      </a:solidFill>
-                      <a:prstDash val="solid"/>
-                      <a:round/>
-                      <a:headEnd type="none" w="med" len="med"/>
-                      <a:tailEnd type="none" w="med" len="med"/>
-                    </a:lnB>
-                    <a:solidFill>
-                      <a:srgbClr val="FFFFFF"/>
-                    </a:solidFill>
-                  </a:tcPr>
-                </a:tc>
-                <a:tc>
-                  <a:txBody>
-                    <a:bodyPr/>
-                    <a:lstStyle/>
-                    <a:p>
-                      <a:pPr algn="ctr" indent="0" marL="0">
-                        <a:buNone/>
-                      </a:pPr>
-                      <a:r>
-                        <a:rPr lang="en-US" sz="900" dirty="0">
-                          <a:solidFill>
-                            <a:srgbClr val="334155"/>
-                          </a:solidFill>
-                          <a:latin typeface="Arial" pitchFamily="34" charset="0"/>
-                          <a:ea typeface="Arial" pitchFamily="34" charset="-122"/>
-                          <a:cs typeface="Arial" pitchFamily="34" charset="-120"/>
-                        </a:rPr>
-                        <a:t>2件</a:t>
-                      </a:r>
-                      <a:endParaRPr lang="en-US" sz="900" dirty="0">
-                        <a:latin typeface="Arial" charset="0"/>
-                        <a:ea typeface="Arial" charset="0"/>
-                        <a:cs typeface="Arial" charset="0"/>
-                      </a:endParaRPr>
-                    </a:p>
-                  </a:txBody>
-                  <a:tcPr marL="91440" marR="91440" marT="45720" marB="45720">
-                    <a:lnL w="6350" cap="flat" cmpd="sng" algn="ctr">
-                      <a:solidFill>
-                        <a:srgbClr val="CBD5E1"/>
-                      </a:solidFill>
-                      <a:prstDash val="solid"/>
-                      <a:round/>
-                      <a:headEnd type="none" w="med" len="med"/>
-                      <a:tailEnd type="none" w="med" len="med"/>
-                    </a:lnL>
-                    <a:lnR w="6350" cap="flat" cmpd="sng" algn="ctr">
-                      <a:solidFill>
-                        <a:srgbClr val="CBD5E1"/>
-                      </a:solidFill>
-                      <a:prstDash val="solid"/>
-                      <a:round/>
-                      <a:headEnd type="none" w="med" len="med"/>
-                      <a:tailEnd type="none" w="med" len="med"/>
-                    </a:lnR>
-                    <a:lnT w="6350" cap="flat" cmpd="sng" algn="ctr">
-                      <a:solidFill>
-                        <a:srgbClr val="CBD5E1"/>
-                      </a:solidFill>
-                      <a:prstDash val="solid"/>
-                      <a:round/>
-                      <a:headEnd type="none" w="med" len="med"/>
-                      <a:tailEnd type="none" w="med" len="med"/>
-                    </a:lnT>
-                    <a:lnB w="6350" cap="flat" cmpd="sng" algn="ctr">
-                      <a:solidFill>
-                        <a:srgbClr val="CBD5E1"/>
-                      </a:solidFill>
-                      <a:prstDash val="solid"/>
-                      <a:round/>
-                      <a:headEnd type="none" w="med" len="med"/>
-                      <a:tailEnd type="none" w="med" len="med"/>
-                    </a:lnB>
-                    <a:solidFill>
-                      <a:srgbClr val="FFFFFF"/>
-                    </a:solidFill>
-                  </a:tcPr>
-                </a:tc>
-              </a:tr>
-              <a:tr h="320040">
-                <a:tc>
-                  <a:txBody>
-                    <a:bodyPr/>
-                    <a:lstStyle/>
-                    <a:p>
-                      <a:pPr algn="ctr" indent="0" marL="0">
-                        <a:buNone/>
-                      </a:pPr>
-                      <a:r>
-                        <a:rPr lang="en-US" sz="1200" b="1" dirty="0">
-                          <a:solidFill>
-                            <a:srgbClr val="D4A843"/>
-                          </a:solidFill>
-                          <a:latin typeface="Arial" pitchFamily="34" charset="0"/>
-                          <a:ea typeface="Arial" pitchFamily="34" charset="-122"/>
-                          <a:cs typeface="Arial" pitchFamily="34" charset="-120"/>
-                        </a:rPr>
-                        <a:t>B</a:t>
-                      </a:r>
-                      <a:endParaRPr lang="en-US" sz="1200" dirty="0">
-                        <a:latin typeface="Arial" charset="0"/>
-                        <a:ea typeface="Arial" charset="0"/>
-                        <a:cs typeface="Arial" charset="0"/>
-                      </a:endParaRPr>
-                    </a:p>
-                  </a:txBody>
-                  <a:tcPr marL="91440" marR="91440" marT="45720" marB="45720">
-                    <a:lnL w="6350" cap="flat" cmpd="sng" algn="ctr">
-                      <a:solidFill>
-                        <a:srgbClr val="CBD5E1"/>
-                      </a:solidFill>
-                      <a:prstDash val="solid"/>
-                      <a:round/>
-                      <a:headEnd type="none" w="med" len="med"/>
-                      <a:tailEnd type="none" w="med" len="med"/>
-                    </a:lnL>
-                    <a:lnR w="6350" cap="flat" cmpd="sng" algn="ctr">
-                      <a:solidFill>
-                        <a:srgbClr val="CBD5E1"/>
-                      </a:solidFill>
-                      <a:prstDash val="solid"/>
-                      <a:round/>
-                      <a:headEnd type="none" w="med" len="med"/>
-                      <a:tailEnd type="none" w="med" len="med"/>
-                    </a:lnR>
-                    <a:lnT w="6350" cap="flat" cmpd="sng" algn="ctr">
-                      <a:solidFill>
-                        <a:srgbClr val="CBD5E1"/>
-                      </a:solidFill>
-                      <a:prstDash val="solid"/>
-                      <a:round/>
-                      <a:headEnd type="none" w="med" len="med"/>
-                      <a:tailEnd type="none" w="med" len="med"/>
-                    </a:lnT>
-                    <a:lnB w="6350" cap="flat" cmpd="sng" algn="ctr">
-                      <a:solidFill>
-                        <a:srgbClr val="CBD5E1"/>
-                      </a:solidFill>
-                      <a:prstDash val="solid"/>
-                      <a:round/>
-                      <a:headEnd type="none" w="med" len="med"/>
-                      <a:tailEnd type="none" w="med" len="med"/>
-                    </a:lnB>
-                    <a:solidFill>
-                      <a:srgbClr val="E8EFF8"/>
-                    </a:solidFill>
-                  </a:tcPr>
-                </a:tc>
-                <a:tc>
-                  <a:txBody>
-                    <a:bodyPr/>
-                    <a:lstStyle/>
-                    <a:p>
-                      <a:pPr indent="0" marL="0">
-                        <a:buNone/>
-                      </a:pPr>
-                      <a:r>
-                        <a:rPr lang="en-US" sz="900" b="1" dirty="0">
-                          <a:solidFill>
-                            <a:srgbClr val="334155"/>
-                          </a:solidFill>
-                          <a:latin typeface="Arial" pitchFamily="34" charset="0"/>
-                          <a:ea typeface="Arial" pitchFamily="34" charset="-122"/>
-                          <a:cs typeface="Arial" pitchFamily="34" charset="-120"/>
-                        </a:rPr>
-                        <a:t>浴室・水回り</a:t>
-                      </a:r>
-                      <a:endParaRPr lang="en-US" sz="900" dirty="0">
-                        <a:latin typeface="Arial" charset="0"/>
-                        <a:ea typeface="Arial" charset="0"/>
-                        <a:cs typeface="Arial" charset="0"/>
-                      </a:endParaRPr>
-                    </a:p>
-                  </a:txBody>
-                  <a:tcPr marL="91440" marR="91440" marT="45720" marB="45720">
-                    <a:lnL w="6350" cap="flat" cmpd="sng" algn="ctr">
-                      <a:solidFill>
-                        <a:srgbClr val="CBD5E1"/>
-                      </a:solidFill>
-                      <a:prstDash val="solid"/>
-                      <a:round/>
-                      <a:headEnd type="none" w="med" len="med"/>
-                      <a:tailEnd type="none" w="med" len="med"/>
-                    </a:lnL>
-                    <a:lnR w="6350" cap="flat" cmpd="sng" algn="ctr">
-                      <a:solidFill>
-                        <a:srgbClr val="CBD5E1"/>
-                      </a:solidFill>
-                      <a:prstDash val="solid"/>
-                      <a:round/>
-                      <a:headEnd type="none" w="med" len="med"/>
-                      <a:tailEnd type="none" w="med" len="med"/>
-                    </a:lnR>
-                    <a:lnT w="6350" cap="flat" cmpd="sng" algn="ctr">
-                      <a:solidFill>
-                        <a:srgbClr val="CBD5E1"/>
-                      </a:solidFill>
-                      <a:prstDash val="solid"/>
-                      <a:round/>
-                      <a:headEnd type="none" w="med" len="med"/>
-                      <a:tailEnd type="none" w="med" len="med"/>
-                    </a:lnT>
-                    <a:lnB w="6350" cap="flat" cmpd="sng" algn="ctr">
-                      <a:solidFill>
-                        <a:srgbClr val="CBD5E1"/>
-                      </a:solidFill>
-                      <a:prstDash val="solid"/>
-                      <a:round/>
-                      <a:headEnd type="none" w="med" len="med"/>
-                      <a:tailEnd type="none" w="med" len="med"/>
-                    </a:lnB>
-                    <a:solidFill>
-                      <a:srgbClr val="E8EFF8"/>
-                    </a:solidFill>
-                  </a:tcPr>
-                </a:tc>
-                <a:tc>
-                  <a:txBody>
-                    <a:bodyPr/>
-                    <a:lstStyle/>
-                    <a:p>
-                      <a:pPr indent="0" marL="0">
-                        <a:buNone/>
-                      </a:pPr>
-                      <a:r>
-                        <a:rPr lang="en-US" sz="900" dirty="0">
-                          <a:solidFill>
-                            <a:srgbClr val="64748B"/>
-                          </a:solidFill>
-                          <a:latin typeface="Arial" pitchFamily="34" charset="0"/>
-                          <a:ea typeface="Arial" pitchFamily="34" charset="-122"/>
-                          <a:cs typeface="Arial" pitchFamily="34" charset="-120"/>
-                        </a:rPr>
-                        <a:t>ビジネスに利用するには少々高めではありますが、風呂とトイレは広く取られており、窮屈感がありません</a:t>
-                      </a:r>
-                      <a:endParaRPr lang="en-US" sz="900" dirty="0">
-                        <a:latin typeface="Arial" charset="0"/>
-                        <a:ea typeface="Arial" charset="0"/>
-                        <a:cs typeface="Arial" charset="0"/>
-                      </a:endParaRPr>
-                    </a:p>
-                  </a:txBody>
-                  <a:tcPr marL="91440" marR="91440" marT="45720" marB="45720">
-                    <a:lnL w="6350" cap="flat" cmpd="sng" algn="ctr">
-                      <a:solidFill>
-                        <a:srgbClr val="CBD5E1"/>
-                      </a:solidFill>
-                      <a:prstDash val="solid"/>
-                      <a:round/>
-                      <a:headEnd type="none" w="med" len="med"/>
-                      <a:tailEnd type="none" w="med" len="med"/>
-                    </a:lnL>
-                    <a:lnR w="6350" cap="flat" cmpd="sng" algn="ctr">
-                      <a:solidFill>
-                        <a:srgbClr val="CBD5E1"/>
-                      </a:solidFill>
-                      <a:prstDash val="solid"/>
-                      <a:round/>
-                      <a:headEnd type="none" w="med" len="med"/>
-                      <a:tailEnd type="none" w="med" len="med"/>
-                    </a:lnR>
-                    <a:lnT w="6350" cap="flat" cmpd="sng" algn="ctr">
-                      <a:solidFill>
-                        <a:srgbClr val="CBD5E1"/>
-                      </a:solidFill>
-                      <a:prstDash val="solid"/>
-                      <a:round/>
-                      <a:headEnd type="none" w="med" len="med"/>
-                      <a:tailEnd type="none" w="med" len="med"/>
-                    </a:lnT>
-                    <a:lnB w="6350" cap="flat" cmpd="sng" algn="ctr">
-                      <a:solidFill>
-                        <a:srgbClr val="CBD5E1"/>
-                      </a:solidFill>
-                      <a:prstDash val="solid"/>
-                      <a:round/>
-                      <a:headEnd type="none" w="med" len="med"/>
-                      <a:tailEnd type="none" w="med" len="med"/>
-                    </a:lnB>
-                    <a:solidFill>
-                      <a:srgbClr val="E8EFF8"/>
-                    </a:solidFill>
-                  </a:tcPr>
-                </a:tc>
-                <a:tc>
-                  <a:txBody>
-                    <a:bodyPr/>
-                    <a:lstStyle/>
-                    <a:p>
-                      <a:pPr algn="ctr" indent="0" marL="0">
-                        <a:buNone/>
-                      </a:pPr>
-                      <a:r>
-                        <a:rPr lang="en-US" sz="900" dirty="0">
-                          <a:solidFill>
-                            <a:srgbClr val="334155"/>
-                          </a:solidFill>
-                          <a:latin typeface="Arial" pitchFamily="34" charset="0"/>
-                          <a:ea typeface="Arial" pitchFamily="34" charset="-122"/>
-                          <a:cs typeface="Arial" pitchFamily="34" charset="-120"/>
-                        </a:rPr>
-                        <a:t>2件</a:t>
-                      </a:r>
-                      <a:endParaRPr lang="en-US" sz="900" dirty="0">
-                        <a:latin typeface="Arial" charset="0"/>
-                        <a:ea typeface="Arial" charset="0"/>
-                        <a:cs typeface="Arial" charset="0"/>
-                      </a:endParaRPr>
-                    </a:p>
-                  </a:txBody>
-                  <a:tcPr marL="91440" marR="91440" marT="45720" marB="45720">
-                    <a:lnL w="6350" cap="flat" cmpd="sng" algn="ctr">
-                      <a:solidFill>
-                        <a:srgbClr val="CBD5E1"/>
-                      </a:solidFill>
-                      <a:prstDash val="solid"/>
-                      <a:round/>
-                      <a:headEnd type="none" w="med" len="med"/>
-                      <a:tailEnd type="none" w="med" len="med"/>
-                    </a:lnL>
-                    <a:lnR w="6350" cap="flat" cmpd="sng" algn="ctr">
-                      <a:solidFill>
-                        <a:srgbClr val="CBD5E1"/>
-                      </a:solidFill>
-                      <a:prstDash val="solid"/>
-                      <a:round/>
-                      <a:headEnd type="none" w="med" len="med"/>
-                      <a:tailEnd type="none" w="med" len="med"/>
-                    </a:lnR>
-                    <a:lnT w="6350" cap="flat" cmpd="sng" algn="ctr">
-                      <a:solidFill>
-                        <a:srgbClr val="CBD5E1"/>
-                      </a:solidFill>
-                      <a:prstDash val="solid"/>
-                      <a:round/>
-                      <a:headEnd type="none" w="med" len="med"/>
-                      <a:tailEnd type="none" w="med" len="med"/>
-                    </a:lnT>
-                    <a:lnB w="6350" cap="flat" cmpd="sng" algn="ctr">
-                      <a:solidFill>
-                        <a:srgbClr val="CBD5E1"/>
-                      </a:solidFill>
-                      <a:prstDash val="solid"/>
-                      <a:round/>
-                      <a:headEnd type="none" w="med" len="med"/>
-                      <a:tailEnd type="none" w="med" len="med"/>
-                    </a:lnB>
-                    <a:solidFill>
-                      <a:srgbClr val="E8EFF8"/>
-                    </a:solidFill>
-                  </a:tcPr>
-                </a:tc>
-              </a:tr>
-              <a:tr h="320040">
-                <a:tc>
-                  <a:txBody>
-                    <a:bodyPr/>
-                    <a:lstStyle/>
-                    <a:p>
-                      <a:pPr algn="ctr" indent="0" marL="0">
-                        <a:buNone/>
-                      </a:pPr>
-                      <a:r>
-                        <a:rPr lang="en-US" sz="1200" b="1" dirty="0">
-                          <a:solidFill>
-                            <a:srgbClr val="94A3B8"/>
-                          </a:solidFill>
-                          <a:latin typeface="Arial" pitchFamily="34" charset="0"/>
-                          <a:ea typeface="Arial" pitchFamily="34" charset="-122"/>
-                          <a:cs typeface="Arial" pitchFamily="34" charset="-120"/>
-                        </a:rPr>
-                        <a:t>C</a:t>
-                      </a:r>
-                      <a:endParaRPr lang="en-US" sz="1200" dirty="0">
-                        <a:latin typeface="Arial" charset="0"/>
-                        <a:ea typeface="Arial" charset="0"/>
-                        <a:cs typeface="Arial" charset="0"/>
-                      </a:endParaRPr>
-                    </a:p>
-                  </a:txBody>
-                  <a:tcPr marL="91440" marR="91440" marT="45720" marB="45720">
-                    <a:lnL w="6350" cap="flat" cmpd="sng" algn="ctr">
-                      <a:solidFill>
-                        <a:srgbClr val="CBD5E1"/>
-                      </a:solidFill>
-                      <a:prstDash val="solid"/>
-                      <a:round/>
-                      <a:headEnd type="none" w="med" len="med"/>
-                      <a:tailEnd type="none" w="med" len="med"/>
-                    </a:lnL>
-                    <a:lnR w="6350" cap="flat" cmpd="sng" algn="ctr">
-                      <a:solidFill>
-                        <a:srgbClr val="CBD5E1"/>
-                      </a:solidFill>
-                      <a:prstDash val="solid"/>
-                      <a:round/>
-                      <a:headEnd type="none" w="med" len="med"/>
-                      <a:tailEnd type="none" w="med" len="med"/>
-                    </a:lnR>
-                    <a:lnT w="6350" cap="flat" cmpd="sng" algn="ctr">
-                      <a:solidFill>
-                        <a:srgbClr val="CBD5E1"/>
-                      </a:solidFill>
-                      <a:prstDash val="solid"/>
-                      <a:round/>
-                      <a:headEnd type="none" w="med" len="med"/>
-                      <a:tailEnd type="none" w="med" len="med"/>
-                    </a:lnT>
-                    <a:lnB w="6350" cap="flat" cmpd="sng" algn="ctr">
-                      <a:solidFill>
-                        <a:srgbClr val="CBD5E1"/>
-                      </a:solidFill>
-                      <a:prstDash val="solid"/>
-                      <a:round/>
-                      <a:headEnd type="none" w="med" len="med"/>
-                      <a:tailEnd type="none" w="med" len="med"/>
-                    </a:lnB>
-                    <a:solidFill>
-                      <a:srgbClr val="FFFFFF"/>
-                    </a:solidFill>
-                  </a:tcPr>
-                </a:tc>
-                <a:tc>
-                  <a:txBody>
-                    <a:bodyPr/>
-                    <a:lstStyle/>
-                    <a:p>
-                      <a:pPr indent="0" marL="0">
-                        <a:buNone/>
-                      </a:pPr>
-                      <a:r>
-                        <a:rPr lang="en-US" sz="900" b="1" dirty="0">
-                          <a:solidFill>
-                            <a:srgbClr val="334155"/>
-                          </a:solidFill>
-                          <a:latin typeface="Arial" pitchFamily="34" charset="0"/>
-                          <a:ea typeface="Arial" pitchFamily="34" charset="-122"/>
-                          <a:cs typeface="Arial" pitchFamily="34" charset="-120"/>
-                        </a:rPr>
-                        <a:t>エアコン・空調</a:t>
-                      </a:r>
-                      <a:endParaRPr lang="en-US" sz="900" dirty="0">
-                        <a:latin typeface="Arial" charset="0"/>
-                        <a:ea typeface="Arial" charset="0"/>
-                        <a:cs typeface="Arial" charset="0"/>
-                      </a:endParaRPr>
-                    </a:p>
-                  </a:txBody>
-                  <a:tcPr marL="91440" marR="91440" marT="45720" marB="45720">
-                    <a:lnL w="6350" cap="flat" cmpd="sng" algn="ctr">
-                      <a:solidFill>
-                        <a:srgbClr val="CBD5E1"/>
-                      </a:solidFill>
-                      <a:prstDash val="solid"/>
-                      <a:round/>
-                      <a:headEnd type="none" w="med" len="med"/>
-                      <a:tailEnd type="none" w="med" len="med"/>
-                    </a:lnL>
-                    <a:lnR w="6350" cap="flat" cmpd="sng" algn="ctr">
-                      <a:solidFill>
-                        <a:srgbClr val="CBD5E1"/>
-                      </a:solidFill>
-                      <a:prstDash val="solid"/>
-                      <a:round/>
-                      <a:headEnd type="none" w="med" len="med"/>
-                      <a:tailEnd type="none" w="med" len="med"/>
-                    </a:lnR>
-                    <a:lnT w="6350" cap="flat" cmpd="sng" algn="ctr">
-                      <a:solidFill>
-                        <a:srgbClr val="CBD5E1"/>
-                      </a:solidFill>
-                      <a:prstDash val="solid"/>
-                      <a:round/>
-                      <a:headEnd type="none" w="med" len="med"/>
-                      <a:tailEnd type="none" w="med" len="med"/>
-                    </a:lnT>
-                    <a:lnB w="6350" cap="flat" cmpd="sng" algn="ctr">
-                      <a:solidFill>
-                        <a:srgbClr val="CBD5E1"/>
-                      </a:solidFill>
-                      <a:prstDash val="solid"/>
-                      <a:round/>
-                      <a:headEnd type="none" w="med" len="med"/>
-                      <a:tailEnd type="none" w="med" len="med"/>
-                    </a:lnB>
-                    <a:solidFill>
-                      <a:srgbClr val="FFFFFF"/>
-                    </a:solidFill>
-                  </a:tcPr>
-                </a:tc>
-                <a:tc>
-                  <a:txBody>
-                    <a:bodyPr/>
-                    <a:lstStyle/>
-                    <a:p>
-                      <a:pPr indent="0" marL="0">
-                        <a:buNone/>
-                      </a:pPr>
-                      <a:r>
-                        <a:rPr lang="en-US" sz="900" dirty="0">
-                          <a:solidFill>
-                            <a:srgbClr val="64748B"/>
-                          </a:solidFill>
-                          <a:latin typeface="Arial" pitchFamily="34" charset="0"/>
-                          <a:ea typeface="Arial" pitchFamily="34" charset="-122"/>
-                          <a:cs typeface="Arial" pitchFamily="34" charset="-120"/>
-                        </a:rPr>
-                        <a:t>紅茶、コーヒー、ほうじ茶があり寒い日には嬉しいアメニティでした</a:t>
-                      </a:r>
-                      <a:endParaRPr lang="en-US" sz="900" dirty="0">
-                        <a:latin typeface="Arial" charset="0"/>
-                        <a:ea typeface="Arial" charset="0"/>
-                        <a:cs typeface="Arial" charset="0"/>
-                      </a:endParaRPr>
-                    </a:p>
-                  </a:txBody>
-                  <a:tcPr marL="91440" marR="91440" marT="45720" marB="45720">
-                    <a:lnL w="6350" cap="flat" cmpd="sng" algn="ctr">
-                      <a:solidFill>
-                        <a:srgbClr val="CBD5E1"/>
-                      </a:solidFill>
-                      <a:prstDash val="solid"/>
-                      <a:round/>
-                      <a:headEnd type="none" w="med" len="med"/>
-                      <a:tailEnd type="none" w="med" len="med"/>
-                    </a:lnL>
-                    <a:lnR w="6350" cap="flat" cmpd="sng" algn="ctr">
-                      <a:solidFill>
-                        <a:srgbClr val="CBD5E1"/>
-                      </a:solidFill>
-                      <a:prstDash val="solid"/>
-                      <a:round/>
-                      <a:headEnd type="none" w="med" len="med"/>
-                      <a:tailEnd type="none" w="med" len="med"/>
-                    </a:lnR>
-                    <a:lnT w="6350" cap="flat" cmpd="sng" algn="ctr">
-                      <a:solidFill>
-                        <a:srgbClr val="CBD5E1"/>
-                      </a:solidFill>
-                      <a:prstDash val="solid"/>
-                      <a:round/>
-                      <a:headEnd type="none" w="med" len="med"/>
-                      <a:tailEnd type="none" w="med" len="med"/>
-                    </a:lnT>
-                    <a:lnB w="6350" cap="flat" cmpd="sng" algn="ctr">
-                      <a:solidFill>
-                        <a:srgbClr val="CBD5E1"/>
-                      </a:solidFill>
-                      <a:prstDash val="solid"/>
-                      <a:round/>
-                      <a:headEnd type="none" w="med" len="med"/>
-                      <a:tailEnd type="none" w="med" len="med"/>
-                    </a:lnB>
-                    <a:solidFill>
-                      <a:srgbClr val="FFFFFF"/>
-                    </a:solidFill>
-                  </a:tcPr>
-                </a:tc>
-                <a:tc>
-                  <a:txBody>
-                    <a:bodyPr/>
-                    <a:lstStyle/>
-                    <a:p>
-                      <a:pPr algn="ctr" indent="0" marL="0">
-                        <a:buNone/>
-                      </a:pPr>
-                      <a:r>
-                        <a:rPr lang="en-US" sz="900" dirty="0">
-                          <a:solidFill>
-                            <a:srgbClr val="334155"/>
-                          </a:solidFill>
-                          <a:latin typeface="Arial" pitchFamily="34" charset="0"/>
-                          <a:ea typeface="Arial" pitchFamily="34" charset="-122"/>
-                          <a:cs typeface="Arial" pitchFamily="34" charset="-120"/>
-                        </a:rPr>
-                        <a:t>2件</a:t>
-                      </a:r>
-                      <a:endParaRPr lang="en-US" sz="900" dirty="0">
-                        <a:latin typeface="Arial" charset="0"/>
-                        <a:ea typeface="Arial" charset="0"/>
-                        <a:cs typeface="Arial" charset="0"/>
-                      </a:endParaRPr>
-                    </a:p>
-                  </a:txBody>
-                  <a:tcPr marL="91440" marR="91440" marT="45720" marB="45720">
-                    <a:lnL w="6350" cap="flat" cmpd="sng" algn="ctr">
-                      <a:solidFill>
-                        <a:srgbClr val="CBD5E1"/>
-                      </a:solidFill>
-                      <a:prstDash val="solid"/>
-                      <a:round/>
-                      <a:headEnd type="none" w="med" len="med"/>
-                      <a:tailEnd type="none" w="med" len="med"/>
-                    </a:lnL>
-                    <a:lnR w="6350" cap="flat" cmpd="sng" algn="ctr">
-                      <a:solidFill>
-                        <a:srgbClr val="CBD5E1"/>
-                      </a:solidFill>
-                      <a:prstDash val="solid"/>
-                      <a:round/>
-                      <a:headEnd type="none" w="med" len="med"/>
-                      <a:tailEnd type="none" w="med" len="med"/>
-                    </a:lnR>
-                    <a:lnT w="6350" cap="flat" cmpd="sng" algn="ctr">
-                      <a:solidFill>
-                        <a:srgbClr val="CBD5E1"/>
-                      </a:solidFill>
-                      <a:prstDash val="solid"/>
-                      <a:round/>
-                      <a:headEnd type="none" w="med" len="med"/>
-                      <a:tailEnd type="none" w="med" len="med"/>
-                    </a:lnT>
-                    <a:lnB w="6350" cap="flat" cmpd="sng" algn="ctr">
-                      <a:solidFill>
-                        <a:srgbClr val="CBD5E1"/>
-                      </a:solidFill>
-                      <a:prstDash val="solid"/>
-                      <a:round/>
-                      <a:headEnd type="none" w="med" len="med"/>
-                      <a:tailEnd type="none" w="med" len="med"/>
-                    </a:lnB>
-                    <a:solidFill>
-                      <a:srgbClr val="FFFFFF"/>
-                    </a:solidFill>
-                  </a:tcPr>
-                </a:tc>
-              </a:tr>
-              <a:tr h="320040">
-                <a:tc>
-                  <a:txBody>
-                    <a:bodyPr/>
-                    <a:lstStyle/>
-                    <a:p>
-                      <a:pPr algn="ctr" indent="0" marL="0">
-                        <a:buNone/>
-                      </a:pPr>
-                      <a:r>
-                        <a:rPr lang="en-US" sz="1200" b="1" dirty="0">
-                          <a:solidFill>
-                            <a:srgbClr val="94A3B8"/>
-                          </a:solidFill>
-                          <a:latin typeface="Arial" pitchFamily="34" charset="0"/>
-                          <a:ea typeface="Arial" pitchFamily="34" charset="-122"/>
-                          <a:cs typeface="Arial" pitchFamily="34" charset="-120"/>
-                        </a:rPr>
-                        <a:t>C</a:t>
-                      </a:r>
-                      <a:endParaRPr lang="en-US" sz="1200" dirty="0">
-                        <a:latin typeface="Arial" charset="0"/>
-                        <a:ea typeface="Arial" charset="0"/>
-                        <a:cs typeface="Arial" charset="0"/>
-                      </a:endParaRPr>
-                    </a:p>
-                  </a:txBody>
-                  <a:tcPr marL="91440" marR="91440" marT="45720" marB="45720">
-                    <a:lnL w="6350" cap="flat" cmpd="sng" algn="ctr">
-                      <a:solidFill>
-                        <a:srgbClr val="CBD5E1"/>
-                      </a:solidFill>
-                      <a:prstDash val="solid"/>
-                      <a:round/>
-                      <a:headEnd type="none" w="med" len="med"/>
-                      <a:tailEnd type="none" w="med" len="med"/>
-                    </a:lnL>
-                    <a:lnR w="6350" cap="flat" cmpd="sng" algn="ctr">
-                      <a:solidFill>
-                        <a:srgbClr val="CBD5E1"/>
-                      </a:solidFill>
-                      <a:prstDash val="solid"/>
-                      <a:round/>
-                      <a:headEnd type="none" w="med" len="med"/>
-                      <a:tailEnd type="none" w="med" len="med"/>
-                    </a:lnR>
-                    <a:lnT w="6350" cap="flat" cmpd="sng" algn="ctr">
-                      <a:solidFill>
-                        <a:srgbClr val="CBD5E1"/>
-                      </a:solidFill>
-                      <a:prstDash val="solid"/>
-                      <a:round/>
-                      <a:headEnd type="none" w="med" len="med"/>
-                      <a:tailEnd type="none" w="med" len="med"/>
-                    </a:lnT>
-                    <a:lnB w="6350" cap="flat" cmpd="sng" algn="ctr">
-                      <a:solidFill>
-                        <a:srgbClr val="CBD5E1"/>
-                      </a:solidFill>
-                      <a:prstDash val="solid"/>
-                      <a:round/>
-                      <a:headEnd type="none" w="med" len="med"/>
-                      <a:tailEnd type="none" w="med" len="med"/>
-                    </a:lnB>
-                    <a:solidFill>
-                      <a:srgbClr val="E8EFF8"/>
-                    </a:solidFill>
-                  </a:tcPr>
-                </a:tc>
-                <a:tc>
-                  <a:txBody>
-                    <a:bodyPr/>
-                    <a:lstStyle/>
-                    <a:p>
-                      <a:pPr indent="0" marL="0">
-                        <a:buNone/>
-                      </a:pPr>
-                      <a:r>
-                        <a:rPr lang="en-US" sz="900" b="1" dirty="0">
-                          <a:solidFill>
-                            <a:srgbClr val="334155"/>
-                          </a:solidFill>
-                          <a:latin typeface="Arial" pitchFamily="34" charset="0"/>
-                          <a:ea typeface="Arial" pitchFamily="34" charset="-122"/>
-                          <a:cs typeface="Arial" pitchFamily="34" charset="-120"/>
-                        </a:rPr>
-                        <a:t>設備の老朽化</a:t>
-                      </a:r>
-                      <a:endParaRPr lang="en-US" sz="900" dirty="0">
-                        <a:latin typeface="Arial" charset="0"/>
-                        <a:ea typeface="Arial" charset="0"/>
-                        <a:cs typeface="Arial" charset="0"/>
-                      </a:endParaRPr>
-                    </a:p>
-                  </a:txBody>
-                  <a:tcPr marL="91440" marR="91440" marT="45720" marB="45720">
-                    <a:lnL w="6350" cap="flat" cmpd="sng" algn="ctr">
-                      <a:solidFill>
-                        <a:srgbClr val="CBD5E1"/>
-                      </a:solidFill>
-                      <a:prstDash val="solid"/>
-                      <a:round/>
-                      <a:headEnd type="none" w="med" len="med"/>
-                      <a:tailEnd type="none" w="med" len="med"/>
-                    </a:lnL>
-                    <a:lnR w="6350" cap="flat" cmpd="sng" algn="ctr">
-                      <a:solidFill>
-                        <a:srgbClr val="CBD5E1"/>
-                      </a:solidFill>
-                      <a:prstDash val="solid"/>
-                      <a:round/>
-                      <a:headEnd type="none" w="med" len="med"/>
-                      <a:tailEnd type="none" w="med" len="med"/>
-                    </a:lnR>
-                    <a:lnT w="6350" cap="flat" cmpd="sng" algn="ctr">
-                      <a:solidFill>
-                        <a:srgbClr val="CBD5E1"/>
-                      </a:solidFill>
-                      <a:prstDash val="solid"/>
-                      <a:round/>
-                      <a:headEnd type="none" w="med" len="med"/>
-                      <a:tailEnd type="none" w="med" len="med"/>
-                    </a:lnT>
-                    <a:lnB w="6350" cap="flat" cmpd="sng" algn="ctr">
-                      <a:solidFill>
-                        <a:srgbClr val="CBD5E1"/>
-                      </a:solidFill>
-                      <a:prstDash val="solid"/>
-                      <a:round/>
-                      <a:headEnd type="none" w="med" len="med"/>
-                      <a:tailEnd type="none" w="med" len="med"/>
-                    </a:lnB>
-                    <a:solidFill>
-                      <a:srgbClr val="E8EFF8"/>
-                    </a:solidFill>
-                  </a:tcPr>
-                </a:tc>
-                <a:tc>
-                  <a:txBody>
-                    <a:bodyPr/>
-                    <a:lstStyle/>
-                    <a:p>
-                      <a:pPr indent="0" marL="0">
-                        <a:buNone/>
-                      </a:pPr>
-                      <a:r>
-                        <a:rPr lang="en-US" sz="900" dirty="0">
-                          <a:solidFill>
-                            <a:srgbClr val="64748B"/>
-                          </a:solidFill>
-                          <a:latin typeface="Arial" pitchFamily="34" charset="0"/>
-                          <a:ea typeface="Arial" pitchFamily="34" charset="-122"/>
-                          <a:cs typeface="Arial" pitchFamily="34" charset="-120"/>
-                        </a:rPr>
-                        <a:t>周辺の宿泊施設は老朽化が激しく小さなリクエストにも答えない施設があったりと・・・当施設は築浅で基本的な部分は申し分...</a:t>
-                      </a:r>
-                      <a:endParaRPr lang="en-US" sz="900" dirty="0">
-                        <a:latin typeface="Arial" charset="0"/>
-                        <a:ea typeface="Arial" charset="0"/>
-                        <a:cs typeface="Arial" charset="0"/>
-                      </a:endParaRPr>
-                    </a:p>
-                  </a:txBody>
-                  <a:tcPr marL="91440" marR="91440" marT="45720" marB="45720">
-                    <a:lnL w="6350" cap="flat" cmpd="sng" algn="ctr">
-                      <a:solidFill>
-                        <a:srgbClr val="CBD5E1"/>
-                      </a:solidFill>
-                      <a:prstDash val="solid"/>
-                      <a:round/>
-                      <a:headEnd type="none" w="med" len="med"/>
-                      <a:tailEnd type="none" w="med" len="med"/>
-                    </a:lnL>
-                    <a:lnR w="6350" cap="flat" cmpd="sng" algn="ctr">
-                      <a:solidFill>
-                        <a:srgbClr val="CBD5E1"/>
-                      </a:solidFill>
-                      <a:prstDash val="solid"/>
-                      <a:round/>
-                      <a:headEnd type="none" w="med" len="med"/>
-                      <a:tailEnd type="none" w="med" len="med"/>
-                    </a:lnR>
-                    <a:lnT w="6350" cap="flat" cmpd="sng" algn="ctr">
-                      <a:solidFill>
-                        <a:srgbClr val="CBD5E1"/>
-                      </a:solidFill>
-                      <a:prstDash val="solid"/>
-                      <a:round/>
-                      <a:headEnd type="none" w="med" len="med"/>
-                      <a:tailEnd type="none" w="med" len="med"/>
-                    </a:lnT>
-                    <a:lnB w="6350" cap="flat" cmpd="sng" algn="ctr">
-                      <a:solidFill>
-                        <a:srgbClr val="CBD5E1"/>
-                      </a:solidFill>
-                      <a:prstDash val="solid"/>
-                      <a:round/>
-                      <a:headEnd type="none" w="med" len="med"/>
-                      <a:tailEnd type="none" w="med" len="med"/>
-                    </a:lnB>
-                    <a:solidFill>
-                      <a:srgbClr val="E8EFF8"/>
-                    </a:solidFill>
-                  </a:tcPr>
-                </a:tc>
-                <a:tc>
-                  <a:txBody>
-                    <a:bodyPr/>
-                    <a:lstStyle/>
-                    <a:p>
-                      <a:pPr algn="ctr" indent="0" marL="0">
-                        <a:buNone/>
-                      </a:pPr>
-                      <a:r>
-                        <a:rPr lang="en-US" sz="900" dirty="0">
-                          <a:solidFill>
-                            <a:srgbClr val="334155"/>
-                          </a:solidFill>
-                          <a:latin typeface="Arial" pitchFamily="34" charset="0"/>
-                          <a:ea typeface="Arial" pitchFamily="34" charset="-122"/>
-                          <a:cs typeface="Arial" pitchFamily="34" charset="-120"/>
-                        </a:rPr>
-                        <a:t>1件</a:t>
-                      </a:r>
-                      <a:endParaRPr lang="en-US" sz="900" dirty="0">
-                        <a:latin typeface="Arial" charset="0"/>
-                        <a:ea typeface="Arial" charset="0"/>
-                        <a:cs typeface="Arial" charset="0"/>
-                      </a:endParaRPr>
-                    </a:p>
-                  </a:txBody>
-                  <a:tcPr marL="91440" marR="91440" marT="45720" marB="45720">
-                    <a:lnL w="6350" cap="flat" cmpd="sng" algn="ctr">
-                      <a:solidFill>
-                        <a:srgbClr val="CBD5E1"/>
-                      </a:solidFill>
-                      <a:prstDash val="solid"/>
-                      <a:round/>
-                      <a:headEnd type="none" w="med" len="med"/>
-                      <a:tailEnd type="none" w="med" len="med"/>
-                    </a:lnL>
-                    <a:lnR w="6350" cap="flat" cmpd="sng" algn="ctr">
-                      <a:solidFill>
-                        <a:srgbClr val="CBD5E1"/>
-                      </a:solidFill>
-                      <a:prstDash val="solid"/>
-                      <a:round/>
-                      <a:headEnd type="none" w="med" len="med"/>
-                      <a:tailEnd type="none" w="med" len="med"/>
-                    </a:lnR>
-                    <a:lnT w="6350" cap="flat" cmpd="sng" algn="ctr">
-                      <a:solidFill>
-                        <a:srgbClr val="CBD5E1"/>
-                      </a:solidFill>
-                      <a:prstDash val="solid"/>
-                      <a:round/>
-                      <a:headEnd type="none" w="med" len="med"/>
-                      <a:tailEnd type="none" w="med" len="med"/>
-                    </a:lnT>
-                    <a:lnB w="6350" cap="flat" cmpd="sng" algn="ctr">
-                      <a:solidFill>
-                        <a:srgbClr val="CBD5E1"/>
-                      </a:solidFill>
-                      <a:prstDash val="solid"/>
-                      <a:round/>
-                      <a:headEnd type="none" w="med" len="med"/>
-                      <a:tailEnd type="none" w="med" len="med"/>
-                    </a:lnB>
-                    <a:solidFill>
-                      <a:srgbClr val="E8EFF8"/>
-                    </a:solidFill>
-                  </a:tcPr>
-                </a:tc>
-              </a:tr>
-              <a:tr h="320040">
-                <a:tc>
-                  <a:txBody>
-                    <a:bodyPr/>
-                    <a:lstStyle/>
-                    <a:p>
-                      <a:pPr algn="ctr" indent="0" marL="0">
-                        <a:buNone/>
-                      </a:pPr>
-                      <a:r>
-                        <a:rPr lang="en-US" sz="1200" b="1" dirty="0">
-                          <a:solidFill>
-                            <a:srgbClr val="94A3B8"/>
-                          </a:solidFill>
-                          <a:latin typeface="Arial" pitchFamily="34" charset="0"/>
-                          <a:ea typeface="Arial" pitchFamily="34" charset="-122"/>
-                          <a:cs typeface="Arial" pitchFamily="34" charset="-120"/>
-                        </a:rPr>
-                        <a:t>C</a:t>
-                      </a:r>
-                      <a:endParaRPr lang="en-US" sz="1200" dirty="0">
-                        <a:latin typeface="Arial" charset="0"/>
-                        <a:ea typeface="Arial" charset="0"/>
-                        <a:cs typeface="Arial" charset="0"/>
-                      </a:endParaRPr>
-                    </a:p>
-                  </a:txBody>
-                  <a:tcPr marL="91440" marR="91440" marT="45720" marB="45720">
-                    <a:lnL w="6350" cap="flat" cmpd="sng" algn="ctr">
-                      <a:solidFill>
-                        <a:srgbClr val="CBD5E1"/>
-                      </a:solidFill>
-                      <a:prstDash val="solid"/>
-                      <a:round/>
-                      <a:headEnd type="none" w="med" len="med"/>
-                      <a:tailEnd type="none" w="med" len="med"/>
-                    </a:lnL>
-                    <a:lnR w="6350" cap="flat" cmpd="sng" algn="ctr">
-                      <a:solidFill>
-                        <a:srgbClr val="CBD5E1"/>
-                      </a:solidFill>
-                      <a:prstDash val="solid"/>
-                      <a:round/>
-                      <a:headEnd type="none" w="med" len="med"/>
-                      <a:tailEnd type="none" w="med" len="med"/>
-                    </a:lnR>
-                    <a:lnT w="6350" cap="flat" cmpd="sng" algn="ctr">
-                      <a:solidFill>
-                        <a:srgbClr val="CBD5E1"/>
-                      </a:solidFill>
-                      <a:prstDash val="solid"/>
-                      <a:round/>
-                      <a:headEnd type="none" w="med" len="med"/>
-                      <a:tailEnd type="none" w="med" len="med"/>
-                    </a:lnT>
-                    <a:lnB w="6350" cap="flat" cmpd="sng" algn="ctr">
-                      <a:solidFill>
-                        <a:srgbClr val="CBD5E1"/>
-                      </a:solidFill>
-                      <a:prstDash val="solid"/>
-                      <a:round/>
-                      <a:headEnd type="none" w="med" len="med"/>
-                      <a:tailEnd type="none" w="med" len="med"/>
-                    </a:lnB>
-                    <a:solidFill>
-                      <a:srgbClr val="FFFFFF"/>
-                    </a:solidFill>
-                  </a:tcPr>
-                </a:tc>
-                <a:tc>
-                  <a:txBody>
-                    <a:bodyPr/>
-                    <a:lstStyle/>
-                    <a:p>
-                      <a:pPr indent="0" marL="0">
-                        <a:buNone/>
-                      </a:pPr>
-                      <a:r>
-                        <a:rPr lang="en-US" sz="900" b="1" dirty="0">
-                          <a:solidFill>
-                            <a:srgbClr val="334155"/>
-                          </a:solidFill>
-                          <a:latin typeface="Arial" pitchFamily="34" charset="0"/>
-                          <a:ea typeface="Arial" pitchFamily="34" charset="-122"/>
-                          <a:cs typeface="Arial" pitchFamily="34" charset="-120"/>
-                        </a:rPr>
                         <a:t>臭い・匂い</a:t>
                       </a:r>
                       <a:endParaRPr lang="en-US" sz="900" dirty="0">
@@ -14689,280 +13576,6 @@
                   </a:tcPr>
                 </a:tc>
               </a:tr>
-              <a:tr h="320040">
-                <a:tc>
-                  <a:txBody>
-                    <a:bodyPr/>
-                    <a:lstStyle/>
-                    <a:p>
-                      <a:pPr algn="ctr" indent="0" marL="0">
-                        <a:buNone/>
-                      </a:pPr>
-                      <a:r>
-                        <a:rPr lang="en-US" sz="1200" b="1" dirty="0">
-                          <a:solidFill>
-                            <a:srgbClr val="94A3B8"/>
-                          </a:solidFill>
-                          <a:latin typeface="Arial" pitchFamily="34" charset="0"/>
-                          <a:ea typeface="Arial" pitchFamily="34" charset="-122"/>
-                          <a:cs typeface="Arial" pitchFamily="34" charset="-120"/>
-                        </a:rPr>
-                        <a:t>C</a:t>
-                      </a:r>
-                      <a:endParaRPr lang="en-US" sz="1200" dirty="0">
-                        <a:latin typeface="Arial" charset="0"/>
-                        <a:ea typeface="Arial" charset="0"/>
-                        <a:cs typeface="Arial" charset="0"/>
-                      </a:endParaRPr>
-                    </a:p>
-                  </a:txBody>
-                  <a:tcPr marL="91440" marR="91440" marT="45720" marB="45720">
-                    <a:lnL w="6350" cap="flat" cmpd="sng" algn="ctr">
-                      <a:solidFill>
-                        <a:srgbClr val="CBD5E1"/>
-                      </a:solidFill>
-                      <a:prstDash val="solid"/>
-                      <a:round/>
-                      <a:headEnd type="none" w="med" len="med"/>
-                      <a:tailEnd type="none" w="med" len="med"/>
-                    </a:lnL>
-                    <a:lnR w="6350" cap="flat" cmpd="sng" algn="ctr">
-                      <a:solidFill>
-                        <a:srgbClr val="CBD5E1"/>
-                      </a:solidFill>
-                      <a:prstDash val="solid"/>
-                      <a:round/>
-                      <a:headEnd type="none" w="med" len="med"/>
-                      <a:tailEnd type="none" w="med" len="med"/>
-                    </a:lnR>
-                    <a:lnT w="6350" cap="flat" cmpd="sng" algn="ctr">
-                      <a:solidFill>
-                        <a:srgbClr val="CBD5E1"/>
-                      </a:solidFill>
-                      <a:prstDash val="solid"/>
-                      <a:round/>
-                      <a:headEnd type="none" w="med" len="med"/>
-                      <a:tailEnd type="none" w="med" len="med"/>
-                    </a:lnT>
-                    <a:lnB w="6350" cap="flat" cmpd="sng" algn="ctr">
-                      <a:solidFill>
-                        <a:srgbClr val="CBD5E1"/>
-                      </a:solidFill>
-                      <a:prstDash val="solid"/>
-                      <a:round/>
-                      <a:headEnd type="none" w="med" len="med"/>
-                      <a:tailEnd type="none" w="med" len="med"/>
-                    </a:lnB>
-                    <a:solidFill>
-                      <a:srgbClr val="E8EFF8"/>
-                    </a:solidFill>
-                  </a:tcPr>
-                </a:tc>
-                <a:tc>
-                  <a:txBody>
-                    <a:bodyPr/>
-                    <a:lstStyle/>
-                    <a:p>
-                      <a:pPr indent="0" marL="0">
-                        <a:buNone/>
-                      </a:pPr>
-                      <a:r>
-                        <a:rPr lang="en-US" sz="900" b="1" dirty="0">
-                          <a:solidFill>
-                            <a:srgbClr val="334155"/>
-                          </a:solidFill>
-                          <a:latin typeface="Arial" pitchFamily="34" charset="0"/>
-                          <a:ea typeface="Arial" pitchFamily="34" charset="-122"/>
-                          <a:cs typeface="Arial" pitchFamily="34" charset="-120"/>
-                        </a:rPr>
-                        <a:t>清掃不備</a:t>
-                      </a:r>
-                      <a:endParaRPr lang="en-US" sz="900" dirty="0">
-                        <a:latin typeface="Arial" charset="0"/>
-                        <a:ea typeface="Arial" charset="0"/>
-                        <a:cs typeface="Arial" charset="0"/>
-                      </a:endParaRPr>
-                    </a:p>
-                  </a:txBody>
-                  <a:tcPr marL="91440" marR="91440" marT="45720" marB="45720">
-                    <a:lnL w="6350" cap="flat" cmpd="sng" algn="ctr">
-                      <a:solidFill>
-                        <a:srgbClr val="CBD5E1"/>
-                      </a:solidFill>
-                      <a:prstDash val="solid"/>
-                      <a:round/>
-                      <a:headEnd type="none" w="med" len="med"/>
-                      <a:tailEnd type="none" w="med" len="med"/>
-                    </a:lnL>
-                    <a:lnR w="6350" cap="flat" cmpd="sng" algn="ctr">
-                      <a:solidFill>
-                        <a:srgbClr val="CBD5E1"/>
-                      </a:solidFill>
-                      <a:prstDash val="solid"/>
-                      <a:round/>
-                      <a:headEnd type="none" w="med" len="med"/>
-                      <a:tailEnd type="none" w="med" len="med"/>
-                    </a:lnR>
-                    <a:lnT w="6350" cap="flat" cmpd="sng" algn="ctr">
-                      <a:solidFill>
-                        <a:srgbClr val="CBD5E1"/>
-                      </a:solidFill>
-                      <a:prstDash val="solid"/>
-                      <a:round/>
-                      <a:headEnd type="none" w="med" len="med"/>
-                      <a:tailEnd type="none" w="med" len="med"/>
-                    </a:lnT>
-                    <a:lnB w="6350" cap="flat" cmpd="sng" algn="ctr">
-                      <a:solidFill>
-                        <a:srgbClr val="CBD5E1"/>
-                      </a:solidFill>
-                      <a:prstDash val="solid"/>
-                      <a:round/>
-                      <a:headEnd type="none" w="med" len="med"/>
-                      <a:tailEnd type="none" w="med" len="med"/>
-                    </a:lnB>
-                    <a:solidFill>
-                      <a:srgbClr val="E8EFF8"/>
-                    </a:solidFill>
-                  </a:tcPr>
-                </a:tc>
-                <a:tc>
-                  <a:txBody>
-                    <a:bodyPr/>
-                    <a:lstStyle/>
-                    <a:p>
-                      <a:pPr indent="0" marL="0">
-                        <a:buNone/>
-                      </a:pPr>
-                      <a:r>
-                        <a:rPr lang="en-US" sz="900" dirty="0">
-                          <a:solidFill>
-                            <a:srgbClr val="64748B"/>
-                          </a:solidFill>
-                          <a:latin typeface="Arial" pitchFamily="34" charset="0"/>
-                          <a:ea typeface="Arial" pitchFamily="34" charset="-122"/>
-                          <a:cs typeface="Arial" pitchFamily="34" charset="-120"/>
-                        </a:rPr>
-                        <a:t>お風呂等設備が新しかったので綺麗だったんで良かったですが、ベッドのシーツに毛やゴミが残ってました</a:t>
-                      </a:r>
-                      <a:endParaRPr lang="en-US" sz="900" dirty="0">
-                        <a:latin typeface="Arial" charset="0"/>
-                        <a:ea typeface="Arial" charset="0"/>
-                        <a:cs typeface="Arial" charset="0"/>
-                      </a:endParaRPr>
-                    </a:p>
-                  </a:txBody>
-                  <a:tcPr marL="91440" marR="91440" marT="45720" marB="45720">
-                    <a:lnL w="6350" cap="flat" cmpd="sng" algn="ctr">
-                      <a:solidFill>
-                        <a:srgbClr val="CBD5E1"/>
-                      </a:solidFill>
-                      <a:prstDash val="solid"/>
-                      <a:round/>
-                      <a:headEnd type="none" w="med" len="med"/>
-                      <a:tailEnd type="none" w="med" len="med"/>
-                    </a:lnL>
-                    <a:lnR w="6350" cap="flat" cmpd="sng" algn="ctr">
-                      <a:solidFill>
-                        <a:srgbClr val="CBD5E1"/>
-                      </a:solidFill>
-                      <a:prstDash val="solid"/>
-                      <a:round/>
-                      <a:headEnd type="none" w="med" len="med"/>
-                      <a:tailEnd type="none" w="med" len="med"/>
-                    </a:lnR>
-                    <a:lnT w="6350" cap="flat" cmpd="sng" algn="ctr">
-                      <a:solidFill>
-                        <a:srgbClr val="CBD5E1"/>
-                      </a:solidFill>
-                      <a:prstDash val="solid"/>
-                      <a:round/>
-                      <a:headEnd type="none" w="med" len="med"/>
-                      <a:tailEnd type="none" w="med" len="med"/>
-                    </a:lnT>
-                    <a:lnB w="6350" cap="flat" cmpd="sng" algn="ctr">
-                      <a:solidFill>
-                        <a:srgbClr val="CBD5E1"/>
-                      </a:solidFill>
-                      <a:prstDash val="solid"/>
-                      <a:round/>
-                      <a:headEnd type="none" w="med" len="med"/>
-                      <a:tailEnd type="none" w="med" len="med"/>
-                    </a:lnB>
-                    <a:solidFill>
-                      <a:srgbClr val="E8EFF8"/>
-                    </a:solidFill>
-                  </a:tcPr>
-                </a:tc>
-                <a:tc>
-                  <a:txBody>
-                    <a:bodyPr/>
-                    <a:lstStyle/>
-                    <a:p>
-                      <a:pPr algn="ctr" indent="0" marL="0">
-                        <a:buNone/>
-                      </a:pPr>
-                      <a:r>
-                        <a:rPr lang="en-US" sz="900" dirty="0">
-                          <a:solidFill>
-                            <a:srgbClr val="334155"/>
-                          </a:solidFill>
-                          <a:latin typeface="Arial" pitchFamily="34" charset="0"/>
-                          <a:ea typeface="Arial" pitchFamily="34" charset="-122"/>
-                          <a:cs typeface="Arial" pitchFamily="34" charset="-120"/>
-                        </a:rPr>
-                        <a:t>1件</a:t>
-                      </a:r>
-                      <a:endParaRPr lang="en-US" sz="900" dirty="0">
-                        <a:latin typeface="Arial" charset="0"/>
-                        <a:ea typeface="Arial" charset="0"/>
-                        <a:cs typeface="Arial" charset="0"/>
-                      </a:endParaRPr>
-                    </a:p>
-                  </a:txBody>
-                  <a:tcPr marL="91440" marR="91440" marT="45720" marB="45720">
-                    <a:lnL w="6350" cap="flat" cmpd="sng" algn="ctr">
-                      <a:solidFill>
-                        <a:srgbClr val="CBD5E1"/>
-                      </a:solidFill>
-                      <a:prstDash val="solid"/>
-                      <a:round/>
-                      <a:headEnd type="none" w="med" len="med"/>
-                      <a:tailEnd type="none" w="med" len="med"/>
-                    </a:lnL>
-                    <a:lnR w="6350" cap="flat" cmpd="sng" algn="ctr">
-                      <a:solidFill>
-                        <a:srgbClr val="CBD5E1"/>
-                      </a:solidFill>
-                      <a:prstDash val="solid"/>
-                      <a:round/>
-                      <a:headEnd type="none" w="med" len="med"/>
-                      <a:tailEnd type="none" w="med" len="med"/>
-                    </a:lnR>
-                    <a:lnT w="6350" cap="flat" cmpd="sng" algn="ctr">
-                      <a:solidFill>
-                        <a:srgbClr val="CBD5E1"/>
-                      </a:solidFill>
-                      <a:prstDash val="solid"/>
-                      <a:round/>
-                      <a:headEnd type="none" w="med" len="med"/>
-                      <a:tailEnd type="none" w="med" len="med"/>
-                    </a:lnT>
-                    <a:lnB w="6350" cap="flat" cmpd="sng" algn="ctr">
-                      <a:solidFill>
-                        <a:srgbClr val="CBD5E1"/>
-                      </a:solidFill>
-                      <a:prstDash val="solid"/>
-                      <a:round/>
-                      <a:headEnd type="none" w="med" len="med"/>
-                      <a:tailEnd type="none" w="med" len="med"/>
-                    </a:lnB>
-                    <a:solidFill>
-                      <a:srgbClr val="E8EFF8"/>
-                    </a:solidFill>
-                  </a:tcPr>
-                </a:tc>
-              </a:tr>
             </a:tbl>
           </a:graphicData>
         </a:graphic>
@@ -15622,7 +14235,7 @@
                 <a:ea typeface="Arial" pitchFamily="34" charset="-122"/>
                 <a:cs typeface="Arial" pitchFamily="34" charset="-120"/>
               </a:rPr>
-              <a:t>清掃品質の向上</a:t>
+              <a:t>朝食サービスの改善</a:t>
             </a:r>
             <a:endParaRPr lang="en-US" sz="1200" dirty="0"/>
           </a:p>
@@ -15637,177 +14250,6 @@
         <p:spPr>
           <a:xfrm>
             <a:off x="4800600" y="1600200"/>
-            <a:ext cx="3657600" cy="1188720"/>
-          </a:xfrm>
-          <a:prstGeom prst="rect">
-            <a:avLst/>
-          </a:prstGeom>
-          <a:noFill/>
-          <a:ln/>
-        </p:spPr>
-        <p:txBody>
-          <a:bodyPr wrap="square" lIns="0" tIns="0" rIns="0" bIns="0" rtlCol="0" anchor="ctr"/>
-          <a:lstStyle/>
-          <a:p>
-            <a:pPr marL="342900" indent="-342900">
-              <a:spcAft>
-                <a:spcPts val="300"/>
-              </a:spcAft>
-              <a:buSzPct val="100000"/>
-              <a:buChar char="•"/>
-            </a:pPr>
-            <a:r>
-              <a:rPr lang="en-US" sz="900" dirty="0">
-                <a:solidFill>
-                  <a:srgbClr val="334155"/>
-                </a:solidFill>
-                <a:latin typeface="Arial" pitchFamily="34" charset="0"/>
-                <a:ea typeface="Arial" pitchFamily="34" charset="-122"/>
-                <a:cs typeface="Arial" pitchFamily="34" charset="-120"/>
-              </a:rPr>
-              <a:t>清掃チェックリストの見直しと強化（ベッド下・隅の重点確認）</a:t>
-            </a:r>
-            <a:endParaRPr lang="en-US" sz="900" dirty="0"/>
-          </a:p>
-          <a:p>
-            <a:pPr marL="342900" indent="-342900">
-              <a:spcAft>
-                <a:spcPts val="300"/>
-              </a:spcAft>
-              <a:buSzPct val="100000"/>
-              <a:buChar char="•"/>
-            </a:pPr>
-            <a:r>
-              <a:rPr lang="en-US" sz="900" dirty="0">
-                <a:solidFill>
-                  <a:srgbClr val="334155"/>
-                </a:solidFill>
-                <a:latin typeface="Arial" pitchFamily="34" charset="0"/>
-                <a:ea typeface="Arial" pitchFamily="34" charset="-122"/>
-                <a:cs typeface="Arial" pitchFamily="34" charset="-120"/>
-              </a:rPr>
-              <a:t>清掃後のダブルチェック体制の導入</a:t>
-            </a:r>
-            <a:endParaRPr lang="en-US" sz="900" dirty="0"/>
-          </a:p>
-          <a:p>
-            <a:pPr marL="342900" indent="-342900">
-              <a:spcAft>
-                <a:spcPts val="300"/>
-              </a:spcAft>
-              <a:buSzPct val="100000"/>
-              <a:buChar char="•"/>
-            </a:pPr>
-            <a:r>
-              <a:rPr lang="en-US" sz="900" dirty="0">
-                <a:solidFill>
-                  <a:srgbClr val="334155"/>
-                </a:solidFill>
-                <a:latin typeface="Arial" pitchFamily="34" charset="0"/>
-                <a:ea typeface="Arial" pitchFamily="34" charset="-122"/>
-                <a:cs typeface="Arial" pitchFamily="34" charset="-120"/>
-              </a:rPr>
-              <a:t>清掃スタッフへの再研修実施</a:t>
-            </a:r>
-            <a:endParaRPr lang="en-US" sz="900" dirty="0"/>
-          </a:p>
-        </p:txBody>
-      </p:sp>
-      <p:sp>
-        <p:nvSpPr>
-          <p:cNvPr id="14" name="Shape 12"/>
-          <p:cNvSpPr/>
-          <p:nvPr/>
-        </p:nvSpPr>
-        <p:spPr>
-          <a:xfrm>
-            <a:off x="457200" y="3017520"/>
-            <a:ext cx="3977640" cy="1600200"/>
-          </a:xfrm>
-          <a:prstGeom prst="rect">
-            <a:avLst/>
-          </a:prstGeom>
-          <a:solidFill>
-            <a:srgbClr val="FFFFFF"/>
-          </a:solidFill>
-          <a:ln/>
-          <a:effectLst>
-            <a:outerShdw sx="100000" sy="100000" kx="0" ky="0" algn="bl" rotWithShape="0" blurRad="50800" dist="25400" dir="8100000">
-              <a:srgbClr val="000000">
-                <a:alpha val="10000"/>
-              </a:srgbClr>
-            </a:outerShdw>
-          </a:effectLst>
-        </p:spPr>
-      </p:sp>
-      <p:sp>
-        <p:nvSpPr>
-          <p:cNvPr id="15" name="Shape 13"/>
-          <p:cNvSpPr/>
-          <p:nvPr/>
-        </p:nvSpPr>
-        <p:spPr>
-          <a:xfrm>
-            <a:off x="457200" y="3017520"/>
-            <a:ext cx="54864" cy="1600200"/>
-          </a:xfrm>
-          <a:prstGeom prst="rect">
-            <a:avLst/>
-          </a:prstGeom>
-          <a:solidFill>
-            <a:srgbClr val="3B7DD8"/>
-          </a:solidFill>
-          <a:ln/>
-        </p:spPr>
-      </p:sp>
-      <p:sp>
-        <p:nvSpPr>
-          <p:cNvPr id="16" name="Text 14"/>
-          <p:cNvSpPr/>
-          <p:nvPr/>
-        </p:nvSpPr>
-        <p:spPr>
-          <a:xfrm>
-            <a:off x="594360" y="3063240"/>
-            <a:ext cx="3657600" cy="320040"/>
-          </a:xfrm>
-          <a:prstGeom prst="rect">
-            <a:avLst/>
-          </a:prstGeom>
-          <a:noFill/>
-          <a:ln/>
-        </p:spPr>
-        <p:txBody>
-          <a:bodyPr wrap="square" lIns="0" tIns="0" rIns="0" bIns="0" rtlCol="0" anchor="ctr"/>
-          <a:lstStyle/>
-          <a:p>
-            <a:pPr indent="0" marL="0">
-              <a:buNone/>
-            </a:pPr>
-            <a:r>
-              <a:rPr lang="en-US" sz="1200" b="1" dirty="0">
-                <a:solidFill>
-                  <a:srgbClr val="1A2744"/>
-                </a:solidFill>
-                <a:latin typeface="Arial" pitchFamily="34" charset="0"/>
-                <a:ea typeface="Arial" pitchFamily="34" charset="-122"/>
-                <a:cs typeface="Arial" pitchFamily="34" charset="-120"/>
-              </a:rPr>
-              <a:t>朝食サービスの改善</a:t>
-            </a:r>
-            <a:endParaRPr lang="en-US" sz="1200" dirty="0"/>
-          </a:p>
-        </p:txBody>
-      </p:sp>
-      <p:sp>
-        <p:nvSpPr>
-          <p:cNvPr id="17" name="Text 15"/>
-          <p:cNvSpPr/>
-          <p:nvPr/>
-        </p:nvSpPr>
-        <p:spPr>
-          <a:xfrm>
-            <a:off x="594360" y="3383280"/>
             <a:ext cx="3657600" cy="1188720"/>
           </a:xfrm>
           <a:prstGeom prst="rect">
@@ -15886,13 +14328,13 @@
       </p:sp>
       <p:sp>
         <p:nvSpPr>
-          <p:cNvPr id="18" name="Shape 16"/>
-          <p:cNvSpPr/>
-          <p:nvPr/>
-        </p:nvSpPr>
-        <p:spPr>
-          <a:xfrm>
-            <a:off x="4663440" y="3017520"/>
+          <p:cNvPr id="14" name="Shape 12"/>
+          <p:cNvSpPr/>
+          <p:nvPr/>
+        </p:nvSpPr>
+        <p:spPr>
+          <a:xfrm>
+            <a:off x="457200" y="3017520"/>
             <a:ext cx="3977640" cy="1600200"/>
           </a:xfrm>
           <a:prstGeom prst="rect">
@@ -15913,13 +14355,13 @@
       </p:sp>
       <p:sp>
         <p:nvSpPr>
-          <p:cNvPr id="19" name="Shape 17"/>
-          <p:cNvSpPr/>
-          <p:nvPr/>
-        </p:nvSpPr>
-        <p:spPr>
-          <a:xfrm>
-            <a:off x="4663440" y="3017520"/>
+          <p:cNvPr id="15" name="Shape 13"/>
+          <p:cNvSpPr/>
+          <p:nvPr/>
+        </p:nvSpPr>
+        <p:spPr>
+          <a:xfrm>
+            <a:off x="457200" y="3017520"/>
             <a:ext cx="54864" cy="1600200"/>
           </a:xfrm>
           <a:prstGeom prst="rect">
@@ -15933,13 +14375,13 @@
       </p:sp>
       <p:sp>
         <p:nvSpPr>
-          <p:cNvPr id="20" name="Text 18"/>
-          <p:cNvSpPr/>
-          <p:nvPr/>
-        </p:nvSpPr>
-        <p:spPr>
-          <a:xfrm>
-            <a:off x="4800600" y="3063240"/>
+          <p:cNvPr id="16" name="Text 14"/>
+          <p:cNvSpPr/>
+          <p:nvPr/>
+        </p:nvSpPr>
+        <p:spPr>
+          <a:xfrm>
+            <a:off x="594360" y="3063240"/>
             <a:ext cx="3657600" cy="320040"/>
           </a:xfrm>
           <a:prstGeom prst="rect">
@@ -15964,7 +14406,7 @@
                 <a:ea typeface="Arial" pitchFamily="34" charset="-122"/>
                 <a:cs typeface="Arial" pitchFamily="34" charset="-120"/>
               </a:rPr>
-              <a:t>エアコン・空調の定期点検強化</a:t>
+              <a:t>スタッフ対応品質の統一</a:t>
             </a:r>
             <a:endParaRPr lang="en-US" sz="1200" dirty="0"/>
           </a:p>
@@ -15972,13 +14414,13 @@
       </p:sp>
       <p:sp>
         <p:nvSpPr>
-          <p:cNvPr id="21" name="Text 19"/>
-          <p:cNvSpPr/>
-          <p:nvPr/>
-        </p:nvSpPr>
-        <p:spPr>
-          <a:xfrm>
-            <a:off x="4800600" y="3383280"/>
+          <p:cNvPr id="17" name="Text 15"/>
+          <p:cNvSpPr/>
+          <p:nvPr/>
+        </p:nvSpPr>
+        <p:spPr>
+          <a:xfrm>
+            <a:off x="594360" y="3383280"/>
             <a:ext cx="3657600" cy="1188720"/>
           </a:xfrm>
           <a:prstGeom prst="rect">
@@ -16007,7 +14449,7 @@
                 <a:ea typeface="Arial" pitchFamily="34" charset="-122"/>
                 <a:cs typeface="Arial" pitchFamily="34" charset="-120"/>
               </a:rPr>
-              <a:t>全室のエアコン設定を季節に応じてデフォルト確認する運用フロー導入</a:t>
+              <a:t>接客マニュアルの見直しと全スタッフへの周知</a:t>
             </a:r>
             <a:endParaRPr lang="en-US" sz="900" dirty="0"/>
           </a:p>
@@ -16028,7 +14470,7 @@
                 <a:ea typeface="Arial" pitchFamily="34" charset="-122"/>
                 <a:cs typeface="Arial" pitchFamily="34" charset="-120"/>
               </a:rPr>
-              <a:t>冷暖房の正常動作を定期チェックリストに追加</a:t>
+              <a:t>ゲストからのクレーム対応フローの明確化</a:t>
             </a:r>
             <a:endParaRPr lang="en-US" sz="900" dirty="0"/>
           </a:p>
@@ -16049,7 +14491,7 @@
                 <a:ea typeface="Arial" pitchFamily="34" charset="-122"/>
                 <a:cs typeface="Arial" pitchFamily="34" charset="-120"/>
               </a:rPr>
-              <a:t>異常報告があった客室の優先メンテナンス実施</a:t>
+              <a:t>定期的なCS研修の実施</a:t>
             </a:r>
             <a:endParaRPr lang="en-US" sz="900" dirty="0"/>
           </a:p>
@@ -16057,7 +14499,7 @@
       </p:sp>
       <p:sp>
         <p:nvSpPr>
-          <p:cNvPr id="22" name="Shape 20"/>
+          <p:cNvPr id="18" name="Shape 16"/>
           <p:cNvSpPr/>
           <p:nvPr/>
         </p:nvSpPr>
@@ -16077,7 +14519,7 @@
       </p:sp>
       <p:sp>
         <p:nvSpPr>
-          <p:cNvPr id="23" name="Text 21"/>
+          <p:cNvPr id="19" name="Text 17"/>
           <p:cNvSpPr/>
           <p:nvPr/>
         </p:nvSpPr>
@@ -16116,7 +14558,7 @@
       </p:sp>
       <p:sp>
         <p:nvSpPr>
-          <p:cNvPr id="24" name="Text 22"/>
+          <p:cNvPr id="20" name="Text 18"/>
           <p:cNvSpPr/>
           <p:nvPr/>
         </p:nvSpPr>
@@ -16402,7 +14844,7 @@
                 <a:ea typeface="Arial" pitchFamily="34" charset="-122"/>
                 <a:cs typeface="Arial" pitchFamily="34" charset="-120"/>
               </a:rPr>
-              <a:t>浴室の快適性向上</a:t>
+              <a:t>口コミ返信体制の構築</a:t>
             </a:r>
             <a:endParaRPr lang="en-US" sz="1000" dirty="0"/>
           </a:p>
@@ -16417,254 +14859,6 @@
         <p:spPr>
           <a:xfrm>
             <a:off x="640080" y="1719072"/>
-            <a:ext cx="3474720" cy="694944"/>
-          </a:xfrm>
-          <a:prstGeom prst="rect">
-            <a:avLst/>
-          </a:prstGeom>
-          <a:noFill/>
-          <a:ln/>
-        </p:spPr>
-        <p:txBody>
-          <a:bodyPr wrap="square" lIns="0" tIns="0" rIns="0" bIns="0" rtlCol="0" anchor="ctr"/>
-          <a:lstStyle/>
-          <a:p>
-            <a:pPr marL="342900" indent="-342900">
-              <a:spcAft>
-                <a:spcPts val="200"/>
-              </a:spcAft>
-              <a:buSzPct val="100000"/>
-              <a:buChar char="•"/>
-            </a:pPr>
-            <a:r>
-              <a:rPr lang="en-US" sz="900" dirty="0">
-                <a:solidFill>
-                  <a:srgbClr val="64748B"/>
-                </a:solidFill>
-                <a:latin typeface="Arial" pitchFamily="34" charset="0"/>
-                <a:ea typeface="Arial" pitchFamily="34" charset="-122"/>
-                <a:cs typeface="Arial" pitchFamily="34" charset="-120"/>
-              </a:rPr>
-              <a:t>排水口の清掃・修繕を全室で実施し、排水速度を改善</a:t>
-            </a:r>
-            <a:endParaRPr lang="en-US" sz="900" dirty="0"/>
-          </a:p>
-          <a:p>
-            <a:pPr marL="342900" indent="-342900">
-              <a:spcAft>
-                <a:spcPts val="200"/>
-              </a:spcAft>
-              <a:buSzPct val="100000"/>
-              <a:buChar char="•"/>
-            </a:pPr>
-            <a:r>
-              <a:rPr lang="en-US" sz="900" dirty="0">
-                <a:solidFill>
-                  <a:srgbClr val="64748B"/>
-                </a:solidFill>
-                <a:latin typeface="Arial" pitchFamily="34" charset="0"/>
-                <a:ea typeface="Arial" pitchFamily="34" charset="-122"/>
-                <a:cs typeface="Arial" pitchFamily="34" charset="-120"/>
-              </a:rPr>
-              <a:t>シャワーヘッドの交換（水圧改善・節水タイプ導入）</a:t>
-            </a:r>
-            <a:endParaRPr lang="en-US" sz="900" dirty="0"/>
-          </a:p>
-          <a:p>
-            <a:pPr marL="342900" indent="-342900">
-              <a:spcAft>
-                <a:spcPts val="200"/>
-              </a:spcAft>
-              <a:buSzPct val="100000"/>
-              <a:buChar char="•"/>
-            </a:pPr>
-            <a:r>
-              <a:rPr lang="en-US" sz="900" dirty="0">
-                <a:solidFill>
-                  <a:srgbClr val="64748B"/>
-                </a:solidFill>
-                <a:latin typeface="Arial" pitchFamily="34" charset="0"/>
-                <a:ea typeface="Arial" pitchFamily="34" charset="-122"/>
-                <a:cs typeface="Arial" pitchFamily="34" charset="-120"/>
-              </a:rPr>
-              <a:t>浴室換気・暖房設備の点検と改善</a:t>
-            </a:r>
-            <a:endParaRPr lang="en-US" sz="900" dirty="0"/>
-          </a:p>
-        </p:txBody>
-      </p:sp>
-      <p:sp>
-        <p:nvSpPr>
-          <p:cNvPr id="10" name="Text 8"/>
-          <p:cNvSpPr/>
-          <p:nvPr/>
-        </p:nvSpPr>
-        <p:spPr>
-          <a:xfrm>
-            <a:off x="640080" y="2505456"/>
-            <a:ext cx="3474720" cy="274320"/>
-          </a:xfrm>
-          <a:prstGeom prst="rect">
-            <a:avLst/>
-          </a:prstGeom>
-          <a:noFill/>
-          <a:ln/>
-        </p:spPr>
-        <p:txBody>
-          <a:bodyPr wrap="square" lIns="0" tIns="0" rIns="0" bIns="0" rtlCol="0" anchor="ctr"/>
-          <a:lstStyle/>
-          <a:p>
-            <a:pPr indent="0" marL="0">
-              <a:buNone/>
-            </a:pPr>
-            <a:r>
-              <a:rPr lang="en-US" sz="1000" b="1" dirty="0">
-                <a:solidFill>
-                  <a:srgbClr val="1A2744"/>
-                </a:solidFill>
-                <a:latin typeface="Arial" pitchFamily="34" charset="0"/>
-                <a:ea typeface="Arial" pitchFamily="34" charset="-122"/>
-                <a:cs typeface="Arial" pitchFamily="34" charset="-120"/>
-              </a:rPr>
-              <a:t>窓・採光環境の改善</a:t>
-            </a:r>
-            <a:endParaRPr lang="en-US" sz="1000" dirty="0"/>
-          </a:p>
-        </p:txBody>
-      </p:sp>
-      <p:sp>
-        <p:nvSpPr>
-          <p:cNvPr id="11" name="Text 9"/>
-          <p:cNvSpPr/>
-          <p:nvPr/>
-        </p:nvSpPr>
-        <p:spPr>
-          <a:xfrm>
-            <a:off x="640080" y="2761488"/>
-            <a:ext cx="3474720" cy="694944"/>
-          </a:xfrm>
-          <a:prstGeom prst="rect">
-            <a:avLst/>
-          </a:prstGeom>
-          <a:noFill/>
-          <a:ln/>
-        </p:spPr>
-        <p:txBody>
-          <a:bodyPr wrap="square" lIns="0" tIns="0" rIns="0" bIns="0" rtlCol="0" anchor="ctr"/>
-          <a:lstStyle/>
-          <a:p>
-            <a:pPr marL="342900" indent="-342900">
-              <a:spcAft>
-                <a:spcPts val="200"/>
-              </a:spcAft>
-              <a:buSzPct val="100000"/>
-              <a:buChar char="•"/>
-            </a:pPr>
-            <a:r>
-              <a:rPr lang="en-US" sz="900" dirty="0">
-                <a:solidFill>
-                  <a:srgbClr val="64748B"/>
-                </a:solidFill>
-                <a:latin typeface="Arial" pitchFamily="34" charset="0"/>
-                <a:ea typeface="Arial" pitchFamily="34" charset="-122"/>
-                <a:cs typeface="Arial" pitchFamily="34" charset="-120"/>
-              </a:rPr>
-              <a:t>遮光カーテンとレースカーテンの品質見直し</a:t>
-            </a:r>
-            <a:endParaRPr lang="en-US" sz="900" dirty="0"/>
-          </a:p>
-          <a:p>
-            <a:pPr marL="342900" indent="-342900">
-              <a:spcAft>
-                <a:spcPts val="200"/>
-              </a:spcAft>
-              <a:buSzPct val="100000"/>
-              <a:buChar char="•"/>
-            </a:pPr>
-            <a:r>
-              <a:rPr lang="en-US" sz="900" dirty="0">
-                <a:solidFill>
-                  <a:srgbClr val="64748B"/>
-                </a:solidFill>
-                <a:latin typeface="Arial" pitchFamily="34" charset="0"/>
-                <a:ea typeface="Arial" pitchFamily="34" charset="-122"/>
-                <a:cs typeface="Arial" pitchFamily="34" charset="-120"/>
-              </a:rPr>
-              <a:t>窓の開閉可否に関する事前案内の徹底</a:t>
-            </a:r>
-            <a:endParaRPr lang="en-US" sz="900" dirty="0"/>
-          </a:p>
-          <a:p>
-            <a:pPr marL="342900" indent="-342900">
-              <a:spcAft>
-                <a:spcPts val="200"/>
-              </a:spcAft>
-              <a:buSzPct val="100000"/>
-              <a:buChar char="•"/>
-            </a:pPr>
-            <a:r>
-              <a:rPr lang="en-US" sz="900" dirty="0">
-                <a:solidFill>
-                  <a:srgbClr val="64748B"/>
-                </a:solidFill>
-                <a:latin typeface="Arial" pitchFamily="34" charset="0"/>
-                <a:ea typeface="Arial" pitchFamily="34" charset="-122"/>
-                <a:cs typeface="Arial" pitchFamily="34" charset="-120"/>
-              </a:rPr>
-              <a:t>採光の良い客室の優先割り当てルール整備</a:t>
-            </a:r>
-            <a:endParaRPr lang="en-US" sz="900" dirty="0"/>
-          </a:p>
-        </p:txBody>
-      </p:sp>
-      <p:sp>
-        <p:nvSpPr>
-          <p:cNvPr id="12" name="Text 10"/>
-          <p:cNvSpPr/>
-          <p:nvPr/>
-        </p:nvSpPr>
-        <p:spPr>
-          <a:xfrm>
-            <a:off x="640080" y="3547872"/>
-            <a:ext cx="3474720" cy="274320"/>
-          </a:xfrm>
-          <a:prstGeom prst="rect">
-            <a:avLst/>
-          </a:prstGeom>
-          <a:noFill/>
-          <a:ln/>
-        </p:spPr>
-        <p:txBody>
-          <a:bodyPr wrap="square" lIns="0" tIns="0" rIns="0" bIns="0" rtlCol="0" anchor="ctr"/>
-          <a:lstStyle/>
-          <a:p>
-            <a:pPr indent="0" marL="0">
-              <a:buNone/>
-            </a:pPr>
-            <a:r>
-              <a:rPr lang="en-US" sz="1000" b="1" dirty="0">
-                <a:solidFill>
-                  <a:srgbClr val="1A2744"/>
-                </a:solidFill>
-                <a:latin typeface="Arial" pitchFamily="34" charset="0"/>
-                <a:ea typeface="Arial" pitchFamily="34" charset="-122"/>
-                <a:cs typeface="Arial" pitchFamily="34" charset="-120"/>
-              </a:rPr>
-              <a:t>口コミ返信体制の構築</a:t>
-            </a:r>
-            <a:endParaRPr lang="en-US" sz="1000" dirty="0"/>
-          </a:p>
-        </p:txBody>
-      </p:sp>
-      <p:sp>
-        <p:nvSpPr>
-          <p:cNvPr id="13" name="Text 11"/>
-          <p:cNvSpPr/>
-          <p:nvPr/>
-        </p:nvSpPr>
-        <p:spPr>
-          <a:xfrm>
-            <a:off x="640080" y="3803904"/>
             <a:ext cx="3474720" cy="493776"/>
           </a:xfrm>
           <a:prstGeom prst="rect">
@@ -16722,7 +14916,7 @@
       </p:sp>
       <p:sp>
         <p:nvSpPr>
-          <p:cNvPr id="14" name="Shape 12"/>
+          <p:cNvPr id="10" name="Shape 8"/>
           <p:cNvSpPr/>
           <p:nvPr/>
         </p:nvSpPr>
@@ -16749,7 +14943,7 @@
       </p:sp>
       <p:sp>
         <p:nvSpPr>
-          <p:cNvPr id="15" name="Shape 13"/>
+          <p:cNvPr id="11" name="Shape 9"/>
           <p:cNvSpPr/>
           <p:nvPr/>
         </p:nvSpPr>
@@ -16769,7 +14963,7 @@
       </p:sp>
       <p:sp>
         <p:nvSpPr>
-          <p:cNvPr id="16" name="Text 14"/>
+          <p:cNvPr id="12" name="Text 10"/>
           <p:cNvSpPr/>
           <p:nvPr/>
         </p:nvSpPr>
@@ -16808,7 +15002,7 @@
       </p:sp>
       <p:sp>
         <p:nvSpPr>
-          <p:cNvPr id="17" name="Text 15"/>
+          <p:cNvPr id="13" name="Text 11"/>
           <p:cNvSpPr/>
           <p:nvPr/>
         </p:nvSpPr>
@@ -16839,7 +15033,7 @@
                 <a:ea typeface="Arial" pitchFamily="34" charset="-122"/>
                 <a:cs typeface="Arial" pitchFamily="34" charset="-120"/>
               </a:rPr>
-              <a:t>客室リニューアル計画</a:t>
+              <a:t>客室設備のアップグレード</a:t>
             </a:r>
             <a:endParaRPr lang="en-US" sz="1000" dirty="0"/>
           </a:p>
@@ -16847,7 +15041,7 @@
       </p:sp>
       <p:sp>
         <p:nvSpPr>
-          <p:cNvPr id="18" name="Text 16"/>
+          <p:cNvPr id="14" name="Text 12"/>
           <p:cNvSpPr/>
           <p:nvPr/>
         </p:nvSpPr>
@@ -16882,7 +15076,7 @@
                 <a:ea typeface="Arial" pitchFamily="34" charset="-122"/>
                 <a:cs typeface="Arial" pitchFamily="34" charset="-120"/>
               </a:rPr>
-              <a:t>壁紙・カーペットの張替えによる「古さ」印象の払拭</a:t>
+              <a:t>内装の定期的なリフレッシュ計画の策定</a:t>
             </a:r>
             <a:endParaRPr lang="en-US" sz="900" dirty="0"/>
           </a:p>
@@ -16903,7 +15097,7 @@
                 <a:ea typeface="Arial" pitchFamily="34" charset="-122"/>
                 <a:cs typeface="Arial" pitchFamily="34" charset="-120"/>
               </a:rPr>
-              <a:t>照明のLED化・調光機能の追加で客室の雰囲気向上</a:t>
+              <a:t>照明・電源周りの設備更新</a:t>
             </a:r>
             <a:endParaRPr lang="en-US" sz="900" dirty="0"/>
           </a:p>
@@ -16924,7 +15118,7 @@
                 <a:ea typeface="Arial" pitchFamily="34" charset="-122"/>
                 <a:cs typeface="Arial" pitchFamily="34" charset="-120"/>
               </a:rPr>
-              <a:t>USB充電ポート付きコンセントの設置</a:t>
+              <a:t>快適性向上のための設備投資計画の立案</a:t>
             </a:r>
             <a:endParaRPr lang="en-US" sz="900" dirty="0"/>
           </a:p>
@@ -16932,116 +15126,13 @@
       </p:sp>
       <p:sp>
         <p:nvSpPr>
-          <p:cNvPr id="19" name="Text 17"/>
+          <p:cNvPr id="15" name="Text 13"/>
           <p:cNvSpPr/>
           <p:nvPr/>
         </p:nvSpPr>
         <p:spPr>
           <a:xfrm>
             <a:off x="4892040" y="2505456"/>
-            <a:ext cx="3474720" cy="274320"/>
-          </a:xfrm>
-          <a:prstGeom prst="rect">
-            <a:avLst/>
-          </a:prstGeom>
-          <a:noFill/>
-          <a:ln/>
-        </p:spPr>
-        <p:txBody>
-          <a:bodyPr wrap="square" lIns="0" tIns="0" rIns="0" bIns="0" rtlCol="0" anchor="ctr"/>
-          <a:lstStyle/>
-          <a:p>
-            <a:pPr indent="0" marL="0">
-              <a:buNone/>
-            </a:pPr>
-            <a:r>
-              <a:rPr lang="en-US" sz="1000" b="1" dirty="0">
-                <a:solidFill>
-                  <a:srgbClr val="1A2744"/>
-                </a:solidFill>
-                <a:latin typeface="Arial" pitchFamily="34" charset="0"/>
-                <a:ea typeface="Arial" pitchFamily="34" charset="-122"/>
-                <a:cs typeface="Arial" pitchFamily="34" charset="-120"/>
-              </a:rPr>
-              <a:t>浴室の抜本的改修</a:t>
-            </a:r>
-            <a:endParaRPr lang="en-US" sz="1000" dirty="0"/>
-          </a:p>
-        </p:txBody>
-      </p:sp>
-      <p:sp>
-        <p:nvSpPr>
-          <p:cNvPr id="20" name="Text 18"/>
-          <p:cNvSpPr/>
-          <p:nvPr/>
-        </p:nvSpPr>
-        <p:spPr>
-          <a:xfrm>
-            <a:off x="4892040" y="2761488"/>
-            <a:ext cx="3474720" cy="493776"/>
-          </a:xfrm>
-          <a:prstGeom prst="rect">
-            <a:avLst/>
-          </a:prstGeom>
-          <a:noFill/>
-          <a:ln/>
-        </p:spPr>
-        <p:txBody>
-          <a:bodyPr wrap="square" lIns="0" tIns="0" rIns="0" bIns="0" rtlCol="0" anchor="ctr"/>
-          <a:lstStyle/>
-          <a:p>
-            <a:pPr marL="342900" indent="-342900">
-              <a:spcAft>
-                <a:spcPts val="200"/>
-              </a:spcAft>
-              <a:buSzPct val="100000"/>
-              <a:buChar char="•"/>
-            </a:pPr>
-            <a:r>
-              <a:rPr lang="en-US" sz="900" dirty="0">
-                <a:solidFill>
-                  <a:srgbClr val="64748B"/>
-                </a:solidFill>
-                <a:latin typeface="Arial" pitchFamily="34" charset="0"/>
-                <a:ea typeface="Arial" pitchFamily="34" charset="-122"/>
-                <a:cs typeface="Arial" pitchFamily="34" charset="-120"/>
-              </a:rPr>
-              <a:t>配管更新による排水問題の根本解決</a:t>
-            </a:r>
-            <a:endParaRPr lang="en-US" sz="900" dirty="0"/>
-          </a:p>
-          <a:p>
-            <a:pPr marL="342900" indent="-342900">
-              <a:spcAft>
-                <a:spcPts val="200"/>
-              </a:spcAft>
-              <a:buSzPct val="100000"/>
-              <a:buChar char="•"/>
-            </a:pPr>
-            <a:r>
-              <a:rPr lang="en-US" sz="900" dirty="0">
-                <a:solidFill>
-                  <a:srgbClr val="64748B"/>
-                </a:solidFill>
-                <a:latin typeface="Arial" pitchFamily="34" charset="0"/>
-                <a:ea typeface="Arial" pitchFamily="34" charset="-122"/>
-                <a:cs typeface="Arial" pitchFamily="34" charset="-120"/>
-              </a:rPr>
-              <a:t>換気設備の強化による浴室内の温度・湿度改善</a:t>
-            </a:r>
-            <a:endParaRPr lang="en-US" sz="900" dirty="0"/>
-          </a:p>
-        </p:txBody>
-      </p:sp>
-      <p:sp>
-        <p:nvSpPr>
-          <p:cNvPr id="21" name="Text 19"/>
-          <p:cNvSpPr/>
-          <p:nvPr/>
-        </p:nvSpPr>
-        <p:spPr>
-          <a:xfrm>
-            <a:off x="4892040" y="3346704"/>
             <a:ext cx="3474720" cy="274320"/>
           </a:xfrm>
           <a:prstGeom prst="rect">
@@ -17074,13 +15165,13 @@
       </p:sp>
       <p:sp>
         <p:nvSpPr>
-          <p:cNvPr id="22" name="Text 20"/>
-          <p:cNvSpPr/>
-          <p:nvPr/>
-        </p:nvSpPr>
-        <p:spPr>
-          <a:xfrm>
-            <a:off x="4892040" y="3602736"/>
+          <p:cNvPr id="16" name="Text 14"/>
+          <p:cNvSpPr/>
+          <p:nvPr/>
+        </p:nvSpPr>
+        <p:spPr>
+          <a:xfrm>
+            <a:off x="4892040" y="2761488"/>
             <a:ext cx="3474720" cy="694944"/>
           </a:xfrm>
           <a:prstGeom prst="rect">
@@ -17159,7 +15250,7 @@
       </p:sp>
       <p:sp>
         <p:nvSpPr>
-          <p:cNvPr id="23" name="Shape 21"/>
+          <p:cNvPr id="17" name="Shape 15"/>
           <p:cNvSpPr/>
           <p:nvPr/>
         </p:nvSpPr>
@@ -17179,7 +15270,7 @@
       </p:sp>
       <p:sp>
         <p:nvSpPr>
-          <p:cNvPr id="24" name="Text 22"/>
+          <p:cNvPr id="18" name="Text 16"/>
           <p:cNvSpPr/>
           <p:nvPr/>
         </p:nvSpPr>
@@ -17218,7 +15309,7 @@
       </p:sp>
       <p:sp>
         <p:nvSpPr>
-          <p:cNvPr id="25" name="Text 23"/>
+          <p:cNvPr id="19" name="Text 17"/>
           <p:cNvSpPr/>
           <p:nvPr/>
         </p:nvSpPr>

--- a/納品レポート/ホテル別レポート/keyakigate_口コミ分析レポート.pptx
+++ b/納品レポート/ホテル別レポート/keyakigate_口コミ分析レポート.pptx
@@ -214,13 +214,13 @@
                   <c:v>9.5</c:v>
                 </c:pt>
                 <c:pt idx="2">
-                  <c:v>9.38</c:v>
+                  <c:v>9.41</c:v>
                 </c:pt>
                 <c:pt idx="3">
                   <c:v>9</c:v>
                 </c:pt>
                 <c:pt idx="4">
-                  <c:v>8.67</c:v>
+                  <c:v>8.8</c:v>
                 </c:pt>
                 <c:pt idx="5">
                   <c:v>6</c:v>
@@ -566,7 +566,7 @@
               <c:numCache>
                 <c:ptCount val="3"/>
                 <c:pt idx="0">
-                  <c:v>52</c:v>
+                  <c:v>54</c:v>
                 </c:pt>
                 <c:pt idx="1">
                   <c:v>5</c:v>
@@ -781,7 +781,7 @@
                 <c:formatCode>General</c:formatCode>
                 <c:ptCount val="6"/>
                 <c:pt idx="0">
-                  <c:v>37</c:v>
+                  <c:v>39</c:v>
                 </c:pt>
                 <c:pt idx="1">
                   <c:v>3</c:v>
@@ -2727,7 +2727,7 @@
                 <a:ea typeface="Arial" pitchFamily="34" charset="-122"/>
                 <a:cs typeface="Arial" pitchFamily="34" charset="-120"/>
               </a:rPr>
-              <a:t>分析対象期間：2026年3月</a:t>
+              <a:t>分析対象期間：2026年3月〜4月</a:t>
             </a:r>
             <a:endParaRPr lang="en-US" sz="1000" dirty="0"/>
           </a:p>
@@ -2747,7 +2747,7 @@
                 <a:ea typeface="Arial" pitchFamily="34" charset="-122"/>
                 <a:cs typeface="Arial" pitchFamily="34" charset="-120"/>
               </a:rPr>
-              <a:t>レビュー総数：59件（6サイト）</a:t>
+              <a:t>レビュー総数：61件（6サイト）</a:t>
             </a:r>
             <a:endParaRPr lang="en-US" sz="1000" dirty="0"/>
           </a:p>
@@ -3313,7 +3313,7 @@
                           <a:ea typeface="Arial" pitchFamily="34" charset="-122"/>
                           <a:cs typeface="Arial" pitchFamily="34" charset="-120"/>
                         </a:rPr>
-                        <a:t>8.95点</a:t>
+                        <a:t>8.98点</a:t>
                       </a:r>
                       <a:endParaRPr lang="en-US" sz="1000" dirty="0">
                         <a:latin typeface="Arial" charset="0"/>
@@ -3587,7 +3587,7 @@
                           <a:ea typeface="Arial" pitchFamily="34" charset="-122"/>
                           <a:cs typeface="Arial" pitchFamily="34" charset="-120"/>
                         </a:rPr>
-                        <a:t>88.1%</a:t>
+                        <a:t>88.5%</a:t>
                       </a:r>
                       <a:endParaRPr lang="en-US" sz="1000" dirty="0">
                         <a:latin typeface="Arial" charset="0"/>
@@ -3655,7 +3655,7 @@
                           <a:ea typeface="Arial" pitchFamily="34" charset="-122"/>
                           <a:cs typeface="Arial" pitchFamily="34" charset="-120"/>
                         </a:rPr>
-                        <a:t>93%以上</a:t>
+                        <a:t>94%以上</a:t>
                       </a:r>
                       <a:endParaRPr lang="en-US" sz="1000" dirty="0">
                         <a:latin typeface="Arial" charset="0"/>
@@ -3861,7 +3861,7 @@
                           <a:ea typeface="Arial" pitchFamily="34" charset="-122"/>
                           <a:cs typeface="Arial" pitchFamily="34" charset="-120"/>
                         </a:rPr>
-                        <a:t>3.4%</a:t>
+                        <a:t>3.3%</a:t>
                       </a:r>
                       <a:endParaRPr lang="en-US" sz="1000" dirty="0">
                         <a:latin typeface="Arial" charset="0"/>
@@ -4683,7 +4683,7 @@
                           <a:ea typeface="Arial" pitchFamily="34" charset="-122"/>
                           <a:cs typeface="Arial" pitchFamily="34" charset="-120"/>
                         </a:rPr>
-                        <a:t>約6件/期間</a:t>
+                        <a:t>約7件/期間</a:t>
                       </a:r>
                       <a:endParaRPr lang="en-US" sz="1000" dirty="0">
                         <a:latin typeface="Arial" charset="0"/>
@@ -5322,7 +5322,7 @@
                 <a:ea typeface="Arial" pitchFamily="34" charset="-122"/>
                 <a:cs typeface="Arial" pitchFamily="34" charset="-120"/>
               </a:rPr>
-              <a:t>8.95</a:t>
+              <a:t>8.98</a:t>
             </a:r>
             <a:endParaRPr lang="en-US" sz="3200" dirty="0"/>
           </a:p>
@@ -5447,7 +5447,7 @@
                 <a:ea typeface="Arial" pitchFamily="34" charset="-122"/>
                 <a:cs typeface="Arial" pitchFamily="34" charset="-120"/>
               </a:rPr>
-              <a:t>88.1%</a:t>
+              <a:t>88.5%</a:t>
             </a:r>
             <a:endParaRPr lang="en-US" sz="3200" dirty="0"/>
           </a:p>
@@ -5572,7 +5572,7 @@
                 <a:ea typeface="Arial" pitchFamily="34" charset="-122"/>
                 <a:cs typeface="Arial" pitchFamily="34" charset="-120"/>
               </a:rPr>
-              <a:t>3.4%</a:t>
+              <a:t>3.3%</a:t>
             </a:r>
             <a:endParaRPr lang="en-US" sz="3200" dirty="0"/>
           </a:p>
@@ -5697,7 +5697,7 @@
                 <a:ea typeface="Arial" pitchFamily="34" charset="-122"/>
                 <a:cs typeface="Arial" pitchFamily="34" charset="-120"/>
               </a:rPr>
-              <a:t>59件</a:t>
+              <a:t>61件</a:t>
             </a:r>
             <a:endParaRPr lang="en-US" sz="3200" dirty="0"/>
           </a:p>
@@ -5845,7 +5845,7 @@
                 <a:ea typeface="Arial" pitchFamily="34" charset="-122"/>
                 <a:cs typeface="Arial" pitchFamily="34" charset="-120"/>
               </a:rPr>
-              <a:t>  駅から近く京王アリーナにも近くてとても便利</a:t>
+              <a:t>  府中駅からすぐの立地で本当に便利です</a:t>
             </a:r>
             <a:endParaRPr lang="en-US" sz="1100" dirty="0"/>
           </a:p>
@@ -5885,7 +5885,7 @@
                 <a:ea typeface="Arial" pitchFamily="34" charset="-122"/>
                 <a:cs typeface="Arial" pitchFamily="34" charset="-120"/>
               </a:rPr>
-              <a:t>  附近最好的酒店了吧 部屋は少し狭かったものの、とても清潔でした</a:t>
+              <a:t>  お部屋も綺麗、バスルームも広めでアメニティグッツも充実してます</a:t>
             </a:r>
             <a:endParaRPr lang="en-US" sz="1100" dirty="0"/>
           </a:p>
@@ -5925,7 +5925,7 @@
                 <a:ea typeface="Arial" pitchFamily="34" charset="-122"/>
                 <a:cs typeface="Arial" pitchFamily="34" charset="-120"/>
               </a:rPr>
-              <a:t>  仕事の出張にて、何度か利用させて頂いておりますが、ホテルが綺麗かつ快適です</a:t>
+              <a:t>  お部屋も綺麗、バスルームも広めでアメニティグッツも充実してます</a:t>
             </a:r>
             <a:endParaRPr lang="en-US" sz="1100" dirty="0"/>
           </a:p>
@@ -6073,7 +6073,7 @@
                 <a:ea typeface="Arial" pitchFamily="34" charset="-122"/>
                 <a:cs typeface="Arial" pitchFamily="34" charset="-120"/>
               </a:rPr>
-              <a:t>  朝食も美味しかったです。副菜も少しずついただきましたがどれも美味しかったです。  今回、無事にパンも焼くことができ...</a:t>
+              <a:t>  朝食のメニューは少ないけど、非常に美味しくいただきました。スマホの動画をテレビへ転送できるシステムも良かったです。...</a:t>
             </a:r>
             <a:endParaRPr lang="en-US" sz="1100" dirty="0"/>
           </a:p>
@@ -6506,7 +6506,7 @@
                 <a:ea typeface="Arial" pitchFamily="34" charset="-122"/>
                 <a:cs typeface="Arial" pitchFamily="34" charset="-120"/>
               </a:rPr>
-              <a:t>8.95</a:t>
+              <a:t>8.98</a:t>
             </a:r>
             <a:endParaRPr lang="en-US" sz="3200" dirty="0"/>
           </a:p>
@@ -6631,7 +6631,7 @@
                 <a:ea typeface="Arial" pitchFamily="34" charset="-122"/>
                 <a:cs typeface="Arial" pitchFamily="34" charset="-120"/>
               </a:rPr>
-              <a:t>88.1%</a:t>
+              <a:t>88.5%</a:t>
             </a:r>
             <a:endParaRPr lang="en-US" sz="3200" dirty="0"/>
           </a:p>
@@ -6756,7 +6756,7 @@
                 <a:ea typeface="Arial" pitchFamily="34" charset="-122"/>
                 <a:cs typeface="Arial" pitchFamily="34" charset="-120"/>
               </a:rPr>
-              <a:t>3.4%</a:t>
+              <a:t>3.3%</a:t>
             </a:r>
             <a:endParaRPr lang="en-US" sz="3200" dirty="0"/>
           </a:p>
@@ -6881,7 +6881,7 @@
                 <a:ea typeface="Arial" pitchFamily="34" charset="-122"/>
                 <a:cs typeface="Arial" pitchFamily="34" charset="-120"/>
               </a:rPr>
-              <a:t>59件</a:t>
+              <a:t>61件</a:t>
             </a:r>
             <a:endParaRPr lang="en-US" sz="3200" dirty="0"/>
           </a:p>
@@ -8544,7 +8544,7 @@
                           <a:ea typeface="Arial" pitchFamily="34" charset="-122"/>
                           <a:cs typeface="Arial" pitchFamily="34" charset="-120"/>
                         </a:rPr>
-                        <a:t>26</a:t>
+                        <a:t>27</a:t>
                       </a:r>
                       <a:endParaRPr lang="en-US" sz="900" dirty="0">
                         <a:latin typeface="Arial" charset="0"/>
@@ -8612,7 +8612,7 @@
                           <a:ea typeface="Arial" pitchFamily="34" charset="-122"/>
                           <a:cs typeface="Arial" pitchFamily="34" charset="-120"/>
                         </a:rPr>
-                        <a:t>4.69</a:t>
+                        <a:t>4.7</a:t>
                       </a:r>
                       <a:endParaRPr lang="en-US" sz="900" dirty="0">
                         <a:latin typeface="Arial" charset="0"/>
@@ -8748,7 +8748,7 @@
                           <a:ea typeface="Arial" pitchFamily="34" charset="-122"/>
                           <a:cs typeface="Arial" pitchFamily="34" charset="-120"/>
                         </a:rPr>
-                        <a:t>9.38</a:t>
+                        <a:t>9.41</a:t>
                       </a:r>
                       <a:endParaRPr lang="en-US" sz="900" dirty="0">
                         <a:latin typeface="Arial" charset="0"/>
@@ -9228,7 +9228,7 @@
                           <a:ea typeface="Arial" pitchFamily="34" charset="-122"/>
                           <a:cs typeface="Arial" pitchFamily="34" charset="-120"/>
                         </a:rPr>
-                        <a:t>9</a:t>
+                        <a:t>10</a:t>
                       </a:r>
                       <a:endParaRPr lang="en-US" sz="900" dirty="0">
                         <a:latin typeface="Arial" charset="0"/>
@@ -9296,7 +9296,7 @@
                           <a:ea typeface="Arial" pitchFamily="34" charset="-122"/>
                           <a:cs typeface="Arial" pitchFamily="34" charset="-120"/>
                         </a:rPr>
-                        <a:t>4.33</a:t>
+                        <a:t>4.4</a:t>
                       </a:r>
                       <a:endParaRPr lang="en-US" sz="900" dirty="0">
                         <a:latin typeface="Arial" charset="0"/>
@@ -9432,7 +9432,7 @@
                           <a:ea typeface="Arial" pitchFamily="34" charset="-122"/>
                           <a:cs typeface="Arial" pitchFamily="34" charset="-120"/>
                         </a:rPr>
-                        <a:t>8.67</a:t>
+                        <a:t>8.8</a:t>
                       </a:r>
                       <a:endParaRPr lang="en-US" sz="900" dirty="0">
                         <a:latin typeface="Arial" charset="0"/>
@@ -10182,7 +10182,7 @@
                 <a:ea typeface="Arial" pitchFamily="34" charset="-122"/>
                 <a:cs typeface="Arial" pitchFamily="34" charset="-120"/>
               </a:rPr>
-              <a:t>52件（88.1%）</a:t>
+              <a:t>54件（88.5%）</a:t>
             </a:r>
             <a:endParaRPr lang="en-US" sz="1100" dirty="0"/>
           </a:p>
@@ -10280,7 +10280,7 @@
                 <a:ea typeface="Arial" pitchFamily="34" charset="-122"/>
                 <a:cs typeface="Arial" pitchFamily="34" charset="-120"/>
               </a:rPr>
-              <a:t>5件（8.5%）</a:t>
+              <a:t>5件（8.2%）</a:t>
             </a:r>
             <a:endParaRPr lang="en-US" sz="1100" dirty="0"/>
           </a:p>
@@ -10378,7 +10378,7 @@
                 <a:ea typeface="Arial" pitchFamily="34" charset="-122"/>
                 <a:cs typeface="Arial" pitchFamily="34" charset="-120"/>
               </a:rPr>
-              <a:t>2件（3.4%）</a:t>
+              <a:t>2件（3.3%）</a:t>
             </a:r>
             <a:endParaRPr lang="en-US" sz="1100" dirty="0"/>
           </a:p>
@@ -10790,7 +10790,7 @@
                 <a:ea typeface="Arial" pitchFamily="34" charset="-122"/>
                 <a:cs typeface="Arial" pitchFamily="34" charset="-120"/>
               </a:rPr>
-              <a:t>駅から近く京王アリーナにも近くてとても便利</a:t>
+              <a:t>府中駅からすぐの立地で本当に便利です</a:t>
             </a:r>
             <a:endParaRPr lang="en-US" sz="900" dirty="0"/>
           </a:p>
@@ -10829,7 +10829,7 @@
                 <a:ea typeface="Arial" pitchFamily="34" charset="-122"/>
                 <a:cs typeface="Arial" pitchFamily="34" charset="-120"/>
               </a:rPr>
-              <a:t>「府中駅から直結ですので大きな荷物を持っていても不便なく移動できました」</a:t>
+              <a:t>「駅から近く京王アリーナにも近くてとても便利」</a:t>
             </a:r>
             <a:endParaRPr lang="en-US" sz="900" dirty="0"/>
           </a:p>
@@ -11013,7 +11013,7 @@
                 <a:ea typeface="Arial" pitchFamily="34" charset="-122"/>
                 <a:cs typeface="Arial" pitchFamily="34" charset="-120"/>
               </a:rPr>
-              <a:t>附近最好的酒店了吧 部屋は少し狭かったものの、とても清潔でした</a:t>
+              <a:t>お部屋も綺麗、バスルームも広めでアメニティグッツも充実してます</a:t>
             </a:r>
             <a:endParaRPr lang="en-US" sz="900" dirty="0"/>
           </a:p>
@@ -11052,7 +11052,7 @@
                 <a:ea typeface="Arial" pitchFamily="34" charset="-122"/>
                 <a:cs typeface="Arial" pitchFamily="34" charset="-120"/>
               </a:rPr>
-              <a:t>「駅からのアクセスと清潔さが最高でした」</a:t>
+              <a:t>「部屋もキレイで居心地も良いです」</a:t>
             </a:r>
             <a:endParaRPr lang="en-US" sz="900" dirty="0"/>
           </a:p>
@@ -11236,7 +11236,7 @@
                 <a:ea typeface="Arial" pitchFamily="34" charset="-122"/>
                 <a:cs typeface="Arial" pitchFamily="34" charset="-120"/>
               </a:rPr>
-              <a:t>仕事の出張にて、何度か利用させて頂いておりますが、ホテルが綺麗かつ快適です</a:t>
+              <a:t>お部屋も綺麗、バスルームも広めでアメニティグッツも充実してます</a:t>
             </a:r>
             <a:endParaRPr lang="en-US" sz="900" dirty="0"/>
           </a:p>
@@ -11275,7 +11275,7 @@
                 <a:ea typeface="Arial" pitchFamily="34" charset="-122"/>
                 <a:cs typeface="Arial" pitchFamily="34" charset="-120"/>
               </a:rPr>
-              <a:t>「クッションやベッドでの寝心地よかった」</a:t>
+              <a:t>「仕事の出張にて、何度か利用させて頂いておりますが、ホテルが綺麗かつ快適です」</a:t>
             </a:r>
             <a:endParaRPr lang="en-US" sz="900" dirty="0"/>
           </a:p>
@@ -11459,7 +11459,7 @@
                 <a:ea typeface="Arial" pitchFamily="34" charset="-122"/>
                 <a:cs typeface="Arial" pitchFamily="34" charset="-120"/>
               </a:rPr>
-              <a:t>朝食は素晴らしく美味しかったです</a:t>
+              <a:t>朝食のメニューは少ないけど、非常に美味しくいただきました</a:t>
             </a:r>
             <a:endParaRPr lang="en-US" sz="900" dirty="0"/>
           </a:p>
@@ -11498,7 +11498,7 @@
                 <a:ea typeface="Arial" pitchFamily="34" charset="-122"/>
                 <a:cs typeface="Arial" pitchFamily="34" charset="-120"/>
               </a:rPr>
-              <a:t>「清掃も行き届いており朝食の和食もおいしかったです」</a:t>
+              <a:t>「朝食は素晴らしく美味しかったです」</a:t>
             </a:r>
             <a:endParaRPr lang="en-US" sz="900" dirty="0"/>
           </a:p>
@@ -11682,7 +11682,7 @@
                 <a:ea typeface="Arial" pitchFamily="34" charset="-122"/>
                 <a:cs typeface="Arial" pitchFamily="34" charset="-120"/>
               </a:rPr>
-              <a:t>通常のビジネスホテルよりも広いのは当たり前だが、お風呂もそれなりに広く疲れが取れる入浴剤のサービスもあり良かった</a:t>
+              <a:t>フロントの方も親切で府中にくるかたへぜひおすすめしたいホテルです</a:t>
             </a:r>
             <a:endParaRPr lang="en-US" sz="900" dirty="0"/>
           </a:p>
@@ -11721,7 +11721,7 @@
                 <a:ea typeface="Arial" pitchFamily="34" charset="-122"/>
                 <a:cs typeface="Arial" pitchFamily="34" charset="-120"/>
               </a:rPr>
-              <a:t>「受付の方もスマートで丁寧で好印象」</a:t>
+              <a:t>「通常のビジネスホテルよりも広いのは当たり前だが、お風呂もそれなりに広く疲れが取れる入浴剤のサービスもあり良かった」</a:t>
             </a:r>
             <a:endParaRPr lang="en-US" sz="900" dirty="0"/>
           </a:p>
@@ -11827,7 +11827,7 @@
                 <a:ea typeface="Arial" pitchFamily="34" charset="-122"/>
                 <a:cs typeface="Arial" pitchFamily="34" charset="-120"/>
               </a:rPr>
-              <a:t>4件</a:t>
+              <a:t>5件</a:t>
             </a:r>
             <a:endParaRPr lang="en-US" sz="900" dirty="0"/>
           </a:p>
@@ -11905,7 +11905,7 @@
                 <a:ea typeface="Arial" pitchFamily="34" charset="-122"/>
                 <a:cs typeface="Arial" pitchFamily="34" charset="-120"/>
               </a:rPr>
-              <a:t>通常のビジネスホテルよりも広いのは当たり前だが、お風呂もそれなりに広く疲れが取れる入浴剤のサービスもあり良かった</a:t>
+              <a:t>お部屋も綺麗、バスルームも広めでアメニティグッツも充実してます</a:t>
             </a:r>
             <a:endParaRPr lang="en-US" sz="900" dirty="0"/>
           </a:p>
@@ -11944,7 +11944,7 @@
                 <a:ea typeface="Arial" pitchFamily="34" charset="-122"/>
                 <a:cs typeface="Arial" pitchFamily="34" charset="-120"/>
               </a:rPr>
-              <a:t>「部屋は綺麗で、日本にしてはスペースがあった」</a:t>
+              <a:t>「通常のビジネスホテルよりも広いのは当たり前だが、お風呂もそれなりに広く疲れが取れる入浴剤のサービスもあり良かった」</a:t>
             </a:r>
             <a:endParaRPr lang="en-US" sz="900" dirty="0"/>
           </a:p>
@@ -12634,7 +12634,7 @@
                           <a:ea typeface="Arial" pitchFamily="34" charset="-122"/>
                           <a:cs typeface="Arial" pitchFamily="34" charset="-120"/>
                         </a:rPr>
-                        <a:t>朝食も美味しかったです。副菜も少しずついただきましたがどれも美味しかったです。  今回、無事にパンも焼くことができ...</a:t>
+                        <a:t>朝食のメニューは少ないけど、非常に美味しくいただきました。スマホの動画をテレビへ転送できるシステムも良かったです。...</a:t>
                       </a:r>
                       <a:endParaRPr lang="en-US" sz="900" dirty="0">
                         <a:latin typeface="Arial" charset="0"/>
@@ -12702,7 +12702,7 @@
                           <a:ea typeface="Arial" pitchFamily="34" charset="-122"/>
                           <a:cs typeface="Arial" pitchFamily="34" charset="-120"/>
                         </a:rPr>
-                        <a:t>6件</a:t>
+                        <a:t>7件</a:t>
                       </a:r>
                       <a:endParaRPr lang="en-US" sz="900" dirty="0">
                         <a:latin typeface="Arial" charset="0"/>
@@ -13388,7 +13388,7 @@
                           <a:ea typeface="Arial" pitchFamily="34" charset="-122"/>
                           <a:cs typeface="Arial" pitchFamily="34" charset="-120"/>
                         </a:rPr>
-                        <a:t>臭い・匂い</a:t>
+                        <a:t>浴室・水回り</a:t>
                       </a:r>
                       <a:endParaRPr lang="en-US" sz="900" dirty="0">
                         <a:latin typeface="Arial" charset="0"/>
@@ -13456,7 +13456,7 @@
                           <a:ea typeface="Arial" pitchFamily="34" charset="-122"/>
                           <a:cs typeface="Arial" pitchFamily="34" charset="-120"/>
                         </a:rPr>
-                        <a:t>ただ１つ難を言わせていただくなら、部屋着の匂いがキツく残念でした｡ また、機会がありましたらお世話になりたいと思います</a:t>
+                        <a:t>お部屋も綺麗、バスルームも広めでアメニティグッツも充実してます</a:t>
                       </a:r>
                       <a:endParaRPr lang="en-US" sz="900" dirty="0">
                         <a:latin typeface="Arial" charset="0"/>
@@ -13576,6 +13576,280 @@
                   </a:tcPr>
                 </a:tc>
               </a:tr>
+              <a:tr h="320040">
+                <a:tc>
+                  <a:txBody>
+                    <a:bodyPr/>
+                    <a:lstStyle/>
+                    <a:p>
+                      <a:pPr algn="ctr" indent="0" marL="0">
+                        <a:buNone/>
+                      </a:pPr>
+                      <a:r>
+                        <a:rPr lang="en-US" sz="1200" b="1" dirty="0">
+                          <a:solidFill>
+                            <a:srgbClr val="D4A843"/>
+                          </a:solidFill>
+                          <a:latin typeface="Arial" pitchFamily="34" charset="0"/>
+                          <a:ea typeface="Arial" pitchFamily="34" charset="-122"/>
+                          <a:cs typeface="Arial" pitchFamily="34" charset="-120"/>
+                        </a:rPr>
+                        <a:t>B</a:t>
+                      </a:r>
+                      <a:endParaRPr lang="en-US" sz="1200" dirty="0">
+                        <a:latin typeface="Arial" charset="0"/>
+                        <a:ea typeface="Arial" charset="0"/>
+                        <a:cs typeface="Arial" charset="0"/>
+                      </a:endParaRPr>
+                    </a:p>
+                  </a:txBody>
+                  <a:tcPr marL="91440" marR="91440" marT="45720" marB="45720">
+                    <a:lnL w="6350" cap="flat" cmpd="sng" algn="ctr">
+                      <a:solidFill>
+                        <a:srgbClr val="CBD5E1"/>
+                      </a:solidFill>
+                      <a:prstDash val="solid"/>
+                      <a:round/>
+                      <a:headEnd type="none" w="med" len="med"/>
+                      <a:tailEnd type="none" w="med" len="med"/>
+                    </a:lnL>
+                    <a:lnR w="6350" cap="flat" cmpd="sng" algn="ctr">
+                      <a:solidFill>
+                        <a:srgbClr val="CBD5E1"/>
+                      </a:solidFill>
+                      <a:prstDash val="solid"/>
+                      <a:round/>
+                      <a:headEnd type="none" w="med" len="med"/>
+                      <a:tailEnd type="none" w="med" len="med"/>
+                    </a:lnR>
+                    <a:lnT w="6350" cap="flat" cmpd="sng" algn="ctr">
+                      <a:solidFill>
+                        <a:srgbClr val="CBD5E1"/>
+                      </a:solidFill>
+                      <a:prstDash val="solid"/>
+                      <a:round/>
+                      <a:headEnd type="none" w="med" len="med"/>
+                      <a:tailEnd type="none" w="med" len="med"/>
+                    </a:lnT>
+                    <a:lnB w="6350" cap="flat" cmpd="sng" algn="ctr">
+                      <a:solidFill>
+                        <a:srgbClr val="CBD5E1"/>
+                      </a:solidFill>
+                      <a:prstDash val="solid"/>
+                      <a:round/>
+                      <a:headEnd type="none" w="med" len="med"/>
+                      <a:tailEnd type="none" w="med" len="med"/>
+                    </a:lnB>
+                    <a:solidFill>
+                      <a:srgbClr val="E8EFF8"/>
+                    </a:solidFill>
+                  </a:tcPr>
+                </a:tc>
+                <a:tc>
+                  <a:txBody>
+                    <a:bodyPr/>
+                    <a:lstStyle/>
+                    <a:p>
+                      <a:pPr indent="0" marL="0">
+                        <a:buNone/>
+                      </a:pPr>
+                      <a:r>
+                        <a:rPr lang="en-US" sz="900" b="1" dirty="0">
+                          <a:solidFill>
+                            <a:srgbClr val="334155"/>
+                          </a:solidFill>
+                          <a:latin typeface="Arial" pitchFamily="34" charset="0"/>
+                          <a:ea typeface="Arial" pitchFamily="34" charset="-122"/>
+                          <a:cs typeface="Arial" pitchFamily="34" charset="-120"/>
+                        </a:rPr>
+                        <a:t>臭い・匂い</a:t>
+                      </a:r>
+                      <a:endParaRPr lang="en-US" sz="900" dirty="0">
+                        <a:latin typeface="Arial" charset="0"/>
+                        <a:ea typeface="Arial" charset="0"/>
+                        <a:cs typeface="Arial" charset="0"/>
+                      </a:endParaRPr>
+                    </a:p>
+                  </a:txBody>
+                  <a:tcPr marL="91440" marR="91440" marT="45720" marB="45720">
+                    <a:lnL w="6350" cap="flat" cmpd="sng" algn="ctr">
+                      <a:solidFill>
+                        <a:srgbClr val="CBD5E1"/>
+                      </a:solidFill>
+                      <a:prstDash val="solid"/>
+                      <a:round/>
+                      <a:headEnd type="none" w="med" len="med"/>
+                      <a:tailEnd type="none" w="med" len="med"/>
+                    </a:lnL>
+                    <a:lnR w="6350" cap="flat" cmpd="sng" algn="ctr">
+                      <a:solidFill>
+                        <a:srgbClr val="CBD5E1"/>
+                      </a:solidFill>
+                      <a:prstDash val="solid"/>
+                      <a:round/>
+                      <a:headEnd type="none" w="med" len="med"/>
+                      <a:tailEnd type="none" w="med" len="med"/>
+                    </a:lnR>
+                    <a:lnT w="6350" cap="flat" cmpd="sng" algn="ctr">
+                      <a:solidFill>
+                        <a:srgbClr val="CBD5E1"/>
+                      </a:solidFill>
+                      <a:prstDash val="solid"/>
+                      <a:round/>
+                      <a:headEnd type="none" w="med" len="med"/>
+                      <a:tailEnd type="none" w="med" len="med"/>
+                    </a:lnT>
+                    <a:lnB w="6350" cap="flat" cmpd="sng" algn="ctr">
+                      <a:solidFill>
+                        <a:srgbClr val="CBD5E1"/>
+                      </a:solidFill>
+                      <a:prstDash val="solid"/>
+                      <a:round/>
+                      <a:headEnd type="none" w="med" len="med"/>
+                      <a:tailEnd type="none" w="med" len="med"/>
+                    </a:lnB>
+                    <a:solidFill>
+                      <a:srgbClr val="E8EFF8"/>
+                    </a:solidFill>
+                  </a:tcPr>
+                </a:tc>
+                <a:tc>
+                  <a:txBody>
+                    <a:bodyPr/>
+                    <a:lstStyle/>
+                    <a:p>
+                      <a:pPr indent="0" marL="0">
+                        <a:buNone/>
+                      </a:pPr>
+                      <a:r>
+                        <a:rPr lang="en-US" sz="900" dirty="0">
+                          <a:solidFill>
+                            <a:srgbClr val="64748B"/>
+                          </a:solidFill>
+                          <a:latin typeface="Arial" pitchFamily="34" charset="0"/>
+                          <a:ea typeface="Arial" pitchFamily="34" charset="-122"/>
+                          <a:cs typeface="Arial" pitchFamily="34" charset="-120"/>
+                        </a:rPr>
+                        <a:t>ただ１つ難を言わせていただくなら、部屋着の匂いがキツく残念でした｡ また、機会がありましたらお世話になりたいと思います</a:t>
+                      </a:r>
+                      <a:endParaRPr lang="en-US" sz="900" dirty="0">
+                        <a:latin typeface="Arial" charset="0"/>
+                        <a:ea typeface="Arial" charset="0"/>
+                        <a:cs typeface="Arial" charset="0"/>
+                      </a:endParaRPr>
+                    </a:p>
+                  </a:txBody>
+                  <a:tcPr marL="91440" marR="91440" marT="45720" marB="45720">
+                    <a:lnL w="6350" cap="flat" cmpd="sng" algn="ctr">
+                      <a:solidFill>
+                        <a:srgbClr val="CBD5E1"/>
+                      </a:solidFill>
+                      <a:prstDash val="solid"/>
+                      <a:round/>
+                      <a:headEnd type="none" w="med" len="med"/>
+                      <a:tailEnd type="none" w="med" len="med"/>
+                    </a:lnL>
+                    <a:lnR w="6350" cap="flat" cmpd="sng" algn="ctr">
+                      <a:solidFill>
+                        <a:srgbClr val="CBD5E1"/>
+                      </a:solidFill>
+                      <a:prstDash val="solid"/>
+                      <a:round/>
+                      <a:headEnd type="none" w="med" len="med"/>
+                      <a:tailEnd type="none" w="med" len="med"/>
+                    </a:lnR>
+                    <a:lnT w="6350" cap="flat" cmpd="sng" algn="ctr">
+                      <a:solidFill>
+                        <a:srgbClr val="CBD5E1"/>
+                      </a:solidFill>
+                      <a:prstDash val="solid"/>
+                      <a:round/>
+                      <a:headEnd type="none" w="med" len="med"/>
+                      <a:tailEnd type="none" w="med" len="med"/>
+                    </a:lnT>
+                    <a:lnB w="6350" cap="flat" cmpd="sng" algn="ctr">
+                      <a:solidFill>
+                        <a:srgbClr val="CBD5E1"/>
+                      </a:solidFill>
+                      <a:prstDash val="solid"/>
+                      <a:round/>
+                      <a:headEnd type="none" w="med" len="med"/>
+                      <a:tailEnd type="none" w="med" len="med"/>
+                    </a:lnB>
+                    <a:solidFill>
+                      <a:srgbClr val="E8EFF8"/>
+                    </a:solidFill>
+                  </a:tcPr>
+                </a:tc>
+                <a:tc>
+                  <a:txBody>
+                    <a:bodyPr/>
+                    <a:lstStyle/>
+                    <a:p>
+                      <a:pPr algn="ctr" indent="0" marL="0">
+                        <a:buNone/>
+                      </a:pPr>
+                      <a:r>
+                        <a:rPr lang="en-US" sz="900" dirty="0">
+                          <a:solidFill>
+                            <a:srgbClr val="334155"/>
+                          </a:solidFill>
+                          <a:latin typeface="Arial" pitchFamily="34" charset="0"/>
+                          <a:ea typeface="Arial" pitchFamily="34" charset="-122"/>
+                          <a:cs typeface="Arial" pitchFamily="34" charset="-120"/>
+                        </a:rPr>
+                        <a:t>1件</a:t>
+                      </a:r>
+                      <a:endParaRPr lang="en-US" sz="900" dirty="0">
+                        <a:latin typeface="Arial" charset="0"/>
+                        <a:ea typeface="Arial" charset="0"/>
+                        <a:cs typeface="Arial" charset="0"/>
+                      </a:endParaRPr>
+                    </a:p>
+                  </a:txBody>
+                  <a:tcPr marL="91440" marR="91440" marT="45720" marB="45720">
+                    <a:lnL w="6350" cap="flat" cmpd="sng" algn="ctr">
+                      <a:solidFill>
+                        <a:srgbClr val="CBD5E1"/>
+                      </a:solidFill>
+                      <a:prstDash val="solid"/>
+                      <a:round/>
+                      <a:headEnd type="none" w="med" len="med"/>
+                      <a:tailEnd type="none" w="med" len="med"/>
+                    </a:lnL>
+                    <a:lnR w="6350" cap="flat" cmpd="sng" algn="ctr">
+                      <a:solidFill>
+                        <a:srgbClr val="CBD5E1"/>
+                      </a:solidFill>
+                      <a:prstDash val="solid"/>
+                      <a:round/>
+                      <a:headEnd type="none" w="med" len="med"/>
+                      <a:tailEnd type="none" w="med" len="med"/>
+                    </a:lnR>
+                    <a:lnT w="6350" cap="flat" cmpd="sng" algn="ctr">
+                      <a:solidFill>
+                        <a:srgbClr val="CBD5E1"/>
+                      </a:solidFill>
+                      <a:prstDash val="solid"/>
+                      <a:round/>
+                      <a:headEnd type="none" w="med" len="med"/>
+                      <a:tailEnd type="none" w="med" len="med"/>
+                    </a:lnT>
+                    <a:lnB w="6350" cap="flat" cmpd="sng" algn="ctr">
+                      <a:solidFill>
+                        <a:srgbClr val="CBD5E1"/>
+                      </a:solidFill>
+                      <a:prstDash val="solid"/>
+                      <a:round/>
+                      <a:headEnd type="none" w="med" len="med"/>
+                      <a:tailEnd type="none" w="med" len="med"/>
+                    </a:lnB>
+                    <a:solidFill>
+                      <a:srgbClr val="E8EFF8"/>
+                    </a:solidFill>
+                  </a:tcPr>
+                </a:tc>
+              </a:tr>
             </a:tbl>
           </a:graphicData>
         </a:graphic>
@@ -14844,6 +15118,130 @@
                 <a:ea typeface="Arial" pitchFamily="34" charset="-122"/>
                 <a:cs typeface="Arial" pitchFamily="34" charset="-120"/>
               </a:rPr>
+              <a:t>浴室の快適性向上</a:t>
+            </a:r>
+            <a:endParaRPr lang="en-US" sz="1000" dirty="0"/>
+          </a:p>
+        </p:txBody>
+      </p:sp>
+      <p:sp>
+        <p:nvSpPr>
+          <p:cNvPr id="9" name="Text 7"/>
+          <p:cNvSpPr/>
+          <p:nvPr/>
+        </p:nvSpPr>
+        <p:spPr>
+          <a:xfrm>
+            <a:off x="640080" y="1719072"/>
+            <a:ext cx="3474720" cy="694944"/>
+          </a:xfrm>
+          <a:prstGeom prst="rect">
+            <a:avLst/>
+          </a:prstGeom>
+          <a:noFill/>
+          <a:ln/>
+        </p:spPr>
+        <p:txBody>
+          <a:bodyPr wrap="square" lIns="0" tIns="0" rIns="0" bIns="0" rtlCol="0" anchor="ctr"/>
+          <a:lstStyle/>
+          <a:p>
+            <a:pPr marL="342900" indent="-342900">
+              <a:spcAft>
+                <a:spcPts val="200"/>
+              </a:spcAft>
+              <a:buSzPct val="100000"/>
+              <a:buChar char="•"/>
+            </a:pPr>
+            <a:r>
+              <a:rPr lang="en-US" sz="900" dirty="0">
+                <a:solidFill>
+                  <a:srgbClr val="64748B"/>
+                </a:solidFill>
+                <a:latin typeface="Arial" pitchFamily="34" charset="0"/>
+                <a:ea typeface="Arial" pitchFamily="34" charset="-122"/>
+                <a:cs typeface="Arial" pitchFamily="34" charset="-120"/>
+              </a:rPr>
+              <a:t>排水口の清掃・修繕を全室で実施し、排水速度を改善</a:t>
+            </a:r>
+            <a:endParaRPr lang="en-US" sz="900" dirty="0"/>
+          </a:p>
+          <a:p>
+            <a:pPr marL="342900" indent="-342900">
+              <a:spcAft>
+                <a:spcPts val="200"/>
+              </a:spcAft>
+              <a:buSzPct val="100000"/>
+              <a:buChar char="•"/>
+            </a:pPr>
+            <a:r>
+              <a:rPr lang="en-US" sz="900" dirty="0">
+                <a:solidFill>
+                  <a:srgbClr val="64748B"/>
+                </a:solidFill>
+                <a:latin typeface="Arial" pitchFamily="34" charset="0"/>
+                <a:ea typeface="Arial" pitchFamily="34" charset="-122"/>
+                <a:cs typeface="Arial" pitchFamily="34" charset="-120"/>
+              </a:rPr>
+              <a:t>シャワーヘッドの交換（水圧改善・節水タイプ導入）</a:t>
+            </a:r>
+            <a:endParaRPr lang="en-US" sz="900" dirty="0"/>
+          </a:p>
+          <a:p>
+            <a:pPr marL="342900" indent="-342900">
+              <a:spcAft>
+                <a:spcPts val="200"/>
+              </a:spcAft>
+              <a:buSzPct val="100000"/>
+              <a:buChar char="•"/>
+            </a:pPr>
+            <a:r>
+              <a:rPr lang="en-US" sz="900" dirty="0">
+                <a:solidFill>
+                  <a:srgbClr val="64748B"/>
+                </a:solidFill>
+                <a:latin typeface="Arial" pitchFamily="34" charset="0"/>
+                <a:ea typeface="Arial" pitchFamily="34" charset="-122"/>
+                <a:cs typeface="Arial" pitchFamily="34" charset="-120"/>
+              </a:rPr>
+              <a:t>浴室換気・暖房設備の点検と改善</a:t>
+            </a:r>
+            <a:endParaRPr lang="en-US" sz="900" dirty="0"/>
+          </a:p>
+        </p:txBody>
+      </p:sp>
+      <p:sp>
+        <p:nvSpPr>
+          <p:cNvPr id="10" name="Text 8"/>
+          <p:cNvSpPr/>
+          <p:nvPr/>
+        </p:nvSpPr>
+        <p:spPr>
+          <a:xfrm>
+            <a:off x="640080" y="2505456"/>
+            <a:ext cx="3474720" cy="274320"/>
+          </a:xfrm>
+          <a:prstGeom prst="rect">
+            <a:avLst/>
+          </a:prstGeom>
+          <a:noFill/>
+          <a:ln/>
+        </p:spPr>
+        <p:txBody>
+          <a:bodyPr wrap="square" lIns="0" tIns="0" rIns="0" bIns="0" rtlCol="0" anchor="ctr"/>
+          <a:lstStyle/>
+          <a:p>
+            <a:pPr indent="0" marL="0">
+              <a:buNone/>
+            </a:pPr>
+            <a:r>
+              <a:rPr lang="en-US" sz="1000" b="1" dirty="0">
+                <a:solidFill>
+                  <a:srgbClr val="1A2744"/>
+                </a:solidFill>
+                <a:latin typeface="Arial" pitchFamily="34" charset="0"/>
+                <a:ea typeface="Arial" pitchFamily="34" charset="-122"/>
+                <a:cs typeface="Arial" pitchFamily="34" charset="-120"/>
+              </a:rPr>
               <a:t>口コミ返信体制の構築</a:t>
             </a:r>
             <a:endParaRPr lang="en-US" sz="1000" dirty="0"/>
@@ -14852,13 +15250,13 @@
       </p:sp>
       <p:sp>
         <p:nvSpPr>
-          <p:cNvPr id="9" name="Text 7"/>
-          <p:cNvSpPr/>
-          <p:nvPr/>
-        </p:nvSpPr>
-        <p:spPr>
-          <a:xfrm>
-            <a:off x="640080" y="1719072"/>
+          <p:cNvPr id="11" name="Text 9"/>
+          <p:cNvSpPr/>
+          <p:nvPr/>
+        </p:nvSpPr>
+        <p:spPr>
+          <a:xfrm>
+            <a:off x="640080" y="2761488"/>
             <a:ext cx="3474720" cy="493776"/>
           </a:xfrm>
           <a:prstGeom prst="rect">
@@ -14916,7 +15314,7 @@
       </p:sp>
       <p:sp>
         <p:nvSpPr>
-          <p:cNvPr id="10" name="Shape 8"/>
+          <p:cNvPr id="12" name="Shape 10"/>
           <p:cNvSpPr/>
           <p:nvPr/>
         </p:nvSpPr>
@@ -14943,7 +15341,7 @@
       </p:sp>
       <p:sp>
         <p:nvSpPr>
-          <p:cNvPr id="11" name="Shape 9"/>
+          <p:cNvPr id="13" name="Shape 11"/>
           <p:cNvSpPr/>
           <p:nvPr/>
         </p:nvSpPr>
@@ -14963,7 +15361,7 @@
       </p:sp>
       <p:sp>
         <p:nvSpPr>
-          <p:cNvPr id="12" name="Text 10"/>
+          <p:cNvPr id="14" name="Text 12"/>
           <p:cNvSpPr/>
           <p:nvPr/>
         </p:nvSpPr>
@@ -15002,7 +15400,7 @@
       </p:sp>
       <p:sp>
         <p:nvSpPr>
-          <p:cNvPr id="13" name="Text 11"/>
+          <p:cNvPr id="15" name="Text 13"/>
           <p:cNvSpPr/>
           <p:nvPr/>
         </p:nvSpPr>
@@ -15041,7 +15439,7 @@
       </p:sp>
       <p:sp>
         <p:nvSpPr>
-          <p:cNvPr id="14" name="Text 12"/>
+          <p:cNvPr id="16" name="Text 14"/>
           <p:cNvSpPr/>
           <p:nvPr/>
         </p:nvSpPr>
@@ -15126,13 +15524,116 @@
       </p:sp>
       <p:sp>
         <p:nvSpPr>
-          <p:cNvPr id="15" name="Text 13"/>
+          <p:cNvPr id="17" name="Text 15"/>
           <p:cNvSpPr/>
           <p:nvPr/>
         </p:nvSpPr>
         <p:spPr>
           <a:xfrm>
             <a:off x="4892040" y="2505456"/>
+            <a:ext cx="3474720" cy="274320"/>
+          </a:xfrm>
+          <a:prstGeom prst="rect">
+            <a:avLst/>
+          </a:prstGeom>
+          <a:noFill/>
+          <a:ln/>
+        </p:spPr>
+        <p:txBody>
+          <a:bodyPr wrap="square" lIns="0" tIns="0" rIns="0" bIns="0" rtlCol="0" anchor="ctr"/>
+          <a:lstStyle/>
+          <a:p>
+            <a:pPr indent="0" marL="0">
+              <a:buNone/>
+            </a:pPr>
+            <a:r>
+              <a:rPr lang="en-US" sz="1000" b="1" dirty="0">
+                <a:solidFill>
+                  <a:srgbClr val="1A2744"/>
+                </a:solidFill>
+                <a:latin typeface="Arial" pitchFamily="34" charset="0"/>
+                <a:ea typeface="Arial" pitchFamily="34" charset="-122"/>
+                <a:cs typeface="Arial" pitchFamily="34" charset="-120"/>
+              </a:rPr>
+              <a:t>浴室の抜本的改修</a:t>
+            </a:r>
+            <a:endParaRPr lang="en-US" sz="1000" dirty="0"/>
+          </a:p>
+        </p:txBody>
+      </p:sp>
+      <p:sp>
+        <p:nvSpPr>
+          <p:cNvPr id="18" name="Text 16"/>
+          <p:cNvSpPr/>
+          <p:nvPr/>
+        </p:nvSpPr>
+        <p:spPr>
+          <a:xfrm>
+            <a:off x="4892040" y="2761488"/>
+            <a:ext cx="3474720" cy="493776"/>
+          </a:xfrm>
+          <a:prstGeom prst="rect">
+            <a:avLst/>
+          </a:prstGeom>
+          <a:noFill/>
+          <a:ln/>
+        </p:spPr>
+        <p:txBody>
+          <a:bodyPr wrap="square" lIns="0" tIns="0" rIns="0" bIns="0" rtlCol="0" anchor="ctr"/>
+          <a:lstStyle/>
+          <a:p>
+            <a:pPr marL="342900" indent="-342900">
+              <a:spcAft>
+                <a:spcPts val="200"/>
+              </a:spcAft>
+              <a:buSzPct val="100000"/>
+              <a:buChar char="•"/>
+            </a:pPr>
+            <a:r>
+              <a:rPr lang="en-US" sz="900" dirty="0">
+                <a:solidFill>
+                  <a:srgbClr val="64748B"/>
+                </a:solidFill>
+                <a:latin typeface="Arial" pitchFamily="34" charset="0"/>
+                <a:ea typeface="Arial" pitchFamily="34" charset="-122"/>
+                <a:cs typeface="Arial" pitchFamily="34" charset="-120"/>
+              </a:rPr>
+              <a:t>配管更新による排水問題の根本解決</a:t>
+            </a:r>
+            <a:endParaRPr lang="en-US" sz="900" dirty="0"/>
+          </a:p>
+          <a:p>
+            <a:pPr marL="342900" indent="-342900">
+              <a:spcAft>
+                <a:spcPts val="200"/>
+              </a:spcAft>
+              <a:buSzPct val="100000"/>
+              <a:buChar char="•"/>
+            </a:pPr>
+            <a:r>
+              <a:rPr lang="en-US" sz="900" dirty="0">
+                <a:solidFill>
+                  <a:srgbClr val="64748B"/>
+                </a:solidFill>
+                <a:latin typeface="Arial" pitchFamily="34" charset="0"/>
+                <a:ea typeface="Arial" pitchFamily="34" charset="-122"/>
+                <a:cs typeface="Arial" pitchFamily="34" charset="-120"/>
+              </a:rPr>
+              <a:t>換気設備の強化による浴室内の温度・湿度改善</a:t>
+            </a:r>
+            <a:endParaRPr lang="en-US" sz="900" dirty="0"/>
+          </a:p>
+        </p:txBody>
+      </p:sp>
+      <p:sp>
+        <p:nvSpPr>
+          <p:cNvPr id="19" name="Text 17"/>
+          <p:cNvSpPr/>
+          <p:nvPr/>
+        </p:nvSpPr>
+        <p:spPr>
+          <a:xfrm>
+            <a:off x="4892040" y="3346704"/>
             <a:ext cx="3474720" cy="274320"/>
           </a:xfrm>
           <a:prstGeom prst="rect">
@@ -15165,13 +15666,13 @@
       </p:sp>
       <p:sp>
         <p:nvSpPr>
-          <p:cNvPr id="16" name="Text 14"/>
-          <p:cNvSpPr/>
-          <p:nvPr/>
-        </p:nvSpPr>
-        <p:spPr>
-          <a:xfrm>
-            <a:off x="4892040" y="2761488"/>
+          <p:cNvPr id="20" name="Text 18"/>
+          <p:cNvSpPr/>
+          <p:nvPr/>
+        </p:nvSpPr>
+        <p:spPr>
+          <a:xfrm>
+            <a:off x="4892040" y="3602736"/>
             <a:ext cx="3474720" cy="694944"/>
           </a:xfrm>
           <a:prstGeom prst="rect">
@@ -15250,7 +15751,7 @@
       </p:sp>
       <p:sp>
         <p:nvSpPr>
-          <p:cNvPr id="17" name="Shape 15"/>
+          <p:cNvPr id="21" name="Shape 19"/>
           <p:cNvSpPr/>
           <p:nvPr/>
         </p:nvSpPr>
@@ -15270,7 +15771,7 @@
       </p:sp>
       <p:sp>
         <p:nvSpPr>
-          <p:cNvPr id="18" name="Text 16"/>
+          <p:cNvPr id="22" name="Text 20"/>
           <p:cNvSpPr/>
           <p:nvPr/>
         </p:nvSpPr>
@@ -15309,7 +15810,7 @@
       </p:sp>
       <p:sp>
         <p:nvSpPr>
-          <p:cNvPr id="19" name="Text 17"/>
+          <p:cNvPr id="23" name="Text 21"/>
           <p:cNvSpPr/>
           <p:nvPr/>
         </p:nvSpPr>

--- a/納品レポート/ホテル別レポート/keyakigate_口コミ分析レポート.pptx
+++ b/納品レポート/ホテル別レポート/keyakigate_口コミ分析レポート.pptx
@@ -217,7 +217,7 @@
                   <c:v>9.41</c:v>
                 </c:pt>
                 <c:pt idx="3">
-                  <c:v>9</c:v>
+                  <c:v>8.92</c:v>
                 </c:pt>
                 <c:pt idx="4">
                   <c:v>8.8</c:v>
@@ -566,7 +566,7 @@
               <c:numCache>
                 <c:ptCount val="3"/>
                 <c:pt idx="0">
-                  <c:v>54</c:v>
+                  <c:v>55</c:v>
                 </c:pt>
                 <c:pt idx="1">
                   <c:v>5</c:v>
@@ -787,7 +787,7 @@
                   <c:v>3</c:v>
                 </c:pt>
                 <c:pt idx="2">
-                  <c:v>12</c:v>
+                  <c:v>13</c:v>
                 </c:pt>
                 <c:pt idx="3">
                   <c:v>1</c:v>
@@ -2747,7 +2747,7 @@
                 <a:ea typeface="Arial" pitchFamily="34" charset="-122"/>
                 <a:cs typeface="Arial" pitchFamily="34" charset="-120"/>
               </a:rPr>
-              <a:t>レビュー総数：61件（6サイト）</a:t>
+              <a:t>レビュー総数：62件（6サイト）</a:t>
             </a:r>
             <a:endParaRPr lang="en-US" sz="1000" dirty="0"/>
           </a:p>
@@ -2767,7 +2767,7 @@
                 <a:ea typeface="Arial" pitchFamily="34" charset="-122"/>
                 <a:cs typeface="Arial" pitchFamily="34" charset="-120"/>
               </a:rPr>
-              <a:t>作成日：2026年4月6日</a:t>
+              <a:t>作成日：2026年4月7日</a:t>
             </a:r>
             <a:endParaRPr lang="en-US" sz="1000" dirty="0"/>
           </a:p>
@@ -3313,7 +3313,7 @@
                           <a:ea typeface="Arial" pitchFamily="34" charset="-122"/>
                           <a:cs typeface="Arial" pitchFamily="34" charset="-120"/>
                         </a:rPr>
-                        <a:t>8.98点</a:t>
+                        <a:t>8.97点</a:t>
                       </a:r>
                       <a:endParaRPr lang="en-US" sz="1000" dirty="0">
                         <a:latin typeface="Arial" charset="0"/>
@@ -3587,7 +3587,7 @@
                           <a:ea typeface="Arial" pitchFamily="34" charset="-122"/>
                           <a:cs typeface="Arial" pitchFamily="34" charset="-120"/>
                         </a:rPr>
-                        <a:t>88.5%</a:t>
+                        <a:t>88.7%</a:t>
                       </a:r>
                       <a:endParaRPr lang="en-US" sz="1000" dirty="0">
                         <a:latin typeface="Arial" charset="0"/>
@@ -3861,7 +3861,7 @@
                           <a:ea typeface="Arial" pitchFamily="34" charset="-122"/>
                           <a:cs typeface="Arial" pitchFamily="34" charset="-120"/>
                         </a:rPr>
-                        <a:t>3.3%</a:t>
+                        <a:t>3.2%</a:t>
                       </a:r>
                       <a:endParaRPr lang="en-US" sz="1000" dirty="0">
                         <a:latin typeface="Arial" charset="0"/>
@@ -5322,7 +5322,7 @@
                 <a:ea typeface="Arial" pitchFamily="34" charset="-122"/>
                 <a:cs typeface="Arial" pitchFamily="34" charset="-120"/>
               </a:rPr>
-              <a:t>8.98</a:t>
+              <a:t>8.97</a:t>
             </a:r>
             <a:endParaRPr lang="en-US" sz="3200" dirty="0"/>
           </a:p>
@@ -5447,7 +5447,7 @@
                 <a:ea typeface="Arial" pitchFamily="34" charset="-122"/>
                 <a:cs typeface="Arial" pitchFamily="34" charset="-120"/>
               </a:rPr>
-              <a:t>88.5%</a:t>
+              <a:t>88.7%</a:t>
             </a:r>
             <a:endParaRPr lang="en-US" sz="3200" dirty="0"/>
           </a:p>
@@ -5572,7 +5572,7 @@
                 <a:ea typeface="Arial" pitchFamily="34" charset="-122"/>
                 <a:cs typeface="Arial" pitchFamily="34" charset="-120"/>
               </a:rPr>
-              <a:t>3.3%</a:t>
+              <a:t>3.2%</a:t>
             </a:r>
             <a:endParaRPr lang="en-US" sz="3200" dirty="0"/>
           </a:p>
@@ -5697,7 +5697,7 @@
                 <a:ea typeface="Arial" pitchFamily="34" charset="-122"/>
                 <a:cs typeface="Arial" pitchFamily="34" charset="-120"/>
               </a:rPr>
-              <a:t>61件</a:t>
+              <a:t>62件</a:t>
             </a:r>
             <a:endParaRPr lang="en-US" sz="3200" dirty="0"/>
           </a:p>
@@ -5845,7 +5845,7 @@
                 <a:ea typeface="Arial" pitchFamily="34" charset="-122"/>
                 <a:cs typeface="Arial" pitchFamily="34" charset="-120"/>
               </a:rPr>
-              <a:t>  府中駅からすぐの立地で本当に便利です</a:t>
+              <a:t>  Very close to train station  My room was very quiet and b...</a:t>
             </a:r>
             <a:endParaRPr lang="en-US" sz="1100" dirty="0"/>
           </a:p>
@@ -5925,7 +5925,7 @@
                 <a:ea typeface="Arial" pitchFamily="34" charset="-122"/>
                 <a:cs typeface="Arial" pitchFamily="34" charset="-120"/>
               </a:rPr>
-              <a:t>  お部屋も綺麗、バスルームも広めでアメニティグッツも充実してます</a:t>
+              <a:t>  Very close to train station  My room was very quiet and b...</a:t>
             </a:r>
             <a:endParaRPr lang="en-US" sz="1100" dirty="0"/>
           </a:p>
@@ -6506,7 +6506,7 @@
                 <a:ea typeface="Arial" pitchFamily="34" charset="-122"/>
                 <a:cs typeface="Arial" pitchFamily="34" charset="-120"/>
               </a:rPr>
-              <a:t>8.98</a:t>
+              <a:t>8.97</a:t>
             </a:r>
             <a:endParaRPr lang="en-US" sz="3200" dirty="0"/>
           </a:p>
@@ -6631,7 +6631,7 @@
                 <a:ea typeface="Arial" pitchFamily="34" charset="-122"/>
                 <a:cs typeface="Arial" pitchFamily="34" charset="-120"/>
               </a:rPr>
-              <a:t>88.5%</a:t>
+              <a:t>88.7%</a:t>
             </a:r>
             <a:endParaRPr lang="en-US" sz="3200" dirty="0"/>
           </a:p>
@@ -6756,7 +6756,7 @@
                 <a:ea typeface="Arial" pitchFamily="34" charset="-122"/>
                 <a:cs typeface="Arial" pitchFamily="34" charset="-120"/>
               </a:rPr>
-              <a:t>3.3%</a:t>
+              <a:t>3.2%</a:t>
             </a:r>
             <a:endParaRPr lang="en-US" sz="3200" dirty="0"/>
           </a:p>
@@ -6881,7 +6881,7 @@
                 <a:ea typeface="Arial" pitchFamily="34" charset="-122"/>
                 <a:cs typeface="Arial" pitchFamily="34" charset="-120"/>
               </a:rPr>
-              <a:t>61件</a:t>
+              <a:t>62件</a:t>
             </a:r>
             <a:endParaRPr lang="en-US" sz="3200" dirty="0"/>
           </a:p>
@@ -8886,7 +8886,7 @@
                           <a:ea typeface="Arial" pitchFamily="34" charset="-122"/>
                           <a:cs typeface="Arial" pitchFamily="34" charset="-120"/>
                         </a:rPr>
-                        <a:t>11</a:t>
+                        <a:t>12</a:t>
                       </a:r>
                       <a:endParaRPr lang="en-US" sz="900" dirty="0">
                         <a:latin typeface="Arial" charset="0"/>
@@ -8954,7 +8954,7 @@
                           <a:ea typeface="Arial" pitchFamily="34" charset="-122"/>
                           <a:cs typeface="Arial" pitchFamily="34" charset="-120"/>
                         </a:rPr>
-                        <a:t>9</a:t>
+                        <a:t>8.92</a:t>
                       </a:r>
                       <a:endParaRPr lang="en-US" sz="900" dirty="0">
                         <a:latin typeface="Arial" charset="0"/>
@@ -9090,7 +9090,7 @@
                           <a:ea typeface="Arial" pitchFamily="34" charset="-122"/>
                           <a:cs typeface="Arial" pitchFamily="34" charset="-120"/>
                         </a:rPr>
-                        <a:t>9</a:t>
+                        <a:t>8.92</a:t>
                       </a:r>
                       <a:endParaRPr lang="en-US" sz="900" dirty="0">
                         <a:latin typeface="Arial" charset="0"/>
@@ -10182,7 +10182,7 @@
                 <a:ea typeface="Arial" pitchFamily="34" charset="-122"/>
                 <a:cs typeface="Arial" pitchFamily="34" charset="-120"/>
               </a:rPr>
-              <a:t>54件（88.5%）</a:t>
+              <a:t>55件（88.7%）</a:t>
             </a:r>
             <a:endParaRPr lang="en-US" sz="1100" dirty="0"/>
           </a:p>
@@ -10280,7 +10280,7 @@
                 <a:ea typeface="Arial" pitchFamily="34" charset="-122"/>
                 <a:cs typeface="Arial" pitchFamily="34" charset="-120"/>
               </a:rPr>
-              <a:t>5件（8.2%）</a:t>
+              <a:t>5件（8.1%）</a:t>
             </a:r>
             <a:endParaRPr lang="en-US" sz="1100" dirty="0"/>
           </a:p>
@@ -10378,7 +10378,7 @@
                 <a:ea typeface="Arial" pitchFamily="34" charset="-122"/>
                 <a:cs typeface="Arial" pitchFamily="34" charset="-120"/>
               </a:rPr>
-              <a:t>2件（3.3%）</a:t>
+              <a:t>2件（3.2%）</a:t>
             </a:r>
             <a:endParaRPr lang="en-US" sz="1100" dirty="0"/>
           </a:p>
@@ -10790,7 +10790,7 @@
                 <a:ea typeface="Arial" pitchFamily="34" charset="-122"/>
                 <a:cs typeface="Arial" pitchFamily="34" charset="-120"/>
               </a:rPr>
-              <a:t>府中駅からすぐの立地で本当に便利です</a:t>
+              <a:t>Very close to train station  My room was very quiet and b...</a:t>
             </a:r>
             <a:endParaRPr lang="en-US" sz="900" dirty="0"/>
           </a:p>
@@ -10829,7 +10829,7 @@
                 <a:ea typeface="Arial" pitchFamily="34" charset="-122"/>
                 <a:cs typeface="Arial" pitchFamily="34" charset="-120"/>
               </a:rPr>
-              <a:t>「駅から近く京王アリーナにも近くてとても便利」</a:t>
+              <a:t>「府中駅からすぐの立地で本当に便利です」</a:t>
             </a:r>
             <a:endParaRPr lang="en-US" sz="900" dirty="0"/>
           </a:p>
@@ -11236,7 +11236,7 @@
                 <a:ea typeface="Arial" pitchFamily="34" charset="-122"/>
                 <a:cs typeface="Arial" pitchFamily="34" charset="-120"/>
               </a:rPr>
-              <a:t>お部屋も綺麗、バスルームも広めでアメニティグッツも充実してます</a:t>
+              <a:t>Very close to train station  My room was very quiet and b...</a:t>
             </a:r>
             <a:endParaRPr lang="en-US" sz="900" dirty="0"/>
           </a:p>
@@ -11275,7 +11275,7 @@
                 <a:ea typeface="Arial" pitchFamily="34" charset="-122"/>
                 <a:cs typeface="Arial" pitchFamily="34" charset="-120"/>
               </a:rPr>
-              <a:t>「仕事の出張にて、何度か利用させて頂いておりますが、ホテルが綺麗かつ快適です」</a:t>
+              <a:t>「お部屋も綺麗、バスルームも広めでアメニティグッツも充実してます」</a:t>
             </a:r>
             <a:endParaRPr lang="en-US" sz="900" dirty="0"/>
           </a:p>

--- a/納品レポート/ホテル別レポート/keyakigate_口コミ分析レポート.pptx
+++ b/納品レポート/ホテル別レポート/keyakigate_口コミ分析レポート.pptx
@@ -2767,7 +2767,7 @@
                 <a:ea typeface="Arial" pitchFamily="34" charset="-122"/>
                 <a:cs typeface="Arial" pitchFamily="34" charset="-120"/>
               </a:rPr>
-              <a:t>作成日：2026年4月7日</a:t>
+              <a:t>作成日：2026年4月8日</a:t>
             </a:r>
             <a:endParaRPr lang="en-US" sz="1000" dirty="0"/>
           </a:p>

--- a/納品レポート/ホテル別レポート/keyakigate_口コミ分析レポート.pptx
+++ b/納品レポート/ホテル別レポート/keyakigate_口コミ分析レポート.pptx
@@ -2767,7 +2767,7 @@
                 <a:ea typeface="Arial" pitchFamily="34" charset="-122"/>
                 <a:cs typeface="Arial" pitchFamily="34" charset="-120"/>
               </a:rPr>
-              <a:t>作成日：2026年4月10日</a:t>
+              <a:t>作成日：2026年4月11日</a:t>
             </a:r>
             <a:endParaRPr lang="en-US" sz="1000" dirty="0"/>
           </a:p>

--- a/納品レポート/ホテル別レポート/keyakigate_口コミ分析レポート.pptx
+++ b/納品レポート/ホテル別レポート/keyakigate_口コミ分析レポート.pptx
@@ -2767,7 +2767,7 @@
                 <a:ea typeface="Arial" pitchFamily="34" charset="-122"/>
                 <a:cs typeface="Arial" pitchFamily="34" charset="-120"/>
               </a:rPr>
-              <a:t>作成日：2026年4月11日</a:t>
+              <a:t>作成日：2026年4月13日</a:t>
             </a:r>
             <a:endParaRPr lang="en-US" sz="1000" dirty="0"/>
           </a:p>

--- a/納品レポート/ホテル別レポート/keyakigate_口コミ分析レポート.pptx
+++ b/納品レポート/ホテル別レポート/keyakigate_口コミ分析レポート.pptx
@@ -2767,7 +2767,7 @@
                 <a:ea typeface="Arial" pitchFamily="34" charset="-122"/>
                 <a:cs typeface="Arial" pitchFamily="34" charset="-120"/>
               </a:rPr>
-              <a:t>作成日：2026年4月13日</a:t>
+              <a:t>作成日：2026年4月15日</a:t>
             </a:r>
             <a:endParaRPr lang="en-US" sz="1000" dirty="0"/>
           </a:p>

--- a/納品レポート/ホテル別レポート/keyakigate_口コミ分析レポート.pptx
+++ b/納品レポート/ホテル別レポート/keyakigate_口コミ分析レポート.pptx
@@ -2767,7 +2767,7 @@
                 <a:ea typeface="Arial" pitchFamily="34" charset="-122"/>
                 <a:cs typeface="Arial" pitchFamily="34" charset="-120"/>
               </a:rPr>
-              <a:t>作成日：2026年4月16日</a:t>
+              <a:t>作成日：2026年4月20日</a:t>
             </a:r>
             <a:endParaRPr lang="en-US" sz="1000" dirty="0"/>
           </a:p>

--- a/納品レポート/ホテル別レポート/keyakigate_口コミ分析レポート.pptx
+++ b/納品レポート/ホテル別レポート/keyakigate_口コミ分析レポート.pptx
@@ -2685,7 +2685,7 @@
                 <a:ea typeface="Arial" pitchFamily="34" charset="-122"/>
                 <a:cs typeface="Arial" pitchFamily="34" charset="-120"/>
               </a:rPr>
-              <a:t>ホテルケヤキゲート東京府中</a:t>
+              <a:t>コンフォートホテルキーヤキゲート</a:t>
             </a:r>
             <a:endParaRPr lang="en-US" sz="1600" dirty="0"/>
           </a:p>
@@ -2767,7 +2767,7 @@
                 <a:ea typeface="Arial" pitchFamily="34" charset="-122"/>
                 <a:cs typeface="Arial" pitchFamily="34" charset="-120"/>
               </a:rPr>
-              <a:t>作成日：2026年4月20日</a:t>
+              <a:t>作成日：2026年4月21日</a:t>
             </a:r>
             <a:endParaRPr lang="en-US" sz="1000" dirty="0"/>
           </a:p>

--- a/納品レポート/ホテル別レポート/keyakigate_口コミ分析レポート.pptx
+++ b/納品レポート/ホテル別レポート/keyakigate_口コミ分析レポート.pptx
@@ -2685,7 +2685,7 @@
                 <a:ea typeface="Arial" pitchFamily="34" charset="-122"/>
                 <a:cs typeface="Arial" pitchFamily="34" charset="-120"/>
               </a:rPr>
-              <a:t>コンフォートホテルキーヤキゲート</a:t>
+              <a:t>ホテルケヤキゲート東京府中</a:t>
             </a:r>
             <a:endParaRPr lang="en-US" sz="1600" dirty="0"/>
           </a:p>
@@ -2767,7 +2767,7 @@
                 <a:ea typeface="Arial" pitchFamily="34" charset="-122"/>
                 <a:cs typeface="Arial" pitchFamily="34" charset="-120"/>
               </a:rPr>
-              <a:t>作成日：2026年4月21日</a:t>
+              <a:t>作成日：2026年4月22日</a:t>
             </a:r>
             <a:endParaRPr lang="en-US" sz="1000" dirty="0"/>
           </a:p>
